--- a/templates/default.pptx
+++ b/templates/default.pptx
@@ -4,7 +4,7 @@
   <p:sldMasterIdLst>
     <p:sldMasterId id="2147483648" r:id="rId1"/>
   </p:sldMasterIdLst>
-  <p:sldSz cx="12192000" cy="6858000" type="screen4x3"/>
+  <p:sldSz cx="12191999" cy="6858000" type="screen4x3"/>
   <p:notesSz cx="6858000" cy="9144000"/>
   <p:defaultTextStyle>
     <a:defPPr>
@@ -110,7 +110,7 @@
     <p:bg>
       <p:bgPr>
         <a:solidFill>
-          <a:srgbClr val="1A3A6C"/>
+          <a:srgbClr val="FFFFFF"/>
         </a:solidFill>
         <a:effectLst/>
       </p:bgPr>
@@ -141,22 +141,27 @@
         </p:nvSpPr>
         <p:spPr>
           <a:xfrm>
-            <a:off x="685800" y="2130425"/>
-            <a:ext cx="7772400" cy="1470025"/>
+            <a:off x="502920" y="1645920"/>
+            <a:ext cx="8961120" cy="2377440"/>
           </a:xfrm>
+          <a:noFill/>
+          <a:ln>
+            <a:noFill/>
+          </a:ln>
         </p:spPr>
         <p:txBody>
-          <a:bodyPr/>
+          <a:bodyPr anchor="ctr" wrap="square" lIns="0" tIns="0" rIns="0" bIns="0"/>
           <a:lstStyle>
             <a:lvl1pPr>
-              <a:defRPr>
+              <a:defRPr sz="6000" b="1">
                 <a:solidFill>
-                  <a:srgbClr val="FFFFFF"/>
+                  <a:srgbClr val="111111"/>
                 </a:solidFill>
               </a:defRPr>
             </a:lvl1pPr>
           </a:lstStyle>
           <a:p>
+            <a:pPr algn="l"/>
             <a:r>
               <a:rPr lang="en-US" smtClean="0"/>
               <a:t>Click to edit Master title style</a:t>
@@ -177,18 +182,22 @@
         </p:nvSpPr>
         <p:spPr>
           <a:xfrm>
-            <a:off x="1371600" y="3886200"/>
-            <a:ext cx="6400800" cy="1752600"/>
+            <a:off x="502920" y="4206240"/>
+            <a:ext cx="7772400" cy="1463040"/>
           </a:xfrm>
+          <a:noFill/>
+          <a:ln>
+            <a:noFill/>
+          </a:ln>
         </p:spPr>
         <p:txBody>
-          <a:bodyPr/>
+          <a:bodyPr anchor="t" wrap="square" lIns="0" tIns="0" rIns="0" bIns="0"/>
           <a:lstStyle>
             <a:lvl1pPr marL="0" indent="0" algn="ctr">
               <a:buNone/>
-              <a:defRPr>
+              <a:defRPr sz="1800">
                 <a:solidFill>
-                  <a:srgbClr val="FFFFFF"/>
+                  <a:srgbClr val="444444"/>
                 </a:solidFill>
               </a:defRPr>
             </a:lvl1pPr>
@@ -274,6 +283,7 @@
             </a:lvl9pPr>
           </a:lstStyle>
           <a:p>
+            <a:pPr algn="l"/>
             <a:r>
               <a:rPr lang="en-US" smtClean="0"/>
               <a:t>Click to edit Master subtitle style</a:t>
@@ -363,6 +373,14 @@
 <file path=ppt/slideLayouts/slideLayout10.xml><?xml version="1.0" encoding="utf-8"?>
 <p:sldLayout xmlns:a="http://schemas.openxmlformats.org/drawingml/2006/main" xmlns:r="http://schemas.openxmlformats.org/officeDocument/2006/relationships" xmlns:p="http://schemas.openxmlformats.org/presentationml/2006/main" type="vertTx" preserve="1">
   <p:cSld name="Title and Vertical Text">
+    <p:bg>
+      <p:bgPr>
+        <a:solidFill>
+          <a:srgbClr val="FFFFFF"/>
+        </a:solidFill>
+        <a:effectLst/>
+      </p:bgPr>
+    </p:bg>
     <p:spTree>
       <p:nvGrpSpPr>
         <p:cNvPr id="1" name=""/>
@@ -533,6 +551,14 @@
 <file path=ppt/slideLayouts/slideLayout11.xml><?xml version="1.0" encoding="utf-8"?>
 <p:sldLayout xmlns:a="http://schemas.openxmlformats.org/drawingml/2006/main" xmlns:r="http://schemas.openxmlformats.org/officeDocument/2006/relationships" xmlns:p="http://schemas.openxmlformats.org/presentationml/2006/main" type="vertTitleAndTx" preserve="1">
   <p:cSld name="Vertical Title and Text">
+    <p:bg>
+      <p:bgPr>
+        <a:solidFill>
+          <a:srgbClr val="FFFFFF"/>
+        </a:solidFill>
+        <a:effectLst/>
+      </p:bgPr>
+    </p:bg>
     <p:spTree>
       <p:nvGrpSpPr>
         <p:cNvPr id="1" name=""/>
@@ -745,19 +771,29 @@
             <p:ph type="title"/>
           </p:nvPr>
         </p:nvSpPr>
-        <p:spPr/>
-        <p:txBody>
-          <a:bodyPr/>
+        <p:spPr>
+          <a:xfrm>
+            <a:off x="502920" y="365760"/>
+            <a:ext cx="10058400" cy="1508760"/>
+          </a:xfrm>
+          <a:noFill/>
+          <a:ln>
+            <a:noFill/>
+          </a:ln>
+        </p:spPr>
+        <p:txBody>
+          <a:bodyPr anchor="t" wrap="square" lIns="0" tIns="0" rIns="0" bIns="0"/>
           <a:lstStyle>
             <a:lvl1pPr>
-              <a:defRPr>
+              <a:defRPr sz="4800" b="1">
                 <a:solidFill>
-                  <a:srgbClr val="1A3A6C"/>
+                  <a:srgbClr val="111111"/>
                 </a:solidFill>
               </a:defRPr>
             </a:lvl1pPr>
           </a:lstStyle>
           <a:p>
+            <a:pPr algn="l"/>
             <a:r>
               <a:rPr lang="en-US" smtClean="0"/>
               <a:t>Click to edit Master title style</a:t>
@@ -776,20 +812,29 @@
             <p:ph idx="1"/>
           </p:nvPr>
         </p:nvSpPr>
-        <p:spPr/>
-        <p:txBody>
-          <a:bodyPr/>
+        <p:spPr>
+          <a:xfrm>
+            <a:off x="502920" y="2011680"/>
+            <a:ext cx="11247120" cy="4617720"/>
+          </a:xfrm>
+          <a:noFill/>
+          <a:ln>
+            <a:noFill/>
+          </a:ln>
+        </p:spPr>
+        <p:txBody>
+          <a:bodyPr anchor="t" wrap="square" lIns="0" tIns="36576" rIns="0" bIns="0"/>
           <a:lstStyle>
             <a:lvl1pPr>
-              <a:defRPr>
+              <a:defRPr sz="1600">
                 <a:solidFill>
-                  <a:srgbClr val="333333"/>
+                  <a:srgbClr val="444444"/>
                 </a:solidFill>
               </a:defRPr>
             </a:lvl1pPr>
           </a:lstStyle>
           <a:p>
-            <a:pPr lvl="0"/>
+            <a:pPr lvl="0" algn="l"/>
             <a:r>
               <a:rPr lang="en-US" smtClean="0"/>
               <a:t>Click to edit Master text styles</a:t>
@@ -910,7 +955,7 @@
     <p:bg>
       <p:bgPr>
         <a:solidFill>
-          <a:srgbClr val="1A3A6C"/>
+          <a:srgbClr val="FFFFFF"/>
         </a:solidFill>
         <a:effectLst/>
       </p:bgPr>
@@ -941,22 +986,27 @@
         </p:nvSpPr>
         <p:spPr>
           <a:xfrm>
-            <a:off x="722313" y="4406900"/>
-            <a:ext cx="7772400" cy="1362075"/>
+            <a:off x="502920" y="1828800"/>
+            <a:ext cx="9144000" cy="2103120"/>
           </a:xfrm>
+          <a:noFill/>
+          <a:ln>
+            <a:noFill/>
+          </a:ln>
         </p:spPr>
         <p:txBody>
-          <a:bodyPr anchor="t"/>
+          <a:bodyPr anchor="ctr" wrap="square" lIns="0" tIns="0" rIns="0" bIns="0"/>
           <a:lstStyle>
             <a:lvl1pPr algn="l">
-              <a:defRPr sz="4000" b="1" cap="all">
+              <a:defRPr sz="6000" b="1" cap="all">
                 <a:solidFill>
-                  <a:srgbClr val="FFFFFF"/>
+                  <a:srgbClr val="111111"/>
                 </a:solidFill>
               </a:defRPr>
             </a:lvl1pPr>
           </a:lstStyle>
           <a:p>
+            <a:pPr algn="l"/>
             <a:r>
               <a:rPr lang="en-US" smtClean="0"/>
               <a:t>Click to edit Master title style</a:t>
@@ -977,18 +1027,22 @@
         </p:nvSpPr>
         <p:spPr>
           <a:xfrm>
-            <a:off x="722313" y="2906713"/>
-            <a:ext cx="7772400" cy="1500187"/>
+            <a:off x="502920" y="4206240"/>
+            <a:ext cx="8229600" cy="1463040"/>
           </a:xfrm>
+          <a:noFill/>
+          <a:ln>
+            <a:noFill/>
+          </a:ln>
         </p:spPr>
         <p:txBody>
-          <a:bodyPr anchor="b"/>
+          <a:bodyPr anchor="t" wrap="square" lIns="0" tIns="0" rIns="0" bIns="0"/>
           <a:lstStyle>
             <a:lvl1pPr marL="0" indent="0">
               <a:buNone/>
-              <a:defRPr sz="2000">
+              <a:defRPr sz="1800">
                 <a:solidFill>
-                  <a:srgbClr val="FFFFFF"/>
+                  <a:srgbClr val="444444"/>
                 </a:solidFill>
               </a:defRPr>
             </a:lvl1pPr>
@@ -1074,7 +1128,7 @@
             </a:lvl9pPr>
           </a:lstStyle>
           <a:p>
-            <a:pPr lvl="0"/>
+            <a:pPr lvl="0" algn="l"/>
             <a:r>
               <a:rPr lang="en-US" smtClean="0"/>
               <a:t>Click to edit Master text styles</a:t>
@@ -1187,6 +1241,141 @@
       </p:grpSpPr>
       <p:sp>
         <p:nvSpPr>
+          <p:cNvPr id="11" name="Rounded Rectangle 11"/>
+          <p:cNvSpPr/>
+          <p:nvPr/>
+        </p:nvSpPr>
+        <p:spPr>
+          <a:xfrm>
+            <a:off x="8074152" y="1737360"/>
+            <a:ext cx="3692347" cy="4937760"/>
+          </a:xfrm>
+          <a:prstGeom prst="roundRect">
+            <a:avLst/>
+          </a:prstGeom>
+          <a:solidFill>
+            <a:srgbClr val="F2F2F2"/>
+          </a:solidFill>
+          <a:ln>
+            <a:solidFill>
+              <a:srgbClr val="CCCCCC"/>
+            </a:solidFill>
+          </a:ln>
+        </p:spPr>
+        <p:style>
+          <a:lnRef idx="1">
+            <a:schemeClr val="accent1"/>
+          </a:lnRef>
+          <a:fillRef idx="3">
+            <a:schemeClr val="accent1"/>
+          </a:fillRef>
+          <a:effectRef idx="2">
+            <a:schemeClr val="accent1"/>
+          </a:effectRef>
+          <a:fontRef idx="minor">
+            <a:schemeClr val="lt1"/>
+          </a:fontRef>
+        </p:style>
+        <p:txBody>
+          <a:bodyPr rtlCol="0" anchor="ctr"/>
+          <a:lstStyle/>
+          <a:p>
+            <a:pPr algn="ctr"/>
+          </a:p>
+        </p:txBody>
+      </p:sp>
+      <p:sp>
+        <p:nvSpPr>
+          <p:cNvPr id="10" name="Rounded Rectangle 10"/>
+          <p:cNvSpPr/>
+          <p:nvPr/>
+        </p:nvSpPr>
+        <p:spPr>
+          <a:xfrm>
+            <a:off x="4251960" y="1737360"/>
+            <a:ext cx="3692347" cy="4937760"/>
+          </a:xfrm>
+          <a:prstGeom prst="roundRect">
+            <a:avLst/>
+          </a:prstGeom>
+          <a:solidFill>
+            <a:srgbClr val="F2F2F2"/>
+          </a:solidFill>
+          <a:ln>
+            <a:solidFill>
+              <a:srgbClr val="CCCCCC"/>
+            </a:solidFill>
+          </a:ln>
+        </p:spPr>
+        <p:style>
+          <a:lnRef idx="1">
+            <a:schemeClr val="accent1"/>
+          </a:lnRef>
+          <a:fillRef idx="3">
+            <a:schemeClr val="accent1"/>
+          </a:fillRef>
+          <a:effectRef idx="2">
+            <a:schemeClr val="accent1"/>
+          </a:effectRef>
+          <a:fontRef idx="minor">
+            <a:schemeClr val="lt1"/>
+          </a:fontRef>
+        </p:style>
+        <p:txBody>
+          <a:bodyPr rtlCol="0" anchor="ctr"/>
+          <a:lstStyle/>
+          <a:p>
+            <a:pPr algn="ctr"/>
+          </a:p>
+        </p:txBody>
+      </p:sp>
+      <p:sp>
+        <p:nvSpPr>
+          <p:cNvPr id="9" name="Rounded Rectangle 9"/>
+          <p:cNvSpPr/>
+          <p:nvPr/>
+        </p:nvSpPr>
+        <p:spPr>
+          <a:xfrm>
+            <a:off x="429768" y="1737360"/>
+            <a:ext cx="3692347" cy="4937760"/>
+          </a:xfrm>
+          <a:prstGeom prst="roundRect">
+            <a:avLst/>
+          </a:prstGeom>
+          <a:solidFill>
+            <a:srgbClr val="F2F2F2"/>
+          </a:solidFill>
+          <a:ln>
+            <a:solidFill>
+              <a:srgbClr val="CCCCCC"/>
+            </a:solidFill>
+          </a:ln>
+        </p:spPr>
+        <p:style>
+          <a:lnRef idx="1">
+            <a:schemeClr val="accent1"/>
+          </a:lnRef>
+          <a:fillRef idx="3">
+            <a:schemeClr val="accent1"/>
+          </a:fillRef>
+          <a:effectRef idx="2">
+            <a:schemeClr val="accent1"/>
+          </a:effectRef>
+          <a:fontRef idx="minor">
+            <a:schemeClr val="lt1"/>
+          </a:fontRef>
+        </p:style>
+        <p:txBody>
+          <a:bodyPr rtlCol="0" anchor="ctr"/>
+          <a:lstStyle/>
+          <a:p>
+            <a:pPr algn="ctr"/>
+          </a:p>
+        </p:txBody>
+      </p:sp>
+      <p:sp>
+        <p:nvSpPr>
           <p:cNvPr id="2" name="Title 1"/>
           <p:cNvSpPr>
             <a:spLocks noGrp="1"/>
@@ -1195,19 +1384,29 @@
             <p:ph type="title"/>
           </p:nvPr>
         </p:nvSpPr>
-        <p:spPr/>
-        <p:txBody>
-          <a:bodyPr/>
+        <p:spPr>
+          <a:xfrm>
+            <a:off x="502920" y="320040"/>
+            <a:ext cx="10058400" cy="1325880"/>
+          </a:xfrm>
+          <a:noFill/>
+          <a:ln>
+            <a:noFill/>
+          </a:ln>
+        </p:spPr>
+        <p:txBody>
+          <a:bodyPr anchor="t" wrap="square" lIns="0" tIns="0" rIns="0" bIns="0"/>
           <a:lstStyle>
             <a:lvl1pPr>
-              <a:defRPr>
+              <a:defRPr sz="4800" b="1">
                 <a:solidFill>
-                  <a:srgbClr val="1A3A6C"/>
+                  <a:srgbClr val="111111"/>
                 </a:solidFill>
               </a:defRPr>
             </a:lvl1pPr>
           </a:lstStyle>
           <a:p>
+            <a:pPr algn="l"/>
             <a:r>
               <a:rPr lang="en-US" smtClean="0"/>
               <a:t>Click to edit Master title style</a:t>
@@ -1228,17 +1427,21 @@
         </p:nvSpPr>
         <p:spPr>
           <a:xfrm>
-            <a:off x="457200" y="1600200"/>
-            <a:ext cx="4038600" cy="4525963"/>
+            <a:off x="502920" y="1828800"/>
+            <a:ext cx="3546043" cy="4754880"/>
           </a:xfrm>
+          <a:noFill/>
+          <a:ln>
+            <a:noFill/>
+          </a:ln>
         </p:spPr>
         <p:txBody>
-          <a:bodyPr/>
+          <a:bodyPr anchor="t" wrap="square" lIns="73152" tIns="54864" rIns="73152" bIns="54864"/>
           <a:lstStyle>
             <a:lvl1pPr>
-              <a:defRPr sz="2800">
+              <a:defRPr sz="1400">
                 <a:solidFill>
-                  <a:srgbClr val="333333"/>
+                  <a:srgbClr val="444444"/>
                 </a:solidFill>
               </a:defRPr>
             </a:lvl1pPr>
@@ -1268,7 +1471,7 @@
             </a:lvl9pPr>
           </a:lstStyle>
           <a:p>
-            <a:pPr lvl="0"/>
+            <a:pPr lvl="0" algn="l"/>
             <a:r>
               <a:rPr lang="en-US" smtClean="0"/>
               <a:t>Click to edit Master text styles</a:t>
@@ -1317,17 +1520,21 @@
         </p:nvSpPr>
         <p:spPr>
           <a:xfrm>
-            <a:off x="4648200" y="1600200"/>
-            <a:ext cx="4038600" cy="4525963"/>
+            <a:off x="4325112" y="1828800"/>
+            <a:ext cx="3546043" cy="4754880"/>
           </a:xfrm>
+          <a:noFill/>
+          <a:ln>
+            <a:noFill/>
+          </a:ln>
         </p:spPr>
         <p:txBody>
-          <a:bodyPr/>
+          <a:bodyPr anchor="t" wrap="square" lIns="73152" tIns="54864" rIns="73152" bIns="54864"/>
           <a:lstStyle>
             <a:lvl1pPr>
-              <a:defRPr sz="2800">
+              <a:defRPr sz="1400">
                 <a:solidFill>
-                  <a:srgbClr val="333333"/>
+                  <a:srgbClr val="444444"/>
                 </a:solidFill>
               </a:defRPr>
             </a:lvl1pPr>
@@ -1357,7 +1564,7 @@
             </a:lvl9pPr>
           </a:lstStyle>
           <a:p>
-            <a:pPr lvl="0"/>
+            <a:pPr lvl="0" algn="l"/>
             <a:r>
               <a:rPr lang="en-US" smtClean="0"/>
               <a:t>Click to edit Master text styles</a:t>
@@ -1456,6 +1663,45 @@
               <a:t>‹#›</a:t>
             </a:fld>
             <a:endParaRPr lang="en-US"/>
+          </a:p>
+        </p:txBody>
+      </p:sp>
+      <p:sp>
+        <p:nvSpPr>
+          <p:cNvPr id="8" name="Content Placeholder 3"/>
+          <p:cNvSpPr>
+            <a:spLocks noGrp="1"/>
+          </p:cNvSpPr>
+          <p:nvPr>
+            <p:ph idx="3"/>
+          </p:nvPr>
+        </p:nvSpPr>
+        <p:spPr>
+          <a:xfrm>
+            <a:off x="8147304" y="1828800"/>
+            <a:ext cx="3546043" cy="4754880"/>
+          </a:xfrm>
+          <a:prstGeom prst="rect">
+            <a:avLst/>
+          </a:prstGeom>
+          <a:noFill/>
+          <a:ln>
+            <a:noFill/>
+          </a:ln>
+        </p:spPr>
+        <p:txBody>
+          <a:bodyPr anchor="t" wrap="square" lIns="73152" tIns="54864" rIns="73152" bIns="54864"/>
+          <a:lstStyle>
+            <a:lvl1pPr>
+              <a:defRPr sz="1400">
+                <a:solidFill>
+                  <a:srgbClr val="444444"/>
+                </a:solidFill>
+              </a:defRPr>
+            </a:lvl1pPr>
+          </a:lstStyle>
+          <a:p>
+            <a:pPr algn="l"/>
           </a:p>
         </p:txBody>
       </p:sp>
@@ -1499,6 +1745,96 @@
       </p:grpSpPr>
       <p:sp>
         <p:nvSpPr>
+          <p:cNvPr id="11" name="Rounded Rectangle 11"/>
+          <p:cNvSpPr/>
+          <p:nvPr/>
+        </p:nvSpPr>
+        <p:spPr>
+          <a:xfrm>
+            <a:off x="6245352" y="1874519"/>
+            <a:ext cx="5440680" cy="4709160"/>
+          </a:xfrm>
+          <a:prstGeom prst="roundRect">
+            <a:avLst/>
+          </a:prstGeom>
+          <a:solidFill>
+            <a:srgbClr val="F2F2F2"/>
+          </a:solidFill>
+          <a:ln>
+            <a:solidFill>
+              <a:srgbClr val="CCCCCC"/>
+            </a:solidFill>
+          </a:ln>
+        </p:spPr>
+        <p:style>
+          <a:lnRef idx="1">
+            <a:schemeClr val="accent1"/>
+          </a:lnRef>
+          <a:fillRef idx="3">
+            <a:schemeClr val="accent1"/>
+          </a:fillRef>
+          <a:effectRef idx="2">
+            <a:schemeClr val="accent1"/>
+          </a:effectRef>
+          <a:fontRef idx="minor">
+            <a:schemeClr val="lt1"/>
+          </a:fontRef>
+        </p:style>
+        <p:txBody>
+          <a:bodyPr rtlCol="0" anchor="ctr"/>
+          <a:lstStyle/>
+          <a:p>
+            <a:pPr algn="ctr"/>
+          </a:p>
+        </p:txBody>
+      </p:sp>
+      <p:sp>
+        <p:nvSpPr>
+          <p:cNvPr id="10" name="Rounded Rectangle 10"/>
+          <p:cNvSpPr/>
+          <p:nvPr/>
+        </p:nvSpPr>
+        <p:spPr>
+          <a:xfrm>
+            <a:off x="502920" y="1874519"/>
+            <a:ext cx="5440680" cy="4709160"/>
+          </a:xfrm>
+          <a:prstGeom prst="roundRect">
+            <a:avLst/>
+          </a:prstGeom>
+          <a:solidFill>
+            <a:srgbClr val="F2F2F2"/>
+          </a:solidFill>
+          <a:ln>
+            <a:solidFill>
+              <a:srgbClr val="CCCCCC"/>
+            </a:solidFill>
+          </a:ln>
+        </p:spPr>
+        <p:style>
+          <a:lnRef idx="1">
+            <a:schemeClr val="accent1"/>
+          </a:lnRef>
+          <a:fillRef idx="3">
+            <a:schemeClr val="accent1"/>
+          </a:fillRef>
+          <a:effectRef idx="2">
+            <a:schemeClr val="accent1"/>
+          </a:effectRef>
+          <a:fontRef idx="minor">
+            <a:schemeClr val="lt1"/>
+          </a:fontRef>
+        </p:style>
+        <p:txBody>
+          <a:bodyPr rtlCol="0" anchor="ctr"/>
+          <a:lstStyle/>
+          <a:p>
+            <a:pPr algn="ctr"/>
+          </a:p>
+        </p:txBody>
+      </p:sp>
+      <p:sp>
+        <p:nvSpPr>
           <p:cNvPr id="2" name="Title 1"/>
           <p:cNvSpPr>
             <a:spLocks noGrp="1"/>
@@ -1507,19 +1843,29 @@
             <p:ph type="title"/>
           </p:nvPr>
         </p:nvSpPr>
-        <p:spPr/>
-        <p:txBody>
-          <a:bodyPr/>
+        <p:spPr>
+          <a:xfrm>
+            <a:off x="502920" y="320040"/>
+            <a:ext cx="10058400" cy="1417320"/>
+          </a:xfrm>
+          <a:noFill/>
+          <a:ln>
+            <a:noFill/>
+          </a:ln>
+        </p:spPr>
+        <p:txBody>
+          <a:bodyPr anchor="t" wrap="square" lIns="0" tIns="0" rIns="0" bIns="0"/>
           <a:lstStyle>
             <a:lvl1pPr>
-              <a:defRPr>
+              <a:defRPr sz="5400" b="1">
                 <a:solidFill>
-                  <a:srgbClr val="1A3A6C"/>
+                  <a:srgbClr val="111111"/>
                 </a:solidFill>
               </a:defRPr>
             </a:lvl1pPr>
           </a:lstStyle>
           <a:p>
+            <a:pPr algn="l"/>
             <a:r>
               <a:rPr lang="en-US" smtClean="0"/>
               <a:t>Click to edit Master title style</a:t>
@@ -1540,18 +1886,22 @@
         </p:nvSpPr>
         <p:spPr>
           <a:xfrm>
-            <a:off x="457200" y="1535113"/>
-            <a:ext cx="4040188" cy="639762"/>
+            <a:off x="804672" y="2057400"/>
+            <a:ext cx="4846320" cy="502920"/>
           </a:xfrm>
+          <a:noFill/>
+          <a:ln>
+            <a:noFill/>
+          </a:ln>
         </p:spPr>
         <p:txBody>
-          <a:bodyPr anchor="b"/>
+          <a:bodyPr anchor="t" wrap="square" lIns="73152" tIns="36576" rIns="73152" bIns="0"/>
           <a:lstStyle>
             <a:lvl1pPr marL="0" indent="0">
               <a:buNone/>
-              <a:defRPr sz="2400" b="1">
+              <a:defRPr sz="1400" b="1">
                 <a:solidFill>
-                  <a:srgbClr val="333333"/>
+                  <a:srgbClr val="111111"/>
                 </a:solidFill>
               </a:defRPr>
             </a:lvl1pPr>
@@ -1589,7 +1939,7 @@
             </a:lvl9pPr>
           </a:lstStyle>
           <a:p>
-            <a:pPr lvl="0"/>
+            <a:pPr lvl="0" algn="l"/>
             <a:r>
               <a:rPr lang="en-US" smtClean="0"/>
               <a:t>Click to edit Master text styles</a:t>
@@ -1609,17 +1959,21 @@
         </p:nvSpPr>
         <p:spPr>
           <a:xfrm>
-            <a:off x="457200" y="2174875"/>
-            <a:ext cx="4040188" cy="3951288"/>
+            <a:off x="804672" y="2651760"/>
+            <a:ext cx="4846320" cy="3749039"/>
           </a:xfrm>
+          <a:noFill/>
+          <a:ln>
+            <a:noFill/>
+          </a:ln>
         </p:spPr>
         <p:txBody>
-          <a:bodyPr/>
+          <a:bodyPr anchor="t" wrap="square" lIns="73152" tIns="36576" rIns="73152" bIns="36576"/>
           <a:lstStyle>
             <a:lvl1pPr>
-              <a:defRPr sz="2400">
+              <a:defRPr sz="1400">
                 <a:solidFill>
-                  <a:srgbClr val="333333"/>
+                  <a:srgbClr val="444444"/>
                 </a:solidFill>
               </a:defRPr>
             </a:lvl1pPr>
@@ -1649,7 +2003,7 @@
             </a:lvl9pPr>
           </a:lstStyle>
           <a:p>
-            <a:pPr lvl="0"/>
+            <a:pPr lvl="0" algn="l"/>
             <a:r>
               <a:rPr lang="en-US" smtClean="0"/>
               <a:t>Click to edit Master text styles</a:t>
@@ -1698,18 +2052,22 @@
         </p:nvSpPr>
         <p:spPr>
           <a:xfrm>
-            <a:off x="4645025" y="1535113"/>
-            <a:ext cx="4041775" cy="639762"/>
+            <a:off x="6547104" y="2057400"/>
+            <a:ext cx="4846320" cy="502920"/>
           </a:xfrm>
+          <a:noFill/>
+          <a:ln>
+            <a:noFill/>
+          </a:ln>
         </p:spPr>
         <p:txBody>
-          <a:bodyPr anchor="b"/>
+          <a:bodyPr anchor="t" wrap="square" lIns="73152" tIns="36576" rIns="73152" bIns="0"/>
           <a:lstStyle>
             <a:lvl1pPr marL="0" indent="0">
               <a:buNone/>
-              <a:defRPr sz="2400" b="1">
+              <a:defRPr sz="1400" b="1">
                 <a:solidFill>
-                  <a:srgbClr val="333333"/>
+                  <a:srgbClr val="111111"/>
                 </a:solidFill>
               </a:defRPr>
             </a:lvl1pPr>
@@ -1747,7 +2105,7 @@
             </a:lvl9pPr>
           </a:lstStyle>
           <a:p>
-            <a:pPr lvl="0"/>
+            <a:pPr lvl="0" algn="l"/>
             <a:r>
               <a:rPr lang="en-US" smtClean="0"/>
               <a:t>Click to edit Master text styles</a:t>
@@ -1767,17 +2125,21 @@
         </p:nvSpPr>
         <p:spPr>
           <a:xfrm>
-            <a:off x="4645025" y="2174875"/>
-            <a:ext cx="4041775" cy="3951288"/>
+            <a:off x="6547104" y="2651760"/>
+            <a:ext cx="4846320" cy="3749039"/>
           </a:xfrm>
+          <a:noFill/>
+          <a:ln>
+            <a:noFill/>
+          </a:ln>
         </p:spPr>
         <p:txBody>
-          <a:bodyPr/>
+          <a:bodyPr anchor="t" wrap="square" lIns="73152" tIns="36576" rIns="73152" bIns="36576"/>
           <a:lstStyle>
             <a:lvl1pPr>
-              <a:defRPr sz="2400">
+              <a:defRPr sz="1400">
                 <a:solidFill>
-                  <a:srgbClr val="333333"/>
+                  <a:srgbClr val="444444"/>
                 </a:solidFill>
               </a:defRPr>
             </a:lvl1pPr>
@@ -1807,7 +2169,7 @@
             </a:lvl9pPr>
           </a:lstStyle>
           <a:p>
-            <a:pPr lvl="0"/>
+            <a:pPr lvl="0" algn="l"/>
             <a:r>
               <a:rPr lang="en-US" smtClean="0"/>
               <a:t>Click to edit Master text styles</a:t>
@@ -1925,6 +2287,14 @@
 <file path=ppt/slideLayouts/slideLayout6.xml><?xml version="1.0" encoding="utf-8"?>
 <p:sldLayout xmlns:a="http://schemas.openxmlformats.org/drawingml/2006/main" xmlns:r="http://schemas.openxmlformats.org/officeDocument/2006/relationships" xmlns:p="http://schemas.openxmlformats.org/presentationml/2006/main" type="titleOnly" preserve="1">
   <p:cSld name="Title Only">
+    <p:bg>
+      <p:bgPr>
+        <a:solidFill>
+          <a:srgbClr val="FFFFFF"/>
+        </a:solidFill>
+        <a:effectLst/>
+      </p:bgPr>
+    </p:bg>
     <p:spTree>
       <p:nvGrpSpPr>
         <p:cNvPr id="1" name=""/>
@@ -2043,6 +2413,14 @@
 <file path=ppt/slideLayouts/slideLayout7.xml><?xml version="1.0" encoding="utf-8"?>
 <p:sldLayout xmlns:a="http://schemas.openxmlformats.org/drawingml/2006/main" xmlns:r="http://schemas.openxmlformats.org/officeDocument/2006/relationships" xmlns:p="http://schemas.openxmlformats.org/presentationml/2006/main" type="blank" preserve="1">
   <p:cSld name="Blank">
+    <p:bg>
+      <p:bgPr>
+        <a:solidFill>
+          <a:srgbClr val="FFFFFF"/>
+        </a:solidFill>
+        <a:effectLst/>
+      </p:bgPr>
+    </p:bg>
     <p:spTree>
       <p:nvGrpSpPr>
         <p:cNvPr id="1" name=""/>
@@ -2138,6 +2516,14 @@
 <file path=ppt/slideLayouts/slideLayout8.xml><?xml version="1.0" encoding="utf-8"?>
 <p:sldLayout xmlns:a="http://schemas.openxmlformats.org/drawingml/2006/main" xmlns:r="http://schemas.openxmlformats.org/officeDocument/2006/relationships" xmlns:p="http://schemas.openxmlformats.org/presentationml/2006/main" type="objTx" preserve="1">
   <p:cSld name="Content with Caption">
+    <p:bg>
+      <p:bgPr>
+        <a:solidFill>
+          <a:srgbClr val="FFFFFF"/>
+        </a:solidFill>
+        <a:effectLst/>
+      </p:bgPr>
+    </p:bg>
     <p:spTree>
       <p:nvGrpSpPr>
         <p:cNvPr id="1" name=""/>
@@ -2449,22 +2835,27 @@
         </p:nvSpPr>
         <p:spPr>
           <a:xfrm>
-            <a:off x="1792288" y="4800600"/>
-            <a:ext cx="5486400" cy="566738"/>
+            <a:off x="502920" y="320040"/>
+            <a:ext cx="10058400" cy="1417320"/>
           </a:xfrm>
+          <a:noFill/>
+          <a:ln>
+            <a:noFill/>
+          </a:ln>
         </p:spPr>
         <p:txBody>
-          <a:bodyPr anchor="b"/>
+          <a:bodyPr anchor="t" wrap="square" lIns="0" tIns="0" rIns="0" bIns="0"/>
           <a:lstStyle>
             <a:lvl1pPr algn="l">
-              <a:defRPr sz="2000" b="1">
+              <a:defRPr sz="5400" b="1">
                 <a:solidFill>
-                  <a:srgbClr val="1A3A6C"/>
+                  <a:srgbClr val="111111"/>
                 </a:solidFill>
               </a:defRPr>
             </a:lvl1pPr>
           </a:lstStyle>
           <a:p>
+            <a:pPr algn="l"/>
             <a:r>
               <a:rPr lang="en-US" smtClean="0"/>
               <a:t>Click to edit Master title style</a:t>
@@ -2485,12 +2876,20 @@
         </p:nvSpPr>
         <p:spPr>
           <a:xfrm>
-            <a:off x="1792288" y="612775"/>
-            <a:ext cx="5486400" cy="4114800"/>
+            <a:off x="502920" y="1920240"/>
+            <a:ext cx="7772400" cy="4663440"/>
           </a:xfrm>
+          <a:solidFill>
+            <a:srgbClr val="F2F2F2"/>
+          </a:solidFill>
+          <a:ln>
+            <a:solidFill>
+              <a:srgbClr val="CCCCCC"/>
+            </a:solidFill>
+          </a:ln>
         </p:spPr>
         <p:txBody>
-          <a:bodyPr/>
+          <a:bodyPr anchor="t" wrap="square" lIns="0" tIns="0" rIns="0" bIns="0"/>
           <a:lstStyle>
             <a:lvl1pPr marL="0" indent="0">
               <a:buNone/>
@@ -2530,6 +2929,7 @@
             </a:lvl9pPr>
           </a:lstStyle>
           <a:p>
+            <a:pPr algn="l"/>
             <a:endParaRPr lang="en-US"/>
           </a:p>
         </p:txBody>
@@ -2546,18 +2946,22 @@
         </p:nvSpPr>
         <p:spPr>
           <a:xfrm>
-            <a:off x="1792288" y="5367338"/>
-            <a:ext cx="5486400" cy="804862"/>
+            <a:off x="8531352" y="1920240"/>
+            <a:ext cx="3154680" cy="4663440"/>
           </a:xfrm>
+          <a:noFill/>
+          <a:ln>
+            <a:noFill/>
+          </a:ln>
         </p:spPr>
         <p:txBody>
-          <a:bodyPr/>
+          <a:bodyPr anchor="t" wrap="square" lIns="0" tIns="36576" rIns="0" bIns="0"/>
           <a:lstStyle>
             <a:lvl1pPr marL="0" indent="0">
               <a:buNone/>
               <a:defRPr sz="1400">
                 <a:solidFill>
-                  <a:srgbClr val="333333"/>
+                  <a:srgbClr val="444444"/>
                 </a:solidFill>
               </a:defRPr>
             </a:lvl1pPr>
@@ -2595,7 +2999,7 @@
             </a:lvl9pPr>
           </a:lstStyle>
           <a:p>
-            <a:pPr lvl="0"/>
+            <a:pPr lvl="0" algn="l"/>
             <a:r>
               <a:rPr lang="en-US" smtClean="0"/>
               <a:t>Click to edit Master text styles</a:t>
@@ -2706,6 +3110,264 @@
           <a:chExt cx="0" cy="0"/>
         </a:xfrm>
       </p:grpSpPr>
+      <p:sp>
+        <p:nvSpPr>
+          <p:cNvPr id="2147483665" name="Oval 2147483665"/>
+          <p:cNvSpPr/>
+          <p:nvPr/>
+        </p:nvSpPr>
+        <p:spPr>
+          <a:xfrm>
+            <a:off x="3505198" y="-8686800"/>
+            <a:ext cx="17373600" cy="17373600"/>
+          </a:xfrm>
+          <a:prstGeom prst="ellipse">
+            <a:avLst/>
+          </a:prstGeom>
+          <a:noFill/>
+          <a:ln w="6350">
+            <a:solidFill>
+              <a:srgbClr val="E7E7E7"/>
+            </a:solidFill>
+          </a:ln>
+        </p:spPr>
+        <p:style>
+          <a:lnRef idx="1">
+            <a:schemeClr val="accent1"/>
+          </a:lnRef>
+          <a:fillRef idx="3">
+            <a:schemeClr val="accent1"/>
+          </a:fillRef>
+          <a:effectRef idx="2">
+            <a:schemeClr val="accent1"/>
+          </a:effectRef>
+          <a:fontRef idx="minor">
+            <a:schemeClr val="lt1"/>
+          </a:fontRef>
+        </p:style>
+        <p:txBody>
+          <a:bodyPr rtlCol="0" anchor="ctr"/>
+          <a:lstStyle/>
+          <a:p>
+            <a:pPr algn="ctr"/>
+          </a:p>
+        </p:txBody>
+      </p:sp>
+      <p:sp>
+        <p:nvSpPr>
+          <p:cNvPr id="2147483664" name="Oval 2147483664"/>
+          <p:cNvSpPr/>
+          <p:nvPr/>
+        </p:nvSpPr>
+        <p:spPr>
+          <a:xfrm>
+            <a:off x="4145278" y="-8046720"/>
+            <a:ext cx="16093440" cy="16093440"/>
+          </a:xfrm>
+          <a:prstGeom prst="ellipse">
+            <a:avLst/>
+          </a:prstGeom>
+          <a:noFill/>
+          <a:ln w="9525">
+            <a:solidFill>
+              <a:srgbClr val="DFDFDF"/>
+            </a:solidFill>
+          </a:ln>
+        </p:spPr>
+        <p:style>
+          <a:lnRef idx="1">
+            <a:schemeClr val="accent1"/>
+          </a:lnRef>
+          <a:fillRef idx="3">
+            <a:schemeClr val="accent1"/>
+          </a:fillRef>
+          <a:effectRef idx="2">
+            <a:schemeClr val="accent1"/>
+          </a:effectRef>
+          <a:fontRef idx="minor">
+            <a:schemeClr val="lt1"/>
+          </a:fontRef>
+        </p:style>
+        <p:txBody>
+          <a:bodyPr rtlCol="0" anchor="ctr"/>
+          <a:lstStyle/>
+          <a:p>
+            <a:pPr algn="ctr"/>
+          </a:p>
+        </p:txBody>
+      </p:sp>
+      <p:sp>
+        <p:nvSpPr>
+          <p:cNvPr id="2147483663" name="Oval 2147483663"/>
+          <p:cNvSpPr/>
+          <p:nvPr/>
+        </p:nvSpPr>
+        <p:spPr>
+          <a:xfrm>
+            <a:off x="5242559" y="-6949440"/>
+            <a:ext cx="13898880" cy="13898880"/>
+          </a:xfrm>
+          <a:prstGeom prst="ellipse">
+            <a:avLst/>
+          </a:prstGeom>
+          <a:noFill/>
+          <a:ln w="9525">
+            <a:solidFill>
+              <a:srgbClr val="D7D7D7"/>
+            </a:solidFill>
+          </a:ln>
+        </p:spPr>
+        <p:style>
+          <a:lnRef idx="1">
+            <a:schemeClr val="accent1"/>
+          </a:lnRef>
+          <a:fillRef idx="3">
+            <a:schemeClr val="accent1"/>
+          </a:fillRef>
+          <a:effectRef idx="2">
+            <a:schemeClr val="accent1"/>
+          </a:effectRef>
+          <a:fontRef idx="minor">
+            <a:schemeClr val="lt1"/>
+          </a:fontRef>
+        </p:style>
+        <p:txBody>
+          <a:bodyPr rtlCol="0" anchor="ctr"/>
+          <a:lstStyle/>
+          <a:p>
+            <a:pPr algn="ctr"/>
+          </a:p>
+        </p:txBody>
+      </p:sp>
+      <p:sp>
+        <p:nvSpPr>
+          <p:cNvPr id="2147483662" name="Oval 2147483662"/>
+          <p:cNvSpPr/>
+          <p:nvPr/>
+        </p:nvSpPr>
+        <p:spPr>
+          <a:xfrm>
+            <a:off x="6339838" y="-5852160"/>
+            <a:ext cx="11704320" cy="11704320"/>
+          </a:xfrm>
+          <a:prstGeom prst="ellipse">
+            <a:avLst/>
+          </a:prstGeom>
+          <a:noFill/>
+          <a:ln w="12700">
+            <a:solidFill>
+              <a:srgbClr val="CECECE"/>
+            </a:solidFill>
+          </a:ln>
+        </p:spPr>
+        <p:style>
+          <a:lnRef idx="1">
+            <a:schemeClr val="accent1"/>
+          </a:lnRef>
+          <a:fillRef idx="3">
+            <a:schemeClr val="accent1"/>
+          </a:fillRef>
+          <a:effectRef idx="2">
+            <a:schemeClr val="accent1"/>
+          </a:effectRef>
+          <a:fontRef idx="minor">
+            <a:schemeClr val="lt1"/>
+          </a:fontRef>
+        </p:style>
+        <p:txBody>
+          <a:bodyPr rtlCol="0" anchor="ctr"/>
+          <a:lstStyle/>
+          <a:p>
+            <a:pPr algn="ctr"/>
+          </a:p>
+        </p:txBody>
+      </p:sp>
+      <p:sp>
+        <p:nvSpPr>
+          <p:cNvPr id="2147483661" name="Oval 2147483661"/>
+          <p:cNvSpPr/>
+          <p:nvPr/>
+        </p:nvSpPr>
+        <p:spPr>
+          <a:xfrm>
+            <a:off x="7437118" y="-4754880"/>
+            <a:ext cx="9509760" cy="9509760"/>
+          </a:xfrm>
+          <a:prstGeom prst="ellipse">
+            <a:avLst/>
+          </a:prstGeom>
+          <a:noFill/>
+          <a:ln w="15875">
+            <a:solidFill>
+              <a:srgbClr val="C5C5C5"/>
+            </a:solidFill>
+          </a:ln>
+        </p:spPr>
+        <p:style>
+          <a:lnRef idx="1">
+            <a:schemeClr val="accent1"/>
+          </a:lnRef>
+          <a:fillRef idx="3">
+            <a:schemeClr val="accent1"/>
+          </a:fillRef>
+          <a:effectRef idx="2">
+            <a:schemeClr val="accent1"/>
+          </a:effectRef>
+          <a:fontRef idx="minor">
+            <a:schemeClr val="lt1"/>
+          </a:fontRef>
+        </p:style>
+        <p:txBody>
+          <a:bodyPr rtlCol="0" anchor="ctr"/>
+          <a:lstStyle/>
+          <a:p>
+            <a:pPr algn="ctr"/>
+          </a:p>
+        </p:txBody>
+      </p:sp>
+      <p:sp>
+        <p:nvSpPr>
+          <p:cNvPr id="2147483660" name="Oval 2147483660"/>
+          <p:cNvSpPr/>
+          <p:nvPr/>
+        </p:nvSpPr>
+        <p:spPr>
+          <a:xfrm>
+            <a:off x="8534399" y="-3657600"/>
+            <a:ext cx="7315200" cy="7315200"/>
+          </a:xfrm>
+          <a:prstGeom prst="ellipse">
+            <a:avLst/>
+          </a:prstGeom>
+          <a:noFill/>
+          <a:ln w="19050">
+            <a:solidFill>
+              <a:srgbClr val="BBBBBB"/>
+            </a:solidFill>
+          </a:ln>
+        </p:spPr>
+        <p:style>
+          <a:lnRef idx="1">
+            <a:schemeClr val="accent1"/>
+          </a:lnRef>
+          <a:fillRef idx="3">
+            <a:schemeClr val="accent1"/>
+          </a:fillRef>
+          <a:effectRef idx="2">
+            <a:schemeClr val="accent1"/>
+          </a:effectRef>
+          <a:fontRef idx="minor">
+            <a:schemeClr val="lt1"/>
+          </a:fontRef>
+        </p:style>
+        <p:txBody>
+          <a:bodyPr rtlCol="0" anchor="ctr"/>
+          <a:lstStyle/>
+          <a:p>
+            <a:pPr algn="ctr"/>
+          </a:p>
+        </p:txBody>
+      </p:sp>
       <p:sp>
         <p:nvSpPr>
           <p:cNvPr id="2" name="Title Placeholder 1"/>

--- a/templates/default.pptx
+++ b/templates/default.pptx
@@ -4,7 +4,7 @@
   <p:sldMasterIdLst>
     <p:sldMasterId id="2147483648" r:id="rId1"/>
   </p:sldMasterIdLst>
-  <p:sldSz cx="12191999" cy="6858000" type="screen4x3"/>
+  <p:sldSz cx="12192000" cy="6858000"/>
   <p:notesSz cx="6858000" cy="9144000"/>
   <p:defaultTextStyle>
     <a:defPPr>
@@ -101,11 +101,27 @@
       </a:defRPr>
     </a:lvl9pPr>
   </p:defaultTextStyle>
+  <p:extLst>
+    <p:ext uri="{EFAFB233-063F-42B5-8137-9DF3F51BA10A}">
+      <p15:sldGuideLst xmlns:p15="http://schemas.microsoft.com/office/powerpoint/2012/main">
+        <p15:guide id="1" orient="horz" pos="2160">
+          <p15:clr>
+            <a:srgbClr val="A4A3A4"/>
+          </p15:clr>
+        </p15:guide>
+        <p15:guide id="2" pos="2880">
+          <p15:clr>
+            <a:srgbClr val="A4A3A4"/>
+          </p15:clr>
+        </p15:guide>
+      </p15:sldGuideLst>
+    </p:ext>
+  </p:extLst>
 </p:presentation>
 </file>
 
 <file path=ppt/slideLayouts/slideLayout1.xml><?xml version="1.0" encoding="utf-8"?>
-<p:sldLayout xmlns:a="http://schemas.openxmlformats.org/drawingml/2006/main" xmlns:r="http://schemas.openxmlformats.org/officeDocument/2006/relationships" xmlns:p="http://schemas.openxmlformats.org/presentationml/2006/main" type="title" preserve="1">
+<p:sldLayout xmlns:a="http://schemas.openxmlformats.org/drawingml/2006/main" xmlns:r="http://schemas.openxmlformats.org/officeDocument/2006/relationships" xmlns:p="http://schemas.openxmlformats.org/presentationml/2006/main" preserve="1" userDrawn="1">
   <p:cSld name="Title Slide">
     <p:bg>
       <p:bgPr>
@@ -131,58 +147,17 @@
       </p:grpSpPr>
       <p:sp>
         <p:nvSpPr>
-          <p:cNvPr id="2" name="Title 1"/>
-          <p:cNvSpPr>
-            <a:spLocks noGrp="1"/>
-          </p:cNvSpPr>
-          <p:nvPr>
-            <p:ph type="ctrTitle"/>
+          <p:cNvPr id="3" name="Subtitle 2"/>
+          <p:cNvSpPr>
+            <a:spLocks noGrp="1"/>
+          </p:cNvSpPr>
+          <p:nvPr>
+            <p:ph type="subTitle" idx="1"/>
           </p:nvPr>
         </p:nvSpPr>
         <p:spPr>
           <a:xfrm>
-            <a:off x="502920" y="1645920"/>
-            <a:ext cx="8961120" cy="2377440"/>
-          </a:xfrm>
-          <a:noFill/>
-          <a:ln>
-            <a:noFill/>
-          </a:ln>
-        </p:spPr>
-        <p:txBody>
-          <a:bodyPr anchor="ctr" wrap="square" lIns="0" tIns="0" rIns="0" bIns="0"/>
-          <a:lstStyle>
-            <a:lvl1pPr>
-              <a:defRPr sz="6000" b="1">
-                <a:solidFill>
-                  <a:srgbClr val="111111"/>
-                </a:solidFill>
-              </a:defRPr>
-            </a:lvl1pPr>
-          </a:lstStyle>
-          <a:p>
-            <a:pPr algn="l"/>
-            <a:r>
-              <a:rPr lang="en-US" smtClean="0"/>
-              <a:t>Click to edit Master title style</a:t>
-            </a:r>
-            <a:endParaRPr lang="en-US"/>
-          </a:p>
-        </p:txBody>
-      </p:sp>
-      <p:sp>
-        <p:nvSpPr>
-          <p:cNvPr id="3" name="Subtitle 2"/>
-          <p:cNvSpPr>
-            <a:spLocks noGrp="1"/>
-          </p:cNvSpPr>
-          <p:nvPr>
-            <p:ph type="subTitle" idx="1"/>
-          </p:nvPr>
-        </p:nvSpPr>
-        <p:spPr>
-          <a:xfrm>
-            <a:off x="502920" y="4206240"/>
+            <a:off x="502920" y="3884023"/>
             <a:ext cx="7772400" cy="1463040"/>
           </a:xfrm>
           <a:noFill/>
@@ -191,7 +166,7 @@
           </a:ln>
         </p:spPr>
         <p:txBody>
-          <a:bodyPr anchor="t" wrap="square" lIns="0" tIns="0" rIns="0" bIns="0"/>
+          <a:bodyPr wrap="square" lIns="0" tIns="0" rIns="0" bIns="0" anchor="t"/>
           <a:lstStyle>
             <a:lvl1pPr marL="0" indent="0" algn="ctr">
               <a:buNone/>
@@ -285,16 +260,58 @@
           <a:p>
             <a:pPr algn="l"/>
             <a:r>
-              <a:rPr lang="en-US" smtClean="0"/>
+              <a:rPr lang="en-US" dirty="0"/>
               <a:t>Click to edit Master subtitle style</a:t>
             </a:r>
-            <a:endParaRPr lang="en-US"/>
-          </a:p>
-        </p:txBody>
-      </p:sp>
-      <p:sp>
-        <p:nvSpPr>
-          <p:cNvPr id="4" name="Date Placeholder 3"/>
+          </a:p>
+        </p:txBody>
+      </p:sp>
+      <p:sp>
+        <p:nvSpPr>
+          <p:cNvPr id="7" name="タイトル 6">
+            <a:extLst>
+              <a:ext uri="{FF2B5EF4-FFF2-40B4-BE49-F238E27FC236}">
+                <a16:creationId xmlns:a16="http://schemas.microsoft.com/office/drawing/2014/main" id="{C72B98BA-869D-3750-C4A0-0819554AC7D4}"/>
+              </a:ext>
+            </a:extLst>
+          </p:cNvPr>
+          <p:cNvSpPr>
+            <a:spLocks noGrp="1"/>
+          </p:cNvSpPr>
+          <p:nvPr>
+            <p:ph type="title"/>
+          </p:nvPr>
+        </p:nvSpPr>
+        <p:spPr>
+          <a:xfrm>
+            <a:off x="502920" y="2376170"/>
+            <a:ext cx="11290663" cy="1143000"/>
+          </a:xfrm>
+        </p:spPr>
+        <p:txBody>
+          <a:bodyPr/>
+          <a:lstStyle>
+            <a:lvl1pPr>
+              <a:defRPr b="1"/>
+            </a:lvl1pPr>
+          </a:lstStyle>
+          <a:p>
+            <a:r>
+              <a:rPr kumimoji="1" lang="ja-JP" altLang="en-US"/>
+              <a:t>マスター タイトルの書式設定</a:t>
+            </a:r>
+          </a:p>
+        </p:txBody>
+      </p:sp>
+      <p:sp>
+        <p:nvSpPr>
+          <p:cNvPr id="8" name="日付プレースホルダー 7">
+            <a:extLst>
+              <a:ext uri="{FF2B5EF4-FFF2-40B4-BE49-F238E27FC236}">
+                <a16:creationId xmlns:a16="http://schemas.microsoft.com/office/drawing/2014/main" id="{075B6510-E118-0470-C854-7A1786F3A532}"/>
+              </a:ext>
+            </a:extLst>
+          </p:cNvPr>
           <p:cNvSpPr>
             <a:spLocks noGrp="1"/>
           </p:cNvSpPr>
@@ -309,7 +326,7 @@
           <a:p>
             <a:fld id="{5BCAD085-E8A6-8845-BD4E-CB4CCA059FC4}" type="datetimeFigureOut">
               <a:rPr lang="en-US" smtClean="0"/>
-              <a:t>1/27/13</a:t>
+              <a:t>5/3/26</a:t>
             </a:fld>
             <a:endParaRPr lang="en-US"/>
           </a:p>
@@ -317,7 +334,13 @@
       </p:sp>
       <p:sp>
         <p:nvSpPr>
-          <p:cNvPr id="5" name="Footer Placeholder 4"/>
+          <p:cNvPr id="9" name="フッター プレースホルダー 8">
+            <a:extLst>
+              <a:ext uri="{FF2B5EF4-FFF2-40B4-BE49-F238E27FC236}">
+                <a16:creationId xmlns:a16="http://schemas.microsoft.com/office/drawing/2014/main" id="{3AD7D4C5-CFA3-A26C-9B40-00CB703ED488}"/>
+              </a:ext>
+            </a:extLst>
+          </p:cNvPr>
           <p:cNvSpPr>
             <a:spLocks noGrp="1"/>
           </p:cNvSpPr>
@@ -330,13 +353,19 @@
           <a:bodyPr/>
           <a:lstStyle/>
           <a:p>
-            <a:endParaRPr lang="en-US"/>
-          </a:p>
-        </p:txBody>
-      </p:sp>
-      <p:sp>
-        <p:nvSpPr>
-          <p:cNvPr id="6" name="Slide Number Placeholder 5"/>
+            <a:endParaRPr lang="en-US" dirty="0"/>
+          </a:p>
+        </p:txBody>
+      </p:sp>
+      <p:sp>
+        <p:nvSpPr>
+          <p:cNvPr id="10" name="スライド番号プレースホルダー 9">
+            <a:extLst>
+              <a:ext uri="{FF2B5EF4-FFF2-40B4-BE49-F238E27FC236}">
+                <a16:creationId xmlns:a16="http://schemas.microsoft.com/office/drawing/2014/main" id="{2001425E-CEBA-0160-3EC6-DCDB0872041D}"/>
+              </a:ext>
+            </a:extLst>
+          </p:cNvPr>
           <p:cNvSpPr>
             <a:spLocks noGrp="1"/>
           </p:cNvSpPr>
@@ -371,8 +400,8 @@
 </file>
 
 <file path=ppt/slideLayouts/slideLayout10.xml><?xml version="1.0" encoding="utf-8"?>
-<p:sldLayout xmlns:a="http://schemas.openxmlformats.org/drawingml/2006/main" xmlns:r="http://schemas.openxmlformats.org/officeDocument/2006/relationships" xmlns:p="http://schemas.openxmlformats.org/presentationml/2006/main" type="vertTx" preserve="1">
-  <p:cSld name="Title and Vertical Text">
+<p:sldLayout xmlns:a="http://schemas.openxmlformats.org/drawingml/2006/main" xmlns:r="http://schemas.openxmlformats.org/officeDocument/2006/relationships" xmlns:p="http://schemas.openxmlformats.org/presentationml/2006/main" preserve="1" userDrawn="1" type="cust">
+  <p:cSld name="three_cards_horizontal">
     <p:bg>
       <p:bgPr>
         <a:solidFill>
@@ -397,7 +426,13 @@
       </p:grpSpPr>
       <p:sp>
         <p:nvSpPr>
-          <p:cNvPr id="2" name="Title 1"/>
+          <p:cNvPr id="8" name="タイトル 7">
+            <a:extLst>
+              <a:ext uri="{FF2B5EF4-FFF2-40B4-BE49-F238E27FC236}">
+                <a16:creationId xmlns:a16="http://schemas.microsoft.com/office/drawing/2014/main" id="{8A4D2959-DC66-A124-52B8-8E8467A7D32E}"/>
+              </a:ext>
+            </a:extLst>
+          </p:cNvPr>
           <p:cNvSpPr>
             <a:spLocks noGrp="1"/>
           </p:cNvSpPr>
@@ -405,74 +440,32 @@
             <p:ph type="title"/>
           </p:nvPr>
         </p:nvSpPr>
-        <p:spPr/>
-        <p:txBody>
-          <a:bodyPr/>
-          <a:lstStyle/>
-          <a:p>
-            <a:r>
-              <a:rPr lang="en-US" smtClean="0"/>
-              <a:t>Click to edit Master title style</a:t>
-            </a:r>
-            <a:endParaRPr lang="en-US"/>
-          </a:p>
-        </p:txBody>
-      </p:sp>
-      <p:sp>
-        <p:nvSpPr>
-          <p:cNvPr id="3" name="Vertical Text Placeholder 2"/>
-          <p:cNvSpPr>
-            <a:spLocks noGrp="1"/>
-          </p:cNvSpPr>
-          <p:nvPr>
-            <p:ph type="body" orient="vert" idx="1"/>
-          </p:nvPr>
-        </p:nvSpPr>
-        <p:spPr/>
-        <p:txBody>
-          <a:bodyPr vert="eaVert"/>
-          <a:lstStyle/>
-          <a:p>
-            <a:pPr lvl="0"/>
-            <a:r>
-              <a:rPr lang="en-US" smtClean="0"/>
-              <a:t>Click to edit Master text styles</a:t>
-            </a:r>
-          </a:p>
-          <a:p>
-            <a:pPr lvl="1"/>
-            <a:r>
-              <a:rPr lang="en-US" smtClean="0"/>
-              <a:t>Second level</a:t>
-            </a:r>
-          </a:p>
-          <a:p>
-            <a:pPr lvl="2"/>
-            <a:r>
-              <a:rPr lang="en-US" smtClean="0"/>
-              <a:t>Third level</a:t>
-            </a:r>
-          </a:p>
-          <a:p>
-            <a:pPr lvl="3"/>
-            <a:r>
-              <a:rPr lang="en-US" smtClean="0"/>
-              <a:t>Fourth level</a:t>
-            </a:r>
-          </a:p>
-          <a:p>
-            <a:pPr lvl="4"/>
-            <a:r>
-              <a:rPr lang="en-US" smtClean="0"/>
-              <a:t>Fifth level</a:t>
-            </a:r>
-            <a:endParaRPr lang="en-US"/>
-          </a:p>
-        </p:txBody>
-      </p:sp>
-      <p:sp>
-        <p:nvSpPr>
-          <p:cNvPr id="4" name="Date Placeholder 3"/>
+        <p:spPr>
+          <a:xfrm>
+            <a:off x="231648" y="219456"/>
+            <a:ext cx="11728704" cy="644652"/>
+          </a:xfrm>
+        </p:spPr>
+        <p:txBody>
+          <a:bodyPr/>
+          <a:lstStyle/>
+          <a:p>
+            <a:r>
+              <a:rPr kumimoji="1" lang="ja-JP" altLang="en-US"/>
+              <a:t>マスター タイトルの書式設定</a:t>
+            </a:r>
+          </a:p>
+        </p:txBody>
+      </p:sp>
+      <p:sp>
+        <p:nvSpPr>
+          <p:cNvPr id="9" name="日付プレースホルダー 8">
+            <a:extLst>
+              <a:ext uri="{FF2B5EF4-FFF2-40B4-BE49-F238E27FC236}">
+                <a16:creationId xmlns:a16="http://schemas.microsoft.com/office/drawing/2014/main" id="{AC78EFE3-FFBC-52AC-793F-A5AC5CEFBAE0}"/>
+              </a:ext>
+            </a:extLst>
+          </p:cNvPr>
           <p:cNvSpPr>
             <a:spLocks noGrp="1"/>
           </p:cNvSpPr>
@@ -487,7 +480,7 @@
           <a:p>
             <a:fld id="{5BCAD085-E8A6-8845-BD4E-CB4CCA059FC4}" type="datetimeFigureOut">
               <a:rPr lang="en-US" smtClean="0"/>
-              <a:t>1/27/13</a:t>
+              <a:t>5/3/26</a:t>
             </a:fld>
             <a:endParaRPr lang="en-US"/>
           </a:p>
@@ -495,7 +488,13 @@
       </p:sp>
       <p:sp>
         <p:nvSpPr>
-          <p:cNvPr id="5" name="Footer Placeholder 4"/>
+          <p:cNvPr id="10" name="フッター プレースホルダー 9">
+            <a:extLst>
+              <a:ext uri="{FF2B5EF4-FFF2-40B4-BE49-F238E27FC236}">
+                <a16:creationId xmlns:a16="http://schemas.microsoft.com/office/drawing/2014/main" id="{2885C4CB-8898-EE25-076E-20BC39DFAA4B}"/>
+              </a:ext>
+            </a:extLst>
+          </p:cNvPr>
           <p:cNvSpPr>
             <a:spLocks noGrp="1"/>
           </p:cNvSpPr>
@@ -508,13 +507,19 @@
           <a:bodyPr/>
           <a:lstStyle/>
           <a:p>
-            <a:endParaRPr lang="en-US"/>
-          </a:p>
-        </p:txBody>
-      </p:sp>
-      <p:sp>
-        <p:nvSpPr>
-          <p:cNvPr id="6" name="Slide Number Placeholder 5"/>
+            <a:endParaRPr lang="en-US" dirty="0"/>
+          </a:p>
+        </p:txBody>
+      </p:sp>
+      <p:sp>
+        <p:nvSpPr>
+          <p:cNvPr id="11" name="スライド番号プレースホルダー 10">
+            <a:extLst>
+              <a:ext uri="{FF2B5EF4-FFF2-40B4-BE49-F238E27FC236}">
+                <a16:creationId xmlns:a16="http://schemas.microsoft.com/office/drawing/2014/main" id="{79D36539-24EF-59E1-CB5B-33D4B26D742C}"/>
+              </a:ext>
+            </a:extLst>
+          </p:cNvPr>
           <p:cNvSpPr>
             <a:spLocks noGrp="1"/>
           </p:cNvSpPr>
@@ -532,6 +537,288 @@
               <a:t>‹#›</a:t>
             </a:fld>
             <a:endParaRPr lang="en-US"/>
+          </a:p>
+        </p:txBody>
+      </p:sp>
+      <p:sp>
+        <p:nvSpPr>
+          <p:cNvPr id="13" name="コンテンツ プレースホルダー 12">
+            <a:extLst>
+              <a:ext uri="{FF2B5EF4-FFF2-40B4-BE49-F238E27FC236}">
+                <a16:creationId xmlns:a16="http://schemas.microsoft.com/office/drawing/2014/main" id="{23D794FD-7998-B263-7A33-0D9A529D97EE}"/>
+              </a:ext>
+            </a:extLst>
+          </p:cNvPr>
+          <p:cNvSpPr>
+            <a:spLocks noGrp="1"/>
+          </p:cNvSpPr>
+          <p:nvPr>
+            <p:ph sz="quarter" idx="13"/>
+          </p:nvPr>
+        </p:nvSpPr>
+        <p:spPr>
+          <a:xfrm>
+            <a:off x="231648" y="1117854"/>
+            <a:ext cx="3755136" cy="5013198"/>
+          </a:xfrm>
+        </p:spPr>
+        <p:txBody>
+          <a:bodyPr/>
+          <a:lstStyle/>
+          <a:p>
+            <a:pPr lvl="0"/>
+            <a:r>
+              <a:rPr kumimoji="1" lang="ja-JP" altLang="en-US"/>
+              <a:t>マスター テキストの書式設定</a:t>
+            </a:r>
+          </a:p>
+          <a:p>
+            <a:pPr lvl="1"/>
+            <a:r>
+              <a:rPr kumimoji="1" lang="ja-JP" altLang="en-US"/>
+              <a:t>第 </a:t>
+            </a:r>
+            <a:r>
+              <a:rPr kumimoji="1" lang="en-US" altLang="ja-JP"/>
+              <a:t>2 </a:t>
+            </a:r>
+            <a:r>
+              <a:rPr kumimoji="1" lang="ja-JP" altLang="en-US"/>
+              <a:t>レベル</a:t>
+            </a:r>
+          </a:p>
+          <a:p>
+            <a:pPr lvl="2"/>
+            <a:r>
+              <a:rPr kumimoji="1" lang="ja-JP" altLang="en-US"/>
+              <a:t>第 </a:t>
+            </a:r>
+            <a:r>
+              <a:rPr kumimoji="1" lang="en-US" altLang="ja-JP"/>
+              <a:t>3 </a:t>
+            </a:r>
+            <a:r>
+              <a:rPr kumimoji="1" lang="ja-JP" altLang="en-US"/>
+              <a:t>レベル</a:t>
+            </a:r>
+          </a:p>
+          <a:p>
+            <a:pPr lvl="3"/>
+            <a:r>
+              <a:rPr kumimoji="1" lang="ja-JP" altLang="en-US"/>
+              <a:t>第 </a:t>
+            </a:r>
+            <a:r>
+              <a:rPr kumimoji="1" lang="en-US" altLang="ja-JP"/>
+              <a:t>4 </a:t>
+            </a:r>
+            <a:r>
+              <a:rPr kumimoji="1" lang="ja-JP" altLang="en-US"/>
+              <a:t>レベル</a:t>
+            </a:r>
+          </a:p>
+          <a:p>
+            <a:pPr lvl="4"/>
+            <a:r>
+              <a:rPr kumimoji="1" lang="ja-JP" altLang="en-US"/>
+              <a:t>第 </a:t>
+            </a:r>
+            <a:r>
+              <a:rPr kumimoji="1" lang="en-US" altLang="ja-JP"/>
+              <a:t>5 </a:t>
+            </a:r>
+            <a:r>
+              <a:rPr kumimoji="1" lang="ja-JP" altLang="en-US"/>
+              <a:t>レベル</a:t>
+            </a:r>
+          </a:p>
+        </p:txBody>
+      </p:sp>
+      <p:sp>
+        <p:nvSpPr>
+          <p:cNvPr id="15" name="コンテンツ プレースホルダー 14">
+            <a:extLst>
+              <a:ext uri="{FF2B5EF4-FFF2-40B4-BE49-F238E27FC236}">
+                <a16:creationId xmlns:a16="http://schemas.microsoft.com/office/drawing/2014/main" id="{CE5D3923-D828-BFFF-25F1-02538CEB89C0}"/>
+              </a:ext>
+            </a:extLst>
+          </p:cNvPr>
+          <p:cNvSpPr>
+            <a:spLocks noGrp="1"/>
+          </p:cNvSpPr>
+          <p:nvPr>
+            <p:ph sz="quarter" idx="14"/>
+          </p:nvPr>
+        </p:nvSpPr>
+        <p:spPr>
+          <a:xfrm>
+            <a:off x="4218432" y="1117854"/>
+            <a:ext cx="3755136" cy="5013198"/>
+          </a:xfrm>
+        </p:spPr>
+        <p:txBody>
+          <a:bodyPr/>
+          <a:lstStyle/>
+          <a:p>
+            <a:pPr lvl="0"/>
+            <a:r>
+              <a:rPr kumimoji="1" lang="ja-JP" altLang="en-US"/>
+              <a:t>マスター テキストの書式設定</a:t>
+            </a:r>
+          </a:p>
+          <a:p>
+            <a:pPr lvl="1"/>
+            <a:r>
+              <a:rPr kumimoji="1" lang="ja-JP" altLang="en-US"/>
+              <a:t>第 </a:t>
+            </a:r>
+            <a:r>
+              <a:rPr kumimoji="1" lang="en-US" altLang="ja-JP"/>
+              <a:t>2 </a:t>
+            </a:r>
+            <a:r>
+              <a:rPr kumimoji="1" lang="ja-JP" altLang="en-US"/>
+              <a:t>レベル</a:t>
+            </a:r>
+          </a:p>
+          <a:p>
+            <a:pPr lvl="2"/>
+            <a:r>
+              <a:rPr kumimoji="1" lang="ja-JP" altLang="en-US"/>
+              <a:t>第 </a:t>
+            </a:r>
+            <a:r>
+              <a:rPr kumimoji="1" lang="en-US" altLang="ja-JP"/>
+              <a:t>3 </a:t>
+            </a:r>
+            <a:r>
+              <a:rPr kumimoji="1" lang="ja-JP" altLang="en-US"/>
+              <a:t>レベル</a:t>
+            </a:r>
+          </a:p>
+          <a:p>
+            <a:pPr lvl="3"/>
+            <a:r>
+              <a:rPr kumimoji="1" lang="ja-JP" altLang="en-US"/>
+              <a:t>第 </a:t>
+            </a:r>
+            <a:r>
+              <a:rPr kumimoji="1" lang="en-US" altLang="ja-JP"/>
+              <a:t>4 </a:t>
+            </a:r>
+            <a:r>
+              <a:rPr kumimoji="1" lang="ja-JP" altLang="en-US"/>
+              <a:t>レベル</a:t>
+            </a:r>
+          </a:p>
+          <a:p>
+            <a:pPr lvl="4"/>
+            <a:r>
+              <a:rPr kumimoji="1" lang="ja-JP" altLang="en-US"/>
+              <a:t>第 </a:t>
+            </a:r>
+            <a:r>
+              <a:rPr kumimoji="1" lang="en-US" altLang="ja-JP"/>
+              <a:t>5 </a:t>
+            </a:r>
+            <a:r>
+              <a:rPr kumimoji="1" lang="ja-JP" altLang="en-US"/>
+              <a:t>レベル</a:t>
+            </a:r>
+          </a:p>
+        </p:txBody>
+      </p:sp>
+      <p:sp>
+        <p:nvSpPr>
+          <p:cNvPr id="16" name="コンテンツ プレースホルダー 16">
+            <a:extLst>
+              <a:ext uri="{FF2B5EF4-FFF2-40B4-BE49-F238E27FC236}">
+                <a16:creationId xmlns:a16="http://schemas.microsoft.com/office/drawing/2014/main" id="{CE5D3923-D828-BFFF-25F1-02538CEB89C0}"/>
+              </a:ext>
+            </a:extLst>
+          </p:cNvPr>
+          <p:cNvSpPr>
+            <a:spLocks noGrp="1"/>
+          </p:cNvSpPr>
+          <p:nvPr>
+            <p:ph sz="quarter" idx="15"/>
+          </p:nvPr>
+        </p:nvSpPr>
+        <p:spPr>
+          <a:xfrm>
+            <a:off x="8205216" y="1117854"/>
+            <a:ext cx="3755136" cy="5013198"/>
+          </a:xfrm>
+        </p:spPr>
+        <p:txBody>
+          <a:bodyPr/>
+          <a:lstStyle/>
+          <a:p>
+            <a:pPr lvl="0"/>
+            <a:r>
+              <a:rPr kumimoji="1" lang="ja-JP" altLang="en-US"/>
+              <a:t>マスター テキストの書式設定</a:t>
+            </a:r>
+          </a:p>
+          <a:p>
+            <a:pPr lvl="1"/>
+            <a:r>
+              <a:rPr kumimoji="1" lang="ja-JP" altLang="en-US"/>
+              <a:t>第 </a:t>
+            </a:r>
+            <a:r>
+              <a:rPr kumimoji="1" lang="en-US" altLang="ja-JP"/>
+              <a:t>2 </a:t>
+            </a:r>
+            <a:r>
+              <a:rPr kumimoji="1" lang="ja-JP" altLang="en-US"/>
+              <a:t>レベル</a:t>
+            </a:r>
+          </a:p>
+          <a:p>
+            <a:pPr lvl="2"/>
+            <a:r>
+              <a:rPr kumimoji="1" lang="ja-JP" altLang="en-US"/>
+              <a:t>第 </a:t>
+            </a:r>
+            <a:r>
+              <a:rPr kumimoji="1" lang="en-US" altLang="ja-JP"/>
+              <a:t>3 </a:t>
+            </a:r>
+            <a:r>
+              <a:rPr kumimoji="1" lang="ja-JP" altLang="en-US"/>
+              <a:t>レベル</a:t>
+            </a:r>
+          </a:p>
+          <a:p>
+            <a:pPr lvl="3"/>
+            <a:r>
+              <a:rPr kumimoji="1" lang="ja-JP" altLang="en-US"/>
+              <a:t>第 </a:t>
+            </a:r>
+            <a:r>
+              <a:rPr kumimoji="1" lang="en-US" altLang="ja-JP"/>
+              <a:t>4 </a:t>
+            </a:r>
+            <a:r>
+              <a:rPr kumimoji="1" lang="ja-JP" altLang="en-US"/>
+              <a:t>レベル</a:t>
+            </a:r>
+          </a:p>
+          <a:p>
+            <a:pPr lvl="4"/>
+            <a:r>
+              <a:rPr kumimoji="1" lang="ja-JP" altLang="en-US"/>
+              <a:t>第 </a:t>
+            </a:r>
+            <a:r>
+              <a:rPr kumimoji="1" lang="en-US" altLang="ja-JP"/>
+              <a:t>5 </a:t>
+            </a:r>
+            <a:r>
+              <a:rPr kumimoji="1" lang="ja-JP" altLang="en-US"/>
+              <a:t>レベル</a:t>
+            </a:r>
           </a:p>
         </p:txBody>
       </p:sp>
@@ -549,8 +836,8 @@
 </file>
 
 <file path=ppt/slideLayouts/slideLayout11.xml><?xml version="1.0" encoding="utf-8"?>
-<p:sldLayout xmlns:a="http://schemas.openxmlformats.org/drawingml/2006/main" xmlns:r="http://schemas.openxmlformats.org/officeDocument/2006/relationships" xmlns:p="http://schemas.openxmlformats.org/presentationml/2006/main" type="vertTitleAndTx" preserve="1">
-  <p:cSld name="Vertical Title and Text">
+<p:sldLayout xmlns:a="http://schemas.openxmlformats.org/drawingml/2006/main" xmlns:r="http://schemas.openxmlformats.org/officeDocument/2006/relationships" xmlns:p="http://schemas.openxmlformats.org/presentationml/2006/main" preserve="1" userDrawn="1" type="cust">
+  <p:cSld name="three_cards_vertical">
     <p:bg>
       <p:bgPr>
         <a:solidFill>
@@ -575,92 +862,46 @@
       </p:grpSpPr>
       <p:sp>
         <p:nvSpPr>
-          <p:cNvPr id="2" name="Vertical Title 1"/>
-          <p:cNvSpPr>
-            <a:spLocks noGrp="1"/>
-          </p:cNvSpPr>
-          <p:nvPr>
-            <p:ph type="title" orient="vert"/>
+          <p:cNvPr id="8" name="タイトル 7">
+            <a:extLst>
+              <a:ext uri="{FF2B5EF4-FFF2-40B4-BE49-F238E27FC236}">
+                <a16:creationId xmlns:a16="http://schemas.microsoft.com/office/drawing/2014/main" id="{8A4D2959-DC66-A124-52B8-8E8467A7D32E}"/>
+              </a:ext>
+            </a:extLst>
+          </p:cNvPr>
+          <p:cNvSpPr>
+            <a:spLocks noGrp="1"/>
+          </p:cNvSpPr>
+          <p:nvPr>
+            <p:ph type="title"/>
           </p:nvPr>
         </p:nvSpPr>
         <p:spPr>
           <a:xfrm>
-            <a:off x="6629400" y="274638"/>
-            <a:ext cx="2057400" cy="5851525"/>
+            <a:off x="231648" y="219456"/>
+            <a:ext cx="11728704" cy="644652"/>
           </a:xfrm>
         </p:spPr>
         <p:txBody>
-          <a:bodyPr vert="eaVert"/>
-          <a:lstStyle/>
-          <a:p>
-            <a:r>
-              <a:rPr lang="en-US" smtClean="0"/>
-              <a:t>Click to edit Master title style</a:t>
-            </a:r>
-            <a:endParaRPr lang="en-US"/>
-          </a:p>
-        </p:txBody>
-      </p:sp>
-      <p:sp>
-        <p:nvSpPr>
-          <p:cNvPr id="3" name="Vertical Text Placeholder 2"/>
-          <p:cNvSpPr>
-            <a:spLocks noGrp="1"/>
-          </p:cNvSpPr>
-          <p:nvPr>
-            <p:ph type="body" orient="vert" idx="1"/>
-          </p:nvPr>
-        </p:nvSpPr>
-        <p:spPr>
-          <a:xfrm>
-            <a:off x="457200" y="274638"/>
-            <a:ext cx="6019800" cy="5851525"/>
-          </a:xfrm>
-        </p:spPr>
-        <p:txBody>
-          <a:bodyPr vert="eaVert"/>
-          <a:lstStyle/>
-          <a:p>
-            <a:pPr lvl="0"/>
-            <a:r>
-              <a:rPr lang="en-US" smtClean="0"/>
-              <a:t>Click to edit Master text styles</a:t>
-            </a:r>
-          </a:p>
-          <a:p>
-            <a:pPr lvl="1"/>
-            <a:r>
-              <a:rPr lang="en-US" smtClean="0"/>
-              <a:t>Second level</a:t>
-            </a:r>
-          </a:p>
-          <a:p>
-            <a:pPr lvl="2"/>
-            <a:r>
-              <a:rPr lang="en-US" smtClean="0"/>
-              <a:t>Third level</a:t>
-            </a:r>
-          </a:p>
-          <a:p>
-            <a:pPr lvl="3"/>
-            <a:r>
-              <a:rPr lang="en-US" smtClean="0"/>
-              <a:t>Fourth level</a:t>
-            </a:r>
-          </a:p>
-          <a:p>
-            <a:pPr lvl="4"/>
-            <a:r>
-              <a:rPr lang="en-US" smtClean="0"/>
-              <a:t>Fifth level</a:t>
-            </a:r>
-            <a:endParaRPr lang="en-US"/>
-          </a:p>
-        </p:txBody>
-      </p:sp>
-      <p:sp>
-        <p:nvSpPr>
-          <p:cNvPr id="4" name="Date Placeholder 3"/>
+          <a:bodyPr/>
+          <a:lstStyle/>
+          <a:p>
+            <a:r>
+              <a:rPr kumimoji="1" lang="ja-JP" altLang="en-US"/>
+              <a:t>マスター タイトルの書式設定</a:t>
+            </a:r>
+          </a:p>
+        </p:txBody>
+      </p:sp>
+      <p:sp>
+        <p:nvSpPr>
+          <p:cNvPr id="9" name="日付プレースホルダー 8">
+            <a:extLst>
+              <a:ext uri="{FF2B5EF4-FFF2-40B4-BE49-F238E27FC236}">
+                <a16:creationId xmlns:a16="http://schemas.microsoft.com/office/drawing/2014/main" id="{AC78EFE3-FFBC-52AC-793F-A5AC5CEFBAE0}"/>
+              </a:ext>
+            </a:extLst>
+          </p:cNvPr>
           <p:cNvSpPr>
             <a:spLocks noGrp="1"/>
           </p:cNvSpPr>
@@ -675,7 +916,7 @@
           <a:p>
             <a:fld id="{5BCAD085-E8A6-8845-BD4E-CB4CCA059FC4}" type="datetimeFigureOut">
               <a:rPr lang="en-US" smtClean="0"/>
-              <a:t>1/27/13</a:t>
+              <a:t>5/3/26</a:t>
             </a:fld>
             <a:endParaRPr lang="en-US"/>
           </a:p>
@@ -683,7 +924,13 @@
       </p:sp>
       <p:sp>
         <p:nvSpPr>
-          <p:cNvPr id="5" name="Footer Placeholder 4"/>
+          <p:cNvPr id="10" name="フッター プレースホルダー 9">
+            <a:extLst>
+              <a:ext uri="{FF2B5EF4-FFF2-40B4-BE49-F238E27FC236}">
+                <a16:creationId xmlns:a16="http://schemas.microsoft.com/office/drawing/2014/main" id="{2885C4CB-8898-EE25-076E-20BC39DFAA4B}"/>
+              </a:ext>
+            </a:extLst>
+          </p:cNvPr>
           <p:cNvSpPr>
             <a:spLocks noGrp="1"/>
           </p:cNvSpPr>
@@ -696,13 +943,19 @@
           <a:bodyPr/>
           <a:lstStyle/>
           <a:p>
-            <a:endParaRPr lang="en-US"/>
-          </a:p>
-        </p:txBody>
-      </p:sp>
-      <p:sp>
-        <p:nvSpPr>
-          <p:cNvPr id="6" name="Slide Number Placeholder 5"/>
+            <a:endParaRPr lang="en-US" dirty="0"/>
+          </a:p>
+        </p:txBody>
+      </p:sp>
+      <p:sp>
+        <p:nvSpPr>
+          <p:cNvPr id="11" name="スライド番号プレースホルダー 10">
+            <a:extLst>
+              <a:ext uri="{FF2B5EF4-FFF2-40B4-BE49-F238E27FC236}">
+                <a16:creationId xmlns:a16="http://schemas.microsoft.com/office/drawing/2014/main" id="{79D36539-24EF-59E1-CB5B-33D4B26D742C}"/>
+              </a:ext>
+            </a:extLst>
+          </p:cNvPr>
           <p:cNvSpPr>
             <a:spLocks noGrp="1"/>
           </p:cNvSpPr>
@@ -720,6 +973,288 @@
               <a:t>‹#›</a:t>
             </a:fld>
             <a:endParaRPr lang="en-US"/>
+          </a:p>
+        </p:txBody>
+      </p:sp>
+      <p:sp>
+        <p:nvSpPr>
+          <p:cNvPr id="13" name="コンテンツ プレースホルダー 12">
+            <a:extLst>
+              <a:ext uri="{FF2B5EF4-FFF2-40B4-BE49-F238E27FC236}">
+                <a16:creationId xmlns:a16="http://schemas.microsoft.com/office/drawing/2014/main" id="{23D794FD-7998-B263-7A33-0D9A529D97EE}"/>
+              </a:ext>
+            </a:extLst>
+          </p:cNvPr>
+          <p:cNvSpPr>
+            <a:spLocks noGrp="1"/>
+          </p:cNvSpPr>
+          <p:nvPr>
+            <p:ph sz="quarter" idx="13"/>
+          </p:nvPr>
+        </p:nvSpPr>
+        <p:spPr>
+          <a:xfrm>
+            <a:off x="231648" y="1117854"/>
+            <a:ext cx="11728704" cy="1467612"/>
+          </a:xfrm>
+        </p:spPr>
+        <p:txBody>
+          <a:bodyPr/>
+          <a:lstStyle/>
+          <a:p>
+            <a:pPr lvl="0"/>
+            <a:r>
+              <a:rPr kumimoji="1" lang="ja-JP" altLang="en-US"/>
+              <a:t>マスター テキストの書式設定</a:t>
+            </a:r>
+          </a:p>
+          <a:p>
+            <a:pPr lvl="1"/>
+            <a:r>
+              <a:rPr kumimoji="1" lang="ja-JP" altLang="en-US"/>
+              <a:t>第 </a:t>
+            </a:r>
+            <a:r>
+              <a:rPr kumimoji="1" lang="en-US" altLang="ja-JP"/>
+              <a:t>2 </a:t>
+            </a:r>
+            <a:r>
+              <a:rPr kumimoji="1" lang="ja-JP" altLang="en-US"/>
+              <a:t>レベル</a:t>
+            </a:r>
+          </a:p>
+          <a:p>
+            <a:pPr lvl="2"/>
+            <a:r>
+              <a:rPr kumimoji="1" lang="ja-JP" altLang="en-US"/>
+              <a:t>第 </a:t>
+            </a:r>
+            <a:r>
+              <a:rPr kumimoji="1" lang="en-US" altLang="ja-JP"/>
+              <a:t>3 </a:t>
+            </a:r>
+            <a:r>
+              <a:rPr kumimoji="1" lang="ja-JP" altLang="en-US"/>
+              <a:t>レベル</a:t>
+            </a:r>
+          </a:p>
+          <a:p>
+            <a:pPr lvl="3"/>
+            <a:r>
+              <a:rPr kumimoji="1" lang="ja-JP" altLang="en-US"/>
+              <a:t>第 </a:t>
+            </a:r>
+            <a:r>
+              <a:rPr kumimoji="1" lang="en-US" altLang="ja-JP"/>
+              <a:t>4 </a:t>
+            </a:r>
+            <a:r>
+              <a:rPr kumimoji="1" lang="ja-JP" altLang="en-US"/>
+              <a:t>レベル</a:t>
+            </a:r>
+          </a:p>
+          <a:p>
+            <a:pPr lvl="4"/>
+            <a:r>
+              <a:rPr kumimoji="1" lang="ja-JP" altLang="en-US"/>
+              <a:t>第 </a:t>
+            </a:r>
+            <a:r>
+              <a:rPr kumimoji="1" lang="en-US" altLang="ja-JP"/>
+              <a:t>5 </a:t>
+            </a:r>
+            <a:r>
+              <a:rPr kumimoji="1" lang="ja-JP" altLang="en-US"/>
+              <a:t>レベル</a:t>
+            </a:r>
+          </a:p>
+        </p:txBody>
+      </p:sp>
+      <p:sp>
+        <p:nvSpPr>
+          <p:cNvPr id="15" name="コンテンツ プレースホルダー 14">
+            <a:extLst>
+              <a:ext uri="{FF2B5EF4-FFF2-40B4-BE49-F238E27FC236}">
+                <a16:creationId xmlns:a16="http://schemas.microsoft.com/office/drawing/2014/main" id="{CE5D3923-D828-BFFF-25F1-02538CEB89C0}"/>
+              </a:ext>
+            </a:extLst>
+          </p:cNvPr>
+          <p:cNvSpPr>
+            <a:spLocks noGrp="1"/>
+          </p:cNvSpPr>
+          <p:nvPr>
+            <p:ph sz="quarter" idx="14"/>
+          </p:nvPr>
+        </p:nvSpPr>
+        <p:spPr>
+          <a:xfrm>
+            <a:off x="231648" y="2887218"/>
+            <a:ext cx="11728704" cy="1467612"/>
+          </a:xfrm>
+        </p:spPr>
+        <p:txBody>
+          <a:bodyPr/>
+          <a:lstStyle/>
+          <a:p>
+            <a:pPr lvl="0"/>
+            <a:r>
+              <a:rPr kumimoji="1" lang="ja-JP" altLang="en-US"/>
+              <a:t>マスター テキストの書式設定</a:t>
+            </a:r>
+          </a:p>
+          <a:p>
+            <a:pPr lvl="1"/>
+            <a:r>
+              <a:rPr kumimoji="1" lang="ja-JP" altLang="en-US"/>
+              <a:t>第 </a:t>
+            </a:r>
+            <a:r>
+              <a:rPr kumimoji="1" lang="en-US" altLang="ja-JP"/>
+              <a:t>2 </a:t>
+            </a:r>
+            <a:r>
+              <a:rPr kumimoji="1" lang="ja-JP" altLang="en-US"/>
+              <a:t>レベル</a:t>
+            </a:r>
+          </a:p>
+          <a:p>
+            <a:pPr lvl="2"/>
+            <a:r>
+              <a:rPr kumimoji="1" lang="ja-JP" altLang="en-US"/>
+              <a:t>第 </a:t>
+            </a:r>
+            <a:r>
+              <a:rPr kumimoji="1" lang="en-US" altLang="ja-JP"/>
+              <a:t>3 </a:t>
+            </a:r>
+            <a:r>
+              <a:rPr kumimoji="1" lang="ja-JP" altLang="en-US"/>
+              <a:t>レベル</a:t>
+            </a:r>
+          </a:p>
+          <a:p>
+            <a:pPr lvl="3"/>
+            <a:r>
+              <a:rPr kumimoji="1" lang="ja-JP" altLang="en-US"/>
+              <a:t>第 </a:t>
+            </a:r>
+            <a:r>
+              <a:rPr kumimoji="1" lang="en-US" altLang="ja-JP"/>
+              <a:t>4 </a:t>
+            </a:r>
+            <a:r>
+              <a:rPr kumimoji="1" lang="ja-JP" altLang="en-US"/>
+              <a:t>レベル</a:t>
+            </a:r>
+          </a:p>
+          <a:p>
+            <a:pPr lvl="4"/>
+            <a:r>
+              <a:rPr kumimoji="1" lang="ja-JP" altLang="en-US"/>
+              <a:t>第 </a:t>
+            </a:r>
+            <a:r>
+              <a:rPr kumimoji="1" lang="en-US" altLang="ja-JP"/>
+              <a:t>5 </a:t>
+            </a:r>
+            <a:r>
+              <a:rPr kumimoji="1" lang="ja-JP" altLang="en-US"/>
+              <a:t>レベル</a:t>
+            </a:r>
+          </a:p>
+        </p:txBody>
+      </p:sp>
+      <p:sp>
+        <p:nvSpPr>
+          <p:cNvPr id="16" name="コンテンツ プレースホルダー 16">
+            <a:extLst>
+              <a:ext uri="{FF2B5EF4-FFF2-40B4-BE49-F238E27FC236}">
+                <a16:creationId xmlns:a16="http://schemas.microsoft.com/office/drawing/2014/main" id="{CE5D3923-D828-BFFF-25F1-02538CEB89C0}"/>
+              </a:ext>
+            </a:extLst>
+          </p:cNvPr>
+          <p:cNvSpPr>
+            <a:spLocks noGrp="1"/>
+          </p:cNvSpPr>
+          <p:nvPr>
+            <p:ph sz="quarter" idx="15"/>
+          </p:nvPr>
+        </p:nvSpPr>
+        <p:spPr>
+          <a:xfrm>
+            <a:off x="231648" y="4656582"/>
+            <a:ext cx="11728704" cy="1467612"/>
+          </a:xfrm>
+        </p:spPr>
+        <p:txBody>
+          <a:bodyPr/>
+          <a:lstStyle/>
+          <a:p>
+            <a:pPr lvl="0"/>
+            <a:r>
+              <a:rPr kumimoji="1" lang="ja-JP" altLang="en-US"/>
+              <a:t>マスター テキストの書式設定</a:t>
+            </a:r>
+          </a:p>
+          <a:p>
+            <a:pPr lvl="1"/>
+            <a:r>
+              <a:rPr kumimoji="1" lang="ja-JP" altLang="en-US"/>
+              <a:t>第 </a:t>
+            </a:r>
+            <a:r>
+              <a:rPr kumimoji="1" lang="en-US" altLang="ja-JP"/>
+              <a:t>2 </a:t>
+            </a:r>
+            <a:r>
+              <a:rPr kumimoji="1" lang="ja-JP" altLang="en-US"/>
+              <a:t>レベル</a:t>
+            </a:r>
+          </a:p>
+          <a:p>
+            <a:pPr lvl="2"/>
+            <a:r>
+              <a:rPr kumimoji="1" lang="ja-JP" altLang="en-US"/>
+              <a:t>第 </a:t>
+            </a:r>
+            <a:r>
+              <a:rPr kumimoji="1" lang="en-US" altLang="ja-JP"/>
+              <a:t>3 </a:t>
+            </a:r>
+            <a:r>
+              <a:rPr kumimoji="1" lang="ja-JP" altLang="en-US"/>
+              <a:t>レベル</a:t>
+            </a:r>
+          </a:p>
+          <a:p>
+            <a:pPr lvl="3"/>
+            <a:r>
+              <a:rPr kumimoji="1" lang="ja-JP" altLang="en-US"/>
+              <a:t>第 </a:t>
+            </a:r>
+            <a:r>
+              <a:rPr kumimoji="1" lang="en-US" altLang="ja-JP"/>
+              <a:t>4 </a:t>
+            </a:r>
+            <a:r>
+              <a:rPr kumimoji="1" lang="ja-JP" altLang="en-US"/>
+              <a:t>レベル</a:t>
+            </a:r>
+          </a:p>
+          <a:p>
+            <a:pPr lvl="4"/>
+            <a:r>
+              <a:rPr kumimoji="1" lang="ja-JP" altLang="en-US"/>
+              <a:t>第 </a:t>
+            </a:r>
+            <a:r>
+              <a:rPr kumimoji="1" lang="en-US" altLang="ja-JP"/>
+              <a:t>5 </a:t>
+            </a:r>
+            <a:r>
+              <a:rPr kumimoji="1" lang="ja-JP" altLang="en-US"/>
+              <a:t>レベル</a:t>
+            </a:r>
           </a:p>
         </p:txBody>
       </p:sp>
@@ -737,7 +1272,7 @@
 </file>
 
 <file path=ppt/slideLayouts/slideLayout2.xml><?xml version="1.0" encoding="utf-8"?>
-<p:sldLayout xmlns:a="http://schemas.openxmlformats.org/drawingml/2006/main" xmlns:r="http://schemas.openxmlformats.org/officeDocument/2006/relationships" xmlns:p="http://schemas.openxmlformats.org/presentationml/2006/main" type="obj" preserve="1">
+<p:sldLayout xmlns:a="http://schemas.openxmlformats.org/drawingml/2006/main" xmlns:r="http://schemas.openxmlformats.org/officeDocument/2006/relationships" xmlns:p="http://schemas.openxmlformats.org/presentationml/2006/main" preserve="1" userDrawn="1">
   <p:cSld name="Title and Content">
     <p:bg>
       <p:bgPr>
@@ -763,116 +1298,6 @@
       </p:grpSpPr>
       <p:sp>
         <p:nvSpPr>
-          <p:cNvPr id="2" name="Title 1"/>
-          <p:cNvSpPr>
-            <a:spLocks noGrp="1"/>
-          </p:cNvSpPr>
-          <p:nvPr>
-            <p:ph type="title"/>
-          </p:nvPr>
-        </p:nvSpPr>
-        <p:spPr>
-          <a:xfrm>
-            <a:off x="502920" y="365760"/>
-            <a:ext cx="10058400" cy="1508760"/>
-          </a:xfrm>
-          <a:noFill/>
-          <a:ln>
-            <a:noFill/>
-          </a:ln>
-        </p:spPr>
-        <p:txBody>
-          <a:bodyPr anchor="t" wrap="square" lIns="0" tIns="0" rIns="0" bIns="0"/>
-          <a:lstStyle>
-            <a:lvl1pPr>
-              <a:defRPr sz="4800" b="1">
-                <a:solidFill>
-                  <a:srgbClr val="111111"/>
-                </a:solidFill>
-              </a:defRPr>
-            </a:lvl1pPr>
-          </a:lstStyle>
-          <a:p>
-            <a:pPr algn="l"/>
-            <a:r>
-              <a:rPr lang="en-US" smtClean="0"/>
-              <a:t>Click to edit Master title style</a:t>
-            </a:r>
-            <a:endParaRPr lang="en-US"/>
-          </a:p>
-        </p:txBody>
-      </p:sp>
-      <p:sp>
-        <p:nvSpPr>
-          <p:cNvPr id="3" name="Content Placeholder 2"/>
-          <p:cNvSpPr>
-            <a:spLocks noGrp="1"/>
-          </p:cNvSpPr>
-          <p:nvPr>
-            <p:ph idx="1"/>
-          </p:nvPr>
-        </p:nvSpPr>
-        <p:spPr>
-          <a:xfrm>
-            <a:off x="502920" y="2011680"/>
-            <a:ext cx="11247120" cy="4617720"/>
-          </a:xfrm>
-          <a:noFill/>
-          <a:ln>
-            <a:noFill/>
-          </a:ln>
-        </p:spPr>
-        <p:txBody>
-          <a:bodyPr anchor="t" wrap="square" lIns="0" tIns="36576" rIns="0" bIns="0"/>
-          <a:lstStyle>
-            <a:lvl1pPr>
-              <a:defRPr sz="1600">
-                <a:solidFill>
-                  <a:srgbClr val="444444"/>
-                </a:solidFill>
-              </a:defRPr>
-            </a:lvl1pPr>
-          </a:lstStyle>
-          <a:p>
-            <a:pPr lvl="0" algn="l"/>
-            <a:r>
-              <a:rPr lang="en-US" smtClean="0"/>
-              <a:t>Click to edit Master text styles</a:t>
-            </a:r>
-          </a:p>
-          <a:p>
-            <a:pPr lvl="1"/>
-            <a:r>
-              <a:rPr lang="en-US" smtClean="0"/>
-              <a:t>Second level</a:t>
-            </a:r>
-          </a:p>
-          <a:p>
-            <a:pPr lvl="2"/>
-            <a:r>
-              <a:rPr lang="en-US" smtClean="0"/>
-              <a:t>Third level</a:t>
-            </a:r>
-          </a:p>
-          <a:p>
-            <a:pPr lvl="3"/>
-            <a:r>
-              <a:rPr lang="en-US" smtClean="0"/>
-              <a:t>Fourth level</a:t>
-            </a:r>
-          </a:p>
-          <a:p>
-            <a:pPr lvl="4"/>
-            <a:r>
-              <a:rPr lang="en-US" smtClean="0"/>
-              <a:t>Fifth level</a:t>
-            </a:r>
-            <a:endParaRPr lang="en-US"/>
-          </a:p>
-        </p:txBody>
-      </p:sp>
-      <p:sp>
-        <p:nvSpPr>
           <p:cNvPr id="4" name="Date Placeholder 3"/>
           <p:cNvSpPr>
             <a:spLocks noGrp="1"/>
@@ -888,7 +1313,7 @@
           <a:p>
             <a:fld id="{5BCAD085-E8A6-8845-BD4E-CB4CCA059FC4}" type="datetimeFigureOut">
               <a:rPr lang="en-US" smtClean="0"/>
-              <a:t>1/27/13</a:t>
+              <a:t>5/3/26</a:t>
             </a:fld>
             <a:endParaRPr lang="en-US"/>
           </a:p>
@@ -933,6 +1358,128 @@
               <a:t>‹#›</a:t>
             </a:fld>
             <a:endParaRPr lang="en-US"/>
+          </a:p>
+        </p:txBody>
+      </p:sp>
+      <p:sp>
+        <p:nvSpPr>
+          <p:cNvPr id="7" name="タイトル 6">
+            <a:extLst>
+              <a:ext uri="{FF2B5EF4-FFF2-40B4-BE49-F238E27FC236}">
+                <a16:creationId xmlns:a16="http://schemas.microsoft.com/office/drawing/2014/main" id="{11DAA64B-18C1-17A1-691C-30AB57B5A327}"/>
+              </a:ext>
+            </a:extLst>
+          </p:cNvPr>
+          <p:cNvSpPr>
+            <a:spLocks noGrp="1"/>
+          </p:cNvSpPr>
+          <p:nvPr>
+            <p:ph type="title"/>
+          </p:nvPr>
+        </p:nvSpPr>
+        <p:spPr/>
+        <p:txBody>
+          <a:bodyPr/>
+          <a:lstStyle/>
+          <a:p>
+            <a:r>
+              <a:rPr kumimoji="1" lang="ja-JP" altLang="en-US"/>
+              <a:t>マスター タイトルの書式設定</a:t>
+            </a:r>
+          </a:p>
+        </p:txBody>
+      </p:sp>
+      <p:sp>
+        <p:nvSpPr>
+          <p:cNvPr id="9" name="コンテンツ プレースホルダー 8">
+            <a:extLst>
+              <a:ext uri="{FF2B5EF4-FFF2-40B4-BE49-F238E27FC236}">
+                <a16:creationId xmlns:a16="http://schemas.microsoft.com/office/drawing/2014/main" id="{9972CBED-8C1F-F962-DF1D-46CEC7DCCBC5}"/>
+              </a:ext>
+            </a:extLst>
+          </p:cNvPr>
+          <p:cNvSpPr>
+            <a:spLocks noGrp="1"/>
+          </p:cNvSpPr>
+          <p:nvPr>
+            <p:ph sz="quarter" idx="13"/>
+          </p:nvPr>
+        </p:nvSpPr>
+        <p:spPr>
+          <a:xfrm>
+            <a:off x="226422" y="1114425"/>
+            <a:ext cx="11730445" cy="4998992"/>
+          </a:xfrm>
+        </p:spPr>
+        <p:txBody>
+          <a:bodyPr/>
+          <a:lstStyle/>
+          <a:p>
+            <a:pPr lvl="0"/>
+            <a:r>
+              <a:rPr kumimoji="1" lang="ja-JP" altLang="en-US"/>
+              <a:t>マスター テキストの書式設定</a:t>
+            </a:r>
+          </a:p>
+          <a:p>
+            <a:pPr lvl="1"/>
+            <a:r>
+              <a:rPr kumimoji="1" lang="ja-JP" altLang="en-US"/>
+              <a:t>第 </a:t>
+            </a:r>
+            <a:r>
+              <a:rPr kumimoji="1" lang="en-US" altLang="ja-JP"/>
+              <a:t>2 </a:t>
+            </a:r>
+            <a:r>
+              <a:rPr kumimoji="1" lang="ja-JP" altLang="en-US"/>
+              <a:t>レベル</a:t>
+            </a:r>
+          </a:p>
+          <a:p>
+            <a:pPr lvl="2"/>
+            <a:r>
+              <a:rPr kumimoji="1" lang="ja-JP" altLang="en-US"/>
+              <a:t>第 </a:t>
+            </a:r>
+            <a:r>
+              <a:rPr kumimoji="1" lang="en-US" altLang="ja-JP"/>
+              <a:t>3 </a:t>
+            </a:r>
+            <a:r>
+              <a:rPr kumimoji="1" lang="ja-JP" altLang="en-US"/>
+              <a:t>レベル</a:t>
+            </a:r>
+          </a:p>
+          <a:p>
+            <a:pPr lvl="3"/>
+            <a:r>
+              <a:rPr kumimoji="1" lang="ja-JP" altLang="en-US"/>
+              <a:t>第 </a:t>
+            </a:r>
+            <a:r>
+              <a:rPr kumimoji="1" lang="en-US" altLang="ja-JP"/>
+              <a:t>4 </a:t>
+            </a:r>
+            <a:r>
+              <a:rPr kumimoji="1" lang="ja-JP" altLang="en-US"/>
+              <a:t>レベル</a:t>
+            </a:r>
+          </a:p>
+          <a:p>
+            <a:pPr lvl="4"/>
+            <a:r>
+              <a:rPr kumimoji="1" lang="ja-JP" altLang="en-US"/>
+              <a:t>第 </a:t>
+            </a:r>
+            <a:r>
+              <a:rPr kumimoji="1" lang="en-US" altLang="ja-JP"/>
+              <a:t>5 </a:t>
+            </a:r>
+            <a:r>
+              <a:rPr kumimoji="1" lang="ja-JP" altLang="en-US"/>
+              <a:t>レベル</a:t>
+            </a:r>
           </a:p>
         </p:txBody>
       </p:sp>
@@ -950,7 +1497,7 @@
 </file>
 
 <file path=ppt/slideLayouts/slideLayout3.xml><?xml version="1.0" encoding="utf-8"?>
-<p:sldLayout xmlns:a="http://schemas.openxmlformats.org/drawingml/2006/main" xmlns:r="http://schemas.openxmlformats.org/officeDocument/2006/relationships" xmlns:p="http://schemas.openxmlformats.org/presentationml/2006/main" type="secHead" preserve="1">
+<p:sldLayout xmlns:a="http://schemas.openxmlformats.org/drawingml/2006/main" xmlns:r="http://schemas.openxmlformats.org/officeDocument/2006/relationships" xmlns:p="http://schemas.openxmlformats.org/presentationml/2006/main" preserve="1" userDrawn="1">
   <p:cSld name="Section Header">
     <p:bg>
       <p:bgPr>
@@ -976,58 +1523,17 @@
       </p:grpSpPr>
       <p:sp>
         <p:nvSpPr>
-          <p:cNvPr id="2" name="Title 1"/>
-          <p:cNvSpPr>
-            <a:spLocks noGrp="1"/>
-          </p:cNvSpPr>
-          <p:nvPr>
-            <p:ph type="title"/>
+          <p:cNvPr id="3" name="Text Placeholder 2"/>
+          <p:cNvSpPr>
+            <a:spLocks noGrp="1"/>
+          </p:cNvSpPr>
+          <p:nvPr>
+            <p:ph type="body" idx="1"/>
           </p:nvPr>
         </p:nvSpPr>
         <p:spPr>
           <a:xfrm>
-            <a:off x="502920" y="1828800"/>
-            <a:ext cx="9144000" cy="2103120"/>
-          </a:xfrm>
-          <a:noFill/>
-          <a:ln>
-            <a:noFill/>
-          </a:ln>
-        </p:spPr>
-        <p:txBody>
-          <a:bodyPr anchor="ctr" wrap="square" lIns="0" tIns="0" rIns="0" bIns="0"/>
-          <a:lstStyle>
-            <a:lvl1pPr algn="l">
-              <a:defRPr sz="6000" b="1" cap="all">
-                <a:solidFill>
-                  <a:srgbClr val="111111"/>
-                </a:solidFill>
-              </a:defRPr>
-            </a:lvl1pPr>
-          </a:lstStyle>
-          <a:p>
-            <a:pPr algn="l"/>
-            <a:r>
-              <a:rPr lang="en-US" smtClean="0"/>
-              <a:t>Click to edit Master title style</a:t>
-            </a:r>
-            <a:endParaRPr lang="en-US"/>
-          </a:p>
-        </p:txBody>
-      </p:sp>
-      <p:sp>
-        <p:nvSpPr>
-          <p:cNvPr id="3" name="Text Placeholder 2"/>
-          <p:cNvSpPr>
-            <a:spLocks noGrp="1"/>
-          </p:cNvSpPr>
-          <p:nvPr>
-            <p:ph type="body" idx="1"/>
-          </p:nvPr>
-        </p:nvSpPr>
-        <p:spPr>
-          <a:xfrm>
-            <a:off x="502920" y="4206240"/>
+            <a:off x="502921" y="2333898"/>
             <a:ext cx="8229600" cy="1463040"/>
           </a:xfrm>
           <a:noFill/>
@@ -1036,7 +1542,7 @@
           </a:ln>
         </p:spPr>
         <p:txBody>
-          <a:bodyPr anchor="t" wrap="square" lIns="0" tIns="0" rIns="0" bIns="0"/>
+          <a:bodyPr wrap="square" lIns="0" tIns="0" rIns="0" bIns="0" anchor="t"/>
           <a:lstStyle>
             <a:lvl1pPr marL="0" indent="0">
               <a:buNone/>
@@ -1130,7 +1636,7 @@
           <a:p>
             <a:pPr lvl="0" algn="l"/>
             <a:r>
-              <a:rPr lang="en-US" smtClean="0"/>
+              <a:rPr lang="en-US"/>
               <a:t>Click to edit Master text styles</a:t>
             </a:r>
           </a:p>
@@ -1138,7 +1644,46 @@
       </p:sp>
       <p:sp>
         <p:nvSpPr>
-          <p:cNvPr id="4" name="Date Placeholder 3"/>
+          <p:cNvPr id="7" name="タイトル 6">
+            <a:extLst>
+              <a:ext uri="{FF2B5EF4-FFF2-40B4-BE49-F238E27FC236}">
+                <a16:creationId xmlns:a16="http://schemas.microsoft.com/office/drawing/2014/main" id="{4E21F2C5-D692-C035-AB8E-E7F5E2278282}"/>
+              </a:ext>
+            </a:extLst>
+          </p:cNvPr>
+          <p:cNvSpPr>
+            <a:spLocks noGrp="1"/>
+          </p:cNvSpPr>
+          <p:nvPr>
+            <p:ph type="title"/>
+          </p:nvPr>
+        </p:nvSpPr>
+        <p:spPr>
+          <a:xfrm>
+            <a:off x="502921" y="1411812"/>
+            <a:ext cx="11175274" cy="645196"/>
+          </a:xfrm>
+        </p:spPr>
+        <p:txBody>
+          <a:bodyPr/>
+          <a:lstStyle/>
+          <a:p>
+            <a:r>
+              <a:rPr kumimoji="1" lang="ja-JP" altLang="en-US"/>
+              <a:t>マスター タイトルの書式設定</a:t>
+            </a:r>
+          </a:p>
+        </p:txBody>
+      </p:sp>
+      <p:sp>
+        <p:nvSpPr>
+          <p:cNvPr id="8" name="日付プレースホルダー 7">
+            <a:extLst>
+              <a:ext uri="{FF2B5EF4-FFF2-40B4-BE49-F238E27FC236}">
+                <a16:creationId xmlns:a16="http://schemas.microsoft.com/office/drawing/2014/main" id="{7D32573A-B4BF-D855-B118-082963284F0D}"/>
+              </a:ext>
+            </a:extLst>
+          </p:cNvPr>
           <p:cNvSpPr>
             <a:spLocks noGrp="1"/>
           </p:cNvSpPr>
@@ -1153,7 +1698,7 @@
           <a:p>
             <a:fld id="{5BCAD085-E8A6-8845-BD4E-CB4CCA059FC4}" type="datetimeFigureOut">
               <a:rPr lang="en-US" smtClean="0"/>
-              <a:t>1/27/13</a:t>
+              <a:t>5/3/26</a:t>
             </a:fld>
             <a:endParaRPr lang="en-US"/>
           </a:p>
@@ -1161,7 +1706,13 @@
       </p:sp>
       <p:sp>
         <p:nvSpPr>
-          <p:cNvPr id="5" name="Footer Placeholder 4"/>
+          <p:cNvPr id="9" name="フッター プレースホルダー 8">
+            <a:extLst>
+              <a:ext uri="{FF2B5EF4-FFF2-40B4-BE49-F238E27FC236}">
+                <a16:creationId xmlns:a16="http://schemas.microsoft.com/office/drawing/2014/main" id="{516884CF-46E6-857C-323C-6CEAC6313609}"/>
+              </a:ext>
+            </a:extLst>
+          </p:cNvPr>
           <p:cNvSpPr>
             <a:spLocks noGrp="1"/>
           </p:cNvSpPr>
@@ -1174,13 +1725,19 @@
           <a:bodyPr/>
           <a:lstStyle/>
           <a:p>
-            <a:endParaRPr lang="en-US"/>
-          </a:p>
-        </p:txBody>
-      </p:sp>
-      <p:sp>
-        <p:nvSpPr>
-          <p:cNvPr id="6" name="Slide Number Placeholder 5"/>
+            <a:endParaRPr lang="en-US" dirty="0"/>
+          </a:p>
+        </p:txBody>
+      </p:sp>
+      <p:sp>
+        <p:nvSpPr>
+          <p:cNvPr id="10" name="スライド番号プレースホルダー 9">
+            <a:extLst>
+              <a:ext uri="{FF2B5EF4-FFF2-40B4-BE49-F238E27FC236}">
+                <a16:creationId xmlns:a16="http://schemas.microsoft.com/office/drawing/2014/main" id="{70805F50-61D4-6BF5-5910-DB5ACA39D8FB}"/>
+              </a:ext>
+            </a:extLst>
+          </p:cNvPr>
           <p:cNvSpPr>
             <a:spLocks noGrp="1"/>
           </p:cNvSpPr>
@@ -1215,7 +1772,7 @@
 </file>
 
 <file path=ppt/slideLayouts/slideLayout4.xml><?xml version="1.0" encoding="utf-8"?>
-<p:sldLayout xmlns:a="http://schemas.openxmlformats.org/drawingml/2006/main" xmlns:r="http://schemas.openxmlformats.org/officeDocument/2006/relationships" xmlns:p="http://schemas.openxmlformats.org/presentationml/2006/main" type="twoObj" preserve="1">
+<p:sldLayout xmlns:a="http://schemas.openxmlformats.org/drawingml/2006/main" xmlns:r="http://schemas.openxmlformats.org/officeDocument/2006/relationships" xmlns:p="http://schemas.openxmlformats.org/presentationml/2006/main" preserve="1" userDrawn="1">
   <p:cSld name="Two Content">
     <p:bg>
       <p:bgPr>
@@ -1241,142 +1798,13 @@
       </p:grpSpPr>
       <p:sp>
         <p:nvSpPr>
-          <p:cNvPr id="11" name="Rounded Rectangle 11"/>
-          <p:cNvSpPr/>
-          <p:nvPr/>
-        </p:nvSpPr>
-        <p:spPr>
-          <a:xfrm>
-            <a:off x="8074152" y="1737360"/>
-            <a:ext cx="3692347" cy="4937760"/>
-          </a:xfrm>
-          <a:prstGeom prst="roundRect">
-            <a:avLst/>
-          </a:prstGeom>
-          <a:solidFill>
-            <a:srgbClr val="F2F2F2"/>
-          </a:solidFill>
-          <a:ln>
-            <a:solidFill>
-              <a:srgbClr val="CCCCCC"/>
-            </a:solidFill>
-          </a:ln>
-        </p:spPr>
-        <p:style>
-          <a:lnRef idx="1">
-            <a:schemeClr val="accent1"/>
-          </a:lnRef>
-          <a:fillRef idx="3">
-            <a:schemeClr val="accent1"/>
-          </a:fillRef>
-          <a:effectRef idx="2">
-            <a:schemeClr val="accent1"/>
-          </a:effectRef>
-          <a:fontRef idx="minor">
-            <a:schemeClr val="lt1"/>
-          </a:fontRef>
-        </p:style>
-        <p:txBody>
-          <a:bodyPr rtlCol="0" anchor="ctr"/>
-          <a:lstStyle/>
-          <a:p>
-            <a:pPr algn="ctr"/>
-          </a:p>
-        </p:txBody>
-      </p:sp>
-      <p:sp>
-        <p:nvSpPr>
-          <p:cNvPr id="10" name="Rounded Rectangle 10"/>
-          <p:cNvSpPr/>
-          <p:nvPr/>
-        </p:nvSpPr>
-        <p:spPr>
-          <a:xfrm>
-            <a:off x="4251960" y="1737360"/>
-            <a:ext cx="3692347" cy="4937760"/>
-          </a:xfrm>
-          <a:prstGeom prst="roundRect">
-            <a:avLst/>
-          </a:prstGeom>
-          <a:solidFill>
-            <a:srgbClr val="F2F2F2"/>
-          </a:solidFill>
-          <a:ln>
-            <a:solidFill>
-              <a:srgbClr val="CCCCCC"/>
-            </a:solidFill>
-          </a:ln>
-        </p:spPr>
-        <p:style>
-          <a:lnRef idx="1">
-            <a:schemeClr val="accent1"/>
-          </a:lnRef>
-          <a:fillRef idx="3">
-            <a:schemeClr val="accent1"/>
-          </a:fillRef>
-          <a:effectRef idx="2">
-            <a:schemeClr val="accent1"/>
-          </a:effectRef>
-          <a:fontRef idx="minor">
-            <a:schemeClr val="lt1"/>
-          </a:fontRef>
-        </p:style>
-        <p:txBody>
-          <a:bodyPr rtlCol="0" anchor="ctr"/>
-          <a:lstStyle/>
-          <a:p>
-            <a:pPr algn="ctr"/>
-          </a:p>
-        </p:txBody>
-      </p:sp>
-      <p:sp>
-        <p:nvSpPr>
-          <p:cNvPr id="9" name="Rounded Rectangle 9"/>
-          <p:cNvSpPr/>
-          <p:nvPr/>
-        </p:nvSpPr>
-        <p:spPr>
-          <a:xfrm>
-            <a:off x="429768" y="1737360"/>
-            <a:ext cx="3692347" cy="4937760"/>
-          </a:xfrm>
-          <a:prstGeom prst="roundRect">
-            <a:avLst/>
-          </a:prstGeom>
-          <a:solidFill>
-            <a:srgbClr val="F2F2F2"/>
-          </a:solidFill>
-          <a:ln>
-            <a:solidFill>
-              <a:srgbClr val="CCCCCC"/>
-            </a:solidFill>
-          </a:ln>
-        </p:spPr>
-        <p:style>
-          <a:lnRef idx="1">
-            <a:schemeClr val="accent1"/>
-          </a:lnRef>
-          <a:fillRef idx="3">
-            <a:schemeClr val="accent1"/>
-          </a:fillRef>
-          <a:effectRef idx="2">
-            <a:schemeClr val="accent1"/>
-          </a:effectRef>
-          <a:fontRef idx="minor">
-            <a:schemeClr val="lt1"/>
-          </a:fontRef>
-        </p:style>
-        <p:txBody>
-          <a:bodyPr rtlCol="0" anchor="ctr"/>
-          <a:lstStyle/>
-          <a:p>
-            <a:pPr algn="ctr"/>
-          </a:p>
-        </p:txBody>
-      </p:sp>
-      <p:sp>
-        <p:nvSpPr>
-          <p:cNvPr id="2" name="Title 1"/>
+          <p:cNvPr id="8" name="タイトル 7">
+            <a:extLst>
+              <a:ext uri="{FF2B5EF4-FFF2-40B4-BE49-F238E27FC236}">
+                <a16:creationId xmlns:a16="http://schemas.microsoft.com/office/drawing/2014/main" id="{8A4D2959-DC66-A124-52B8-8E8467A7D32E}"/>
+              </a:ext>
+            </a:extLst>
+          </p:cNvPr>
           <p:cNvSpPr>
             <a:spLocks noGrp="1"/>
           </p:cNvSpPr>
@@ -1384,226 +1812,27 @@
             <p:ph type="title"/>
           </p:nvPr>
         </p:nvSpPr>
-        <p:spPr>
-          <a:xfrm>
-            <a:off x="502920" y="320040"/>
-            <a:ext cx="10058400" cy="1325880"/>
-          </a:xfrm>
-          <a:noFill/>
-          <a:ln>
-            <a:noFill/>
-          </a:ln>
-        </p:spPr>
-        <p:txBody>
-          <a:bodyPr anchor="t" wrap="square" lIns="0" tIns="0" rIns="0" bIns="0"/>
-          <a:lstStyle>
-            <a:lvl1pPr>
-              <a:defRPr sz="4800" b="1">
-                <a:solidFill>
-                  <a:srgbClr val="111111"/>
-                </a:solidFill>
-              </a:defRPr>
-            </a:lvl1pPr>
-          </a:lstStyle>
-          <a:p>
-            <a:pPr algn="l"/>
-            <a:r>
-              <a:rPr lang="en-US" smtClean="0"/>
-              <a:t>Click to edit Master title style</a:t>
-            </a:r>
-            <a:endParaRPr lang="en-US"/>
-          </a:p>
-        </p:txBody>
-      </p:sp>
-      <p:sp>
-        <p:nvSpPr>
-          <p:cNvPr id="3" name="Content Placeholder 2"/>
-          <p:cNvSpPr>
-            <a:spLocks noGrp="1"/>
-          </p:cNvSpPr>
-          <p:nvPr>
-            <p:ph sz="half" idx="1"/>
-          </p:nvPr>
-        </p:nvSpPr>
-        <p:spPr>
-          <a:xfrm>
-            <a:off x="502920" y="1828800"/>
-            <a:ext cx="3546043" cy="4754880"/>
-          </a:xfrm>
-          <a:noFill/>
-          <a:ln>
-            <a:noFill/>
-          </a:ln>
-        </p:spPr>
-        <p:txBody>
-          <a:bodyPr anchor="t" wrap="square" lIns="73152" tIns="54864" rIns="73152" bIns="54864"/>
-          <a:lstStyle>
-            <a:lvl1pPr>
-              <a:defRPr sz="1400">
-                <a:solidFill>
-                  <a:srgbClr val="444444"/>
-                </a:solidFill>
-              </a:defRPr>
-            </a:lvl1pPr>
-            <a:lvl2pPr>
-              <a:defRPr sz="2400"/>
-            </a:lvl2pPr>
-            <a:lvl3pPr>
-              <a:defRPr sz="2000"/>
-            </a:lvl3pPr>
-            <a:lvl4pPr>
-              <a:defRPr sz="1800"/>
-            </a:lvl4pPr>
-            <a:lvl5pPr>
-              <a:defRPr sz="1800"/>
-            </a:lvl5pPr>
-            <a:lvl6pPr>
-              <a:defRPr sz="1800"/>
-            </a:lvl6pPr>
-            <a:lvl7pPr>
-              <a:defRPr sz="1800"/>
-            </a:lvl7pPr>
-            <a:lvl8pPr>
-              <a:defRPr sz="1800"/>
-            </a:lvl8pPr>
-            <a:lvl9pPr>
-              <a:defRPr sz="1800"/>
-            </a:lvl9pPr>
-          </a:lstStyle>
-          <a:p>
-            <a:pPr lvl="0" algn="l"/>
-            <a:r>
-              <a:rPr lang="en-US" smtClean="0"/>
-              <a:t>Click to edit Master text styles</a:t>
-            </a:r>
-          </a:p>
-          <a:p>
-            <a:pPr lvl="1"/>
-            <a:r>
-              <a:rPr lang="en-US" smtClean="0"/>
-              <a:t>Second level</a:t>
-            </a:r>
-          </a:p>
-          <a:p>
-            <a:pPr lvl="2"/>
-            <a:r>
-              <a:rPr lang="en-US" smtClean="0"/>
-              <a:t>Third level</a:t>
-            </a:r>
-          </a:p>
-          <a:p>
-            <a:pPr lvl="3"/>
-            <a:r>
-              <a:rPr lang="en-US" smtClean="0"/>
-              <a:t>Fourth level</a:t>
-            </a:r>
-          </a:p>
-          <a:p>
-            <a:pPr lvl="4"/>
-            <a:r>
-              <a:rPr lang="en-US" smtClean="0"/>
-              <a:t>Fifth level</a:t>
-            </a:r>
-            <a:endParaRPr lang="en-US"/>
-          </a:p>
-        </p:txBody>
-      </p:sp>
-      <p:sp>
-        <p:nvSpPr>
-          <p:cNvPr id="4" name="Content Placeholder 3"/>
-          <p:cNvSpPr>
-            <a:spLocks noGrp="1"/>
-          </p:cNvSpPr>
-          <p:nvPr>
-            <p:ph sz="half" idx="2"/>
-          </p:nvPr>
-        </p:nvSpPr>
-        <p:spPr>
-          <a:xfrm>
-            <a:off x="4325112" y="1828800"/>
-            <a:ext cx="3546043" cy="4754880"/>
-          </a:xfrm>
-          <a:noFill/>
-          <a:ln>
-            <a:noFill/>
-          </a:ln>
-        </p:spPr>
-        <p:txBody>
-          <a:bodyPr anchor="t" wrap="square" lIns="73152" tIns="54864" rIns="73152" bIns="54864"/>
-          <a:lstStyle>
-            <a:lvl1pPr>
-              <a:defRPr sz="1400">
-                <a:solidFill>
-                  <a:srgbClr val="444444"/>
-                </a:solidFill>
-              </a:defRPr>
-            </a:lvl1pPr>
-            <a:lvl2pPr>
-              <a:defRPr sz="2400"/>
-            </a:lvl2pPr>
-            <a:lvl3pPr>
-              <a:defRPr sz="2000"/>
-            </a:lvl3pPr>
-            <a:lvl4pPr>
-              <a:defRPr sz="1800"/>
-            </a:lvl4pPr>
-            <a:lvl5pPr>
-              <a:defRPr sz="1800"/>
-            </a:lvl5pPr>
-            <a:lvl6pPr>
-              <a:defRPr sz="1800"/>
-            </a:lvl6pPr>
-            <a:lvl7pPr>
-              <a:defRPr sz="1800"/>
-            </a:lvl7pPr>
-            <a:lvl8pPr>
-              <a:defRPr sz="1800"/>
-            </a:lvl8pPr>
-            <a:lvl9pPr>
-              <a:defRPr sz="1800"/>
-            </a:lvl9pPr>
-          </a:lstStyle>
-          <a:p>
-            <a:pPr lvl="0" algn="l"/>
-            <a:r>
-              <a:rPr lang="en-US" smtClean="0"/>
-              <a:t>Click to edit Master text styles</a:t>
-            </a:r>
-          </a:p>
-          <a:p>
-            <a:pPr lvl="1"/>
-            <a:r>
-              <a:rPr lang="en-US" smtClean="0"/>
-              <a:t>Second level</a:t>
-            </a:r>
-          </a:p>
-          <a:p>
-            <a:pPr lvl="2"/>
-            <a:r>
-              <a:rPr lang="en-US" smtClean="0"/>
-              <a:t>Third level</a:t>
-            </a:r>
-          </a:p>
-          <a:p>
-            <a:pPr lvl="3"/>
-            <a:r>
-              <a:rPr lang="en-US" smtClean="0"/>
-              <a:t>Fourth level</a:t>
-            </a:r>
-          </a:p>
-          <a:p>
-            <a:pPr lvl="4"/>
-            <a:r>
-              <a:rPr lang="en-US" smtClean="0"/>
-              <a:t>Fifth level</a:t>
-            </a:r>
-            <a:endParaRPr lang="en-US"/>
-          </a:p>
-        </p:txBody>
-      </p:sp>
-      <p:sp>
-        <p:nvSpPr>
-          <p:cNvPr id="5" name="Date Placeholder 4"/>
+        <p:spPr/>
+        <p:txBody>
+          <a:bodyPr/>
+          <a:lstStyle/>
+          <a:p>
+            <a:r>
+              <a:rPr kumimoji="1" lang="ja-JP" altLang="en-US"/>
+              <a:t>マスター タイトルの書式設定</a:t>
+            </a:r>
+          </a:p>
+        </p:txBody>
+      </p:sp>
+      <p:sp>
+        <p:nvSpPr>
+          <p:cNvPr id="9" name="日付プレースホルダー 8">
+            <a:extLst>
+              <a:ext uri="{FF2B5EF4-FFF2-40B4-BE49-F238E27FC236}">
+                <a16:creationId xmlns:a16="http://schemas.microsoft.com/office/drawing/2014/main" id="{AC78EFE3-FFBC-52AC-793F-A5AC5CEFBAE0}"/>
+              </a:ext>
+            </a:extLst>
+          </p:cNvPr>
           <p:cNvSpPr>
             <a:spLocks noGrp="1"/>
           </p:cNvSpPr>
@@ -1618,7 +1847,7 @@
           <a:p>
             <a:fld id="{5BCAD085-E8A6-8845-BD4E-CB4CCA059FC4}" type="datetimeFigureOut">
               <a:rPr lang="en-US" smtClean="0"/>
-              <a:t>1/27/13</a:t>
+              <a:t>5/3/26</a:t>
             </a:fld>
             <a:endParaRPr lang="en-US"/>
           </a:p>
@@ -1626,7 +1855,13 @@
       </p:sp>
       <p:sp>
         <p:nvSpPr>
-          <p:cNvPr id="6" name="Footer Placeholder 5"/>
+          <p:cNvPr id="10" name="フッター プレースホルダー 9">
+            <a:extLst>
+              <a:ext uri="{FF2B5EF4-FFF2-40B4-BE49-F238E27FC236}">
+                <a16:creationId xmlns:a16="http://schemas.microsoft.com/office/drawing/2014/main" id="{2885C4CB-8898-EE25-076E-20BC39DFAA4B}"/>
+              </a:ext>
+            </a:extLst>
+          </p:cNvPr>
           <p:cNvSpPr>
             <a:spLocks noGrp="1"/>
           </p:cNvSpPr>
@@ -1639,13 +1874,19 @@
           <a:bodyPr/>
           <a:lstStyle/>
           <a:p>
-            <a:endParaRPr lang="en-US"/>
-          </a:p>
-        </p:txBody>
-      </p:sp>
-      <p:sp>
-        <p:nvSpPr>
-          <p:cNvPr id="7" name="Slide Number Placeholder 6"/>
+            <a:endParaRPr lang="en-US" dirty="0"/>
+          </a:p>
+        </p:txBody>
+      </p:sp>
+      <p:sp>
+        <p:nvSpPr>
+          <p:cNvPr id="11" name="スライド番号プレースホルダー 10">
+            <a:extLst>
+              <a:ext uri="{FF2B5EF4-FFF2-40B4-BE49-F238E27FC236}">
+                <a16:creationId xmlns:a16="http://schemas.microsoft.com/office/drawing/2014/main" id="{79D36539-24EF-59E1-CB5B-33D4B26D742C}"/>
+              </a:ext>
+            </a:extLst>
+          </p:cNvPr>
           <p:cNvSpPr>
             <a:spLocks noGrp="1"/>
           </p:cNvSpPr>
@@ -1668,40 +1909,189 @@
       </p:sp>
       <p:sp>
         <p:nvSpPr>
-          <p:cNvPr id="8" name="Content Placeholder 3"/>
-          <p:cNvSpPr>
-            <a:spLocks noGrp="1"/>
-          </p:cNvSpPr>
-          <p:nvPr>
-            <p:ph idx="3"/>
+          <p:cNvPr id="13" name="コンテンツ プレースホルダー 12">
+            <a:extLst>
+              <a:ext uri="{FF2B5EF4-FFF2-40B4-BE49-F238E27FC236}">
+                <a16:creationId xmlns:a16="http://schemas.microsoft.com/office/drawing/2014/main" id="{23D794FD-7998-B263-7A33-0D9A529D97EE}"/>
+              </a:ext>
+            </a:extLst>
+          </p:cNvPr>
+          <p:cNvSpPr>
+            <a:spLocks noGrp="1"/>
+          </p:cNvSpPr>
+          <p:nvPr>
+            <p:ph sz="quarter" idx="13"/>
           </p:nvPr>
         </p:nvSpPr>
         <p:spPr>
           <a:xfrm>
-            <a:off x="8147304" y="1828800"/>
-            <a:ext cx="3546043" cy="4754880"/>
+            <a:off x="226423" y="1114652"/>
+            <a:ext cx="5738812" cy="5016182"/>
           </a:xfrm>
-          <a:prstGeom prst="rect">
-            <a:avLst/>
-          </a:prstGeom>
-          <a:noFill/>
-          <a:ln>
-            <a:noFill/>
-          </a:ln>
         </p:spPr>
         <p:txBody>
-          <a:bodyPr anchor="t" wrap="square" lIns="73152" tIns="54864" rIns="73152" bIns="54864"/>
-          <a:lstStyle>
-            <a:lvl1pPr>
-              <a:defRPr sz="1400">
-                <a:solidFill>
-                  <a:srgbClr val="444444"/>
-                </a:solidFill>
-              </a:defRPr>
-            </a:lvl1pPr>
-          </a:lstStyle>
-          <a:p>
-            <a:pPr algn="l"/>
+          <a:bodyPr/>
+          <a:lstStyle/>
+          <a:p>
+            <a:pPr lvl="0"/>
+            <a:r>
+              <a:rPr kumimoji="1" lang="ja-JP" altLang="en-US"/>
+              <a:t>マスター テキストの書式設定</a:t>
+            </a:r>
+          </a:p>
+          <a:p>
+            <a:pPr lvl="1"/>
+            <a:r>
+              <a:rPr kumimoji="1" lang="ja-JP" altLang="en-US"/>
+              <a:t>第 </a:t>
+            </a:r>
+            <a:r>
+              <a:rPr kumimoji="1" lang="en-US" altLang="ja-JP"/>
+              <a:t>2 </a:t>
+            </a:r>
+            <a:r>
+              <a:rPr kumimoji="1" lang="ja-JP" altLang="en-US"/>
+              <a:t>レベル</a:t>
+            </a:r>
+          </a:p>
+          <a:p>
+            <a:pPr lvl="2"/>
+            <a:r>
+              <a:rPr kumimoji="1" lang="ja-JP" altLang="en-US"/>
+              <a:t>第 </a:t>
+            </a:r>
+            <a:r>
+              <a:rPr kumimoji="1" lang="en-US" altLang="ja-JP"/>
+              <a:t>3 </a:t>
+            </a:r>
+            <a:r>
+              <a:rPr kumimoji="1" lang="ja-JP" altLang="en-US"/>
+              <a:t>レベル</a:t>
+            </a:r>
+          </a:p>
+          <a:p>
+            <a:pPr lvl="3"/>
+            <a:r>
+              <a:rPr kumimoji="1" lang="ja-JP" altLang="en-US"/>
+              <a:t>第 </a:t>
+            </a:r>
+            <a:r>
+              <a:rPr kumimoji="1" lang="en-US" altLang="ja-JP"/>
+              <a:t>4 </a:t>
+            </a:r>
+            <a:r>
+              <a:rPr kumimoji="1" lang="ja-JP" altLang="en-US"/>
+              <a:t>レベル</a:t>
+            </a:r>
+          </a:p>
+          <a:p>
+            <a:pPr lvl="4"/>
+            <a:r>
+              <a:rPr kumimoji="1" lang="ja-JP" altLang="en-US"/>
+              <a:t>第 </a:t>
+            </a:r>
+            <a:r>
+              <a:rPr kumimoji="1" lang="en-US" altLang="ja-JP"/>
+              <a:t>5 </a:t>
+            </a:r>
+            <a:r>
+              <a:rPr kumimoji="1" lang="ja-JP" altLang="en-US"/>
+              <a:t>レベル</a:t>
+            </a:r>
+          </a:p>
+        </p:txBody>
+      </p:sp>
+      <p:sp>
+        <p:nvSpPr>
+          <p:cNvPr id="15" name="コンテンツ プレースホルダー 14">
+            <a:extLst>
+              <a:ext uri="{FF2B5EF4-FFF2-40B4-BE49-F238E27FC236}">
+                <a16:creationId xmlns:a16="http://schemas.microsoft.com/office/drawing/2014/main" id="{CE5D3923-D828-BFFF-25F1-02538CEB89C0}"/>
+              </a:ext>
+            </a:extLst>
+          </p:cNvPr>
+          <p:cNvSpPr>
+            <a:spLocks noGrp="1"/>
+          </p:cNvSpPr>
+          <p:nvPr>
+            <p:ph sz="quarter" idx="14"/>
+          </p:nvPr>
+        </p:nvSpPr>
+        <p:spPr>
+          <a:xfrm>
+            <a:off x="6218056" y="1114652"/>
+            <a:ext cx="5738812" cy="5016182"/>
+          </a:xfrm>
+        </p:spPr>
+        <p:txBody>
+          <a:bodyPr/>
+          <a:lstStyle/>
+          <a:p>
+            <a:pPr lvl="0"/>
+            <a:r>
+              <a:rPr kumimoji="1" lang="ja-JP" altLang="en-US"/>
+              <a:t>マスター テキストの書式設定</a:t>
+            </a:r>
+          </a:p>
+          <a:p>
+            <a:pPr lvl="1"/>
+            <a:r>
+              <a:rPr kumimoji="1" lang="ja-JP" altLang="en-US"/>
+              <a:t>第 </a:t>
+            </a:r>
+            <a:r>
+              <a:rPr kumimoji="1" lang="en-US" altLang="ja-JP"/>
+              <a:t>2 </a:t>
+            </a:r>
+            <a:r>
+              <a:rPr kumimoji="1" lang="ja-JP" altLang="en-US"/>
+              <a:t>レベル</a:t>
+            </a:r>
+          </a:p>
+          <a:p>
+            <a:pPr lvl="2"/>
+            <a:r>
+              <a:rPr kumimoji="1" lang="ja-JP" altLang="en-US"/>
+              <a:t>第 </a:t>
+            </a:r>
+            <a:r>
+              <a:rPr kumimoji="1" lang="en-US" altLang="ja-JP"/>
+              <a:t>3 </a:t>
+            </a:r>
+            <a:r>
+              <a:rPr kumimoji="1" lang="ja-JP" altLang="en-US"/>
+              <a:t>レベル</a:t>
+            </a:r>
+          </a:p>
+          <a:p>
+            <a:pPr lvl="3"/>
+            <a:r>
+              <a:rPr kumimoji="1" lang="ja-JP" altLang="en-US"/>
+              <a:t>第 </a:t>
+            </a:r>
+            <a:r>
+              <a:rPr kumimoji="1" lang="en-US" altLang="ja-JP"/>
+              <a:t>4 </a:t>
+            </a:r>
+            <a:r>
+              <a:rPr kumimoji="1" lang="ja-JP" altLang="en-US"/>
+              <a:t>レベル</a:t>
+            </a:r>
+          </a:p>
+          <a:p>
+            <a:pPr lvl="4"/>
+            <a:r>
+              <a:rPr kumimoji="1" lang="ja-JP" altLang="en-US"/>
+              <a:t>第 </a:t>
+            </a:r>
+            <a:r>
+              <a:rPr kumimoji="1" lang="en-US" altLang="ja-JP"/>
+              <a:t>5 </a:t>
+            </a:r>
+            <a:r>
+              <a:rPr kumimoji="1" lang="ja-JP" altLang="en-US"/>
+              <a:t>レベル</a:t>
+            </a:r>
           </a:p>
         </p:txBody>
       </p:sp>
@@ -1719,7 +2109,7 @@
 </file>
 
 <file path=ppt/slideLayouts/slideLayout5.xml><?xml version="1.0" encoding="utf-8"?>
-<p:sldLayout xmlns:a="http://schemas.openxmlformats.org/drawingml/2006/main" xmlns:r="http://schemas.openxmlformats.org/officeDocument/2006/relationships" xmlns:p="http://schemas.openxmlformats.org/presentationml/2006/main" type="twoTxTwoObj" preserve="1">
+<p:sldLayout xmlns:a="http://schemas.openxmlformats.org/drawingml/2006/main" xmlns:r="http://schemas.openxmlformats.org/officeDocument/2006/relationships" xmlns:p="http://schemas.openxmlformats.org/presentationml/2006/main" preserve="1" userDrawn="1">
   <p:cSld name="Comparison">
     <p:bg>
       <p:bgPr>
@@ -1745,108 +2135,18 @@
       </p:grpSpPr>
       <p:sp>
         <p:nvSpPr>
-          <p:cNvPr id="11" name="Rounded Rectangle 11"/>
-          <p:cNvSpPr/>
-          <p:nvPr/>
+          <p:cNvPr id="3" name="Text Placeholder 2"/>
+          <p:cNvSpPr>
+            <a:spLocks noGrp="1"/>
+          </p:cNvSpPr>
+          <p:nvPr>
+            <p:ph type="body" idx="1"/>
+          </p:nvPr>
         </p:nvSpPr>
         <p:spPr>
           <a:xfrm>
-            <a:off x="6245352" y="1874519"/>
-            <a:ext cx="5440680" cy="4709160"/>
-          </a:xfrm>
-          <a:prstGeom prst="roundRect">
-            <a:avLst/>
-          </a:prstGeom>
-          <a:solidFill>
-            <a:srgbClr val="F2F2F2"/>
-          </a:solidFill>
-          <a:ln>
-            <a:solidFill>
-              <a:srgbClr val="CCCCCC"/>
-            </a:solidFill>
-          </a:ln>
-        </p:spPr>
-        <p:style>
-          <a:lnRef idx="1">
-            <a:schemeClr val="accent1"/>
-          </a:lnRef>
-          <a:fillRef idx="3">
-            <a:schemeClr val="accent1"/>
-          </a:fillRef>
-          <a:effectRef idx="2">
-            <a:schemeClr val="accent1"/>
-          </a:effectRef>
-          <a:fontRef idx="minor">
-            <a:schemeClr val="lt1"/>
-          </a:fontRef>
-        </p:style>
-        <p:txBody>
-          <a:bodyPr rtlCol="0" anchor="ctr"/>
-          <a:lstStyle/>
-          <a:p>
-            <a:pPr algn="ctr"/>
-          </a:p>
-        </p:txBody>
-      </p:sp>
-      <p:sp>
-        <p:nvSpPr>
-          <p:cNvPr id="10" name="Rounded Rectangle 10"/>
-          <p:cNvSpPr/>
-          <p:nvPr/>
-        </p:nvSpPr>
-        <p:spPr>
-          <a:xfrm>
-            <a:off x="502920" y="1874519"/>
-            <a:ext cx="5440680" cy="4709160"/>
-          </a:xfrm>
-          <a:prstGeom prst="roundRect">
-            <a:avLst/>
-          </a:prstGeom>
-          <a:solidFill>
-            <a:srgbClr val="F2F2F2"/>
-          </a:solidFill>
-          <a:ln>
-            <a:solidFill>
-              <a:srgbClr val="CCCCCC"/>
-            </a:solidFill>
-          </a:ln>
-        </p:spPr>
-        <p:style>
-          <a:lnRef idx="1">
-            <a:schemeClr val="accent1"/>
-          </a:lnRef>
-          <a:fillRef idx="3">
-            <a:schemeClr val="accent1"/>
-          </a:fillRef>
-          <a:effectRef idx="2">
-            <a:schemeClr val="accent1"/>
-          </a:effectRef>
-          <a:fontRef idx="minor">
-            <a:schemeClr val="lt1"/>
-          </a:fontRef>
-        </p:style>
-        <p:txBody>
-          <a:bodyPr rtlCol="0" anchor="ctr"/>
-          <a:lstStyle/>
-          <a:p>
-            <a:pPr algn="ctr"/>
-          </a:p>
-        </p:txBody>
-      </p:sp>
-      <p:sp>
-        <p:nvSpPr>
-          <p:cNvPr id="2" name="Title 1"/>
-          <p:cNvSpPr>
-            <a:spLocks noGrp="1"/>
-          </p:cNvSpPr>
-          <p:nvPr>
-            <p:ph type="title"/>
-          </p:nvPr>
-        </p:nvSpPr>
-        <p:spPr>
-          <a:xfrm>
-            <a:off x="502920" y="320040"/>
-            <a:ext cx="10058400" cy="1417320"/>
+            <a:off x="226422" y="1049186"/>
+            <a:ext cx="5712824" cy="502920"/>
           </a:xfrm>
           <a:noFill/>
           <a:ln>
@@ -1854,50 +2154,9 @@
           </a:ln>
         </p:spPr>
         <p:txBody>
-          <a:bodyPr anchor="t" wrap="square" lIns="0" tIns="0" rIns="0" bIns="0"/>
+          <a:bodyPr wrap="square" lIns="73152" tIns="36576" rIns="73152" bIns="0" anchor="ctr"/>
           <a:lstStyle>
-            <a:lvl1pPr>
-              <a:defRPr sz="5400" b="1">
-                <a:solidFill>
-                  <a:srgbClr val="111111"/>
-                </a:solidFill>
-              </a:defRPr>
-            </a:lvl1pPr>
-          </a:lstStyle>
-          <a:p>
-            <a:pPr algn="l"/>
-            <a:r>
-              <a:rPr lang="en-US" smtClean="0"/>
-              <a:t>Click to edit Master title style</a:t>
-            </a:r>
-            <a:endParaRPr lang="en-US"/>
-          </a:p>
-        </p:txBody>
-      </p:sp>
-      <p:sp>
-        <p:nvSpPr>
-          <p:cNvPr id="3" name="Text Placeholder 2"/>
-          <p:cNvSpPr>
-            <a:spLocks noGrp="1"/>
-          </p:cNvSpPr>
-          <p:nvPr>
-            <p:ph type="body" idx="1"/>
-          </p:nvPr>
-        </p:nvSpPr>
-        <p:spPr>
-          <a:xfrm>
-            <a:off x="804672" y="2057400"/>
-            <a:ext cx="4846320" cy="502920"/>
-          </a:xfrm>
-          <a:noFill/>
-          <a:ln>
-            <a:noFill/>
-          </a:ln>
-        </p:spPr>
-        <p:txBody>
-          <a:bodyPr anchor="t" wrap="square" lIns="73152" tIns="36576" rIns="73152" bIns="0"/>
-          <a:lstStyle>
-            <a:lvl1pPr marL="0" indent="0">
+            <a:lvl1pPr marL="0" indent="0" algn="ctr">
               <a:buNone/>
               <a:defRPr sz="1400" b="1">
                 <a:solidFill>
@@ -1940,27 +2199,24 @@
           </a:lstStyle>
           <a:p>
             <a:pPr lvl="0" algn="l"/>
-            <a:r>
-              <a:rPr lang="en-US" smtClean="0"/>
-              <a:t>Click to edit Master text styles</a:t>
-            </a:r>
-          </a:p>
-        </p:txBody>
-      </p:sp>
-      <p:sp>
-        <p:nvSpPr>
-          <p:cNvPr id="4" name="Content Placeholder 3"/>
-          <p:cNvSpPr>
-            <a:spLocks noGrp="1"/>
-          </p:cNvSpPr>
-          <p:nvPr>
-            <p:ph sz="half" idx="2"/>
+            <a:endParaRPr lang="en-US" dirty="0"/>
+          </a:p>
+        </p:txBody>
+      </p:sp>
+      <p:sp>
+        <p:nvSpPr>
+          <p:cNvPr id="5" name="Text Placeholder 4"/>
+          <p:cNvSpPr>
+            <a:spLocks noGrp="1"/>
+          </p:cNvSpPr>
+          <p:nvPr>
+            <p:ph type="body" sz="quarter" idx="3"/>
           </p:nvPr>
         </p:nvSpPr>
         <p:spPr>
           <a:xfrm>
-            <a:off x="804672" y="2651760"/>
-            <a:ext cx="4846320" cy="3749039"/>
+            <a:off x="6222818" y="1049186"/>
+            <a:ext cx="5712824" cy="502920"/>
           </a:xfrm>
           <a:noFill/>
           <a:ln>
@@ -1968,102 +2224,9 @@
           </a:ln>
         </p:spPr>
         <p:txBody>
-          <a:bodyPr anchor="t" wrap="square" lIns="73152" tIns="36576" rIns="73152" bIns="36576"/>
+          <a:bodyPr wrap="square" lIns="73152" tIns="36576" rIns="73152" bIns="0" anchor="ctr"/>
           <a:lstStyle>
-            <a:lvl1pPr>
-              <a:defRPr sz="1400">
-                <a:solidFill>
-                  <a:srgbClr val="444444"/>
-                </a:solidFill>
-              </a:defRPr>
-            </a:lvl1pPr>
-            <a:lvl2pPr>
-              <a:defRPr sz="2000"/>
-            </a:lvl2pPr>
-            <a:lvl3pPr>
-              <a:defRPr sz="1800"/>
-            </a:lvl3pPr>
-            <a:lvl4pPr>
-              <a:defRPr sz="1600"/>
-            </a:lvl4pPr>
-            <a:lvl5pPr>
-              <a:defRPr sz="1600"/>
-            </a:lvl5pPr>
-            <a:lvl6pPr>
-              <a:defRPr sz="1600"/>
-            </a:lvl6pPr>
-            <a:lvl7pPr>
-              <a:defRPr sz="1600"/>
-            </a:lvl7pPr>
-            <a:lvl8pPr>
-              <a:defRPr sz="1600"/>
-            </a:lvl8pPr>
-            <a:lvl9pPr>
-              <a:defRPr sz="1600"/>
-            </a:lvl9pPr>
-          </a:lstStyle>
-          <a:p>
-            <a:pPr lvl="0" algn="l"/>
-            <a:r>
-              <a:rPr lang="en-US" smtClean="0"/>
-              <a:t>Click to edit Master text styles</a:t>
-            </a:r>
-          </a:p>
-          <a:p>
-            <a:pPr lvl="1"/>
-            <a:r>
-              <a:rPr lang="en-US" smtClean="0"/>
-              <a:t>Second level</a:t>
-            </a:r>
-          </a:p>
-          <a:p>
-            <a:pPr lvl="2"/>
-            <a:r>
-              <a:rPr lang="en-US" smtClean="0"/>
-              <a:t>Third level</a:t>
-            </a:r>
-          </a:p>
-          <a:p>
-            <a:pPr lvl="3"/>
-            <a:r>
-              <a:rPr lang="en-US" smtClean="0"/>
-              <a:t>Fourth level</a:t>
-            </a:r>
-          </a:p>
-          <a:p>
-            <a:pPr lvl="4"/>
-            <a:r>
-              <a:rPr lang="en-US" smtClean="0"/>
-              <a:t>Fifth level</a:t>
-            </a:r>
-            <a:endParaRPr lang="en-US"/>
-          </a:p>
-        </p:txBody>
-      </p:sp>
-      <p:sp>
-        <p:nvSpPr>
-          <p:cNvPr id="5" name="Text Placeholder 4"/>
-          <p:cNvSpPr>
-            <a:spLocks noGrp="1"/>
-          </p:cNvSpPr>
-          <p:nvPr>
-            <p:ph type="body" sz="quarter" idx="3"/>
-          </p:nvPr>
-        </p:nvSpPr>
-        <p:spPr>
-          <a:xfrm>
-            <a:off x="6547104" y="2057400"/>
-            <a:ext cx="4846320" cy="502920"/>
-          </a:xfrm>
-          <a:noFill/>
-          <a:ln>
-            <a:noFill/>
-          </a:ln>
-        </p:spPr>
-        <p:txBody>
-          <a:bodyPr anchor="t" wrap="square" lIns="73152" tIns="36576" rIns="73152" bIns="0"/>
-          <a:lstStyle>
-            <a:lvl1pPr marL="0" indent="0">
+            <a:lvl1pPr marL="0" indent="0" algn="ctr">
               <a:buNone/>
               <a:defRPr sz="1400" b="1">
                 <a:solidFill>
@@ -2106,109 +2269,51 @@
           </a:lstStyle>
           <a:p>
             <a:pPr lvl="0" algn="l"/>
-            <a:r>
-              <a:rPr lang="en-US" smtClean="0"/>
-              <a:t>Click to edit Master text styles</a:t>
-            </a:r>
-          </a:p>
-        </p:txBody>
-      </p:sp>
-      <p:sp>
-        <p:nvSpPr>
-          <p:cNvPr id="6" name="Content Placeholder 5"/>
-          <p:cNvSpPr>
-            <a:spLocks noGrp="1"/>
-          </p:cNvSpPr>
-          <p:nvPr>
-            <p:ph sz="quarter" idx="4"/>
-          </p:nvPr>
-        </p:nvSpPr>
-        <p:spPr>
-          <a:xfrm>
-            <a:off x="6547104" y="2651760"/>
-            <a:ext cx="4846320" cy="3749039"/>
-          </a:xfrm>
-          <a:noFill/>
-          <a:ln>
-            <a:noFill/>
-          </a:ln>
-        </p:spPr>
-        <p:txBody>
-          <a:bodyPr anchor="t" wrap="square" lIns="73152" tIns="36576" rIns="73152" bIns="36576"/>
+            <a:endParaRPr lang="en-US" dirty="0"/>
+          </a:p>
+        </p:txBody>
+      </p:sp>
+      <p:sp>
+        <p:nvSpPr>
+          <p:cNvPr id="10" name="タイトル 9">
+            <a:extLst>
+              <a:ext uri="{FF2B5EF4-FFF2-40B4-BE49-F238E27FC236}">
+                <a16:creationId xmlns:a16="http://schemas.microsoft.com/office/drawing/2014/main" id="{742611C5-3334-7E2B-59D2-B8B829483775}"/>
+              </a:ext>
+            </a:extLst>
+          </p:cNvPr>
+          <p:cNvSpPr>
+            <a:spLocks noGrp="1"/>
+          </p:cNvSpPr>
+          <p:nvPr>
+            <p:ph type="title"/>
+          </p:nvPr>
+        </p:nvSpPr>
+        <p:spPr/>
+        <p:txBody>
+          <a:bodyPr/>
           <a:lstStyle>
-            <a:lvl1pPr>
-              <a:defRPr sz="1400">
-                <a:solidFill>
-                  <a:srgbClr val="444444"/>
-                </a:solidFill>
-              </a:defRPr>
+            <a:lvl1pPr algn="l">
+              <a:defRPr/>
             </a:lvl1pPr>
-            <a:lvl2pPr>
-              <a:defRPr sz="2000"/>
-            </a:lvl2pPr>
-            <a:lvl3pPr>
-              <a:defRPr sz="1800"/>
-            </a:lvl3pPr>
-            <a:lvl4pPr>
-              <a:defRPr sz="1600"/>
-            </a:lvl4pPr>
-            <a:lvl5pPr>
-              <a:defRPr sz="1600"/>
-            </a:lvl5pPr>
-            <a:lvl6pPr>
-              <a:defRPr sz="1600"/>
-            </a:lvl6pPr>
-            <a:lvl7pPr>
-              <a:defRPr sz="1600"/>
-            </a:lvl7pPr>
-            <a:lvl8pPr>
-              <a:defRPr sz="1600"/>
-            </a:lvl8pPr>
-            <a:lvl9pPr>
-              <a:defRPr sz="1600"/>
-            </a:lvl9pPr>
           </a:lstStyle>
           <a:p>
-            <a:pPr lvl="0" algn="l"/>
-            <a:r>
-              <a:rPr lang="en-US" smtClean="0"/>
-              <a:t>Click to edit Master text styles</a:t>
-            </a:r>
-          </a:p>
-          <a:p>
-            <a:pPr lvl="1"/>
-            <a:r>
-              <a:rPr lang="en-US" smtClean="0"/>
-              <a:t>Second level</a:t>
-            </a:r>
-          </a:p>
-          <a:p>
-            <a:pPr lvl="2"/>
-            <a:r>
-              <a:rPr lang="en-US" smtClean="0"/>
-              <a:t>Third level</a:t>
-            </a:r>
-          </a:p>
-          <a:p>
-            <a:pPr lvl="3"/>
-            <a:r>
-              <a:rPr lang="en-US" smtClean="0"/>
-              <a:t>Fourth level</a:t>
-            </a:r>
-          </a:p>
-          <a:p>
-            <a:pPr lvl="4"/>
-            <a:r>
-              <a:rPr lang="en-US" smtClean="0"/>
-              <a:t>Fifth level</a:t>
-            </a:r>
-            <a:endParaRPr lang="en-US"/>
-          </a:p>
-        </p:txBody>
-      </p:sp>
-      <p:sp>
-        <p:nvSpPr>
-          <p:cNvPr id="7" name="Date Placeholder 6"/>
+            <a:r>
+              <a:rPr kumimoji="1" lang="ja-JP" altLang="en-US"/>
+              <a:t>マスター タイトルの書式設定</a:t>
+            </a:r>
+          </a:p>
+        </p:txBody>
+      </p:sp>
+      <p:sp>
+        <p:nvSpPr>
+          <p:cNvPr id="11" name="日付プレースホルダー 10">
+            <a:extLst>
+              <a:ext uri="{FF2B5EF4-FFF2-40B4-BE49-F238E27FC236}">
+                <a16:creationId xmlns:a16="http://schemas.microsoft.com/office/drawing/2014/main" id="{873B0EB2-52CE-9FBE-5229-B24CF5D71D55}"/>
+              </a:ext>
+            </a:extLst>
+          </p:cNvPr>
           <p:cNvSpPr>
             <a:spLocks noGrp="1"/>
           </p:cNvSpPr>
@@ -2223,7 +2328,7 @@
           <a:p>
             <a:fld id="{5BCAD085-E8A6-8845-BD4E-CB4CCA059FC4}" type="datetimeFigureOut">
               <a:rPr lang="en-US" smtClean="0"/>
-              <a:t>1/27/13</a:t>
+              <a:t>5/3/26</a:t>
             </a:fld>
             <a:endParaRPr lang="en-US"/>
           </a:p>
@@ -2231,7 +2336,13 @@
       </p:sp>
       <p:sp>
         <p:nvSpPr>
-          <p:cNvPr id="8" name="Footer Placeholder 7"/>
+          <p:cNvPr id="12" name="フッター プレースホルダー 11">
+            <a:extLst>
+              <a:ext uri="{FF2B5EF4-FFF2-40B4-BE49-F238E27FC236}">
+                <a16:creationId xmlns:a16="http://schemas.microsoft.com/office/drawing/2014/main" id="{2A7F14D4-BBB3-0D79-5D1A-8E0282780ADA}"/>
+              </a:ext>
+            </a:extLst>
+          </p:cNvPr>
           <p:cNvSpPr>
             <a:spLocks noGrp="1"/>
           </p:cNvSpPr>
@@ -2244,13 +2355,19 @@
           <a:bodyPr/>
           <a:lstStyle/>
           <a:p>
-            <a:endParaRPr lang="en-US"/>
-          </a:p>
-        </p:txBody>
-      </p:sp>
-      <p:sp>
-        <p:nvSpPr>
-          <p:cNvPr id="9" name="Slide Number Placeholder 8"/>
+            <a:endParaRPr lang="en-US" dirty="0"/>
+          </a:p>
+        </p:txBody>
+      </p:sp>
+      <p:sp>
+        <p:nvSpPr>
+          <p:cNvPr id="13" name="スライド番号プレースホルダー 12">
+            <a:extLst>
+              <a:ext uri="{FF2B5EF4-FFF2-40B4-BE49-F238E27FC236}">
+                <a16:creationId xmlns:a16="http://schemas.microsoft.com/office/drawing/2014/main" id="{F8DE6177-18F6-D7A0-7D6F-64E793AF85C8}"/>
+              </a:ext>
+            </a:extLst>
+          </p:cNvPr>
           <p:cNvSpPr>
             <a:spLocks noGrp="1"/>
           </p:cNvSpPr>
@@ -2268,6 +2385,194 @@
               <a:t>‹#›</a:t>
             </a:fld>
             <a:endParaRPr lang="en-US"/>
+          </a:p>
+        </p:txBody>
+      </p:sp>
+      <p:sp>
+        <p:nvSpPr>
+          <p:cNvPr id="15" name="コンテンツ プレースホルダー 14">
+            <a:extLst>
+              <a:ext uri="{FF2B5EF4-FFF2-40B4-BE49-F238E27FC236}">
+                <a16:creationId xmlns:a16="http://schemas.microsoft.com/office/drawing/2014/main" id="{05A5F16C-5213-8739-D5CC-71F95A8DD83A}"/>
+              </a:ext>
+            </a:extLst>
+          </p:cNvPr>
+          <p:cNvSpPr>
+            <a:spLocks noGrp="1"/>
+          </p:cNvSpPr>
+          <p:nvPr>
+            <p:ph sz="quarter" idx="13"/>
+          </p:nvPr>
+        </p:nvSpPr>
+        <p:spPr>
+          <a:xfrm>
+            <a:off x="205421" y="1736725"/>
+            <a:ext cx="5734051" cy="4428944"/>
+          </a:xfrm>
+        </p:spPr>
+        <p:txBody>
+          <a:bodyPr/>
+          <a:lstStyle/>
+          <a:p>
+            <a:pPr lvl="0"/>
+            <a:r>
+              <a:rPr kumimoji="1" lang="ja-JP" altLang="en-US"/>
+              <a:t>マスター テキストの書式設定</a:t>
+            </a:r>
+          </a:p>
+          <a:p>
+            <a:pPr lvl="1"/>
+            <a:r>
+              <a:rPr kumimoji="1" lang="ja-JP" altLang="en-US"/>
+              <a:t>第 </a:t>
+            </a:r>
+            <a:r>
+              <a:rPr kumimoji="1" lang="en-US" altLang="ja-JP"/>
+              <a:t>2 </a:t>
+            </a:r>
+            <a:r>
+              <a:rPr kumimoji="1" lang="ja-JP" altLang="en-US"/>
+              <a:t>レベル</a:t>
+            </a:r>
+          </a:p>
+          <a:p>
+            <a:pPr lvl="2"/>
+            <a:r>
+              <a:rPr kumimoji="1" lang="ja-JP" altLang="en-US"/>
+              <a:t>第 </a:t>
+            </a:r>
+            <a:r>
+              <a:rPr kumimoji="1" lang="en-US" altLang="ja-JP"/>
+              <a:t>3 </a:t>
+            </a:r>
+            <a:r>
+              <a:rPr kumimoji="1" lang="ja-JP" altLang="en-US"/>
+              <a:t>レベル</a:t>
+            </a:r>
+          </a:p>
+          <a:p>
+            <a:pPr lvl="3"/>
+            <a:r>
+              <a:rPr kumimoji="1" lang="ja-JP" altLang="en-US"/>
+              <a:t>第 </a:t>
+            </a:r>
+            <a:r>
+              <a:rPr kumimoji="1" lang="en-US" altLang="ja-JP"/>
+              <a:t>4 </a:t>
+            </a:r>
+            <a:r>
+              <a:rPr kumimoji="1" lang="ja-JP" altLang="en-US"/>
+              <a:t>レベル</a:t>
+            </a:r>
+          </a:p>
+          <a:p>
+            <a:pPr lvl="4"/>
+            <a:r>
+              <a:rPr kumimoji="1" lang="ja-JP" altLang="en-US"/>
+              <a:t>第 </a:t>
+            </a:r>
+            <a:r>
+              <a:rPr kumimoji="1" lang="en-US" altLang="ja-JP"/>
+              <a:t>5 </a:t>
+            </a:r>
+            <a:r>
+              <a:rPr kumimoji="1" lang="ja-JP" altLang="en-US"/>
+              <a:t>レベル</a:t>
+            </a:r>
+          </a:p>
+        </p:txBody>
+      </p:sp>
+      <p:sp>
+        <p:nvSpPr>
+          <p:cNvPr id="17" name="コンテンツ プレースホルダー 16">
+            <a:extLst>
+              <a:ext uri="{FF2B5EF4-FFF2-40B4-BE49-F238E27FC236}">
+                <a16:creationId xmlns:a16="http://schemas.microsoft.com/office/drawing/2014/main" id="{7736F04F-6D87-D6E7-D993-8E4670208CB6}"/>
+              </a:ext>
+            </a:extLst>
+          </p:cNvPr>
+          <p:cNvSpPr>
+            <a:spLocks noGrp="1"/>
+          </p:cNvSpPr>
+          <p:nvPr>
+            <p:ph sz="quarter" idx="14"/>
+          </p:nvPr>
+        </p:nvSpPr>
+        <p:spPr>
+          <a:xfrm>
+            <a:off x="6222817" y="1740444"/>
+            <a:ext cx="5712825" cy="4428944"/>
+          </a:xfrm>
+        </p:spPr>
+        <p:txBody>
+          <a:bodyPr/>
+          <a:lstStyle/>
+          <a:p>
+            <a:pPr lvl="0"/>
+            <a:r>
+              <a:rPr kumimoji="1" lang="ja-JP" altLang="en-US"/>
+              <a:t>マスター テキストの書式設定</a:t>
+            </a:r>
+          </a:p>
+          <a:p>
+            <a:pPr lvl="1"/>
+            <a:r>
+              <a:rPr kumimoji="1" lang="ja-JP" altLang="en-US"/>
+              <a:t>第 </a:t>
+            </a:r>
+            <a:r>
+              <a:rPr kumimoji="1" lang="en-US" altLang="ja-JP"/>
+              <a:t>2 </a:t>
+            </a:r>
+            <a:r>
+              <a:rPr kumimoji="1" lang="ja-JP" altLang="en-US"/>
+              <a:t>レベル</a:t>
+            </a:r>
+          </a:p>
+          <a:p>
+            <a:pPr lvl="2"/>
+            <a:r>
+              <a:rPr kumimoji="1" lang="ja-JP" altLang="en-US"/>
+              <a:t>第 </a:t>
+            </a:r>
+            <a:r>
+              <a:rPr kumimoji="1" lang="en-US" altLang="ja-JP"/>
+              <a:t>3 </a:t>
+            </a:r>
+            <a:r>
+              <a:rPr kumimoji="1" lang="ja-JP" altLang="en-US"/>
+              <a:t>レベル</a:t>
+            </a:r>
+          </a:p>
+          <a:p>
+            <a:pPr lvl="3"/>
+            <a:r>
+              <a:rPr kumimoji="1" lang="ja-JP" altLang="en-US"/>
+              <a:t>第 </a:t>
+            </a:r>
+            <a:r>
+              <a:rPr kumimoji="1" lang="en-US" altLang="ja-JP"/>
+              <a:t>4 </a:t>
+            </a:r>
+            <a:r>
+              <a:rPr kumimoji="1" lang="ja-JP" altLang="en-US"/>
+              <a:t>レベル</a:t>
+            </a:r>
+          </a:p>
+          <a:p>
+            <a:pPr lvl="4"/>
+            <a:r>
+              <a:rPr kumimoji="1" lang="ja-JP" altLang="en-US"/>
+              <a:t>第 </a:t>
+            </a:r>
+            <a:r>
+              <a:rPr kumimoji="1" lang="en-US" altLang="ja-JP"/>
+              <a:t>5 </a:t>
+            </a:r>
+            <a:r>
+              <a:rPr kumimoji="1" lang="ja-JP" altLang="en-US"/>
+              <a:t>レベル</a:t>
+            </a:r>
           </a:p>
         </p:txBody>
       </p:sp>
@@ -2325,10 +2630,9 @@
           <a:lstStyle/>
           <a:p>
             <a:r>
-              <a:rPr lang="en-US" smtClean="0"/>
+              <a:rPr lang="en-US"/>
               <a:t>Click to edit Master title style</a:t>
             </a:r>
-            <a:endParaRPr lang="en-US"/>
           </a:p>
         </p:txBody>
       </p:sp>
@@ -2349,7 +2653,7 @@
           <a:p>
             <a:fld id="{5BCAD085-E8A6-8845-BD4E-CB4CCA059FC4}" type="datetimeFigureOut">
               <a:rPr lang="en-US" smtClean="0"/>
-              <a:t>1/27/13</a:t>
+              <a:t>5/3/26</a:t>
             </a:fld>
             <a:endParaRPr lang="en-US"/>
           </a:p>
@@ -2452,7 +2756,7 @@
           <a:p>
             <a:fld id="{5BCAD085-E8A6-8845-BD4E-CB4CCA059FC4}" type="datetimeFigureOut">
               <a:rPr lang="en-US" smtClean="0"/>
-              <a:t>1/27/13</a:t>
+              <a:t>5/3/26</a:t>
             </a:fld>
             <a:endParaRPr lang="en-US"/>
           </a:p>
@@ -2514,7 +2818,7 @@
 </file>
 
 <file path=ppt/slideLayouts/slideLayout8.xml><?xml version="1.0" encoding="utf-8"?>
-<p:sldLayout xmlns:a="http://schemas.openxmlformats.org/drawingml/2006/main" xmlns:r="http://schemas.openxmlformats.org/officeDocument/2006/relationships" xmlns:p="http://schemas.openxmlformats.org/presentationml/2006/main" type="objTx" preserve="1">
+<p:sldLayout xmlns:a="http://schemas.openxmlformats.org/drawingml/2006/main" xmlns:r="http://schemas.openxmlformats.org/officeDocument/2006/relationships" xmlns:p="http://schemas.openxmlformats.org/presentationml/2006/main" preserve="1" userDrawn="1">
   <p:cSld name="Content with Caption">
     <p:bg>
       <p:bgPr>
@@ -2540,135 +2844,18 @@
       </p:grpSpPr>
       <p:sp>
         <p:nvSpPr>
-          <p:cNvPr id="2" name="Title 1"/>
-          <p:cNvSpPr>
-            <a:spLocks noGrp="1"/>
-          </p:cNvSpPr>
-          <p:nvPr>
-            <p:ph type="title"/>
+          <p:cNvPr id="4" name="Text Placeholder 3"/>
+          <p:cNvSpPr>
+            <a:spLocks noGrp="1"/>
+          </p:cNvSpPr>
+          <p:nvPr>
+            <p:ph type="body" sz="half" idx="2"/>
           </p:nvPr>
         </p:nvSpPr>
         <p:spPr>
           <a:xfrm>
-            <a:off x="457200" y="273050"/>
-            <a:ext cx="3008313" cy="1162050"/>
-          </a:xfrm>
-        </p:spPr>
-        <p:txBody>
-          <a:bodyPr anchor="b"/>
-          <a:lstStyle>
-            <a:lvl1pPr algn="l">
-              <a:defRPr sz="2000" b="1"/>
-            </a:lvl1pPr>
-          </a:lstStyle>
-          <a:p>
-            <a:r>
-              <a:rPr lang="en-US" smtClean="0"/>
-              <a:t>Click to edit Master title style</a:t>
-            </a:r>
-            <a:endParaRPr lang="en-US"/>
-          </a:p>
-        </p:txBody>
-      </p:sp>
-      <p:sp>
-        <p:nvSpPr>
-          <p:cNvPr id="3" name="Content Placeholder 2"/>
-          <p:cNvSpPr>
-            <a:spLocks noGrp="1"/>
-          </p:cNvSpPr>
-          <p:nvPr>
-            <p:ph idx="1"/>
-          </p:nvPr>
-        </p:nvSpPr>
-        <p:spPr>
-          <a:xfrm>
-            <a:off x="3575050" y="273050"/>
-            <a:ext cx="5111750" cy="5853113"/>
-          </a:xfrm>
-        </p:spPr>
-        <p:txBody>
-          <a:bodyPr/>
-          <a:lstStyle>
-            <a:lvl1pPr>
-              <a:defRPr sz="3200"/>
-            </a:lvl1pPr>
-            <a:lvl2pPr>
-              <a:defRPr sz="2800"/>
-            </a:lvl2pPr>
-            <a:lvl3pPr>
-              <a:defRPr sz="2400"/>
-            </a:lvl3pPr>
-            <a:lvl4pPr>
-              <a:defRPr sz="2000"/>
-            </a:lvl4pPr>
-            <a:lvl5pPr>
-              <a:defRPr sz="2000"/>
-            </a:lvl5pPr>
-            <a:lvl6pPr>
-              <a:defRPr sz="2000"/>
-            </a:lvl6pPr>
-            <a:lvl7pPr>
-              <a:defRPr sz="2000"/>
-            </a:lvl7pPr>
-            <a:lvl8pPr>
-              <a:defRPr sz="2000"/>
-            </a:lvl8pPr>
-            <a:lvl9pPr>
-              <a:defRPr sz="2000"/>
-            </a:lvl9pPr>
-          </a:lstStyle>
-          <a:p>
-            <a:pPr lvl="0"/>
-            <a:r>
-              <a:rPr lang="en-US" smtClean="0"/>
-              <a:t>Click to edit Master text styles</a:t>
-            </a:r>
-          </a:p>
-          <a:p>
-            <a:pPr lvl="1"/>
-            <a:r>
-              <a:rPr lang="en-US" smtClean="0"/>
-              <a:t>Second level</a:t>
-            </a:r>
-          </a:p>
-          <a:p>
-            <a:pPr lvl="2"/>
-            <a:r>
-              <a:rPr lang="en-US" smtClean="0"/>
-              <a:t>Third level</a:t>
-            </a:r>
-          </a:p>
-          <a:p>
-            <a:pPr lvl="3"/>
-            <a:r>
-              <a:rPr lang="en-US" smtClean="0"/>
-              <a:t>Fourth level</a:t>
-            </a:r>
-          </a:p>
-          <a:p>
-            <a:pPr lvl="4"/>
-            <a:r>
-              <a:rPr lang="en-US" smtClean="0"/>
-              <a:t>Fifth level</a:t>
-            </a:r>
-            <a:endParaRPr lang="en-US"/>
-          </a:p>
-        </p:txBody>
-      </p:sp>
-      <p:sp>
-        <p:nvSpPr>
-          <p:cNvPr id="4" name="Text Placeholder 3"/>
-          <p:cNvSpPr>
-            <a:spLocks noGrp="1"/>
-          </p:cNvSpPr>
-          <p:nvPr>
-            <p:ph type="body" sz="half" idx="2"/>
-          </p:nvPr>
-        </p:nvSpPr>
-        <p:spPr>
-          <a:xfrm>
-            <a:off x="457200" y="1435100"/>
-            <a:ext cx="3008313" cy="4691063"/>
+            <a:off x="265702" y="1419498"/>
+            <a:ext cx="3383189" cy="4706666"/>
           </a:xfrm>
         </p:spPr>
         <p:txBody>
@@ -2714,7 +2901,7 @@
           <a:p>
             <a:pPr lvl="0"/>
             <a:r>
-              <a:rPr lang="en-US" smtClean="0"/>
+              <a:rPr lang="en-US" dirty="0"/>
               <a:t>Click to edit Master text styles</a:t>
             </a:r>
           </a:p>
@@ -2737,7 +2924,7 @@
           <a:p>
             <a:fld id="{5BCAD085-E8A6-8845-BD4E-CB4CCA059FC4}" type="datetimeFigureOut">
               <a:rPr lang="en-US" smtClean="0"/>
-              <a:t>1/27/13</a:t>
+              <a:t>5/3/26</a:t>
             </a:fld>
             <a:endParaRPr lang="en-US"/>
           </a:p>
@@ -2782,6 +2969,137 @@
               <a:t>‹#›</a:t>
             </a:fld>
             <a:endParaRPr lang="en-US"/>
+          </a:p>
+        </p:txBody>
+      </p:sp>
+      <p:sp>
+        <p:nvSpPr>
+          <p:cNvPr id="8" name="タイトル 7">
+            <a:extLst>
+              <a:ext uri="{FF2B5EF4-FFF2-40B4-BE49-F238E27FC236}">
+                <a16:creationId xmlns:a16="http://schemas.microsoft.com/office/drawing/2014/main" id="{4F013160-CF05-FC39-74BC-3B8CEFD40EB3}"/>
+              </a:ext>
+            </a:extLst>
+          </p:cNvPr>
+          <p:cNvSpPr>
+            <a:spLocks noGrp="1"/>
+          </p:cNvSpPr>
+          <p:nvPr>
+            <p:ph type="title"/>
+          </p:nvPr>
+        </p:nvSpPr>
+        <p:spPr>
+          <a:xfrm>
+            <a:off x="265702" y="231291"/>
+            <a:ext cx="3383189" cy="973621"/>
+          </a:xfrm>
+        </p:spPr>
+        <p:txBody>
+          <a:bodyPr/>
+          <a:lstStyle>
+            <a:lvl1pPr>
+              <a:defRPr sz="1800"/>
+            </a:lvl1pPr>
+          </a:lstStyle>
+          <a:p>
+            <a:r>
+              <a:rPr kumimoji="1" lang="ja-JP" altLang="en-US"/>
+              <a:t>マスター タイトルの書式設定</a:t>
+            </a:r>
+          </a:p>
+        </p:txBody>
+      </p:sp>
+      <p:sp>
+        <p:nvSpPr>
+          <p:cNvPr id="10" name="コンテンツ プレースホルダー 9">
+            <a:extLst>
+              <a:ext uri="{FF2B5EF4-FFF2-40B4-BE49-F238E27FC236}">
+                <a16:creationId xmlns:a16="http://schemas.microsoft.com/office/drawing/2014/main" id="{EABDED12-0D42-4603-CB2B-383FF79C3B92}"/>
+              </a:ext>
+            </a:extLst>
+          </p:cNvPr>
+          <p:cNvSpPr>
+            <a:spLocks noGrp="1"/>
+          </p:cNvSpPr>
+          <p:nvPr>
+            <p:ph sz="quarter" idx="13"/>
+          </p:nvPr>
+        </p:nvSpPr>
+        <p:spPr>
+          <a:xfrm>
+            <a:off x="3858214" y="231290"/>
+            <a:ext cx="8068084" cy="5894873"/>
+          </a:xfrm>
+        </p:spPr>
+        <p:txBody>
+          <a:bodyPr/>
+          <a:lstStyle/>
+          <a:p>
+            <a:pPr lvl="0"/>
+            <a:r>
+              <a:rPr kumimoji="1" lang="ja-JP" altLang="en-US"/>
+              <a:t>マスター テキストの書式設定</a:t>
+            </a:r>
+          </a:p>
+          <a:p>
+            <a:pPr lvl="1"/>
+            <a:r>
+              <a:rPr kumimoji="1" lang="ja-JP" altLang="en-US"/>
+              <a:t>第 </a:t>
+            </a:r>
+            <a:r>
+              <a:rPr kumimoji="1" lang="en-US" altLang="ja-JP"/>
+              <a:t>2 </a:t>
+            </a:r>
+            <a:r>
+              <a:rPr kumimoji="1" lang="ja-JP" altLang="en-US"/>
+              <a:t>レベル</a:t>
+            </a:r>
+          </a:p>
+          <a:p>
+            <a:pPr lvl="2"/>
+            <a:r>
+              <a:rPr kumimoji="1" lang="ja-JP" altLang="en-US"/>
+              <a:t>第 </a:t>
+            </a:r>
+            <a:r>
+              <a:rPr kumimoji="1" lang="en-US" altLang="ja-JP"/>
+              <a:t>3 </a:t>
+            </a:r>
+            <a:r>
+              <a:rPr kumimoji="1" lang="ja-JP" altLang="en-US"/>
+              <a:t>レベル</a:t>
+            </a:r>
+          </a:p>
+          <a:p>
+            <a:pPr lvl="3"/>
+            <a:r>
+              <a:rPr kumimoji="1" lang="ja-JP" altLang="en-US"/>
+              <a:t>第 </a:t>
+            </a:r>
+            <a:r>
+              <a:rPr kumimoji="1" lang="en-US" altLang="ja-JP"/>
+              <a:t>4 </a:t>
+            </a:r>
+            <a:r>
+              <a:rPr kumimoji="1" lang="ja-JP" altLang="en-US"/>
+              <a:t>レベル</a:t>
+            </a:r>
+          </a:p>
+          <a:p>
+            <a:pPr lvl="4"/>
+            <a:r>
+              <a:rPr kumimoji="1" lang="ja-JP" altLang="en-US"/>
+              <a:t>第 </a:t>
+            </a:r>
+            <a:r>
+              <a:rPr kumimoji="1" lang="en-US" altLang="ja-JP"/>
+              <a:t>5 </a:t>
+            </a:r>
+            <a:r>
+              <a:rPr kumimoji="1" lang="ja-JP" altLang="en-US"/>
+              <a:t>レベル</a:t>
+            </a:r>
           </a:p>
         </p:txBody>
       </p:sp>
@@ -2799,7 +3117,7 @@
 </file>
 
 <file path=ppt/slideLayouts/slideLayout9.xml><?xml version="1.0" encoding="utf-8"?>
-<p:sldLayout xmlns:a="http://schemas.openxmlformats.org/drawingml/2006/main" xmlns:r="http://schemas.openxmlformats.org/officeDocument/2006/relationships" xmlns:p="http://schemas.openxmlformats.org/presentationml/2006/main" type="picTx" preserve="1">
+<p:sldLayout xmlns:a="http://schemas.openxmlformats.org/drawingml/2006/main" xmlns:r="http://schemas.openxmlformats.org/officeDocument/2006/relationships" xmlns:p="http://schemas.openxmlformats.org/presentationml/2006/main" preserve="1" userDrawn="1">
   <p:cSld name="Picture with Caption">
     <p:bg>
       <p:bgPr>
@@ -2825,18 +3143,18 @@
       </p:grpSpPr>
       <p:sp>
         <p:nvSpPr>
-          <p:cNvPr id="2" name="Title 1"/>
-          <p:cNvSpPr>
-            <a:spLocks noGrp="1"/>
-          </p:cNvSpPr>
-          <p:nvPr>
-            <p:ph type="title"/>
+          <p:cNvPr id="3" name="Picture Placeholder 2"/>
+          <p:cNvSpPr>
+            <a:spLocks noGrp="1"/>
+          </p:cNvSpPr>
+          <p:nvPr>
+            <p:ph type="pic" idx="1"/>
           </p:nvPr>
         </p:nvSpPr>
         <p:spPr>
           <a:xfrm>
-            <a:off x="502920" y="320040"/>
-            <a:ext cx="10058400" cy="1417320"/>
+            <a:off x="217712" y="1097280"/>
+            <a:ext cx="7855134" cy="5024846"/>
           </a:xfrm>
           <a:noFill/>
           <a:ln>
@@ -2844,52 +3162,7 @@
           </a:ln>
         </p:spPr>
         <p:txBody>
-          <a:bodyPr anchor="t" wrap="square" lIns="0" tIns="0" rIns="0" bIns="0"/>
-          <a:lstStyle>
-            <a:lvl1pPr algn="l">
-              <a:defRPr sz="5400" b="1">
-                <a:solidFill>
-                  <a:srgbClr val="111111"/>
-                </a:solidFill>
-              </a:defRPr>
-            </a:lvl1pPr>
-          </a:lstStyle>
-          <a:p>
-            <a:pPr algn="l"/>
-            <a:r>
-              <a:rPr lang="en-US" smtClean="0"/>
-              <a:t>Click to edit Master title style</a:t>
-            </a:r>
-            <a:endParaRPr lang="en-US"/>
-          </a:p>
-        </p:txBody>
-      </p:sp>
-      <p:sp>
-        <p:nvSpPr>
-          <p:cNvPr id="3" name="Picture Placeholder 2"/>
-          <p:cNvSpPr>
-            <a:spLocks noGrp="1"/>
-          </p:cNvSpPr>
-          <p:nvPr>
-            <p:ph type="pic" idx="1"/>
-          </p:nvPr>
-        </p:nvSpPr>
-        <p:spPr>
-          <a:xfrm>
-            <a:off x="502920" y="1920240"/>
-            <a:ext cx="7772400" cy="4663440"/>
-          </a:xfrm>
-          <a:solidFill>
-            <a:srgbClr val="F2F2F2"/>
-          </a:solidFill>
-          <a:ln>
-            <a:solidFill>
-              <a:srgbClr val="CCCCCC"/>
-            </a:solidFill>
-          </a:ln>
-        </p:spPr>
-        <p:txBody>
-          <a:bodyPr anchor="t" wrap="square" lIns="0" tIns="0" rIns="0" bIns="0"/>
+          <a:bodyPr wrap="square" lIns="0" tIns="0" rIns="0" bIns="0" anchor="t"/>
           <a:lstStyle>
             <a:lvl1pPr marL="0" indent="0">
               <a:buNone/>
@@ -2946,8 +3219,8 @@
         </p:nvSpPr>
         <p:spPr>
           <a:xfrm>
-            <a:off x="8531352" y="1920240"/>
-            <a:ext cx="3154680" cy="4663440"/>
+            <a:off x="8319952" y="1097280"/>
+            <a:ext cx="3636916" cy="5024846"/>
           </a:xfrm>
           <a:noFill/>
           <a:ln>
@@ -2955,7 +3228,7 @@
           </a:ln>
         </p:spPr>
         <p:txBody>
-          <a:bodyPr anchor="t" wrap="square" lIns="0" tIns="36576" rIns="0" bIns="0"/>
+          <a:bodyPr wrap="square" lIns="0" tIns="36576" rIns="0" bIns="0" anchor="t"/>
           <a:lstStyle>
             <a:lvl1pPr marL="0" indent="0">
               <a:buNone/>
@@ -3001,7 +3274,7 @@
           <a:p>
             <a:pPr lvl="0" algn="l"/>
             <a:r>
-              <a:rPr lang="en-US" smtClean="0"/>
+              <a:rPr lang="en-US"/>
               <a:t>Click to edit Master text styles</a:t>
             </a:r>
           </a:p>
@@ -3024,7 +3297,7 @@
           <a:p>
             <a:fld id="{5BCAD085-E8A6-8845-BD4E-CB4CCA059FC4}" type="datetimeFigureOut">
               <a:rPr lang="en-US" smtClean="0"/>
-              <a:t>1/27/13</a:t>
+              <a:t>5/3/26</a:t>
             </a:fld>
             <a:endParaRPr lang="en-US"/>
           </a:p>
@@ -3069,6 +3342,34 @@
               <a:t>‹#›</a:t>
             </a:fld>
             <a:endParaRPr lang="en-US"/>
+          </a:p>
+        </p:txBody>
+      </p:sp>
+      <p:sp>
+        <p:nvSpPr>
+          <p:cNvPr id="8" name="タイトル 7">
+            <a:extLst>
+              <a:ext uri="{FF2B5EF4-FFF2-40B4-BE49-F238E27FC236}">
+                <a16:creationId xmlns:a16="http://schemas.microsoft.com/office/drawing/2014/main" id="{3E4DDDEC-1DB2-EF3B-AA3A-651334DC9538}"/>
+              </a:ext>
+            </a:extLst>
+          </p:cNvPr>
+          <p:cNvSpPr>
+            <a:spLocks noGrp="1"/>
+          </p:cNvSpPr>
+          <p:nvPr>
+            <p:ph type="title"/>
+          </p:nvPr>
+        </p:nvSpPr>
+        <p:spPr/>
+        <p:txBody>
+          <a:bodyPr/>
+          <a:lstStyle/>
+          <a:p>
+            <a:r>
+              <a:rPr kumimoji="1" lang="ja-JP" altLang="en-US"/>
+              <a:t>マスター タイトルの書式設定</a:t>
+            </a:r>
           </a:p>
         </p:txBody>
       </p:sp>
@@ -3112,276 +3413,18 @@
       </p:grpSpPr>
       <p:sp>
         <p:nvSpPr>
-          <p:cNvPr id="2147483665" name="Oval 2147483665"/>
-          <p:cNvSpPr/>
-          <p:nvPr/>
+          <p:cNvPr id="2" name="Title Placeholder 1"/>
+          <p:cNvSpPr>
+            <a:spLocks noGrp="1"/>
+          </p:cNvSpPr>
+          <p:nvPr>
+            <p:ph type="title"/>
+          </p:nvPr>
         </p:nvSpPr>
         <p:spPr>
           <a:xfrm>
-            <a:off x="3505198" y="-8686800"/>
-            <a:ext cx="17373600" cy="17373600"/>
-          </a:xfrm>
-          <a:prstGeom prst="ellipse">
-            <a:avLst/>
-          </a:prstGeom>
-          <a:noFill/>
-          <a:ln w="6350">
-            <a:solidFill>
-              <a:srgbClr val="E7E7E7"/>
-            </a:solidFill>
-          </a:ln>
-        </p:spPr>
-        <p:style>
-          <a:lnRef idx="1">
-            <a:schemeClr val="accent1"/>
-          </a:lnRef>
-          <a:fillRef idx="3">
-            <a:schemeClr val="accent1"/>
-          </a:fillRef>
-          <a:effectRef idx="2">
-            <a:schemeClr val="accent1"/>
-          </a:effectRef>
-          <a:fontRef idx="minor">
-            <a:schemeClr val="lt1"/>
-          </a:fontRef>
-        </p:style>
-        <p:txBody>
-          <a:bodyPr rtlCol="0" anchor="ctr"/>
-          <a:lstStyle/>
-          <a:p>
-            <a:pPr algn="ctr"/>
-          </a:p>
-        </p:txBody>
-      </p:sp>
-      <p:sp>
-        <p:nvSpPr>
-          <p:cNvPr id="2147483664" name="Oval 2147483664"/>
-          <p:cNvSpPr/>
-          <p:nvPr/>
-        </p:nvSpPr>
-        <p:spPr>
-          <a:xfrm>
-            <a:off x="4145278" y="-8046720"/>
-            <a:ext cx="16093440" cy="16093440"/>
-          </a:xfrm>
-          <a:prstGeom prst="ellipse">
-            <a:avLst/>
-          </a:prstGeom>
-          <a:noFill/>
-          <a:ln w="9525">
-            <a:solidFill>
-              <a:srgbClr val="DFDFDF"/>
-            </a:solidFill>
-          </a:ln>
-        </p:spPr>
-        <p:style>
-          <a:lnRef idx="1">
-            <a:schemeClr val="accent1"/>
-          </a:lnRef>
-          <a:fillRef idx="3">
-            <a:schemeClr val="accent1"/>
-          </a:fillRef>
-          <a:effectRef idx="2">
-            <a:schemeClr val="accent1"/>
-          </a:effectRef>
-          <a:fontRef idx="minor">
-            <a:schemeClr val="lt1"/>
-          </a:fontRef>
-        </p:style>
-        <p:txBody>
-          <a:bodyPr rtlCol="0" anchor="ctr"/>
-          <a:lstStyle/>
-          <a:p>
-            <a:pPr algn="ctr"/>
-          </a:p>
-        </p:txBody>
-      </p:sp>
-      <p:sp>
-        <p:nvSpPr>
-          <p:cNvPr id="2147483663" name="Oval 2147483663"/>
-          <p:cNvSpPr/>
-          <p:nvPr/>
-        </p:nvSpPr>
-        <p:spPr>
-          <a:xfrm>
-            <a:off x="5242559" y="-6949440"/>
-            <a:ext cx="13898880" cy="13898880"/>
-          </a:xfrm>
-          <a:prstGeom prst="ellipse">
-            <a:avLst/>
-          </a:prstGeom>
-          <a:noFill/>
-          <a:ln w="9525">
-            <a:solidFill>
-              <a:srgbClr val="D7D7D7"/>
-            </a:solidFill>
-          </a:ln>
-        </p:spPr>
-        <p:style>
-          <a:lnRef idx="1">
-            <a:schemeClr val="accent1"/>
-          </a:lnRef>
-          <a:fillRef idx="3">
-            <a:schemeClr val="accent1"/>
-          </a:fillRef>
-          <a:effectRef idx="2">
-            <a:schemeClr val="accent1"/>
-          </a:effectRef>
-          <a:fontRef idx="minor">
-            <a:schemeClr val="lt1"/>
-          </a:fontRef>
-        </p:style>
-        <p:txBody>
-          <a:bodyPr rtlCol="0" anchor="ctr"/>
-          <a:lstStyle/>
-          <a:p>
-            <a:pPr algn="ctr"/>
-          </a:p>
-        </p:txBody>
-      </p:sp>
-      <p:sp>
-        <p:nvSpPr>
-          <p:cNvPr id="2147483662" name="Oval 2147483662"/>
-          <p:cNvSpPr/>
-          <p:nvPr/>
-        </p:nvSpPr>
-        <p:spPr>
-          <a:xfrm>
-            <a:off x="6339838" y="-5852160"/>
-            <a:ext cx="11704320" cy="11704320"/>
-          </a:xfrm>
-          <a:prstGeom prst="ellipse">
-            <a:avLst/>
-          </a:prstGeom>
-          <a:noFill/>
-          <a:ln w="12700">
-            <a:solidFill>
-              <a:srgbClr val="CECECE"/>
-            </a:solidFill>
-          </a:ln>
-        </p:spPr>
-        <p:style>
-          <a:lnRef idx="1">
-            <a:schemeClr val="accent1"/>
-          </a:lnRef>
-          <a:fillRef idx="3">
-            <a:schemeClr val="accent1"/>
-          </a:fillRef>
-          <a:effectRef idx="2">
-            <a:schemeClr val="accent1"/>
-          </a:effectRef>
-          <a:fontRef idx="minor">
-            <a:schemeClr val="lt1"/>
-          </a:fontRef>
-        </p:style>
-        <p:txBody>
-          <a:bodyPr rtlCol="0" anchor="ctr"/>
-          <a:lstStyle/>
-          <a:p>
-            <a:pPr algn="ctr"/>
-          </a:p>
-        </p:txBody>
-      </p:sp>
-      <p:sp>
-        <p:nvSpPr>
-          <p:cNvPr id="2147483661" name="Oval 2147483661"/>
-          <p:cNvSpPr/>
-          <p:nvPr/>
-        </p:nvSpPr>
-        <p:spPr>
-          <a:xfrm>
-            <a:off x="7437118" y="-4754880"/>
-            <a:ext cx="9509760" cy="9509760"/>
-          </a:xfrm>
-          <a:prstGeom prst="ellipse">
-            <a:avLst/>
-          </a:prstGeom>
-          <a:noFill/>
-          <a:ln w="15875">
-            <a:solidFill>
-              <a:srgbClr val="C5C5C5"/>
-            </a:solidFill>
-          </a:ln>
-        </p:spPr>
-        <p:style>
-          <a:lnRef idx="1">
-            <a:schemeClr val="accent1"/>
-          </a:lnRef>
-          <a:fillRef idx="3">
-            <a:schemeClr val="accent1"/>
-          </a:fillRef>
-          <a:effectRef idx="2">
-            <a:schemeClr val="accent1"/>
-          </a:effectRef>
-          <a:fontRef idx="minor">
-            <a:schemeClr val="lt1"/>
-          </a:fontRef>
-        </p:style>
-        <p:txBody>
-          <a:bodyPr rtlCol="0" anchor="ctr"/>
-          <a:lstStyle/>
-          <a:p>
-            <a:pPr algn="ctr"/>
-          </a:p>
-        </p:txBody>
-      </p:sp>
-      <p:sp>
-        <p:nvSpPr>
-          <p:cNvPr id="2147483660" name="Oval 2147483660"/>
-          <p:cNvSpPr/>
-          <p:nvPr/>
-        </p:nvSpPr>
-        <p:spPr>
-          <a:xfrm>
-            <a:off x="8534399" y="-3657600"/>
-            <a:ext cx="7315200" cy="7315200"/>
-          </a:xfrm>
-          <a:prstGeom prst="ellipse">
-            <a:avLst/>
-          </a:prstGeom>
-          <a:noFill/>
-          <a:ln w="19050">
-            <a:solidFill>
-              <a:srgbClr val="BBBBBB"/>
-            </a:solidFill>
-          </a:ln>
-        </p:spPr>
-        <p:style>
-          <a:lnRef idx="1">
-            <a:schemeClr val="accent1"/>
-          </a:lnRef>
-          <a:fillRef idx="3">
-            <a:schemeClr val="accent1"/>
-          </a:fillRef>
-          <a:effectRef idx="2">
-            <a:schemeClr val="accent1"/>
-          </a:effectRef>
-          <a:fontRef idx="minor">
-            <a:schemeClr val="lt1"/>
-          </a:fontRef>
-        </p:style>
-        <p:txBody>
-          <a:bodyPr rtlCol="0" anchor="ctr"/>
-          <a:lstStyle/>
-          <a:p>
-            <a:pPr algn="ctr"/>
-          </a:p>
-        </p:txBody>
-      </p:sp>
-      <p:sp>
-        <p:nvSpPr>
-          <p:cNvPr id="2" name="Title Placeholder 1"/>
-          <p:cNvSpPr>
-            <a:spLocks noGrp="1"/>
-          </p:cNvSpPr>
-          <p:nvPr>
-            <p:ph type="title"/>
-          </p:nvPr>
-        </p:nvSpPr>
-        <p:spPr>
-          <a:xfrm>
-            <a:off x="457200" y="274638"/>
-            <a:ext cx="8229600" cy="1143000"/>
+            <a:off x="226423" y="218737"/>
+            <a:ext cx="11730445" cy="645196"/>
           </a:xfrm>
           <a:prstGeom prst="rect">
             <a:avLst/>
@@ -3394,10 +3437,9 @@
           <a:lstStyle/>
           <a:p>
             <a:r>
-              <a:rPr lang="en-US" smtClean="0"/>
+              <a:rPr lang="en-US" dirty="0"/>
               <a:t>Click to edit Master title style</a:t>
             </a:r>
-            <a:endParaRPr lang="en-US"/>
           </a:p>
         </p:txBody>
       </p:sp>
@@ -3413,8 +3455,8 @@
         </p:nvSpPr>
         <p:spPr>
           <a:xfrm>
-            <a:off x="457200" y="1600200"/>
-            <a:ext cx="8229600" cy="4525963"/>
+            <a:off x="226423" y="1095103"/>
+            <a:ext cx="11730444" cy="5035731"/>
           </a:xfrm>
           <a:prstGeom prst="rect">
             <a:avLst/>
@@ -3428,38 +3470,37 @@
           <a:p>
             <a:pPr lvl="0"/>
             <a:r>
-              <a:rPr lang="en-US" smtClean="0"/>
+              <a:rPr lang="en-US" dirty="0"/>
               <a:t>Click to edit Master text styles</a:t>
             </a:r>
           </a:p>
           <a:p>
             <a:pPr lvl="1"/>
             <a:r>
-              <a:rPr lang="en-US" smtClean="0"/>
+              <a:rPr lang="en-US" dirty="0"/>
               <a:t>Second level</a:t>
             </a:r>
           </a:p>
           <a:p>
             <a:pPr lvl="2"/>
             <a:r>
-              <a:rPr lang="en-US" smtClean="0"/>
+              <a:rPr lang="en-US" dirty="0"/>
               <a:t>Third level</a:t>
             </a:r>
           </a:p>
           <a:p>
             <a:pPr lvl="3"/>
             <a:r>
-              <a:rPr lang="en-US" smtClean="0"/>
+              <a:rPr lang="en-US" dirty="0"/>
               <a:t>Fourth level</a:t>
             </a:r>
           </a:p>
           <a:p>
             <a:pPr lvl="4"/>
             <a:r>
-              <a:rPr lang="en-US" smtClean="0"/>
+              <a:rPr lang="en-US" dirty="0"/>
               <a:t>Fifth level</a:t>
             </a:r>
-            <a:endParaRPr lang="en-US"/>
           </a:p>
         </p:txBody>
       </p:sp>
@@ -3475,7 +3516,7 @@
         </p:nvSpPr>
         <p:spPr>
           <a:xfrm>
-            <a:off x="457200" y="6356350"/>
+            <a:off x="161108" y="6356350"/>
             <a:ext cx="2133600" cy="365125"/>
           </a:xfrm>
           <a:prstGeom prst="rect">
@@ -3498,7 +3539,7 @@
           <a:p>
             <a:fld id="{5BCAD085-E8A6-8845-BD4E-CB4CCA059FC4}" type="datetimeFigureOut">
               <a:rPr lang="en-US" smtClean="0"/>
-              <a:t>1/27/13</a:t>
+              <a:t>5/3/26</a:t>
             </a:fld>
             <a:endParaRPr lang="en-US"/>
           </a:p>
@@ -3516,7 +3557,7 @@
         </p:nvSpPr>
         <p:spPr>
           <a:xfrm>
-            <a:off x="3124200" y="6356350"/>
+            <a:off x="4654730" y="6356350"/>
             <a:ext cx="2895600" cy="365125"/>
           </a:xfrm>
           <a:prstGeom prst="rect">
@@ -3537,7 +3578,7 @@
             </a:lvl1pPr>
           </a:lstStyle>
           <a:p>
-            <a:endParaRPr lang="en-US"/>
+            <a:endParaRPr lang="en-US" dirty="0"/>
           </a:p>
         </p:txBody>
       </p:sp>
@@ -3553,7 +3594,7 @@
         </p:nvSpPr>
         <p:spPr>
           <a:xfrm>
-            <a:off x="6553200" y="6356350"/>
+            <a:off x="9897292" y="6356350"/>
             <a:ext cx="2133600" cy="365125"/>
           </a:xfrm>
           <a:prstGeom prst="rect">
@@ -3605,12 +3646,12 @@
   </p:sldLayoutIdLst>
   <p:txStyles>
     <p:titleStyle>
-      <a:lvl1pPr algn="ctr" defTabSz="457200" rtl="0" eaLnBrk="1" latinLnBrk="0" hangingPunct="1">
+      <a:lvl1pPr algn="l" defTabSz="457200" rtl="0" eaLnBrk="1" latinLnBrk="0" hangingPunct="1">
         <a:spcBef>
           <a:spcPct val="0"/>
         </a:spcBef>
         <a:buNone/>
-        <a:defRPr sz="4400" kern="1200">
+        <a:defRPr sz="3200" kern="1200">
           <a:solidFill>
             <a:schemeClr val="tx1"/>
           </a:solidFill>
@@ -3625,9 +3666,9 @@
         <a:spcBef>
           <a:spcPct val="20000"/>
         </a:spcBef>
-        <a:buFont typeface="Arial"/>
+        <a:buFont typeface="Arial" panose="020B0604020202020204" pitchFamily="34" charset="0"/>
         <a:buChar char="•"/>
-        <a:defRPr sz="3200" kern="1200">
+        <a:defRPr sz="2400" kern="1200">
           <a:solidFill>
             <a:schemeClr val="tx1"/>
           </a:solidFill>
@@ -3642,7 +3683,7 @@
         </a:spcBef>
         <a:buFont typeface="Arial"/>
         <a:buChar char="–"/>
-        <a:defRPr sz="2800" kern="1200">
+        <a:defRPr sz="2000" kern="1200">
           <a:solidFill>
             <a:schemeClr val="tx1"/>
           </a:solidFill>
@@ -3657,7 +3698,7 @@
         </a:spcBef>
         <a:buFont typeface="Arial"/>
         <a:buChar char="•"/>
-        <a:defRPr sz="2400" kern="1200">
+        <a:defRPr sz="1800" kern="1200">
           <a:solidFill>
             <a:schemeClr val="tx1"/>
           </a:solidFill>
@@ -3672,7 +3713,7 @@
         </a:spcBef>
         <a:buFont typeface="Arial"/>
         <a:buChar char="–"/>
-        <a:defRPr sz="2000" kern="1200">
+        <a:defRPr sz="1600" kern="1200">
           <a:solidFill>
             <a:schemeClr val="tx1"/>
           </a:solidFill>
@@ -3687,7 +3728,7 @@
         </a:spcBef>
         <a:buFont typeface="Arial"/>
         <a:buChar char="»"/>
-        <a:defRPr sz="2000" kern="1200">
+        <a:defRPr sz="1600" kern="1200">
           <a:solidFill>
             <a:schemeClr val="tx1"/>
           </a:solidFill>
@@ -3897,76 +3938,16 @@
         <a:srgbClr val="800080"/>
       </a:folHlink>
     </a:clrScheme>
-    <a:fontScheme name="Office">
+    <a:fontScheme name="BIZ UDPGothic">
       <a:majorFont>
-        <a:latin typeface="Calibri"/>
-        <a:ea typeface=""/>
-        <a:cs typeface=""/>
-        <a:font script="Jpan" typeface="ＭＳ Ｐゴシック"/>
-        <a:font script="Hang" typeface="맑은 고딕"/>
-        <a:font script="Hans" typeface="宋体"/>
-        <a:font script="Hant" typeface="新細明體"/>
-        <a:font script="Arab" typeface="Times New Roman"/>
-        <a:font script="Hebr" typeface="Times New Roman"/>
-        <a:font script="Thai" typeface="Angsana New"/>
-        <a:font script="Ethi" typeface="Nyala"/>
-        <a:font script="Beng" typeface="Vrinda"/>
-        <a:font script="Gujr" typeface="Shruti"/>
-        <a:font script="Khmr" typeface="MoolBoran"/>
-        <a:font script="Knda" typeface="Tunga"/>
-        <a:font script="Guru" typeface="Raavi"/>
-        <a:font script="Cans" typeface="Euphemia"/>
-        <a:font script="Cher" typeface="Plantagenet Cherokee"/>
-        <a:font script="Yiii" typeface="Microsoft Yi Baiti"/>
-        <a:font script="Tibt" typeface="Microsoft Himalaya"/>
-        <a:font script="Thaa" typeface="MV Boli"/>
-        <a:font script="Deva" typeface="Mangal"/>
-        <a:font script="Telu" typeface="Gautami"/>
-        <a:font script="Taml" typeface="Latha"/>
-        <a:font script="Syrc" typeface="Estrangelo Edessa"/>
-        <a:font script="Orya" typeface="Kalinga"/>
-        <a:font script="Mlym" typeface="Kartika"/>
-        <a:font script="Laoo" typeface="DokChampa"/>
-        <a:font script="Sinh" typeface="Iskoola Pota"/>
-        <a:font script="Mong" typeface="Mongolian Baiti"/>
-        <a:font script="Viet" typeface="Times New Roman"/>
-        <a:font script="Uigh" typeface="Microsoft Uighur"/>
-        <a:font script="Geor" typeface="Sylfaen"/>
+        <a:latin typeface="BIZ UDPGothic"/>
+        <a:ea typeface="BIZ UDPGothic"/>
+        <a:cs typeface="BIZ UDPGothic"/>
       </a:majorFont>
       <a:minorFont>
-        <a:latin typeface="Calibri"/>
-        <a:ea typeface=""/>
-        <a:cs typeface=""/>
-        <a:font script="Jpan" typeface="ＭＳ Ｐゴシック"/>
-        <a:font script="Hang" typeface="맑은 고딕"/>
-        <a:font script="Hans" typeface="宋体"/>
-        <a:font script="Hant" typeface="新細明體"/>
-        <a:font script="Arab" typeface="Arial"/>
-        <a:font script="Hebr" typeface="Arial"/>
-        <a:font script="Thai" typeface="Cordia New"/>
-        <a:font script="Ethi" typeface="Nyala"/>
-        <a:font script="Beng" typeface="Vrinda"/>
-        <a:font script="Gujr" typeface="Shruti"/>
-        <a:font script="Khmr" typeface="DaunPenh"/>
-        <a:font script="Knda" typeface="Tunga"/>
-        <a:font script="Guru" typeface="Raavi"/>
-        <a:font script="Cans" typeface="Euphemia"/>
-        <a:font script="Cher" typeface="Plantagenet Cherokee"/>
-        <a:font script="Yiii" typeface="Microsoft Yi Baiti"/>
-        <a:font script="Tibt" typeface="Microsoft Himalaya"/>
-        <a:font script="Thaa" typeface="MV Boli"/>
-        <a:font script="Deva" typeface="Mangal"/>
-        <a:font script="Telu" typeface="Gautami"/>
-        <a:font script="Taml" typeface="Latha"/>
-        <a:font script="Syrc" typeface="Estrangelo Edessa"/>
-        <a:font script="Orya" typeface="Kalinga"/>
-        <a:font script="Mlym" typeface="Kartika"/>
-        <a:font script="Laoo" typeface="DokChampa"/>
-        <a:font script="Sinh" typeface="Iskoola Pota"/>
-        <a:font script="Mong" typeface="Mongolian Baiti"/>
-        <a:font script="Viet" typeface="Arial"/>
-        <a:font script="Uigh" typeface="Microsoft Uighur"/>
-        <a:font script="Geor" typeface="Sylfaen"/>
+        <a:latin typeface="BIZ UDPGothic"/>
+        <a:ea typeface="BIZ UDPGothic"/>
+        <a:cs typeface="BIZ UDPGothic"/>
       </a:minorFont>
     </a:fontScheme>
     <a:fmtScheme name="Office">

--- a/templates/default.pptx
+++ b/templates/default.pptx
@@ -121,7 +121,7 @@
 </file>
 
 <file path=ppt/slideLayouts/slideLayout1.xml><?xml version="1.0" encoding="utf-8"?>
-<p:sldLayout xmlns:a="http://schemas.openxmlformats.org/drawingml/2006/main" xmlns:r="http://schemas.openxmlformats.org/officeDocument/2006/relationships" xmlns:p="http://schemas.openxmlformats.org/presentationml/2006/main" preserve="1" userDrawn="1">
+<p:sldLayout xmlns:a="http://schemas.openxmlformats.org/drawingml/2006/main" xmlns:r="http://schemas.openxmlformats.org/officeDocument/2006/relationships" xmlns:p="http://schemas.openxmlformats.org/presentationml/2006/main" preserve="1" userDrawn="1" type="cust">
   <p:cSld name="Title Slide">
     <p:bg>
       <p:bgPr>
@@ -145,6 +145,93 @@
           <a:chExt cx="0" cy="0"/>
         </a:xfrm>
       </p:grpSpPr>
+      <p:sp>
+        <p:nvSpPr>
+          <p:cNvPr id="200" name="deco_top_bar"/>
+          <p:cNvSpPr>
+            <a:spLocks noGrp="1"/>
+          </p:cNvSpPr>
+          <p:nvPr/>
+        </p:nvSpPr>
+        <p:spPr>
+          <a:xfrm>
+            <a:off x="0" y="0"/>
+            <a:ext cx="12192000" cy="1885950"/>
+          </a:xfrm>
+          <a:prstGeom prst="rect">
+            <a:avLst/>
+          </a:prstGeom>
+          <a:solidFill>
+            <a:srgbClr val="1C3557"/>
+          </a:solidFill>
+          <a:ln>
+            <a:noFill/>
+          </a:ln>
+        </p:spPr>
+        <p:txBody>
+          <a:bodyPr/>
+          <a:lstStyle/>
+          <a:p/>
+        </p:txBody>
+      </p:sp>
+      <p:sp>
+        <p:nvSpPr>
+          <p:cNvPr id="201" name="deco_accent_line"/>
+          <p:cNvSpPr>
+            <a:spLocks noGrp="1"/>
+          </p:cNvSpPr>
+          <p:nvPr/>
+        </p:nvSpPr>
+        <p:spPr>
+          <a:xfrm>
+            <a:off x="0" y="1831086"/>
+            <a:ext cx="12192000" cy="109728"/>
+          </a:xfrm>
+          <a:prstGeom prst="rect">
+            <a:avLst/>
+          </a:prstGeom>
+          <a:solidFill>
+            <a:srgbClr val="E8763A"/>
+          </a:solidFill>
+          <a:ln>
+            <a:noFill/>
+          </a:ln>
+        </p:spPr>
+        <p:txBody>
+          <a:bodyPr/>
+          <a:lstStyle/>
+          <a:p/>
+        </p:txBody>
+      </p:sp>
+      <p:sp>
+        <p:nvSpPr>
+          <p:cNvPr id="202" name="deco_footer_bar"/>
+          <p:cNvSpPr>
+            <a:spLocks noGrp="1"/>
+          </p:cNvSpPr>
+          <p:nvPr/>
+        </p:nvSpPr>
+        <p:spPr>
+          <a:xfrm>
+            <a:off x="0" y="5966460"/>
+            <a:ext cx="12192000" cy="891540"/>
+          </a:xfrm>
+          <a:prstGeom prst="rect">
+            <a:avLst/>
+          </a:prstGeom>
+          <a:solidFill>
+            <a:srgbClr val="1C3557"/>
+          </a:solidFill>
+          <a:ln>
+            <a:noFill/>
+          </a:ln>
+        </p:spPr>
+        <p:txBody>
+          <a:bodyPr/>
+          <a:lstStyle/>
+          <a:p/>
+        </p:txBody>
+      </p:sp>
       <p:sp>
         <p:nvSpPr>
           <p:cNvPr id="3" name="Subtitle 2"/>
@@ -426,6 +513,267 @@
       </p:grpSpPr>
       <p:sp>
         <p:nvSpPr>
+          <p:cNvPr id="200" name="deco_h_card1_bg"/>
+          <p:cNvSpPr>
+            <a:spLocks noGrp="1"/>
+          </p:cNvSpPr>
+          <p:nvPr/>
+        </p:nvSpPr>
+        <p:spPr>
+          <a:xfrm>
+            <a:off x="365760" y="980694"/>
+            <a:ext cx="3474720" cy="5472684"/>
+          </a:xfrm>
+          <a:prstGeom prst="rect">
+            <a:avLst/>
+          </a:prstGeom>
+          <a:solidFill>
+            <a:srgbClr val="E8F2FB"/>
+          </a:solidFill>
+          <a:ln>
+            <a:noFill/>
+          </a:ln>
+        </p:spPr>
+        <p:txBody>
+          <a:bodyPr/>
+          <a:lstStyle/>
+          <a:p/>
+        </p:txBody>
+      </p:sp>
+      <p:sp>
+        <p:nvSpPr>
+          <p:cNvPr id="201" name="deco_h_card1_hdr"/>
+          <p:cNvSpPr>
+            <a:spLocks noGrp="1"/>
+          </p:cNvSpPr>
+          <p:nvPr/>
+        </p:nvSpPr>
+        <p:spPr>
+          <a:xfrm>
+            <a:off x="365760" y="980694"/>
+            <a:ext cx="3474720" cy="1028700"/>
+          </a:xfrm>
+          <a:prstGeom prst="rect">
+            <a:avLst/>
+          </a:prstGeom>
+          <a:solidFill>
+            <a:srgbClr val="1C3557"/>
+          </a:solidFill>
+          <a:ln>
+            <a:noFill/>
+          </a:ln>
+        </p:spPr>
+        <p:txBody>
+          <a:bodyPr/>
+          <a:lstStyle/>
+          <a:p/>
+        </p:txBody>
+      </p:sp>
+      <p:sp>
+        <p:nvSpPr>
+          <p:cNvPr id="202" name="deco_h_card1_acc"/>
+          <p:cNvSpPr>
+            <a:spLocks noGrp="1"/>
+          </p:cNvSpPr>
+          <p:nvPr/>
+        </p:nvSpPr>
+        <p:spPr>
+          <a:xfrm>
+            <a:off x="365760" y="980694"/>
+            <a:ext cx="3474720" cy="48006"/>
+          </a:xfrm>
+          <a:prstGeom prst="rect">
+            <a:avLst/>
+          </a:prstGeom>
+          <a:solidFill>
+            <a:srgbClr val="E8763A"/>
+          </a:solidFill>
+          <a:ln>
+            <a:noFill/>
+          </a:ln>
+        </p:spPr>
+        <p:txBody>
+          <a:bodyPr/>
+          <a:lstStyle/>
+          <a:p/>
+        </p:txBody>
+      </p:sp>
+      <p:sp>
+        <p:nvSpPr>
+          <p:cNvPr id="203" name="deco_h_card2_bg"/>
+          <p:cNvSpPr>
+            <a:spLocks noGrp="1"/>
+          </p:cNvSpPr>
+          <p:nvPr/>
+        </p:nvSpPr>
+        <p:spPr>
+          <a:xfrm>
+            <a:off x="4364736" y="980694"/>
+            <a:ext cx="3474720" cy="5472684"/>
+          </a:xfrm>
+          <a:prstGeom prst="rect">
+            <a:avLst/>
+          </a:prstGeom>
+          <a:solidFill>
+            <a:srgbClr val="E8F2FB"/>
+          </a:solidFill>
+          <a:ln>
+            <a:noFill/>
+          </a:ln>
+        </p:spPr>
+        <p:txBody>
+          <a:bodyPr/>
+          <a:lstStyle/>
+          <a:p/>
+        </p:txBody>
+      </p:sp>
+      <p:sp>
+        <p:nvSpPr>
+          <p:cNvPr id="204" name="deco_h_card2_hdr"/>
+          <p:cNvSpPr>
+            <a:spLocks noGrp="1"/>
+          </p:cNvSpPr>
+          <p:nvPr/>
+        </p:nvSpPr>
+        <p:spPr>
+          <a:xfrm>
+            <a:off x="4364736" y="980694"/>
+            <a:ext cx="3474720" cy="1028700"/>
+          </a:xfrm>
+          <a:prstGeom prst="rect">
+            <a:avLst/>
+          </a:prstGeom>
+          <a:solidFill>
+            <a:srgbClr val="1C3557"/>
+          </a:solidFill>
+          <a:ln>
+            <a:noFill/>
+          </a:ln>
+        </p:spPr>
+        <p:txBody>
+          <a:bodyPr/>
+          <a:lstStyle/>
+          <a:p/>
+        </p:txBody>
+      </p:sp>
+      <p:sp>
+        <p:nvSpPr>
+          <p:cNvPr id="205" name="deco_h_card2_acc"/>
+          <p:cNvSpPr>
+            <a:spLocks noGrp="1"/>
+          </p:cNvSpPr>
+          <p:nvPr/>
+        </p:nvSpPr>
+        <p:spPr>
+          <a:xfrm>
+            <a:off x="4364736" y="980694"/>
+            <a:ext cx="3474720" cy="48006"/>
+          </a:xfrm>
+          <a:prstGeom prst="rect">
+            <a:avLst/>
+          </a:prstGeom>
+          <a:solidFill>
+            <a:srgbClr val="E8763A"/>
+          </a:solidFill>
+          <a:ln>
+            <a:noFill/>
+          </a:ln>
+        </p:spPr>
+        <p:txBody>
+          <a:bodyPr/>
+          <a:lstStyle/>
+          <a:p/>
+        </p:txBody>
+      </p:sp>
+      <p:sp>
+        <p:nvSpPr>
+          <p:cNvPr id="206" name="deco_h_card3_bg"/>
+          <p:cNvSpPr>
+            <a:spLocks noGrp="1"/>
+          </p:cNvSpPr>
+          <p:nvPr/>
+        </p:nvSpPr>
+        <p:spPr>
+          <a:xfrm>
+            <a:off x="8351520" y="980694"/>
+            <a:ext cx="3474720" cy="5472684"/>
+          </a:xfrm>
+          <a:prstGeom prst="rect">
+            <a:avLst/>
+          </a:prstGeom>
+          <a:solidFill>
+            <a:srgbClr val="E8F2FB"/>
+          </a:solidFill>
+          <a:ln>
+            <a:noFill/>
+          </a:ln>
+        </p:spPr>
+        <p:txBody>
+          <a:bodyPr/>
+          <a:lstStyle/>
+          <a:p/>
+        </p:txBody>
+      </p:sp>
+      <p:sp>
+        <p:nvSpPr>
+          <p:cNvPr id="207" name="deco_h_card3_hdr"/>
+          <p:cNvSpPr>
+            <a:spLocks noGrp="1"/>
+          </p:cNvSpPr>
+          <p:nvPr/>
+        </p:nvSpPr>
+        <p:spPr>
+          <a:xfrm>
+            <a:off x="8351520" y="980694"/>
+            <a:ext cx="3474720" cy="1028700"/>
+          </a:xfrm>
+          <a:prstGeom prst="rect">
+            <a:avLst/>
+          </a:prstGeom>
+          <a:solidFill>
+            <a:srgbClr val="1C3557"/>
+          </a:solidFill>
+          <a:ln>
+            <a:noFill/>
+          </a:ln>
+        </p:spPr>
+        <p:txBody>
+          <a:bodyPr/>
+          <a:lstStyle/>
+          <a:p/>
+        </p:txBody>
+      </p:sp>
+      <p:sp>
+        <p:nvSpPr>
+          <p:cNvPr id="208" name="deco_h_card3_acc"/>
+          <p:cNvSpPr>
+            <a:spLocks noGrp="1"/>
+          </p:cNvSpPr>
+          <p:nvPr/>
+        </p:nvSpPr>
+        <p:spPr>
+          <a:xfrm>
+            <a:off x="8351520" y="980694"/>
+            <a:ext cx="3474720" cy="48006"/>
+          </a:xfrm>
+          <a:prstGeom prst="rect">
+            <a:avLst/>
+          </a:prstGeom>
+          <a:solidFill>
+            <a:srgbClr val="E8763A"/>
+          </a:solidFill>
+          <a:ln>
+            <a:noFill/>
+          </a:ln>
+        </p:spPr>
+        <p:txBody>
+          <a:bodyPr/>
+          <a:lstStyle/>
+          <a:p/>
+        </p:txBody>
+      </p:sp>
+      <p:sp>
+        <p:nvSpPr>
           <p:cNvPr id="8" name="タイトル 7">
             <a:extLst>
               <a:ext uri="{FF2B5EF4-FFF2-40B4-BE49-F238E27FC236}">
@@ -542,7 +890,7 @@
       </p:sp>
       <p:sp>
         <p:nvSpPr>
-          <p:cNvPr id="13" name="コンテンツ プレースホルダー 12">
+          <p:cNvPr id="13" name="slot__card_1_combined_text">
             <a:extLst>
               <a:ext uri="{FF2B5EF4-FFF2-40B4-BE49-F238E27FC236}">
                 <a16:creationId xmlns:a16="http://schemas.microsoft.com/office/drawing/2014/main" id="{23D794FD-7998-B263-7A33-0D9A529D97EE}"/>
@@ -553,13 +901,13 @@
             <a:spLocks noGrp="1"/>
           </p:cNvSpPr>
           <p:nvPr>
-            <p:ph sz="quarter" idx="13"/>
-          </p:nvPr>
-        </p:nvSpPr>
-        <p:spPr>
-          <a:xfrm>
-            <a:off x="231648" y="1117854"/>
-            <a:ext cx="3755136" cy="5013198"/>
+            <p:ph sz="quarter" idx="13" type="obj"/>
+          </p:nvPr>
+        </p:nvSpPr>
+        <p:spPr>
+          <a:xfrm>
+            <a:off x="463296" y="2064258"/>
+            <a:ext cx="3279648" cy="4389120"/>
           </a:xfrm>
         </p:spPr>
         <p:txBody>
@@ -636,7 +984,7 @@
       </p:sp>
       <p:sp>
         <p:nvSpPr>
-          <p:cNvPr id="15" name="コンテンツ プレースホルダー 14">
+          <p:cNvPr id="15" name="slot__card_2_combined_text">
             <a:extLst>
               <a:ext uri="{FF2B5EF4-FFF2-40B4-BE49-F238E27FC236}">
                 <a16:creationId xmlns:a16="http://schemas.microsoft.com/office/drawing/2014/main" id="{CE5D3923-D828-BFFF-25F1-02538CEB89C0}"/>
@@ -647,13 +995,13 @@
             <a:spLocks noGrp="1"/>
           </p:cNvSpPr>
           <p:nvPr>
-            <p:ph sz="quarter" idx="14"/>
-          </p:nvPr>
-        </p:nvSpPr>
-        <p:spPr>
-          <a:xfrm>
-            <a:off x="4218432" y="1117854"/>
-            <a:ext cx="3755136" cy="5013198"/>
+            <p:ph sz="quarter" idx="14" type="obj"/>
+          </p:nvPr>
+        </p:nvSpPr>
+        <p:spPr>
+          <a:xfrm>
+            <a:off x="4462272" y="2064258"/>
+            <a:ext cx="3279648" cy="4389120"/>
           </a:xfrm>
         </p:spPr>
         <p:txBody>
@@ -730,7 +1078,7 @@
       </p:sp>
       <p:sp>
         <p:nvSpPr>
-          <p:cNvPr id="16" name="コンテンツ プレースホルダー 16">
+          <p:cNvPr id="16" name="slot__card_3_combined_text">
             <a:extLst>
               <a:ext uri="{FF2B5EF4-FFF2-40B4-BE49-F238E27FC236}">
                 <a16:creationId xmlns:a16="http://schemas.microsoft.com/office/drawing/2014/main" id="{CE5D3923-D828-BFFF-25F1-02538CEB89C0}"/>
@@ -741,13 +1089,13 @@
             <a:spLocks noGrp="1"/>
           </p:cNvSpPr>
           <p:nvPr>
-            <p:ph sz="quarter" idx="15"/>
-          </p:nvPr>
-        </p:nvSpPr>
-        <p:spPr>
-          <a:xfrm>
-            <a:off x="8205216" y="1117854"/>
-            <a:ext cx="3755136" cy="5013198"/>
+            <p:ph sz="quarter" idx="15" type="obj"/>
+          </p:nvPr>
+        </p:nvSpPr>
+        <p:spPr>
+          <a:xfrm>
+            <a:off x="8449056" y="2064258"/>
+            <a:ext cx="3279648" cy="4389120"/>
           </a:xfrm>
         </p:spPr>
         <p:txBody>
@@ -819,6 +1167,204 @@
               <a:rPr kumimoji="1" lang="ja-JP" altLang="en-US"/>
               <a:t>レベル</a:t>
             </a:r>
+          </a:p>
+        </p:txBody>
+      </p:sp>
+      <p:sp>
+        <p:nvSpPr>
+          <p:cNvPr id="17" name="slot__card_1_icon"/>
+          <p:cNvSpPr>
+            <a:spLocks noGrp="1"/>
+          </p:cNvSpPr>
+          <p:nvPr>
+            <p:ph type="pic" idx="16"/>
+          </p:nvPr>
+        </p:nvSpPr>
+        <p:spPr>
+          <a:xfrm>
+            <a:off x="1493520" y="1117854"/>
+            <a:ext cx="1219200" cy="754380"/>
+          </a:xfrm>
+          <a:noFill/>
+          <a:ln>
+            <a:noFill/>
+          </a:ln>
+        </p:spPr>
+        <p:txBody>
+          <a:bodyPr wrap="square" lIns="0" tIns="0" rIns="0" bIns="0" anchor="t"/>
+          <a:lstStyle>
+            <a:lvl1pPr marL="0" indent="0">
+              <a:buNone/>
+              <a:defRPr sz="3200"/>
+            </a:lvl1pPr>
+            <a:lvl2pPr marL="457200" indent="0">
+              <a:buNone/>
+              <a:defRPr sz="2800"/>
+            </a:lvl2pPr>
+            <a:lvl3pPr marL="914400" indent="0">
+              <a:buNone/>
+              <a:defRPr sz="2400"/>
+            </a:lvl3pPr>
+            <a:lvl4pPr marL="1371600" indent="0">
+              <a:buNone/>
+              <a:defRPr sz="2000"/>
+            </a:lvl4pPr>
+            <a:lvl5pPr marL="1828800" indent="0">
+              <a:buNone/>
+              <a:defRPr sz="2000"/>
+            </a:lvl5pPr>
+            <a:lvl6pPr marL="2286000" indent="0">
+              <a:buNone/>
+              <a:defRPr sz="2000"/>
+            </a:lvl6pPr>
+            <a:lvl7pPr marL="2743200" indent="0">
+              <a:buNone/>
+              <a:defRPr sz="2000"/>
+            </a:lvl7pPr>
+            <a:lvl8pPr marL="3200400" indent="0">
+              <a:buNone/>
+              <a:defRPr sz="2000"/>
+            </a:lvl8pPr>
+            <a:lvl9pPr marL="3657600" indent="0">
+              <a:buNone/>
+              <a:defRPr sz="2000"/>
+            </a:lvl9pPr>
+          </a:lstStyle>
+          <a:p>
+            <a:pPr algn="l"/>
+            <a:endParaRPr lang="en-US"/>
+          </a:p>
+        </p:txBody>
+      </p:sp>
+      <p:sp>
+        <p:nvSpPr>
+          <p:cNvPr id="18" name="slot__card_2_icon"/>
+          <p:cNvSpPr>
+            <a:spLocks noGrp="1"/>
+          </p:cNvSpPr>
+          <p:nvPr>
+            <p:ph type="pic" idx="17"/>
+          </p:nvPr>
+        </p:nvSpPr>
+        <p:spPr>
+          <a:xfrm>
+            <a:off x="5492496" y="1117854"/>
+            <a:ext cx="1219200" cy="754380"/>
+          </a:xfrm>
+          <a:noFill/>
+          <a:ln>
+            <a:noFill/>
+          </a:ln>
+        </p:spPr>
+        <p:txBody>
+          <a:bodyPr wrap="square" lIns="0" tIns="0" rIns="0" bIns="0" anchor="t"/>
+          <a:lstStyle>
+            <a:lvl1pPr marL="0" indent="0">
+              <a:buNone/>
+              <a:defRPr sz="3200"/>
+            </a:lvl1pPr>
+            <a:lvl2pPr marL="457200" indent="0">
+              <a:buNone/>
+              <a:defRPr sz="2800"/>
+            </a:lvl2pPr>
+            <a:lvl3pPr marL="914400" indent="0">
+              <a:buNone/>
+              <a:defRPr sz="2400"/>
+            </a:lvl3pPr>
+            <a:lvl4pPr marL="1371600" indent="0">
+              <a:buNone/>
+              <a:defRPr sz="2000"/>
+            </a:lvl4pPr>
+            <a:lvl5pPr marL="1828800" indent="0">
+              <a:buNone/>
+              <a:defRPr sz="2000"/>
+            </a:lvl5pPr>
+            <a:lvl6pPr marL="2286000" indent="0">
+              <a:buNone/>
+              <a:defRPr sz="2000"/>
+            </a:lvl6pPr>
+            <a:lvl7pPr marL="2743200" indent="0">
+              <a:buNone/>
+              <a:defRPr sz="2000"/>
+            </a:lvl7pPr>
+            <a:lvl8pPr marL="3200400" indent="0">
+              <a:buNone/>
+              <a:defRPr sz="2000"/>
+            </a:lvl8pPr>
+            <a:lvl9pPr marL="3657600" indent="0">
+              <a:buNone/>
+              <a:defRPr sz="2000"/>
+            </a:lvl9pPr>
+          </a:lstStyle>
+          <a:p>
+            <a:pPr algn="l"/>
+            <a:endParaRPr lang="en-US"/>
+          </a:p>
+        </p:txBody>
+      </p:sp>
+      <p:sp>
+        <p:nvSpPr>
+          <p:cNvPr id="19" name="slot__card_3_icon"/>
+          <p:cNvSpPr>
+            <a:spLocks noGrp="1"/>
+          </p:cNvSpPr>
+          <p:nvPr>
+            <p:ph type="pic" idx="18"/>
+          </p:nvPr>
+        </p:nvSpPr>
+        <p:spPr>
+          <a:xfrm>
+            <a:off x="9479280" y="1117854"/>
+            <a:ext cx="1219200" cy="754380"/>
+          </a:xfrm>
+          <a:noFill/>
+          <a:ln>
+            <a:noFill/>
+          </a:ln>
+        </p:spPr>
+        <p:txBody>
+          <a:bodyPr wrap="square" lIns="0" tIns="0" rIns="0" bIns="0" anchor="t"/>
+          <a:lstStyle>
+            <a:lvl1pPr marL="0" indent="0">
+              <a:buNone/>
+              <a:defRPr sz="3200"/>
+            </a:lvl1pPr>
+            <a:lvl2pPr marL="457200" indent="0">
+              <a:buNone/>
+              <a:defRPr sz="2800"/>
+            </a:lvl2pPr>
+            <a:lvl3pPr marL="914400" indent="0">
+              <a:buNone/>
+              <a:defRPr sz="2400"/>
+            </a:lvl3pPr>
+            <a:lvl4pPr marL="1371600" indent="0">
+              <a:buNone/>
+              <a:defRPr sz="2000"/>
+            </a:lvl4pPr>
+            <a:lvl5pPr marL="1828800" indent="0">
+              <a:buNone/>
+              <a:defRPr sz="2000"/>
+            </a:lvl5pPr>
+            <a:lvl6pPr marL="2286000" indent="0">
+              <a:buNone/>
+              <a:defRPr sz="2000"/>
+            </a:lvl6pPr>
+            <a:lvl7pPr marL="2743200" indent="0">
+              <a:buNone/>
+              <a:defRPr sz="2000"/>
+            </a:lvl7pPr>
+            <a:lvl8pPr marL="3200400" indent="0">
+              <a:buNone/>
+              <a:defRPr sz="2000"/>
+            </a:lvl8pPr>
+            <a:lvl9pPr marL="3657600" indent="0">
+              <a:buNone/>
+              <a:defRPr sz="2000"/>
+            </a:lvl9pPr>
+          </a:lstStyle>
+          <a:p>
+            <a:pPr algn="l"/>
+            <a:endParaRPr lang="en-US"/>
           </a:p>
         </p:txBody>
       </p:sp>
@@ -862,6 +1408,180 @@
       </p:grpSpPr>
       <p:sp>
         <p:nvSpPr>
+          <p:cNvPr id="200" name="deco_v_strip1_bg"/>
+          <p:cNvSpPr>
+            <a:spLocks noGrp="1"/>
+          </p:cNvSpPr>
+          <p:nvPr/>
+        </p:nvSpPr>
+        <p:spPr>
+          <a:xfrm>
+            <a:off x="243840" y="1014984"/>
+            <a:ext cx="11704320" cy="1536192"/>
+          </a:xfrm>
+          <a:prstGeom prst="rect">
+            <a:avLst/>
+          </a:prstGeom>
+          <a:solidFill>
+            <a:srgbClr val="E8F2FB"/>
+          </a:solidFill>
+          <a:ln>
+            <a:noFill/>
+          </a:ln>
+        </p:spPr>
+        <p:txBody>
+          <a:bodyPr/>
+          <a:lstStyle/>
+          <a:p/>
+        </p:txBody>
+      </p:sp>
+      <p:sp>
+        <p:nvSpPr>
+          <p:cNvPr id="201" name="deco_v_strip1_bar"/>
+          <p:cNvSpPr>
+            <a:spLocks noGrp="1"/>
+          </p:cNvSpPr>
+          <p:nvPr/>
+        </p:nvSpPr>
+        <p:spPr>
+          <a:xfrm>
+            <a:off x="243840" y="1014984"/>
+            <a:ext cx="121920" cy="1536192"/>
+          </a:xfrm>
+          <a:prstGeom prst="rect">
+            <a:avLst/>
+          </a:prstGeom>
+          <a:solidFill>
+            <a:srgbClr val="1C3557"/>
+          </a:solidFill>
+          <a:ln>
+            <a:noFill/>
+          </a:ln>
+        </p:spPr>
+        <p:txBody>
+          <a:bodyPr/>
+          <a:lstStyle/>
+          <a:p/>
+        </p:txBody>
+      </p:sp>
+      <p:sp>
+        <p:nvSpPr>
+          <p:cNvPr id="202" name="deco_v_strip2_bg"/>
+          <p:cNvSpPr>
+            <a:spLocks noGrp="1"/>
+          </p:cNvSpPr>
+          <p:nvPr/>
+        </p:nvSpPr>
+        <p:spPr>
+          <a:xfrm>
+            <a:off x="243840" y="2743200"/>
+            <a:ext cx="11704320" cy="1536192"/>
+          </a:xfrm>
+          <a:prstGeom prst="rect">
+            <a:avLst/>
+          </a:prstGeom>
+          <a:solidFill>
+            <a:srgbClr val="E8F2FB"/>
+          </a:solidFill>
+          <a:ln>
+            <a:noFill/>
+          </a:ln>
+        </p:spPr>
+        <p:txBody>
+          <a:bodyPr/>
+          <a:lstStyle/>
+          <a:p/>
+        </p:txBody>
+      </p:sp>
+      <p:sp>
+        <p:nvSpPr>
+          <p:cNvPr id="203" name="deco_v_strip2_bar"/>
+          <p:cNvSpPr>
+            <a:spLocks noGrp="1"/>
+          </p:cNvSpPr>
+          <p:nvPr/>
+        </p:nvSpPr>
+        <p:spPr>
+          <a:xfrm>
+            <a:off x="243840" y="2743200"/>
+            <a:ext cx="121920" cy="1536192"/>
+          </a:xfrm>
+          <a:prstGeom prst="rect">
+            <a:avLst/>
+          </a:prstGeom>
+          <a:solidFill>
+            <a:srgbClr val="1C3557"/>
+          </a:solidFill>
+          <a:ln>
+            <a:noFill/>
+          </a:ln>
+        </p:spPr>
+        <p:txBody>
+          <a:bodyPr/>
+          <a:lstStyle/>
+          <a:p/>
+        </p:txBody>
+      </p:sp>
+      <p:sp>
+        <p:nvSpPr>
+          <p:cNvPr id="204" name="deco_v_strip3_bg"/>
+          <p:cNvSpPr>
+            <a:spLocks noGrp="1"/>
+          </p:cNvSpPr>
+          <p:nvPr/>
+        </p:nvSpPr>
+        <p:spPr>
+          <a:xfrm>
+            <a:off x="243840" y="4471416"/>
+            <a:ext cx="11704320" cy="1536192"/>
+          </a:xfrm>
+          <a:prstGeom prst="rect">
+            <a:avLst/>
+          </a:prstGeom>
+          <a:solidFill>
+            <a:srgbClr val="E8F2FB"/>
+          </a:solidFill>
+          <a:ln>
+            <a:noFill/>
+          </a:ln>
+        </p:spPr>
+        <p:txBody>
+          <a:bodyPr/>
+          <a:lstStyle/>
+          <a:p/>
+        </p:txBody>
+      </p:sp>
+      <p:sp>
+        <p:nvSpPr>
+          <p:cNvPr id="205" name="deco_v_strip3_bar"/>
+          <p:cNvSpPr>
+            <a:spLocks noGrp="1"/>
+          </p:cNvSpPr>
+          <p:nvPr/>
+        </p:nvSpPr>
+        <p:spPr>
+          <a:xfrm>
+            <a:off x="243840" y="4471416"/>
+            <a:ext cx="121920" cy="1536192"/>
+          </a:xfrm>
+          <a:prstGeom prst="rect">
+            <a:avLst/>
+          </a:prstGeom>
+          <a:solidFill>
+            <a:srgbClr val="1C3557"/>
+          </a:solidFill>
+          <a:ln>
+            <a:noFill/>
+          </a:ln>
+        </p:spPr>
+        <p:txBody>
+          <a:bodyPr/>
+          <a:lstStyle/>
+          <a:p/>
+        </p:txBody>
+      </p:sp>
+      <p:sp>
+        <p:nvSpPr>
           <p:cNvPr id="8" name="タイトル 7">
             <a:extLst>
               <a:ext uri="{FF2B5EF4-FFF2-40B4-BE49-F238E27FC236}">
@@ -978,7 +1698,7 @@
       </p:sp>
       <p:sp>
         <p:nvSpPr>
-          <p:cNvPr id="13" name="コンテンツ プレースホルダー 12">
+          <p:cNvPr id="13" name="slot__card_1_combined_text">
             <a:extLst>
               <a:ext uri="{FF2B5EF4-FFF2-40B4-BE49-F238E27FC236}">
                 <a16:creationId xmlns:a16="http://schemas.microsoft.com/office/drawing/2014/main" id="{23D794FD-7998-B263-7A33-0D9A529D97EE}"/>
@@ -989,13 +1709,13 @@
             <a:spLocks noGrp="1"/>
           </p:cNvSpPr>
           <p:nvPr>
-            <p:ph sz="quarter" idx="13"/>
-          </p:nvPr>
-        </p:nvSpPr>
-        <p:spPr>
-          <a:xfrm>
-            <a:off x="231648" y="1117854"/>
-            <a:ext cx="11728704" cy="1467612"/>
+            <p:ph sz="quarter" idx="13" type="obj"/>
+          </p:nvPr>
+        </p:nvSpPr>
+        <p:spPr>
+          <a:xfrm>
+            <a:off x="1524000" y="1234440"/>
+            <a:ext cx="10302240" cy="1097280"/>
           </a:xfrm>
         </p:spPr>
         <p:txBody>
@@ -1072,7 +1792,7 @@
       </p:sp>
       <p:sp>
         <p:nvSpPr>
-          <p:cNvPr id="15" name="コンテンツ プレースホルダー 14">
+          <p:cNvPr id="15" name="slot__card_2_combined_text">
             <a:extLst>
               <a:ext uri="{FF2B5EF4-FFF2-40B4-BE49-F238E27FC236}">
                 <a16:creationId xmlns:a16="http://schemas.microsoft.com/office/drawing/2014/main" id="{CE5D3923-D828-BFFF-25F1-02538CEB89C0}"/>
@@ -1083,13 +1803,13 @@
             <a:spLocks noGrp="1"/>
           </p:cNvSpPr>
           <p:nvPr>
-            <p:ph sz="quarter" idx="14"/>
-          </p:nvPr>
-        </p:nvSpPr>
-        <p:spPr>
-          <a:xfrm>
-            <a:off x="231648" y="2887218"/>
-            <a:ext cx="11728704" cy="1467612"/>
+            <p:ph sz="quarter" idx="14" type="obj"/>
+          </p:nvPr>
+        </p:nvSpPr>
+        <p:spPr>
+          <a:xfrm>
+            <a:off x="1524000" y="2962656"/>
+            <a:ext cx="10302240" cy="1097280"/>
           </a:xfrm>
         </p:spPr>
         <p:txBody>
@@ -1166,7 +1886,7 @@
       </p:sp>
       <p:sp>
         <p:nvSpPr>
-          <p:cNvPr id="16" name="コンテンツ プレースホルダー 16">
+          <p:cNvPr id="16" name="slot__card_3_combined_text">
             <a:extLst>
               <a:ext uri="{FF2B5EF4-FFF2-40B4-BE49-F238E27FC236}">
                 <a16:creationId xmlns:a16="http://schemas.microsoft.com/office/drawing/2014/main" id="{CE5D3923-D828-BFFF-25F1-02538CEB89C0}"/>
@@ -1177,13 +1897,13 @@
             <a:spLocks noGrp="1"/>
           </p:cNvSpPr>
           <p:nvPr>
-            <p:ph sz="quarter" idx="15"/>
-          </p:nvPr>
-        </p:nvSpPr>
-        <p:spPr>
-          <a:xfrm>
-            <a:off x="231648" y="4656582"/>
-            <a:ext cx="11728704" cy="1467612"/>
+            <p:ph sz="quarter" idx="15" type="obj"/>
+          </p:nvPr>
+        </p:nvSpPr>
+        <p:spPr>
+          <a:xfrm>
+            <a:off x="1524000" y="4690872"/>
+            <a:ext cx="10302240" cy="1097280"/>
           </a:xfrm>
         </p:spPr>
         <p:txBody>
@@ -1255,6 +1975,204 @@
               <a:rPr kumimoji="1" lang="ja-JP" altLang="en-US"/>
               <a:t>レベル</a:t>
             </a:r>
+          </a:p>
+        </p:txBody>
+      </p:sp>
+      <p:sp>
+        <p:nvSpPr>
+          <p:cNvPr id="17" name="slot__card_1_icon"/>
+          <p:cNvSpPr>
+            <a:spLocks noGrp="1"/>
+          </p:cNvSpPr>
+          <p:nvPr>
+            <p:ph type="pic" idx="16"/>
+          </p:nvPr>
+        </p:nvSpPr>
+        <p:spPr>
+          <a:xfrm>
+            <a:off x="451104" y="1405890"/>
+            <a:ext cx="792480" cy="754380"/>
+          </a:xfrm>
+          <a:noFill/>
+          <a:ln>
+            <a:noFill/>
+          </a:ln>
+        </p:spPr>
+        <p:txBody>
+          <a:bodyPr wrap="square" lIns="0" tIns="0" rIns="0" bIns="0" anchor="t"/>
+          <a:lstStyle>
+            <a:lvl1pPr marL="0" indent="0">
+              <a:buNone/>
+              <a:defRPr sz="3200"/>
+            </a:lvl1pPr>
+            <a:lvl2pPr marL="457200" indent="0">
+              <a:buNone/>
+              <a:defRPr sz="2800"/>
+            </a:lvl2pPr>
+            <a:lvl3pPr marL="914400" indent="0">
+              <a:buNone/>
+              <a:defRPr sz="2400"/>
+            </a:lvl3pPr>
+            <a:lvl4pPr marL="1371600" indent="0">
+              <a:buNone/>
+              <a:defRPr sz="2000"/>
+            </a:lvl4pPr>
+            <a:lvl5pPr marL="1828800" indent="0">
+              <a:buNone/>
+              <a:defRPr sz="2000"/>
+            </a:lvl5pPr>
+            <a:lvl6pPr marL="2286000" indent="0">
+              <a:buNone/>
+              <a:defRPr sz="2000"/>
+            </a:lvl6pPr>
+            <a:lvl7pPr marL="2743200" indent="0">
+              <a:buNone/>
+              <a:defRPr sz="2000"/>
+            </a:lvl7pPr>
+            <a:lvl8pPr marL="3200400" indent="0">
+              <a:buNone/>
+              <a:defRPr sz="2000"/>
+            </a:lvl8pPr>
+            <a:lvl9pPr marL="3657600" indent="0">
+              <a:buNone/>
+              <a:defRPr sz="2000"/>
+            </a:lvl9pPr>
+          </a:lstStyle>
+          <a:p>
+            <a:pPr algn="l"/>
+            <a:endParaRPr lang="en-US"/>
+          </a:p>
+        </p:txBody>
+      </p:sp>
+      <p:sp>
+        <p:nvSpPr>
+          <p:cNvPr id="18" name="slot__card_2_icon"/>
+          <p:cNvSpPr>
+            <a:spLocks noGrp="1"/>
+          </p:cNvSpPr>
+          <p:nvPr>
+            <p:ph type="pic" idx="17"/>
+          </p:nvPr>
+        </p:nvSpPr>
+        <p:spPr>
+          <a:xfrm>
+            <a:off x="451104" y="3134106"/>
+            <a:ext cx="792480" cy="754380"/>
+          </a:xfrm>
+          <a:noFill/>
+          <a:ln>
+            <a:noFill/>
+          </a:ln>
+        </p:spPr>
+        <p:txBody>
+          <a:bodyPr wrap="square" lIns="0" tIns="0" rIns="0" bIns="0" anchor="t"/>
+          <a:lstStyle>
+            <a:lvl1pPr marL="0" indent="0">
+              <a:buNone/>
+              <a:defRPr sz="3200"/>
+            </a:lvl1pPr>
+            <a:lvl2pPr marL="457200" indent="0">
+              <a:buNone/>
+              <a:defRPr sz="2800"/>
+            </a:lvl2pPr>
+            <a:lvl3pPr marL="914400" indent="0">
+              <a:buNone/>
+              <a:defRPr sz="2400"/>
+            </a:lvl3pPr>
+            <a:lvl4pPr marL="1371600" indent="0">
+              <a:buNone/>
+              <a:defRPr sz="2000"/>
+            </a:lvl4pPr>
+            <a:lvl5pPr marL="1828800" indent="0">
+              <a:buNone/>
+              <a:defRPr sz="2000"/>
+            </a:lvl5pPr>
+            <a:lvl6pPr marL="2286000" indent="0">
+              <a:buNone/>
+              <a:defRPr sz="2000"/>
+            </a:lvl6pPr>
+            <a:lvl7pPr marL="2743200" indent="0">
+              <a:buNone/>
+              <a:defRPr sz="2000"/>
+            </a:lvl7pPr>
+            <a:lvl8pPr marL="3200400" indent="0">
+              <a:buNone/>
+              <a:defRPr sz="2000"/>
+            </a:lvl8pPr>
+            <a:lvl9pPr marL="3657600" indent="0">
+              <a:buNone/>
+              <a:defRPr sz="2000"/>
+            </a:lvl9pPr>
+          </a:lstStyle>
+          <a:p>
+            <a:pPr algn="l"/>
+            <a:endParaRPr lang="en-US"/>
+          </a:p>
+        </p:txBody>
+      </p:sp>
+      <p:sp>
+        <p:nvSpPr>
+          <p:cNvPr id="19" name="slot__card_3_icon"/>
+          <p:cNvSpPr>
+            <a:spLocks noGrp="1"/>
+          </p:cNvSpPr>
+          <p:nvPr>
+            <p:ph type="pic" idx="18"/>
+          </p:nvPr>
+        </p:nvSpPr>
+        <p:spPr>
+          <a:xfrm>
+            <a:off x="451104" y="4862322"/>
+            <a:ext cx="792480" cy="754380"/>
+          </a:xfrm>
+          <a:noFill/>
+          <a:ln>
+            <a:noFill/>
+          </a:ln>
+        </p:spPr>
+        <p:txBody>
+          <a:bodyPr wrap="square" lIns="0" tIns="0" rIns="0" bIns="0" anchor="t"/>
+          <a:lstStyle>
+            <a:lvl1pPr marL="0" indent="0">
+              <a:buNone/>
+              <a:defRPr sz="3200"/>
+            </a:lvl1pPr>
+            <a:lvl2pPr marL="457200" indent="0">
+              <a:buNone/>
+              <a:defRPr sz="2800"/>
+            </a:lvl2pPr>
+            <a:lvl3pPr marL="914400" indent="0">
+              <a:buNone/>
+              <a:defRPr sz="2400"/>
+            </a:lvl3pPr>
+            <a:lvl4pPr marL="1371600" indent="0">
+              <a:buNone/>
+              <a:defRPr sz="2000"/>
+            </a:lvl4pPr>
+            <a:lvl5pPr marL="1828800" indent="0">
+              <a:buNone/>
+              <a:defRPr sz="2000"/>
+            </a:lvl5pPr>
+            <a:lvl6pPr marL="2286000" indent="0">
+              <a:buNone/>
+              <a:defRPr sz="2000"/>
+            </a:lvl6pPr>
+            <a:lvl7pPr marL="2743200" indent="0">
+              <a:buNone/>
+              <a:defRPr sz="2000"/>
+            </a:lvl7pPr>
+            <a:lvl8pPr marL="3200400" indent="0">
+              <a:buNone/>
+              <a:defRPr sz="2000"/>
+            </a:lvl8pPr>
+            <a:lvl9pPr marL="3657600" indent="0">
+              <a:buNone/>
+              <a:defRPr sz="2000"/>
+            </a:lvl9pPr>
+          </a:lstStyle>
+          <a:p>
+            <a:pPr algn="l"/>
+            <a:endParaRPr lang="en-US"/>
           </a:p>
         </p:txBody>
       </p:sp>
@@ -1497,7 +2415,7 @@
 </file>
 
 <file path=ppt/slideLayouts/slideLayout3.xml><?xml version="1.0" encoding="utf-8"?>
-<p:sldLayout xmlns:a="http://schemas.openxmlformats.org/drawingml/2006/main" xmlns:r="http://schemas.openxmlformats.org/officeDocument/2006/relationships" xmlns:p="http://schemas.openxmlformats.org/presentationml/2006/main" preserve="1" userDrawn="1">
+<p:sldLayout xmlns:a="http://schemas.openxmlformats.org/drawingml/2006/main" xmlns:r="http://schemas.openxmlformats.org/officeDocument/2006/relationships" xmlns:p="http://schemas.openxmlformats.org/presentationml/2006/main" preserve="1" userDrawn="1" type="cust">
   <p:cSld name="Section Header">
     <p:bg>
       <p:bgPr>
@@ -1523,6 +2441,64 @@
       </p:grpSpPr>
       <p:sp>
         <p:nvSpPr>
+          <p:cNvPr id="200" name="deco_bg"/>
+          <p:cNvSpPr>
+            <a:spLocks noGrp="1"/>
+          </p:cNvSpPr>
+          <p:nvPr/>
+        </p:nvSpPr>
+        <p:spPr>
+          <a:xfrm>
+            <a:off x="0" y="0"/>
+            <a:ext cx="12192000" cy="6858000"/>
+          </a:xfrm>
+          <a:prstGeom prst="rect">
+            <a:avLst/>
+          </a:prstGeom>
+          <a:solidFill>
+            <a:srgbClr val="1C3557"/>
+          </a:solidFill>
+          <a:ln>
+            <a:noFill/>
+          </a:ln>
+        </p:spPr>
+        <p:txBody>
+          <a:bodyPr/>
+          <a:lstStyle/>
+          <a:p/>
+        </p:txBody>
+      </p:sp>
+      <p:sp>
+        <p:nvSpPr>
+          <p:cNvPr id="201" name="deco_accent_bar"/>
+          <p:cNvSpPr>
+            <a:spLocks noGrp="1"/>
+          </p:cNvSpPr>
+          <p:nvPr/>
+        </p:nvSpPr>
+        <p:spPr>
+          <a:xfrm>
+            <a:off x="499872" y="5349240"/>
+            <a:ext cx="2438400" cy="68580"/>
+          </a:xfrm>
+          <a:prstGeom prst="rect">
+            <a:avLst/>
+          </a:prstGeom>
+          <a:solidFill>
+            <a:srgbClr val="E8763A"/>
+          </a:solidFill>
+          <a:ln>
+            <a:noFill/>
+          </a:ln>
+        </p:spPr>
+        <p:txBody>
+          <a:bodyPr/>
+          <a:lstStyle/>
+          <a:p/>
+        </p:txBody>
+      </p:sp>
+      <p:sp>
+        <p:nvSpPr>
           <p:cNvPr id="3" name="Text Placeholder 2"/>
           <p:cNvSpPr>
             <a:spLocks noGrp="1"/>
@@ -1544,94 +2520,13 @@
         <p:txBody>
           <a:bodyPr wrap="square" lIns="0" tIns="0" rIns="0" bIns="0" anchor="t"/>
           <a:lstStyle>
-            <a:lvl1pPr marL="0" indent="0">
-              <a:buNone/>
-              <a:defRPr sz="1800">
+            <a:lvl1pPr>
+              <a:defRPr sz="2000">
                 <a:solidFill>
-                  <a:srgbClr val="444444"/>
+                  <a:srgbClr val="E8F2FB"/>
                 </a:solidFill>
               </a:defRPr>
             </a:lvl1pPr>
-            <a:lvl2pPr marL="457200" indent="0">
-              <a:buNone/>
-              <a:defRPr sz="1800">
-                <a:solidFill>
-                  <a:schemeClr val="tx1">
-                    <a:tint val="75000"/>
-                  </a:schemeClr>
-                </a:solidFill>
-              </a:defRPr>
-            </a:lvl2pPr>
-            <a:lvl3pPr marL="914400" indent="0">
-              <a:buNone/>
-              <a:defRPr sz="1600">
-                <a:solidFill>
-                  <a:schemeClr val="tx1">
-                    <a:tint val="75000"/>
-                  </a:schemeClr>
-                </a:solidFill>
-              </a:defRPr>
-            </a:lvl3pPr>
-            <a:lvl4pPr marL="1371600" indent="0">
-              <a:buNone/>
-              <a:defRPr sz="1400">
-                <a:solidFill>
-                  <a:schemeClr val="tx1">
-                    <a:tint val="75000"/>
-                  </a:schemeClr>
-                </a:solidFill>
-              </a:defRPr>
-            </a:lvl4pPr>
-            <a:lvl5pPr marL="1828800" indent="0">
-              <a:buNone/>
-              <a:defRPr sz="1400">
-                <a:solidFill>
-                  <a:schemeClr val="tx1">
-                    <a:tint val="75000"/>
-                  </a:schemeClr>
-                </a:solidFill>
-              </a:defRPr>
-            </a:lvl5pPr>
-            <a:lvl6pPr marL="2286000" indent="0">
-              <a:buNone/>
-              <a:defRPr sz="1400">
-                <a:solidFill>
-                  <a:schemeClr val="tx1">
-                    <a:tint val="75000"/>
-                  </a:schemeClr>
-                </a:solidFill>
-              </a:defRPr>
-            </a:lvl6pPr>
-            <a:lvl7pPr marL="2743200" indent="0">
-              <a:buNone/>
-              <a:defRPr sz="1400">
-                <a:solidFill>
-                  <a:schemeClr val="tx1">
-                    <a:tint val="75000"/>
-                  </a:schemeClr>
-                </a:solidFill>
-              </a:defRPr>
-            </a:lvl7pPr>
-            <a:lvl8pPr marL="3200400" indent="0">
-              <a:buNone/>
-              <a:defRPr sz="1400">
-                <a:solidFill>
-                  <a:schemeClr val="tx1">
-                    <a:tint val="75000"/>
-                  </a:schemeClr>
-                </a:solidFill>
-              </a:defRPr>
-            </a:lvl8pPr>
-            <a:lvl9pPr marL="3657600" indent="0">
-              <a:buNone/>
-              <a:defRPr sz="1400">
-                <a:solidFill>
-                  <a:schemeClr val="tx1">
-                    <a:tint val="75000"/>
-                  </a:schemeClr>
-                </a:solidFill>
-              </a:defRPr>
-            </a:lvl9pPr>
           </a:lstStyle>
           <a:p>
             <a:pPr lvl="0" algn="l"/>
@@ -1666,7 +2561,15 @@
         </p:spPr>
         <p:txBody>
           <a:bodyPr/>
-          <a:lstStyle/>
+          <a:lstStyle>
+            <a:lvl1pPr>
+              <a:defRPr sz="3600" b="1">
+                <a:solidFill>
+                  <a:srgbClr val="FFFFFF"/>
+                </a:solidFill>
+              </a:defRPr>
+            </a:lvl1pPr>
+          </a:lstStyle>
           <a:p>
             <a:r>
               <a:rPr kumimoji="1" lang="ja-JP" altLang="en-US"/>
@@ -2109,8 +3012,8 @@
 </file>
 
 <file path=ppt/slideLayouts/slideLayout5.xml><?xml version="1.0" encoding="utf-8"?>
-<p:sldLayout xmlns:a="http://schemas.openxmlformats.org/drawingml/2006/main" xmlns:r="http://schemas.openxmlformats.org/officeDocument/2006/relationships" xmlns:p="http://schemas.openxmlformats.org/presentationml/2006/main" preserve="1" userDrawn="1">
-  <p:cSld name="Comparison">
+<p:sldLayout xmlns:a="http://schemas.openxmlformats.org/drawingml/2006/main" xmlns:r="http://schemas.openxmlformats.org/officeDocument/2006/relationships" xmlns:p="http://schemas.openxmlformats.org/presentationml/2006/main" preserve="1" userDrawn="1" type="cust">
+  <p:cSld name="comparison_2col">
     <p:bg>
       <p:bgPr>
         <a:solidFill>
@@ -2135,7 +3038,152 @@
       </p:grpSpPr>
       <p:sp>
         <p:nvSpPr>
-          <p:cNvPr id="3" name="Text Placeholder 2"/>
+          <p:cNvPr id="200" name="deco_left_panel"/>
+          <p:cNvSpPr>
+            <a:spLocks noGrp="1"/>
+          </p:cNvSpPr>
+          <p:nvPr/>
+        </p:nvSpPr>
+        <p:spPr>
+          <a:xfrm>
+            <a:off x="268224" y="857250"/>
+            <a:ext cx="5657088" cy="5266944"/>
+          </a:xfrm>
+          <a:prstGeom prst="rect">
+            <a:avLst/>
+          </a:prstGeom>
+          <a:solidFill>
+            <a:srgbClr val="E8F2FB"/>
+          </a:solidFill>
+          <a:ln>
+            <a:noFill/>
+          </a:ln>
+        </p:spPr>
+        <p:txBody>
+          <a:bodyPr/>
+          <a:lstStyle/>
+          <a:p/>
+        </p:txBody>
+      </p:sp>
+      <p:sp>
+        <p:nvSpPr>
+          <p:cNvPr id="201" name="deco_right_panel"/>
+          <p:cNvSpPr>
+            <a:spLocks noGrp="1"/>
+          </p:cNvSpPr>
+          <p:nvPr/>
+        </p:nvSpPr>
+        <p:spPr>
+          <a:xfrm>
+            <a:off x="6266688" y="857250"/>
+            <a:ext cx="5657088" cy="5266944"/>
+          </a:xfrm>
+          <a:prstGeom prst="rect">
+            <a:avLst/>
+          </a:prstGeom>
+          <a:solidFill>
+            <a:srgbClr val="E8F2FB"/>
+          </a:solidFill>
+          <a:ln>
+            <a:noFill/>
+          </a:ln>
+        </p:spPr>
+        <p:txBody>
+          <a:bodyPr/>
+          <a:lstStyle/>
+          <a:p/>
+        </p:txBody>
+      </p:sp>
+      <p:sp>
+        <p:nvSpPr>
+          <p:cNvPr id="202" name="deco_left_accent"/>
+          <p:cNvSpPr>
+            <a:spLocks noGrp="1"/>
+          </p:cNvSpPr>
+          <p:nvPr/>
+        </p:nvSpPr>
+        <p:spPr>
+          <a:xfrm>
+            <a:off x="268224" y="857250"/>
+            <a:ext cx="5657088" cy="109728"/>
+          </a:xfrm>
+          <a:prstGeom prst="rect">
+            <a:avLst/>
+          </a:prstGeom>
+          <a:solidFill>
+            <a:srgbClr val="1C3557"/>
+          </a:solidFill>
+          <a:ln>
+            <a:noFill/>
+          </a:ln>
+        </p:spPr>
+        <p:txBody>
+          <a:bodyPr/>
+          <a:lstStyle/>
+          <a:p/>
+        </p:txBody>
+      </p:sp>
+      <p:sp>
+        <p:nvSpPr>
+          <p:cNvPr id="203" name="deco_right_accent"/>
+          <p:cNvSpPr>
+            <a:spLocks noGrp="1"/>
+          </p:cNvSpPr>
+          <p:nvPr/>
+        </p:nvSpPr>
+        <p:spPr>
+          <a:xfrm>
+            <a:off x="6266688" y="857250"/>
+            <a:ext cx="5657088" cy="109728"/>
+          </a:xfrm>
+          <a:prstGeom prst="rect">
+            <a:avLst/>
+          </a:prstGeom>
+          <a:solidFill>
+            <a:srgbClr val="1C3557"/>
+          </a:solidFill>
+          <a:ln>
+            <a:noFill/>
+          </a:ln>
+        </p:spPr>
+        <p:txBody>
+          <a:bodyPr/>
+          <a:lstStyle/>
+          <a:p/>
+        </p:txBody>
+      </p:sp>
+      <p:sp>
+        <p:nvSpPr>
+          <p:cNvPr id="204" name="deco_divider"/>
+          <p:cNvSpPr>
+            <a:spLocks noGrp="1"/>
+          </p:cNvSpPr>
+          <p:nvPr/>
+        </p:nvSpPr>
+        <p:spPr>
+          <a:xfrm>
+            <a:off x="5974080" y="857250"/>
+            <a:ext cx="243840" cy="5266944"/>
+          </a:xfrm>
+          <a:prstGeom prst="rect">
+            <a:avLst/>
+          </a:prstGeom>
+          <a:solidFill>
+            <a:srgbClr val="BFD4EF"/>
+          </a:solidFill>
+          <a:ln>
+            <a:noFill/>
+          </a:ln>
+        </p:spPr>
+        <p:txBody>
+          <a:bodyPr/>
+          <a:lstStyle/>
+          <a:p/>
+        </p:txBody>
+      </p:sp>
+      <p:sp>
+        <p:nvSpPr>
+          <p:cNvPr id="3" name="slot__left_title"/>
           <p:cNvSpPr>
             <a:spLocks noGrp="1"/>
           </p:cNvSpPr>
@@ -2145,8 +3193,8 @@
         </p:nvSpPr>
         <p:spPr>
           <a:xfrm>
-            <a:off x="226422" y="1049186"/>
-            <a:ext cx="5712824" cy="502920"/>
+            <a:off x="463296" y="1131570"/>
+            <a:ext cx="4693920" cy="445770"/>
           </a:xfrm>
           <a:noFill/>
           <a:ln>
@@ -2205,7 +3253,7 @@
       </p:sp>
       <p:sp>
         <p:nvSpPr>
-          <p:cNvPr id="5" name="Text Placeholder 4"/>
+          <p:cNvPr id="5" name="slot__right_title"/>
           <p:cNvSpPr>
             <a:spLocks noGrp="1"/>
           </p:cNvSpPr>
@@ -2215,8 +3263,8 @@
         </p:nvSpPr>
         <p:spPr>
           <a:xfrm>
-            <a:off x="6222818" y="1049186"/>
-            <a:ext cx="5712824" cy="502920"/>
+            <a:off x="6425184" y="1131570"/>
+            <a:ext cx="4693920" cy="445770"/>
           </a:xfrm>
           <a:noFill/>
           <a:ln>
@@ -2390,7 +3438,7 @@
       </p:sp>
       <p:sp>
         <p:nvSpPr>
-          <p:cNvPr id="15" name="コンテンツ プレースホルダー 14">
+          <p:cNvPr id="15" name="slot__left_description">
             <a:extLst>
               <a:ext uri="{FF2B5EF4-FFF2-40B4-BE49-F238E27FC236}">
                 <a16:creationId xmlns:a16="http://schemas.microsoft.com/office/drawing/2014/main" id="{05A5F16C-5213-8739-D5CC-71F95A8DD83A}"/>
@@ -2406,8 +3454,8 @@
         </p:nvSpPr>
         <p:spPr>
           <a:xfrm>
-            <a:off x="205421" y="1736725"/>
-            <a:ext cx="5734051" cy="4428944"/>
+            <a:off x="463296" y="1680210"/>
+            <a:ext cx="5364480" cy="4389120"/>
           </a:xfrm>
         </p:spPr>
         <p:txBody>
@@ -2484,7 +3532,7 @@
       </p:sp>
       <p:sp>
         <p:nvSpPr>
-          <p:cNvPr id="17" name="コンテンツ プレースホルダー 16">
+          <p:cNvPr id="17" name="slot__right_description">
             <a:extLst>
               <a:ext uri="{FF2B5EF4-FFF2-40B4-BE49-F238E27FC236}">
                 <a16:creationId xmlns:a16="http://schemas.microsoft.com/office/drawing/2014/main" id="{7736F04F-6D87-D6E7-D993-8E4670208CB6}"/>
@@ -2500,8 +3548,8 @@
         </p:nvSpPr>
         <p:spPr>
           <a:xfrm>
-            <a:off x="6222817" y="1740444"/>
-            <a:ext cx="5712825" cy="4428944"/>
+            <a:off x="6425184" y="1680210"/>
+            <a:ext cx="5364480" cy="4389120"/>
           </a:xfrm>
         </p:spPr>
         <p:txBody>
@@ -2573,6 +3621,138 @@
               <a:rPr kumimoji="1" lang="ja-JP" altLang="en-US"/>
               <a:t>レベル</a:t>
             </a:r>
+          </a:p>
+        </p:txBody>
+      </p:sp>
+      <p:sp>
+        <p:nvSpPr>
+          <p:cNvPr id="18" name="slot__left_icon"/>
+          <p:cNvSpPr>
+            <a:spLocks noGrp="1"/>
+          </p:cNvSpPr>
+          <p:nvPr>
+            <p:ph type="pic" idx="15"/>
+          </p:nvPr>
+        </p:nvSpPr>
+        <p:spPr>
+          <a:xfrm>
+            <a:off x="5181600" y="1083564"/>
+            <a:ext cx="609600" cy="548640"/>
+          </a:xfrm>
+          <a:noFill/>
+          <a:ln>
+            <a:noFill/>
+          </a:ln>
+        </p:spPr>
+        <p:txBody>
+          <a:bodyPr wrap="square" lIns="0" tIns="0" rIns="0" bIns="0" anchor="t"/>
+          <a:lstStyle>
+            <a:lvl1pPr marL="0" indent="0">
+              <a:buNone/>
+              <a:defRPr sz="3200"/>
+            </a:lvl1pPr>
+            <a:lvl2pPr marL="457200" indent="0">
+              <a:buNone/>
+              <a:defRPr sz="2800"/>
+            </a:lvl2pPr>
+            <a:lvl3pPr marL="914400" indent="0">
+              <a:buNone/>
+              <a:defRPr sz="2400"/>
+            </a:lvl3pPr>
+            <a:lvl4pPr marL="1371600" indent="0">
+              <a:buNone/>
+              <a:defRPr sz="2000"/>
+            </a:lvl4pPr>
+            <a:lvl5pPr marL="1828800" indent="0">
+              <a:buNone/>
+              <a:defRPr sz="2000"/>
+            </a:lvl5pPr>
+            <a:lvl6pPr marL="2286000" indent="0">
+              <a:buNone/>
+              <a:defRPr sz="2000"/>
+            </a:lvl6pPr>
+            <a:lvl7pPr marL="2743200" indent="0">
+              <a:buNone/>
+              <a:defRPr sz="2000"/>
+            </a:lvl7pPr>
+            <a:lvl8pPr marL="3200400" indent="0">
+              <a:buNone/>
+              <a:defRPr sz="2000"/>
+            </a:lvl8pPr>
+            <a:lvl9pPr marL="3657600" indent="0">
+              <a:buNone/>
+              <a:defRPr sz="2000"/>
+            </a:lvl9pPr>
+          </a:lstStyle>
+          <a:p>
+            <a:pPr algn="l"/>
+            <a:endParaRPr lang="en-US"/>
+          </a:p>
+        </p:txBody>
+      </p:sp>
+      <p:sp>
+        <p:nvSpPr>
+          <p:cNvPr id="19" name="slot__right_icon"/>
+          <p:cNvSpPr>
+            <a:spLocks noGrp="1"/>
+          </p:cNvSpPr>
+          <p:nvPr>
+            <p:ph type="pic" idx="16"/>
+          </p:nvPr>
+        </p:nvSpPr>
+        <p:spPr>
+          <a:xfrm>
+            <a:off x="11192256" y="1083564"/>
+            <a:ext cx="609600" cy="548640"/>
+          </a:xfrm>
+          <a:noFill/>
+          <a:ln>
+            <a:noFill/>
+          </a:ln>
+        </p:spPr>
+        <p:txBody>
+          <a:bodyPr wrap="square" lIns="0" tIns="0" rIns="0" bIns="0" anchor="t"/>
+          <a:lstStyle>
+            <a:lvl1pPr marL="0" indent="0">
+              <a:buNone/>
+              <a:defRPr sz="3200"/>
+            </a:lvl1pPr>
+            <a:lvl2pPr marL="457200" indent="0">
+              <a:buNone/>
+              <a:defRPr sz="2800"/>
+            </a:lvl2pPr>
+            <a:lvl3pPr marL="914400" indent="0">
+              <a:buNone/>
+              <a:defRPr sz="2400"/>
+            </a:lvl3pPr>
+            <a:lvl4pPr marL="1371600" indent="0">
+              <a:buNone/>
+              <a:defRPr sz="2000"/>
+            </a:lvl4pPr>
+            <a:lvl5pPr marL="1828800" indent="0">
+              <a:buNone/>
+              <a:defRPr sz="2000"/>
+            </a:lvl5pPr>
+            <a:lvl6pPr marL="2286000" indent="0">
+              <a:buNone/>
+              <a:defRPr sz="2000"/>
+            </a:lvl6pPr>
+            <a:lvl7pPr marL="2743200" indent="0">
+              <a:buNone/>
+              <a:defRPr sz="2000"/>
+            </a:lvl7pPr>
+            <a:lvl8pPr marL="3200400" indent="0">
+              <a:buNone/>
+              <a:defRPr sz="2000"/>
+            </a:lvl8pPr>
+            <a:lvl9pPr marL="3657600" indent="0">
+              <a:buNone/>
+              <a:defRPr sz="2000"/>
+            </a:lvl9pPr>
+          </a:lstStyle>
+          <a:p>
+            <a:pPr algn="l"/>
+            <a:endParaRPr lang="en-US"/>
           </a:p>
         </p:txBody>
       </p:sp>
@@ -2590,8 +3770,8 @@
 </file>
 
 <file path=ppt/slideLayouts/slideLayout6.xml><?xml version="1.0" encoding="utf-8"?>
-<p:sldLayout xmlns:a="http://schemas.openxmlformats.org/drawingml/2006/main" xmlns:r="http://schemas.openxmlformats.org/officeDocument/2006/relationships" xmlns:p="http://schemas.openxmlformats.org/presentationml/2006/main" type="titleOnly" preserve="1">
-  <p:cSld name="Title Only">
+<p:sldLayout xmlns:a="http://schemas.openxmlformats.org/drawingml/2006/main" xmlns:r="http://schemas.openxmlformats.org/officeDocument/2006/relationships" xmlns:p="http://schemas.openxmlformats.org/presentationml/2006/main" type="cust" preserve="1">
+  <p:cSld name="kpi_big_number">
     <p:bg>
       <p:bgPr>
         <a:solidFill>
@@ -2616,6 +3796,93 @@
       </p:grpSpPr>
       <p:sp>
         <p:nvSpPr>
+          <p:cNvPr id="200" name="deco_metric_panel"/>
+          <p:cNvSpPr>
+            <a:spLocks noGrp="1"/>
+          </p:cNvSpPr>
+          <p:nvPr/>
+        </p:nvSpPr>
+        <p:spPr>
+          <a:xfrm>
+            <a:off x="707136" y="1062990"/>
+            <a:ext cx="8656320" cy="2537460"/>
+          </a:xfrm>
+          <a:prstGeom prst="rect">
+            <a:avLst/>
+          </a:prstGeom>
+          <a:solidFill>
+            <a:srgbClr val="1C3557"/>
+          </a:solidFill>
+          <a:ln>
+            <a:noFill/>
+          </a:ln>
+        </p:spPr>
+        <p:txBody>
+          <a:bodyPr/>
+          <a:lstStyle/>
+          <a:p/>
+        </p:txBody>
+      </p:sp>
+      <p:sp>
+        <p:nvSpPr>
+          <p:cNvPr id="201" name="deco_delta_badge"/>
+          <p:cNvSpPr>
+            <a:spLocks noGrp="1"/>
+          </p:cNvSpPr>
+          <p:nvPr/>
+        </p:nvSpPr>
+        <p:spPr>
+          <a:xfrm>
+            <a:off x="9534144" y="1062990"/>
+            <a:ext cx="2316480" cy="1028700"/>
+          </a:xfrm>
+          <a:prstGeom prst="rect">
+            <a:avLst/>
+          </a:prstGeom>
+          <a:solidFill>
+            <a:srgbClr val="E8763A"/>
+          </a:solidFill>
+          <a:ln>
+            <a:noFill/>
+          </a:ln>
+        </p:spPr>
+        <p:txBody>
+          <a:bodyPr/>
+          <a:lstStyle/>
+          <a:p/>
+        </p:txBody>
+      </p:sp>
+      <p:sp>
+        <p:nvSpPr>
+          <p:cNvPr id="202" name="deco_support_area"/>
+          <p:cNvSpPr>
+            <a:spLocks noGrp="1"/>
+          </p:cNvSpPr>
+          <p:nvPr/>
+        </p:nvSpPr>
+        <p:spPr>
+          <a:xfrm>
+            <a:off x="707136" y="3703320"/>
+            <a:ext cx="10777728" cy="2125980"/>
+          </a:xfrm>
+          <a:prstGeom prst="rect">
+            <a:avLst/>
+          </a:prstGeom>
+          <a:solidFill>
+            <a:srgbClr val="F2F4F7"/>
+          </a:solidFill>
+          <a:ln>
+            <a:noFill/>
+          </a:ln>
+        </p:spPr>
+        <p:txBody>
+          <a:bodyPr/>
+          <a:lstStyle/>
+          <a:p/>
+        </p:txBody>
+      </p:sp>
+      <p:sp>
+        <p:nvSpPr>
           <p:cNvPr id="2" name="Title 1"/>
           <p:cNvSpPr>
             <a:spLocks noGrp="1"/>
@@ -2698,6 +3965,303 @@
               <a:t>‹#›</a:t>
             </a:fld>
             <a:endParaRPr lang="en-US"/>
+          </a:p>
+        </p:txBody>
+      </p:sp>
+      <p:sp>
+        <p:nvSpPr>
+          <p:cNvPr id="6" name="slot__metric_value">
+            <a:extLst>
+              <a:ext uri="{FF2B5EF4-FFF2-40B4-BE49-F238E27FC236}">
+                <a16:creationId xmlns:a16="http://schemas.microsoft.com/office/drawing/2014/main" id="{9972CBED-8C1F-F962-DF1D-46CEC7DCCBC5}"/>
+              </a:ext>
+            </a:extLst>
+          </p:cNvPr>
+          <p:cNvSpPr>
+            <a:spLocks noGrp="1"/>
+          </p:cNvSpPr>
+          <p:nvPr>
+            <p:ph sz="quarter" idx="13" type="obj"/>
+          </p:nvPr>
+        </p:nvSpPr>
+        <p:spPr>
+          <a:xfrm>
+            <a:off x="975360" y="1371600"/>
+            <a:ext cx="8168640" cy="2057400"/>
+          </a:xfrm>
+        </p:spPr>
+        <p:txBody>
+          <a:bodyPr/>
+          <a:lstStyle>
+            <a:lvl1pPr>
+              <a:defRPr sz="5600" b="1">
+                <a:solidFill>
+                  <a:srgbClr val="FFFFFF"/>
+                </a:solidFill>
+              </a:defRPr>
+            </a:lvl1pPr>
+            <a:lvl2pPr>
+              <a:defRPr sz="1800">
+                <a:solidFill>
+                  <a:srgbClr val="E8F2FB"/>
+                </a:solidFill>
+              </a:defRPr>
+            </a:lvl2pPr>
+          </a:lstStyle>
+          <a:p>
+            <a:pPr lvl="0"/>
+            <a:r>
+              <a:rPr kumimoji="1" lang="ja-JP" altLang="en-US"/>
+              <a:t>マスター テキストの書式設定</a:t>
+            </a:r>
+          </a:p>
+          <a:p>
+            <a:pPr lvl="1"/>
+            <a:r>
+              <a:rPr kumimoji="1" lang="ja-JP" altLang="en-US"/>
+              <a:t>第 </a:t>
+            </a:r>
+            <a:r>
+              <a:rPr kumimoji="1" lang="en-US" altLang="ja-JP"/>
+              <a:t>2 </a:t>
+            </a:r>
+            <a:r>
+              <a:rPr kumimoji="1" lang="ja-JP" altLang="en-US"/>
+              <a:t>レベル</a:t>
+            </a:r>
+          </a:p>
+          <a:p>
+            <a:pPr lvl="2"/>
+            <a:r>
+              <a:rPr kumimoji="1" lang="ja-JP" altLang="en-US"/>
+              <a:t>第 </a:t>
+            </a:r>
+            <a:r>
+              <a:rPr kumimoji="1" lang="en-US" altLang="ja-JP"/>
+              <a:t>3 </a:t>
+            </a:r>
+            <a:r>
+              <a:rPr kumimoji="1" lang="ja-JP" altLang="en-US"/>
+              <a:t>レベル</a:t>
+            </a:r>
+          </a:p>
+          <a:p>
+            <a:pPr lvl="3"/>
+            <a:r>
+              <a:rPr kumimoji="1" lang="ja-JP" altLang="en-US"/>
+              <a:t>第 </a:t>
+            </a:r>
+            <a:r>
+              <a:rPr kumimoji="1" lang="en-US" altLang="ja-JP"/>
+              <a:t>4 </a:t>
+            </a:r>
+            <a:r>
+              <a:rPr kumimoji="1" lang="ja-JP" altLang="en-US"/>
+              <a:t>レベル</a:t>
+            </a:r>
+          </a:p>
+          <a:p>
+            <a:pPr lvl="4"/>
+            <a:r>
+              <a:rPr kumimoji="1" lang="ja-JP" altLang="en-US"/>
+              <a:t>第 </a:t>
+            </a:r>
+            <a:r>
+              <a:rPr kumimoji="1" lang="en-US" altLang="ja-JP"/>
+              <a:t>5 </a:t>
+            </a:r>
+            <a:r>
+              <a:rPr kumimoji="1" lang="ja-JP" altLang="en-US"/>
+              <a:t>レベル</a:t>
+            </a:r>
+          </a:p>
+        </p:txBody>
+      </p:sp>
+      <p:sp>
+        <p:nvSpPr>
+          <p:cNvPr id="7" name="slot__metric_delta">
+            <a:extLst>
+              <a:ext uri="{FF2B5EF4-FFF2-40B4-BE49-F238E27FC236}">
+                <a16:creationId xmlns:a16="http://schemas.microsoft.com/office/drawing/2014/main" id="{9972CBED-8C1F-F962-DF1D-46CEC7DCCBC5}"/>
+              </a:ext>
+            </a:extLst>
+          </p:cNvPr>
+          <p:cNvSpPr>
+            <a:spLocks noGrp="1"/>
+          </p:cNvSpPr>
+          <p:nvPr>
+            <p:ph sz="quarter" idx="14" type="obj"/>
+          </p:nvPr>
+        </p:nvSpPr>
+        <p:spPr>
+          <a:xfrm>
+            <a:off x="9656064" y="1289304"/>
+            <a:ext cx="2072640" cy="651510"/>
+          </a:xfrm>
+        </p:spPr>
+        <p:txBody>
+          <a:bodyPr/>
+          <a:lstStyle/>
+          <a:p>
+            <a:pPr lvl="0"/>
+            <a:r>
+              <a:rPr kumimoji="1" lang="ja-JP" altLang="en-US"/>
+              <a:t>マスター テキストの書式設定</a:t>
+            </a:r>
+          </a:p>
+          <a:p>
+            <a:pPr lvl="1"/>
+            <a:r>
+              <a:rPr kumimoji="1" lang="ja-JP" altLang="en-US"/>
+              <a:t>第 </a:t>
+            </a:r>
+            <a:r>
+              <a:rPr kumimoji="1" lang="en-US" altLang="ja-JP"/>
+              <a:t>2 </a:t>
+            </a:r>
+            <a:r>
+              <a:rPr kumimoji="1" lang="ja-JP" altLang="en-US"/>
+              <a:t>レベル</a:t>
+            </a:r>
+          </a:p>
+          <a:p>
+            <a:pPr lvl="2"/>
+            <a:r>
+              <a:rPr kumimoji="1" lang="ja-JP" altLang="en-US"/>
+              <a:t>第 </a:t>
+            </a:r>
+            <a:r>
+              <a:rPr kumimoji="1" lang="en-US" altLang="ja-JP"/>
+              <a:t>3 </a:t>
+            </a:r>
+            <a:r>
+              <a:rPr kumimoji="1" lang="ja-JP" altLang="en-US"/>
+              <a:t>レベル</a:t>
+            </a:r>
+          </a:p>
+          <a:p>
+            <a:pPr lvl="3"/>
+            <a:r>
+              <a:rPr kumimoji="1" lang="ja-JP" altLang="en-US"/>
+              <a:t>第 </a:t>
+            </a:r>
+            <a:r>
+              <a:rPr kumimoji="1" lang="en-US" altLang="ja-JP"/>
+              <a:t>4 </a:t>
+            </a:r>
+            <a:r>
+              <a:rPr kumimoji="1" lang="ja-JP" altLang="en-US"/>
+              <a:t>レベル</a:t>
+            </a:r>
+          </a:p>
+          <a:p>
+            <a:pPr lvl="4"/>
+            <a:r>
+              <a:rPr kumimoji="1" lang="ja-JP" altLang="en-US"/>
+              <a:t>第 </a:t>
+            </a:r>
+            <a:r>
+              <a:rPr kumimoji="1" lang="en-US" altLang="ja-JP"/>
+              <a:t>5 </a:t>
+            </a:r>
+            <a:r>
+              <a:rPr kumimoji="1" lang="ja-JP" altLang="en-US"/>
+              <a:t>レベル</a:t>
+            </a:r>
+          </a:p>
+        </p:txBody>
+      </p:sp>
+      <p:sp>
+        <p:nvSpPr>
+          <p:cNvPr id="8" name="slot__supporting_points">
+            <a:extLst>
+              <a:ext uri="{FF2B5EF4-FFF2-40B4-BE49-F238E27FC236}">
+                <a16:creationId xmlns:a16="http://schemas.microsoft.com/office/drawing/2014/main" id="{9972CBED-8C1F-F962-DF1D-46CEC7DCCBC5}"/>
+              </a:ext>
+            </a:extLst>
+          </p:cNvPr>
+          <p:cNvSpPr>
+            <a:spLocks noGrp="1"/>
+          </p:cNvSpPr>
+          <p:nvPr>
+            <p:ph sz="quarter" idx="15" type="obj"/>
+          </p:nvPr>
+        </p:nvSpPr>
+        <p:spPr>
+          <a:xfrm>
+            <a:off x="1036320" y="3874770"/>
+            <a:ext cx="10119360" cy="1783080"/>
+          </a:xfrm>
+        </p:spPr>
+        <p:txBody>
+          <a:bodyPr/>
+          <a:lstStyle/>
+          <a:p>
+            <a:pPr lvl="0"/>
+            <a:r>
+              <a:rPr kumimoji="1" lang="ja-JP" altLang="en-US"/>
+              <a:t>マスター テキストの書式設定</a:t>
+            </a:r>
+          </a:p>
+          <a:p>
+            <a:pPr lvl="1"/>
+            <a:r>
+              <a:rPr kumimoji="1" lang="ja-JP" altLang="en-US"/>
+              <a:t>第 </a:t>
+            </a:r>
+            <a:r>
+              <a:rPr kumimoji="1" lang="en-US" altLang="ja-JP"/>
+              <a:t>2 </a:t>
+            </a:r>
+            <a:r>
+              <a:rPr kumimoji="1" lang="ja-JP" altLang="en-US"/>
+              <a:t>レベル</a:t>
+            </a:r>
+          </a:p>
+          <a:p>
+            <a:pPr lvl="2"/>
+            <a:r>
+              <a:rPr kumimoji="1" lang="ja-JP" altLang="en-US"/>
+              <a:t>第 </a:t>
+            </a:r>
+            <a:r>
+              <a:rPr kumimoji="1" lang="en-US" altLang="ja-JP"/>
+              <a:t>3 </a:t>
+            </a:r>
+            <a:r>
+              <a:rPr kumimoji="1" lang="ja-JP" altLang="en-US"/>
+              <a:t>レベル</a:t>
+            </a:r>
+          </a:p>
+          <a:p>
+            <a:pPr lvl="3"/>
+            <a:r>
+              <a:rPr kumimoji="1" lang="ja-JP" altLang="en-US"/>
+              <a:t>第 </a:t>
+            </a:r>
+            <a:r>
+              <a:rPr kumimoji="1" lang="en-US" altLang="ja-JP"/>
+              <a:t>4 </a:t>
+            </a:r>
+            <a:r>
+              <a:rPr kumimoji="1" lang="ja-JP" altLang="en-US"/>
+              <a:t>レベル</a:t>
+            </a:r>
+          </a:p>
+          <a:p>
+            <a:pPr lvl="4"/>
+            <a:r>
+              <a:rPr kumimoji="1" lang="ja-JP" altLang="en-US"/>
+              <a:t>第 </a:t>
+            </a:r>
+            <a:r>
+              <a:rPr kumimoji="1" lang="en-US" altLang="ja-JP"/>
+              <a:t>5 </a:t>
+            </a:r>
+            <a:r>
+              <a:rPr kumimoji="1" lang="ja-JP" altLang="en-US"/>
+              <a:t>レベル</a:t>
+            </a:r>
           </a:p>
         </p:txBody>
       </p:sp>
@@ -2715,8 +4279,8 @@
 </file>
 
 <file path=ppt/slideLayouts/slideLayout7.xml><?xml version="1.0" encoding="utf-8"?>
-<p:sldLayout xmlns:a="http://schemas.openxmlformats.org/drawingml/2006/main" xmlns:r="http://schemas.openxmlformats.org/officeDocument/2006/relationships" xmlns:p="http://schemas.openxmlformats.org/presentationml/2006/main" type="blank" preserve="1">
-  <p:cSld name="Blank">
+<p:sldLayout xmlns:a="http://schemas.openxmlformats.org/drawingml/2006/main" xmlns:r="http://schemas.openxmlformats.org/officeDocument/2006/relationships" xmlns:p="http://schemas.openxmlformats.org/presentationml/2006/main" type="cust" preserve="1">
+  <p:cSld name="timeline">
     <p:bg>
       <p:bgPr>
         <a:solidFill>
@@ -2741,6 +4305,209 @@
       </p:grpSpPr>
       <p:sp>
         <p:nvSpPr>
+          <p:cNvPr id="200" name="deco_timeline_line"/>
+          <p:cNvSpPr>
+            <a:spLocks noGrp="1"/>
+          </p:cNvSpPr>
+          <p:nvPr/>
+        </p:nvSpPr>
+        <p:spPr>
+          <a:xfrm>
+            <a:off x="731520" y="1042416"/>
+            <a:ext cx="97536" cy="5225796"/>
+          </a:xfrm>
+          <a:prstGeom prst="rect">
+            <a:avLst/>
+          </a:prstGeom>
+          <a:solidFill>
+            <a:srgbClr val="2E6DA4"/>
+          </a:solidFill>
+          <a:ln>
+            <a:noFill/>
+          </a:ln>
+        </p:spPr>
+        <p:txBody>
+          <a:bodyPr/>
+          <a:lstStyle/>
+          <a:p/>
+        </p:txBody>
+      </p:sp>
+      <p:sp>
+        <p:nvSpPr>
+          <p:cNvPr id="201" name="deco_event_1_dot"/>
+          <p:cNvSpPr>
+            <a:spLocks noGrp="1"/>
+          </p:cNvSpPr>
+          <p:nvPr/>
+        </p:nvSpPr>
+        <p:spPr>
+          <a:xfrm>
+            <a:off x="633984" y="1419606"/>
+            <a:ext cx="292608" cy="205740"/>
+          </a:xfrm>
+          <a:prstGeom prst="ellipse">
+            <a:avLst/>
+          </a:prstGeom>
+          <a:solidFill>
+            <a:srgbClr val="1C3557"/>
+          </a:solidFill>
+          <a:ln>
+            <a:noFill/>
+          </a:ln>
+        </p:spPr>
+        <p:txBody>
+          <a:bodyPr/>
+          <a:lstStyle/>
+          <a:p/>
+        </p:txBody>
+      </p:sp>
+      <p:sp>
+        <p:nvSpPr>
+          <p:cNvPr id="202" name="deco_event_2_dot"/>
+          <p:cNvSpPr>
+            <a:spLocks noGrp="1"/>
+          </p:cNvSpPr>
+          <p:nvPr/>
+        </p:nvSpPr>
+        <p:spPr>
+          <a:xfrm>
+            <a:off x="633984" y="2269998"/>
+            <a:ext cx="292608" cy="205740"/>
+          </a:xfrm>
+          <a:prstGeom prst="ellipse">
+            <a:avLst/>
+          </a:prstGeom>
+          <a:solidFill>
+            <a:srgbClr val="1C3557"/>
+          </a:solidFill>
+          <a:ln>
+            <a:noFill/>
+          </a:ln>
+        </p:spPr>
+        <p:txBody>
+          <a:bodyPr/>
+          <a:lstStyle/>
+          <a:p/>
+        </p:txBody>
+      </p:sp>
+      <p:sp>
+        <p:nvSpPr>
+          <p:cNvPr id="203" name="deco_event_3_dot"/>
+          <p:cNvSpPr>
+            <a:spLocks noGrp="1"/>
+          </p:cNvSpPr>
+          <p:nvPr/>
+        </p:nvSpPr>
+        <p:spPr>
+          <a:xfrm>
+            <a:off x="633984" y="3120390"/>
+            <a:ext cx="292608" cy="205740"/>
+          </a:xfrm>
+          <a:prstGeom prst="ellipse">
+            <a:avLst/>
+          </a:prstGeom>
+          <a:solidFill>
+            <a:srgbClr val="1C3557"/>
+          </a:solidFill>
+          <a:ln>
+            <a:noFill/>
+          </a:ln>
+        </p:spPr>
+        <p:txBody>
+          <a:bodyPr/>
+          <a:lstStyle/>
+          <a:p/>
+        </p:txBody>
+      </p:sp>
+      <p:sp>
+        <p:nvSpPr>
+          <p:cNvPr id="204" name="deco_event_4_dot"/>
+          <p:cNvSpPr>
+            <a:spLocks noGrp="1"/>
+          </p:cNvSpPr>
+          <p:nvPr/>
+        </p:nvSpPr>
+        <p:spPr>
+          <a:xfrm>
+            <a:off x="633984" y="3970782"/>
+            <a:ext cx="292608" cy="205740"/>
+          </a:xfrm>
+          <a:prstGeom prst="ellipse">
+            <a:avLst/>
+          </a:prstGeom>
+          <a:solidFill>
+            <a:srgbClr val="1C3557"/>
+          </a:solidFill>
+          <a:ln>
+            <a:noFill/>
+          </a:ln>
+        </p:spPr>
+        <p:txBody>
+          <a:bodyPr/>
+          <a:lstStyle/>
+          <a:p/>
+        </p:txBody>
+      </p:sp>
+      <p:sp>
+        <p:nvSpPr>
+          <p:cNvPr id="205" name="deco_event_5_dot"/>
+          <p:cNvSpPr>
+            <a:spLocks noGrp="1"/>
+          </p:cNvSpPr>
+          <p:nvPr/>
+        </p:nvSpPr>
+        <p:spPr>
+          <a:xfrm>
+            <a:off x="633984" y="4821174"/>
+            <a:ext cx="292608" cy="205740"/>
+          </a:xfrm>
+          <a:prstGeom prst="ellipse">
+            <a:avLst/>
+          </a:prstGeom>
+          <a:solidFill>
+            <a:srgbClr val="1C3557"/>
+          </a:solidFill>
+          <a:ln>
+            <a:noFill/>
+          </a:ln>
+        </p:spPr>
+        <p:txBody>
+          <a:bodyPr/>
+          <a:lstStyle/>
+          <a:p/>
+        </p:txBody>
+      </p:sp>
+      <p:sp>
+        <p:nvSpPr>
+          <p:cNvPr id="206" name="deco_event_6_dot"/>
+          <p:cNvSpPr>
+            <a:spLocks noGrp="1"/>
+          </p:cNvSpPr>
+          <p:nvPr/>
+        </p:nvSpPr>
+        <p:spPr>
+          <a:xfrm>
+            <a:off x="633984" y="5671566"/>
+            <a:ext cx="292608" cy="205740"/>
+          </a:xfrm>
+          <a:prstGeom prst="ellipse">
+            <a:avLst/>
+          </a:prstGeom>
+          <a:solidFill>
+            <a:srgbClr val="1C3557"/>
+          </a:solidFill>
+          <a:ln>
+            <a:noFill/>
+          </a:ln>
+        </p:spPr>
+        <p:txBody>
+          <a:bodyPr/>
+          <a:lstStyle/>
+          <a:p/>
+        </p:txBody>
+      </p:sp>
+      <p:sp>
+        <p:nvSpPr>
           <p:cNvPr id="2" name="Date Placeholder 1"/>
           <p:cNvSpPr>
             <a:spLocks noGrp="1"/>
@@ -2801,6 +4568,603 @@
               <a:t>‹#›</a:t>
             </a:fld>
             <a:endParaRPr lang="en-US"/>
+          </a:p>
+        </p:txBody>
+      </p:sp>
+      <p:sp>
+        <p:nvSpPr>
+          <p:cNvPr id="5" name="タイトル 6">
+            <a:extLst>
+              <a:ext uri="{FF2B5EF4-FFF2-40B4-BE49-F238E27FC236}">
+                <a16:creationId xmlns:a16="http://schemas.microsoft.com/office/drawing/2014/main" id="{11DAA64B-18C1-17A1-691C-30AB57B5A327}"/>
+              </a:ext>
+            </a:extLst>
+          </p:cNvPr>
+          <p:cNvSpPr>
+            <a:spLocks noGrp="1"/>
+          </p:cNvSpPr>
+          <p:nvPr>
+            <p:ph type="title"/>
+          </p:nvPr>
+        </p:nvSpPr>
+        <p:spPr>
+          <a:xfrm>
+            <a:off x="231648" y="219456"/>
+            <a:ext cx="11728704" cy="644652"/>
+          </a:xfrm>
+        </p:spPr>
+        <p:txBody>
+          <a:bodyPr/>
+          <a:lstStyle/>
+          <a:p>
+            <a:r>
+              <a:rPr kumimoji="1" lang="ja-JP" altLang="en-US"/>
+              <a:t>マスター タイトルの書式設定</a:t>
+            </a:r>
+          </a:p>
+        </p:txBody>
+      </p:sp>
+      <p:sp>
+        <p:nvSpPr>
+          <p:cNvPr id="6" name="slot__event_1_combined_text">
+            <a:extLst>
+              <a:ext uri="{FF2B5EF4-FFF2-40B4-BE49-F238E27FC236}">
+                <a16:creationId xmlns:a16="http://schemas.microsoft.com/office/drawing/2014/main" id="{9972CBED-8C1F-F962-DF1D-46CEC7DCCBC5}"/>
+              </a:ext>
+            </a:extLst>
+          </p:cNvPr>
+          <p:cNvSpPr>
+            <a:spLocks noGrp="1"/>
+          </p:cNvSpPr>
+          <p:nvPr>
+            <p:ph sz="quarter" idx="13" type="obj"/>
+          </p:nvPr>
+        </p:nvSpPr>
+        <p:spPr>
+          <a:xfrm>
+            <a:off x="1219200" y="1179576"/>
+            <a:ext cx="10607040" cy="699516"/>
+          </a:xfrm>
+        </p:spPr>
+        <p:txBody>
+          <a:bodyPr/>
+          <a:lstStyle/>
+          <a:p>
+            <a:pPr lvl="0"/>
+            <a:r>
+              <a:rPr kumimoji="1" lang="ja-JP" altLang="en-US"/>
+              <a:t>マスター テキストの書式設定</a:t>
+            </a:r>
+          </a:p>
+          <a:p>
+            <a:pPr lvl="1"/>
+            <a:r>
+              <a:rPr kumimoji="1" lang="ja-JP" altLang="en-US"/>
+              <a:t>第 </a:t>
+            </a:r>
+            <a:r>
+              <a:rPr kumimoji="1" lang="en-US" altLang="ja-JP"/>
+              <a:t>2 </a:t>
+            </a:r>
+            <a:r>
+              <a:rPr kumimoji="1" lang="ja-JP" altLang="en-US"/>
+              <a:t>レベル</a:t>
+            </a:r>
+          </a:p>
+          <a:p>
+            <a:pPr lvl="2"/>
+            <a:r>
+              <a:rPr kumimoji="1" lang="ja-JP" altLang="en-US"/>
+              <a:t>第 </a:t>
+            </a:r>
+            <a:r>
+              <a:rPr kumimoji="1" lang="en-US" altLang="ja-JP"/>
+              <a:t>3 </a:t>
+            </a:r>
+            <a:r>
+              <a:rPr kumimoji="1" lang="ja-JP" altLang="en-US"/>
+              <a:t>レベル</a:t>
+            </a:r>
+          </a:p>
+          <a:p>
+            <a:pPr lvl="3"/>
+            <a:r>
+              <a:rPr kumimoji="1" lang="ja-JP" altLang="en-US"/>
+              <a:t>第 </a:t>
+            </a:r>
+            <a:r>
+              <a:rPr kumimoji="1" lang="en-US" altLang="ja-JP"/>
+              <a:t>4 </a:t>
+            </a:r>
+            <a:r>
+              <a:rPr kumimoji="1" lang="ja-JP" altLang="en-US"/>
+              <a:t>レベル</a:t>
+            </a:r>
+          </a:p>
+          <a:p>
+            <a:pPr lvl="4"/>
+            <a:r>
+              <a:rPr kumimoji="1" lang="ja-JP" altLang="en-US"/>
+              <a:t>第 </a:t>
+            </a:r>
+            <a:r>
+              <a:rPr kumimoji="1" lang="en-US" altLang="ja-JP"/>
+              <a:t>5 </a:t>
+            </a:r>
+            <a:r>
+              <a:rPr kumimoji="1" lang="ja-JP" altLang="en-US"/>
+              <a:t>レベル</a:t>
+            </a:r>
+          </a:p>
+        </p:txBody>
+      </p:sp>
+      <p:sp>
+        <p:nvSpPr>
+          <p:cNvPr id="7" name="slot__event_2_combined_text">
+            <a:extLst>
+              <a:ext uri="{FF2B5EF4-FFF2-40B4-BE49-F238E27FC236}">
+                <a16:creationId xmlns:a16="http://schemas.microsoft.com/office/drawing/2014/main" id="{9972CBED-8C1F-F962-DF1D-46CEC7DCCBC5}"/>
+              </a:ext>
+            </a:extLst>
+          </p:cNvPr>
+          <p:cNvSpPr>
+            <a:spLocks noGrp="1"/>
+          </p:cNvSpPr>
+          <p:nvPr>
+            <p:ph sz="quarter" idx="14" type="obj"/>
+          </p:nvPr>
+        </p:nvSpPr>
+        <p:spPr>
+          <a:xfrm>
+            <a:off x="1219200" y="2029968"/>
+            <a:ext cx="10607040" cy="699516"/>
+          </a:xfrm>
+        </p:spPr>
+        <p:txBody>
+          <a:bodyPr/>
+          <a:lstStyle/>
+          <a:p>
+            <a:pPr lvl="0"/>
+            <a:r>
+              <a:rPr kumimoji="1" lang="ja-JP" altLang="en-US"/>
+              <a:t>マスター テキストの書式設定</a:t>
+            </a:r>
+          </a:p>
+          <a:p>
+            <a:pPr lvl="1"/>
+            <a:r>
+              <a:rPr kumimoji="1" lang="ja-JP" altLang="en-US"/>
+              <a:t>第 </a:t>
+            </a:r>
+            <a:r>
+              <a:rPr kumimoji="1" lang="en-US" altLang="ja-JP"/>
+              <a:t>2 </a:t>
+            </a:r>
+            <a:r>
+              <a:rPr kumimoji="1" lang="ja-JP" altLang="en-US"/>
+              <a:t>レベル</a:t>
+            </a:r>
+          </a:p>
+          <a:p>
+            <a:pPr lvl="2"/>
+            <a:r>
+              <a:rPr kumimoji="1" lang="ja-JP" altLang="en-US"/>
+              <a:t>第 </a:t>
+            </a:r>
+            <a:r>
+              <a:rPr kumimoji="1" lang="en-US" altLang="ja-JP"/>
+              <a:t>3 </a:t>
+            </a:r>
+            <a:r>
+              <a:rPr kumimoji="1" lang="ja-JP" altLang="en-US"/>
+              <a:t>レベル</a:t>
+            </a:r>
+          </a:p>
+          <a:p>
+            <a:pPr lvl="3"/>
+            <a:r>
+              <a:rPr kumimoji="1" lang="ja-JP" altLang="en-US"/>
+              <a:t>第 </a:t>
+            </a:r>
+            <a:r>
+              <a:rPr kumimoji="1" lang="en-US" altLang="ja-JP"/>
+              <a:t>4 </a:t>
+            </a:r>
+            <a:r>
+              <a:rPr kumimoji="1" lang="ja-JP" altLang="en-US"/>
+              <a:t>レベル</a:t>
+            </a:r>
+          </a:p>
+          <a:p>
+            <a:pPr lvl="4"/>
+            <a:r>
+              <a:rPr kumimoji="1" lang="ja-JP" altLang="en-US"/>
+              <a:t>第 </a:t>
+            </a:r>
+            <a:r>
+              <a:rPr kumimoji="1" lang="en-US" altLang="ja-JP"/>
+              <a:t>5 </a:t>
+            </a:r>
+            <a:r>
+              <a:rPr kumimoji="1" lang="ja-JP" altLang="en-US"/>
+              <a:t>レベル</a:t>
+            </a:r>
+          </a:p>
+        </p:txBody>
+      </p:sp>
+      <p:sp>
+        <p:nvSpPr>
+          <p:cNvPr id="8" name="slot__event_3_combined_text">
+            <a:extLst>
+              <a:ext uri="{FF2B5EF4-FFF2-40B4-BE49-F238E27FC236}">
+                <a16:creationId xmlns:a16="http://schemas.microsoft.com/office/drawing/2014/main" id="{9972CBED-8C1F-F962-DF1D-46CEC7DCCBC5}"/>
+              </a:ext>
+            </a:extLst>
+          </p:cNvPr>
+          <p:cNvSpPr>
+            <a:spLocks noGrp="1"/>
+          </p:cNvSpPr>
+          <p:nvPr>
+            <p:ph sz="quarter" idx="15" type="obj"/>
+          </p:nvPr>
+        </p:nvSpPr>
+        <p:spPr>
+          <a:xfrm>
+            <a:off x="1219200" y="2880360"/>
+            <a:ext cx="10607040" cy="699516"/>
+          </a:xfrm>
+        </p:spPr>
+        <p:txBody>
+          <a:bodyPr/>
+          <a:lstStyle/>
+          <a:p>
+            <a:pPr lvl="0"/>
+            <a:r>
+              <a:rPr kumimoji="1" lang="ja-JP" altLang="en-US"/>
+              <a:t>マスター テキストの書式設定</a:t>
+            </a:r>
+          </a:p>
+          <a:p>
+            <a:pPr lvl="1"/>
+            <a:r>
+              <a:rPr kumimoji="1" lang="ja-JP" altLang="en-US"/>
+              <a:t>第 </a:t>
+            </a:r>
+            <a:r>
+              <a:rPr kumimoji="1" lang="en-US" altLang="ja-JP"/>
+              <a:t>2 </a:t>
+            </a:r>
+            <a:r>
+              <a:rPr kumimoji="1" lang="ja-JP" altLang="en-US"/>
+              <a:t>レベル</a:t>
+            </a:r>
+          </a:p>
+          <a:p>
+            <a:pPr lvl="2"/>
+            <a:r>
+              <a:rPr kumimoji="1" lang="ja-JP" altLang="en-US"/>
+              <a:t>第 </a:t>
+            </a:r>
+            <a:r>
+              <a:rPr kumimoji="1" lang="en-US" altLang="ja-JP"/>
+              <a:t>3 </a:t>
+            </a:r>
+            <a:r>
+              <a:rPr kumimoji="1" lang="ja-JP" altLang="en-US"/>
+              <a:t>レベル</a:t>
+            </a:r>
+          </a:p>
+          <a:p>
+            <a:pPr lvl="3"/>
+            <a:r>
+              <a:rPr kumimoji="1" lang="ja-JP" altLang="en-US"/>
+              <a:t>第 </a:t>
+            </a:r>
+            <a:r>
+              <a:rPr kumimoji="1" lang="en-US" altLang="ja-JP"/>
+              <a:t>4 </a:t>
+            </a:r>
+            <a:r>
+              <a:rPr kumimoji="1" lang="ja-JP" altLang="en-US"/>
+              <a:t>レベル</a:t>
+            </a:r>
+          </a:p>
+          <a:p>
+            <a:pPr lvl="4"/>
+            <a:r>
+              <a:rPr kumimoji="1" lang="ja-JP" altLang="en-US"/>
+              <a:t>第 </a:t>
+            </a:r>
+            <a:r>
+              <a:rPr kumimoji="1" lang="en-US" altLang="ja-JP"/>
+              <a:t>5 </a:t>
+            </a:r>
+            <a:r>
+              <a:rPr kumimoji="1" lang="ja-JP" altLang="en-US"/>
+              <a:t>レベル</a:t>
+            </a:r>
+          </a:p>
+        </p:txBody>
+      </p:sp>
+      <p:sp>
+        <p:nvSpPr>
+          <p:cNvPr id="9" name="slot__event_4_combined_text">
+            <a:extLst>
+              <a:ext uri="{FF2B5EF4-FFF2-40B4-BE49-F238E27FC236}">
+                <a16:creationId xmlns:a16="http://schemas.microsoft.com/office/drawing/2014/main" id="{9972CBED-8C1F-F962-DF1D-46CEC7DCCBC5}"/>
+              </a:ext>
+            </a:extLst>
+          </p:cNvPr>
+          <p:cNvSpPr>
+            <a:spLocks noGrp="1"/>
+          </p:cNvSpPr>
+          <p:nvPr>
+            <p:ph sz="quarter" idx="16" type="obj"/>
+          </p:nvPr>
+        </p:nvSpPr>
+        <p:spPr>
+          <a:xfrm>
+            <a:off x="1219200" y="3730752"/>
+            <a:ext cx="10607040" cy="699516"/>
+          </a:xfrm>
+        </p:spPr>
+        <p:txBody>
+          <a:bodyPr/>
+          <a:lstStyle/>
+          <a:p>
+            <a:pPr lvl="0"/>
+            <a:r>
+              <a:rPr kumimoji="1" lang="ja-JP" altLang="en-US"/>
+              <a:t>マスター テキストの書式設定</a:t>
+            </a:r>
+          </a:p>
+          <a:p>
+            <a:pPr lvl="1"/>
+            <a:r>
+              <a:rPr kumimoji="1" lang="ja-JP" altLang="en-US"/>
+              <a:t>第 </a:t>
+            </a:r>
+            <a:r>
+              <a:rPr kumimoji="1" lang="en-US" altLang="ja-JP"/>
+              <a:t>2 </a:t>
+            </a:r>
+            <a:r>
+              <a:rPr kumimoji="1" lang="ja-JP" altLang="en-US"/>
+              <a:t>レベル</a:t>
+            </a:r>
+          </a:p>
+          <a:p>
+            <a:pPr lvl="2"/>
+            <a:r>
+              <a:rPr kumimoji="1" lang="ja-JP" altLang="en-US"/>
+              <a:t>第 </a:t>
+            </a:r>
+            <a:r>
+              <a:rPr kumimoji="1" lang="en-US" altLang="ja-JP"/>
+              <a:t>3 </a:t>
+            </a:r>
+            <a:r>
+              <a:rPr kumimoji="1" lang="ja-JP" altLang="en-US"/>
+              <a:t>レベル</a:t>
+            </a:r>
+          </a:p>
+          <a:p>
+            <a:pPr lvl="3"/>
+            <a:r>
+              <a:rPr kumimoji="1" lang="ja-JP" altLang="en-US"/>
+              <a:t>第 </a:t>
+            </a:r>
+            <a:r>
+              <a:rPr kumimoji="1" lang="en-US" altLang="ja-JP"/>
+              <a:t>4 </a:t>
+            </a:r>
+            <a:r>
+              <a:rPr kumimoji="1" lang="ja-JP" altLang="en-US"/>
+              <a:t>レベル</a:t>
+            </a:r>
+          </a:p>
+          <a:p>
+            <a:pPr lvl="4"/>
+            <a:r>
+              <a:rPr kumimoji="1" lang="ja-JP" altLang="en-US"/>
+              <a:t>第 </a:t>
+            </a:r>
+            <a:r>
+              <a:rPr kumimoji="1" lang="en-US" altLang="ja-JP"/>
+              <a:t>5 </a:t>
+            </a:r>
+            <a:r>
+              <a:rPr kumimoji="1" lang="ja-JP" altLang="en-US"/>
+              <a:t>レベル</a:t>
+            </a:r>
+          </a:p>
+        </p:txBody>
+      </p:sp>
+      <p:sp>
+        <p:nvSpPr>
+          <p:cNvPr id="10" name="slot__event_5_combined_text">
+            <a:extLst>
+              <a:ext uri="{FF2B5EF4-FFF2-40B4-BE49-F238E27FC236}">
+                <a16:creationId xmlns:a16="http://schemas.microsoft.com/office/drawing/2014/main" id="{9972CBED-8C1F-F962-DF1D-46CEC7DCCBC5}"/>
+              </a:ext>
+            </a:extLst>
+          </p:cNvPr>
+          <p:cNvSpPr>
+            <a:spLocks noGrp="1"/>
+          </p:cNvSpPr>
+          <p:nvPr>
+            <p:ph sz="quarter" idx="17" type="obj"/>
+          </p:nvPr>
+        </p:nvSpPr>
+        <p:spPr>
+          <a:xfrm>
+            <a:off x="1219200" y="4581144"/>
+            <a:ext cx="10607040" cy="699516"/>
+          </a:xfrm>
+        </p:spPr>
+        <p:txBody>
+          <a:bodyPr/>
+          <a:lstStyle/>
+          <a:p>
+            <a:pPr lvl="0"/>
+            <a:r>
+              <a:rPr kumimoji="1" lang="ja-JP" altLang="en-US"/>
+              <a:t>マスター テキストの書式設定</a:t>
+            </a:r>
+          </a:p>
+          <a:p>
+            <a:pPr lvl="1"/>
+            <a:r>
+              <a:rPr kumimoji="1" lang="ja-JP" altLang="en-US"/>
+              <a:t>第 </a:t>
+            </a:r>
+            <a:r>
+              <a:rPr kumimoji="1" lang="en-US" altLang="ja-JP"/>
+              <a:t>2 </a:t>
+            </a:r>
+            <a:r>
+              <a:rPr kumimoji="1" lang="ja-JP" altLang="en-US"/>
+              <a:t>レベル</a:t>
+            </a:r>
+          </a:p>
+          <a:p>
+            <a:pPr lvl="2"/>
+            <a:r>
+              <a:rPr kumimoji="1" lang="ja-JP" altLang="en-US"/>
+              <a:t>第 </a:t>
+            </a:r>
+            <a:r>
+              <a:rPr kumimoji="1" lang="en-US" altLang="ja-JP"/>
+              <a:t>3 </a:t>
+            </a:r>
+            <a:r>
+              <a:rPr kumimoji="1" lang="ja-JP" altLang="en-US"/>
+              <a:t>レベル</a:t>
+            </a:r>
+          </a:p>
+          <a:p>
+            <a:pPr lvl="3"/>
+            <a:r>
+              <a:rPr kumimoji="1" lang="ja-JP" altLang="en-US"/>
+              <a:t>第 </a:t>
+            </a:r>
+            <a:r>
+              <a:rPr kumimoji="1" lang="en-US" altLang="ja-JP"/>
+              <a:t>4 </a:t>
+            </a:r>
+            <a:r>
+              <a:rPr kumimoji="1" lang="ja-JP" altLang="en-US"/>
+              <a:t>レベル</a:t>
+            </a:r>
+          </a:p>
+          <a:p>
+            <a:pPr lvl="4"/>
+            <a:r>
+              <a:rPr kumimoji="1" lang="ja-JP" altLang="en-US"/>
+              <a:t>第 </a:t>
+            </a:r>
+            <a:r>
+              <a:rPr kumimoji="1" lang="en-US" altLang="ja-JP"/>
+              <a:t>5 </a:t>
+            </a:r>
+            <a:r>
+              <a:rPr kumimoji="1" lang="ja-JP" altLang="en-US"/>
+              <a:t>レベル</a:t>
+            </a:r>
+          </a:p>
+        </p:txBody>
+      </p:sp>
+      <p:sp>
+        <p:nvSpPr>
+          <p:cNvPr id="11" name="slot__event_6_combined_text">
+            <a:extLst>
+              <a:ext uri="{FF2B5EF4-FFF2-40B4-BE49-F238E27FC236}">
+                <a16:creationId xmlns:a16="http://schemas.microsoft.com/office/drawing/2014/main" id="{9972CBED-8C1F-F962-DF1D-46CEC7DCCBC5}"/>
+              </a:ext>
+            </a:extLst>
+          </p:cNvPr>
+          <p:cNvSpPr>
+            <a:spLocks noGrp="1"/>
+          </p:cNvSpPr>
+          <p:nvPr>
+            <p:ph sz="quarter" idx="18" type="obj"/>
+          </p:nvPr>
+        </p:nvSpPr>
+        <p:spPr>
+          <a:xfrm>
+            <a:off x="1219200" y="5431536"/>
+            <a:ext cx="10607040" cy="699516"/>
+          </a:xfrm>
+        </p:spPr>
+        <p:txBody>
+          <a:bodyPr/>
+          <a:lstStyle/>
+          <a:p>
+            <a:pPr lvl="0"/>
+            <a:r>
+              <a:rPr kumimoji="1" lang="ja-JP" altLang="en-US"/>
+              <a:t>マスター テキストの書式設定</a:t>
+            </a:r>
+          </a:p>
+          <a:p>
+            <a:pPr lvl="1"/>
+            <a:r>
+              <a:rPr kumimoji="1" lang="ja-JP" altLang="en-US"/>
+              <a:t>第 </a:t>
+            </a:r>
+            <a:r>
+              <a:rPr kumimoji="1" lang="en-US" altLang="ja-JP"/>
+              <a:t>2 </a:t>
+            </a:r>
+            <a:r>
+              <a:rPr kumimoji="1" lang="ja-JP" altLang="en-US"/>
+              <a:t>レベル</a:t>
+            </a:r>
+          </a:p>
+          <a:p>
+            <a:pPr lvl="2"/>
+            <a:r>
+              <a:rPr kumimoji="1" lang="ja-JP" altLang="en-US"/>
+              <a:t>第 </a:t>
+            </a:r>
+            <a:r>
+              <a:rPr kumimoji="1" lang="en-US" altLang="ja-JP"/>
+              <a:t>3 </a:t>
+            </a:r>
+            <a:r>
+              <a:rPr kumimoji="1" lang="ja-JP" altLang="en-US"/>
+              <a:t>レベル</a:t>
+            </a:r>
+          </a:p>
+          <a:p>
+            <a:pPr lvl="3"/>
+            <a:r>
+              <a:rPr kumimoji="1" lang="ja-JP" altLang="en-US"/>
+              <a:t>第 </a:t>
+            </a:r>
+            <a:r>
+              <a:rPr kumimoji="1" lang="en-US" altLang="ja-JP"/>
+              <a:t>4 </a:t>
+            </a:r>
+            <a:r>
+              <a:rPr kumimoji="1" lang="ja-JP" altLang="en-US"/>
+              <a:t>レベル</a:t>
+            </a:r>
+          </a:p>
+          <a:p>
+            <a:pPr lvl="4"/>
+            <a:r>
+              <a:rPr kumimoji="1" lang="ja-JP" altLang="en-US"/>
+              <a:t>第 </a:t>
+            </a:r>
+            <a:r>
+              <a:rPr kumimoji="1" lang="en-US" altLang="ja-JP"/>
+              <a:t>5 </a:t>
+            </a:r>
+            <a:r>
+              <a:rPr kumimoji="1" lang="ja-JP" altLang="en-US"/>
+              <a:t>レベル</a:t>
+            </a:r>
           </a:p>
         </p:txBody>
       </p:sp>
@@ -2818,8 +5182,8 @@
 </file>
 
 <file path=ppt/slideLayouts/slideLayout8.xml><?xml version="1.0" encoding="utf-8"?>
-<p:sldLayout xmlns:a="http://schemas.openxmlformats.org/drawingml/2006/main" xmlns:r="http://schemas.openxmlformats.org/officeDocument/2006/relationships" xmlns:p="http://schemas.openxmlformats.org/presentationml/2006/main" preserve="1" userDrawn="1">
-  <p:cSld name="Content with Caption">
+<p:sldLayout xmlns:a="http://schemas.openxmlformats.org/drawingml/2006/main" xmlns:r="http://schemas.openxmlformats.org/officeDocument/2006/relationships" xmlns:p="http://schemas.openxmlformats.org/presentationml/2006/main" preserve="1" userDrawn="1" type="cust">
+  <p:cSld name="appendix_backup">
     <p:bg>
       <p:bgPr>
         <a:solidFill>
@@ -2844,72 +5208,99 @@
       </p:grpSpPr>
       <p:sp>
         <p:nvSpPr>
-          <p:cNvPr id="4" name="Text Placeholder 3"/>
-          <p:cNvSpPr>
-            <a:spLocks noGrp="1"/>
-          </p:cNvSpPr>
-          <p:nvPr>
-            <p:ph type="body" sz="half" idx="2"/>
-          </p:nvPr>
-        </p:nvSpPr>
-        <p:spPr>
-          <a:xfrm>
-            <a:off x="265702" y="1419498"/>
-            <a:ext cx="3383189" cy="4706666"/>
-          </a:xfrm>
-        </p:spPr>
-        <p:txBody>
-          <a:bodyPr/>
-          <a:lstStyle>
-            <a:lvl1pPr marL="0" indent="0">
-              <a:buNone/>
-              <a:defRPr sz="1400"/>
-            </a:lvl1pPr>
-            <a:lvl2pPr marL="457200" indent="0">
-              <a:buNone/>
-              <a:defRPr sz="1200"/>
-            </a:lvl2pPr>
-            <a:lvl3pPr marL="914400" indent="0">
-              <a:buNone/>
-              <a:defRPr sz="1000"/>
-            </a:lvl3pPr>
-            <a:lvl4pPr marL="1371600" indent="0">
-              <a:buNone/>
-              <a:defRPr sz="900"/>
-            </a:lvl4pPr>
-            <a:lvl5pPr marL="1828800" indent="0">
-              <a:buNone/>
-              <a:defRPr sz="900"/>
-            </a:lvl5pPr>
-            <a:lvl6pPr marL="2286000" indent="0">
-              <a:buNone/>
-              <a:defRPr sz="900"/>
-            </a:lvl6pPr>
-            <a:lvl7pPr marL="2743200" indent="0">
-              <a:buNone/>
-              <a:defRPr sz="900"/>
-            </a:lvl7pPr>
-            <a:lvl8pPr marL="3200400" indent="0">
-              <a:buNone/>
-              <a:defRPr sz="900"/>
-            </a:lvl8pPr>
-            <a:lvl9pPr marL="3657600" indent="0">
-              <a:buNone/>
-              <a:defRPr sz="900"/>
-            </a:lvl9pPr>
-          </a:lstStyle>
-          <a:p>
-            <a:pPr lvl="0"/>
-            <a:r>
-              <a:rPr lang="en-US" dirty="0"/>
-              <a:t>Click to edit Master text styles</a:t>
-            </a:r>
-          </a:p>
-        </p:txBody>
-      </p:sp>
-      <p:sp>
-        <p:nvSpPr>
-          <p:cNvPr id="5" name="Date Placeholder 4"/>
+          <p:cNvPr id="200" name="deco_top_accent"/>
+          <p:cNvSpPr>
+            <a:spLocks noGrp="1"/>
+          </p:cNvSpPr>
+          <p:nvPr/>
+        </p:nvSpPr>
+        <p:spPr>
+          <a:xfrm>
+            <a:off x="341376" y="1268730"/>
+            <a:ext cx="11509248" cy="54864"/>
+          </a:xfrm>
+          <a:prstGeom prst="rect">
+            <a:avLst/>
+          </a:prstGeom>
+          <a:solidFill>
+            <a:srgbClr val="1C3557"/>
+          </a:solidFill>
+          <a:ln>
+            <a:noFill/>
+          </a:ln>
+        </p:spPr>
+        <p:txBody>
+          <a:bodyPr/>
+          <a:lstStyle/>
+          <a:p/>
+        </p:txBody>
+      </p:sp>
+      <p:sp>
+        <p:nvSpPr>
+          <p:cNvPr id="201" name="deco_col_divider"/>
+          <p:cNvSpPr>
+            <a:spLocks noGrp="1"/>
+          </p:cNvSpPr>
+          <p:nvPr/>
+        </p:nvSpPr>
+        <p:spPr>
+          <a:xfrm>
+            <a:off x="5925312" y="1337310"/>
+            <a:ext cx="170688" cy="4354830"/>
+          </a:xfrm>
+          <a:prstGeom prst="rect">
+            <a:avLst/>
+          </a:prstGeom>
+          <a:solidFill>
+            <a:srgbClr val="BFD4EF"/>
+          </a:solidFill>
+          <a:ln>
+            <a:noFill/>
+          </a:ln>
+        </p:spPr>
+        <p:txBody>
+          <a:bodyPr/>
+          <a:lstStyle/>
+          <a:p/>
+        </p:txBody>
+      </p:sp>
+      <p:sp>
+        <p:nvSpPr>
+          <p:cNvPr id="8" name="タイトル 7">
+            <a:extLst>
+              <a:ext uri="{FF2B5EF4-FFF2-40B4-BE49-F238E27FC236}">
+                <a16:creationId xmlns:a16="http://schemas.microsoft.com/office/drawing/2014/main" id="{8A4D2959-DC66-A124-52B8-8E8467A7D32E}"/>
+              </a:ext>
+            </a:extLst>
+          </p:cNvPr>
+          <p:cNvSpPr>
+            <a:spLocks noGrp="1"/>
+          </p:cNvSpPr>
+          <p:nvPr>
+            <p:ph type="title"/>
+          </p:nvPr>
+        </p:nvSpPr>
+        <p:spPr/>
+        <p:txBody>
+          <a:bodyPr/>
+          <a:lstStyle/>
+          <a:p>
+            <a:r>
+              <a:rPr kumimoji="1" lang="ja-JP" altLang="en-US"/>
+              <a:t>マスター タイトルの書式設定</a:t>
+            </a:r>
+          </a:p>
+        </p:txBody>
+      </p:sp>
+      <p:sp>
+        <p:nvSpPr>
+          <p:cNvPr id="9" name="日付プレースホルダー 8">
+            <a:extLst>
+              <a:ext uri="{FF2B5EF4-FFF2-40B4-BE49-F238E27FC236}">
+                <a16:creationId xmlns:a16="http://schemas.microsoft.com/office/drawing/2014/main" id="{AC78EFE3-FFBC-52AC-793F-A5AC5CEFBAE0}"/>
+              </a:ext>
+            </a:extLst>
+          </p:cNvPr>
           <p:cNvSpPr>
             <a:spLocks noGrp="1"/>
           </p:cNvSpPr>
@@ -2932,7 +5323,13 @@
       </p:sp>
       <p:sp>
         <p:nvSpPr>
-          <p:cNvPr id="6" name="Footer Placeholder 5"/>
+          <p:cNvPr id="10" name="フッター プレースホルダー 9">
+            <a:extLst>
+              <a:ext uri="{FF2B5EF4-FFF2-40B4-BE49-F238E27FC236}">
+                <a16:creationId xmlns:a16="http://schemas.microsoft.com/office/drawing/2014/main" id="{2885C4CB-8898-EE25-076E-20BC39DFAA4B}"/>
+              </a:ext>
+            </a:extLst>
+          </p:cNvPr>
           <p:cNvSpPr>
             <a:spLocks noGrp="1"/>
           </p:cNvSpPr>
@@ -2945,13 +5342,19 @@
           <a:bodyPr/>
           <a:lstStyle/>
           <a:p>
-            <a:endParaRPr lang="en-US"/>
-          </a:p>
-        </p:txBody>
-      </p:sp>
-      <p:sp>
-        <p:nvSpPr>
-          <p:cNvPr id="7" name="Slide Number Placeholder 6"/>
+            <a:endParaRPr lang="en-US" dirty="0"/>
+          </a:p>
+        </p:txBody>
+      </p:sp>
+      <p:sp>
+        <p:nvSpPr>
+          <p:cNvPr id="11" name="スライド番号プレースホルダー 10">
+            <a:extLst>
+              <a:ext uri="{FF2B5EF4-FFF2-40B4-BE49-F238E27FC236}">
+                <a16:creationId xmlns:a16="http://schemas.microsoft.com/office/drawing/2014/main" id="{79D36539-24EF-59E1-CB5B-33D4B26D742C}"/>
+              </a:ext>
+            </a:extLst>
+          </p:cNvPr>
           <p:cNvSpPr>
             <a:spLocks noGrp="1"/>
           </p:cNvSpPr>
@@ -2974,10 +5377,10 @@
       </p:sp>
       <p:sp>
         <p:nvSpPr>
-          <p:cNvPr id="8" name="タイトル 7">
+          <p:cNvPr id="13" name="slot__body">
             <a:extLst>
               <a:ext uri="{FF2B5EF4-FFF2-40B4-BE49-F238E27FC236}">
-                <a16:creationId xmlns:a16="http://schemas.microsoft.com/office/drawing/2014/main" id="{4F013160-CF05-FC39-74BC-3B8CEFD40EB3}"/>
+                <a16:creationId xmlns:a16="http://schemas.microsoft.com/office/drawing/2014/main" id="{23D794FD-7998-B263-7A33-0D9A529D97EE}"/>
               </a:ext>
             </a:extLst>
           </p:cNvPr>
@@ -2985,36 +5388,93 @@
             <a:spLocks noGrp="1"/>
           </p:cNvSpPr>
           <p:nvPr>
-            <p:ph type="title"/>
-          </p:nvPr>
-        </p:nvSpPr>
-        <p:spPr>
-          <a:xfrm>
-            <a:off x="265702" y="231291"/>
-            <a:ext cx="3383189" cy="973621"/>
-          </a:xfrm>
-        </p:spPr>
-        <p:txBody>
-          <a:bodyPr/>
-          <a:lstStyle>
-            <a:lvl1pPr>
-              <a:defRPr sz="1800"/>
-            </a:lvl1pPr>
-          </a:lstStyle>
-          <a:p>
-            <a:r>
-              <a:rPr kumimoji="1" lang="ja-JP" altLang="en-US"/>
-              <a:t>マスター タイトルの書式設定</a:t>
-            </a:r>
-          </a:p>
-        </p:txBody>
-      </p:sp>
-      <p:sp>
-        <p:nvSpPr>
-          <p:cNvPr id="10" name="コンテンツ プレースホルダー 9">
+            <p:ph sz="quarter" idx="13" type="obj"/>
+          </p:nvPr>
+        </p:nvSpPr>
+        <p:spPr>
+          <a:xfrm>
+            <a:off x="426720" y="1405890"/>
+            <a:ext cx="5242560" cy="4286250"/>
+          </a:xfrm>
+        </p:spPr>
+        <p:txBody>
+          <a:bodyPr/>
+          <a:lstStyle/>
+          <a:p>
+            <a:pPr lvl="0"/>
+            <a:r>
+              <a:rPr kumimoji="1" lang="ja-JP" altLang="en-US"/>
+              <a:t>マスター テキストの書式設定</a:t>
+            </a:r>
+          </a:p>
+          <a:p>
+            <a:pPr lvl="1"/>
+            <a:r>
+              <a:rPr kumimoji="1" lang="ja-JP" altLang="en-US"/>
+              <a:t>第 </a:t>
+            </a:r>
+            <a:r>
+              <a:rPr kumimoji="1" lang="en-US" altLang="ja-JP"/>
+              <a:t>2 </a:t>
+            </a:r>
+            <a:r>
+              <a:rPr kumimoji="1" lang="ja-JP" altLang="en-US"/>
+              <a:t>レベル</a:t>
+            </a:r>
+          </a:p>
+          <a:p>
+            <a:pPr lvl="2"/>
+            <a:r>
+              <a:rPr kumimoji="1" lang="ja-JP" altLang="en-US"/>
+              <a:t>第 </a:t>
+            </a:r>
+            <a:r>
+              <a:rPr kumimoji="1" lang="en-US" altLang="ja-JP"/>
+              <a:t>3 </a:t>
+            </a:r>
+            <a:r>
+              <a:rPr kumimoji="1" lang="ja-JP" altLang="en-US"/>
+              <a:t>レベル</a:t>
+            </a:r>
+          </a:p>
+          <a:p>
+            <a:pPr lvl="3"/>
+            <a:r>
+              <a:rPr kumimoji="1" lang="ja-JP" altLang="en-US"/>
+              <a:t>第 </a:t>
+            </a:r>
+            <a:r>
+              <a:rPr kumimoji="1" lang="en-US" altLang="ja-JP"/>
+              <a:t>4 </a:t>
+            </a:r>
+            <a:r>
+              <a:rPr kumimoji="1" lang="ja-JP" altLang="en-US"/>
+              <a:t>レベル</a:t>
+            </a:r>
+          </a:p>
+          <a:p>
+            <a:pPr lvl="4"/>
+            <a:r>
+              <a:rPr kumimoji="1" lang="ja-JP" altLang="en-US"/>
+              <a:t>第 </a:t>
+            </a:r>
+            <a:r>
+              <a:rPr kumimoji="1" lang="en-US" altLang="ja-JP"/>
+              <a:t>5 </a:t>
+            </a:r>
+            <a:r>
+              <a:rPr kumimoji="1" lang="ja-JP" altLang="en-US"/>
+              <a:t>レベル</a:t>
+            </a:r>
+          </a:p>
+        </p:txBody>
+      </p:sp>
+      <p:sp>
+        <p:nvSpPr>
+          <p:cNvPr id="15" name="slot__references">
             <a:extLst>
               <a:ext uri="{FF2B5EF4-FFF2-40B4-BE49-F238E27FC236}">
-                <a16:creationId xmlns:a16="http://schemas.microsoft.com/office/drawing/2014/main" id="{EABDED12-0D42-4603-CB2B-383FF79C3B92}"/>
+                <a16:creationId xmlns:a16="http://schemas.microsoft.com/office/drawing/2014/main" id="{CE5D3923-D828-BFFF-25F1-02538CEB89C0}"/>
               </a:ext>
             </a:extLst>
           </p:cNvPr>
@@ -3022,13 +5482,13 @@
             <a:spLocks noGrp="1"/>
           </p:cNvSpPr>
           <p:nvPr>
-            <p:ph sz="quarter" idx="13"/>
-          </p:nvPr>
-        </p:nvSpPr>
-        <p:spPr>
-          <a:xfrm>
-            <a:off x="3858214" y="231290"/>
-            <a:ext cx="8068084" cy="5894873"/>
+            <p:ph sz="quarter" idx="14" type="obj"/>
+          </p:nvPr>
+        </p:nvSpPr>
+        <p:spPr>
+          <a:xfrm>
+            <a:off x="6278880" y="1405890"/>
+            <a:ext cx="5486400" cy="4286250"/>
           </a:xfrm>
         </p:spPr>
         <p:txBody>

--- a/templates/default.pptx
+++ b/templates/default.pptx
@@ -487,8 +487,8 @@
 </file>
 
 <file path=ppt/slideLayouts/slideLayout10.xml><?xml version="1.0" encoding="utf-8"?>
-<p:sldLayout xmlns:a="http://schemas.openxmlformats.org/drawingml/2006/main" xmlns:r="http://schemas.openxmlformats.org/officeDocument/2006/relationships" xmlns:p="http://schemas.openxmlformats.org/presentationml/2006/main" preserve="1" userDrawn="1" type="cust">
-  <p:cSld name="three_cards_horizontal">
+<p:sldLayout xmlns:a="http://schemas.openxmlformats.org/drawingml/2006/main" xmlns:r="http://schemas.openxmlformats.org/officeDocument/2006/relationships" xmlns:p="http://schemas.openxmlformats.org/presentationml/2006/main" preserve="1" userDrawn="1">
+  <p:cSld name="Title and Vertical Text">
     <p:bg>
       <p:bgPr>
         <a:solidFill>
@@ -513,307 +513,58 @@
       </p:grpSpPr>
       <p:sp>
         <p:nvSpPr>
-          <p:cNvPr id="200" name="deco_h_card1_bg"/>
-          <p:cNvSpPr>
-            <a:spLocks noGrp="1"/>
-          </p:cNvSpPr>
-          <p:nvPr/>
-        </p:nvSpPr>
-        <p:spPr>
-          <a:xfrm>
-            <a:off x="365760" y="980694"/>
-            <a:ext cx="3474720" cy="5472684"/>
-          </a:xfrm>
-          <a:prstGeom prst="rect">
-            <a:avLst/>
-          </a:prstGeom>
-          <a:solidFill>
-            <a:srgbClr val="E8F2FB"/>
-          </a:solidFill>
-          <a:ln>
-            <a:noFill/>
-          </a:ln>
-        </p:spPr>
-        <p:txBody>
-          <a:bodyPr/>
-          <a:lstStyle/>
-          <a:p/>
-        </p:txBody>
-      </p:sp>
-      <p:sp>
-        <p:nvSpPr>
-          <p:cNvPr id="201" name="deco_h_card1_hdr"/>
-          <p:cNvSpPr>
-            <a:spLocks noGrp="1"/>
-          </p:cNvSpPr>
-          <p:nvPr/>
-        </p:nvSpPr>
-        <p:spPr>
-          <a:xfrm>
-            <a:off x="365760" y="980694"/>
-            <a:ext cx="3474720" cy="1028700"/>
-          </a:xfrm>
-          <a:prstGeom prst="rect">
-            <a:avLst/>
-          </a:prstGeom>
-          <a:solidFill>
-            <a:srgbClr val="1C3557"/>
-          </a:solidFill>
-          <a:ln>
-            <a:noFill/>
-          </a:ln>
-        </p:spPr>
-        <p:txBody>
-          <a:bodyPr/>
-          <a:lstStyle/>
-          <a:p/>
-        </p:txBody>
-      </p:sp>
-      <p:sp>
-        <p:nvSpPr>
-          <p:cNvPr id="202" name="deco_h_card1_acc"/>
-          <p:cNvSpPr>
-            <a:spLocks noGrp="1"/>
-          </p:cNvSpPr>
-          <p:nvPr/>
-        </p:nvSpPr>
-        <p:spPr>
-          <a:xfrm>
-            <a:off x="365760" y="980694"/>
-            <a:ext cx="3474720" cy="48006"/>
-          </a:xfrm>
-          <a:prstGeom prst="rect">
-            <a:avLst/>
-          </a:prstGeom>
-          <a:solidFill>
-            <a:srgbClr val="E8763A"/>
-          </a:solidFill>
-          <a:ln>
-            <a:noFill/>
-          </a:ln>
-        </p:spPr>
-        <p:txBody>
-          <a:bodyPr/>
-          <a:lstStyle/>
-          <a:p/>
-        </p:txBody>
-      </p:sp>
-      <p:sp>
-        <p:nvSpPr>
-          <p:cNvPr id="203" name="deco_h_card2_bg"/>
-          <p:cNvSpPr>
-            <a:spLocks noGrp="1"/>
-          </p:cNvSpPr>
-          <p:nvPr/>
-        </p:nvSpPr>
-        <p:spPr>
-          <a:xfrm>
-            <a:off x="4364736" y="980694"/>
-            <a:ext cx="3474720" cy="5472684"/>
-          </a:xfrm>
-          <a:prstGeom prst="rect">
-            <a:avLst/>
-          </a:prstGeom>
-          <a:solidFill>
-            <a:srgbClr val="E8F2FB"/>
-          </a:solidFill>
-          <a:ln>
-            <a:noFill/>
-          </a:ln>
-        </p:spPr>
-        <p:txBody>
-          <a:bodyPr/>
-          <a:lstStyle/>
-          <a:p/>
-        </p:txBody>
-      </p:sp>
-      <p:sp>
-        <p:nvSpPr>
-          <p:cNvPr id="204" name="deco_h_card2_hdr"/>
-          <p:cNvSpPr>
-            <a:spLocks noGrp="1"/>
-          </p:cNvSpPr>
-          <p:nvPr/>
-        </p:nvSpPr>
-        <p:spPr>
-          <a:xfrm>
-            <a:off x="4364736" y="980694"/>
-            <a:ext cx="3474720" cy="1028700"/>
-          </a:xfrm>
-          <a:prstGeom prst="rect">
-            <a:avLst/>
-          </a:prstGeom>
-          <a:solidFill>
-            <a:srgbClr val="1C3557"/>
-          </a:solidFill>
-          <a:ln>
-            <a:noFill/>
-          </a:ln>
-        </p:spPr>
-        <p:txBody>
-          <a:bodyPr/>
-          <a:lstStyle/>
-          <a:p/>
-        </p:txBody>
-      </p:sp>
-      <p:sp>
-        <p:nvSpPr>
-          <p:cNvPr id="205" name="deco_h_card2_acc"/>
-          <p:cNvSpPr>
-            <a:spLocks noGrp="1"/>
-          </p:cNvSpPr>
-          <p:nvPr/>
-        </p:nvSpPr>
-        <p:spPr>
-          <a:xfrm>
-            <a:off x="4364736" y="980694"/>
-            <a:ext cx="3474720" cy="48006"/>
-          </a:xfrm>
-          <a:prstGeom prst="rect">
-            <a:avLst/>
-          </a:prstGeom>
-          <a:solidFill>
-            <a:srgbClr val="E8763A"/>
-          </a:solidFill>
-          <a:ln>
-            <a:noFill/>
-          </a:ln>
-        </p:spPr>
-        <p:txBody>
-          <a:bodyPr/>
-          <a:lstStyle/>
-          <a:p/>
-        </p:txBody>
-      </p:sp>
-      <p:sp>
-        <p:nvSpPr>
-          <p:cNvPr id="206" name="deco_h_card3_bg"/>
-          <p:cNvSpPr>
-            <a:spLocks noGrp="1"/>
-          </p:cNvSpPr>
-          <p:nvPr/>
-        </p:nvSpPr>
-        <p:spPr>
-          <a:xfrm>
-            <a:off x="8351520" y="980694"/>
-            <a:ext cx="3474720" cy="5472684"/>
-          </a:xfrm>
-          <a:prstGeom prst="rect">
-            <a:avLst/>
-          </a:prstGeom>
-          <a:solidFill>
-            <a:srgbClr val="E8F2FB"/>
-          </a:solidFill>
-          <a:ln>
-            <a:noFill/>
-          </a:ln>
-        </p:spPr>
-        <p:txBody>
-          <a:bodyPr/>
-          <a:lstStyle/>
-          <a:p/>
-        </p:txBody>
-      </p:sp>
-      <p:sp>
-        <p:nvSpPr>
-          <p:cNvPr id="207" name="deco_h_card3_hdr"/>
-          <p:cNvSpPr>
-            <a:spLocks noGrp="1"/>
-          </p:cNvSpPr>
-          <p:nvPr/>
-        </p:nvSpPr>
-        <p:spPr>
-          <a:xfrm>
-            <a:off x="8351520" y="980694"/>
-            <a:ext cx="3474720" cy="1028700"/>
-          </a:xfrm>
-          <a:prstGeom prst="rect">
-            <a:avLst/>
-          </a:prstGeom>
-          <a:solidFill>
-            <a:srgbClr val="1C3557"/>
-          </a:solidFill>
-          <a:ln>
-            <a:noFill/>
-          </a:ln>
-        </p:spPr>
-        <p:txBody>
-          <a:bodyPr/>
-          <a:lstStyle/>
-          <a:p/>
-        </p:txBody>
-      </p:sp>
-      <p:sp>
-        <p:nvSpPr>
-          <p:cNvPr id="208" name="deco_h_card3_acc"/>
-          <p:cNvSpPr>
-            <a:spLocks noGrp="1"/>
-          </p:cNvSpPr>
-          <p:nvPr/>
-        </p:nvSpPr>
-        <p:spPr>
-          <a:xfrm>
-            <a:off x="8351520" y="980694"/>
-            <a:ext cx="3474720" cy="48006"/>
-          </a:xfrm>
-          <a:prstGeom prst="rect">
-            <a:avLst/>
-          </a:prstGeom>
-          <a:solidFill>
-            <a:srgbClr val="E8763A"/>
-          </a:solidFill>
-          <a:ln>
-            <a:noFill/>
-          </a:ln>
-        </p:spPr>
-        <p:txBody>
-          <a:bodyPr/>
-          <a:lstStyle/>
-          <a:p/>
-        </p:txBody>
-      </p:sp>
-      <p:sp>
-        <p:nvSpPr>
-          <p:cNvPr id="8" name="タイトル 7">
-            <a:extLst>
-              <a:ext uri="{FF2B5EF4-FFF2-40B4-BE49-F238E27FC236}">
-                <a16:creationId xmlns:a16="http://schemas.microsoft.com/office/drawing/2014/main" id="{8A4D2959-DC66-A124-52B8-8E8467A7D32E}"/>
-              </a:ext>
-            </a:extLst>
-          </p:cNvPr>
-          <p:cNvSpPr>
-            <a:spLocks noGrp="1"/>
-          </p:cNvSpPr>
-          <p:nvPr>
-            <p:ph type="title"/>
-          </p:nvPr>
-        </p:nvSpPr>
-        <p:spPr>
-          <a:xfrm>
-            <a:off x="231648" y="219456"/>
-            <a:ext cx="11728704" cy="644652"/>
-          </a:xfrm>
-        </p:spPr>
-        <p:txBody>
-          <a:bodyPr/>
-          <a:lstStyle/>
-          <a:p>
-            <a:r>
-              <a:rPr kumimoji="1" lang="ja-JP" altLang="en-US"/>
-              <a:t>マスター タイトルの書式設定</a:t>
-            </a:r>
-          </a:p>
-        </p:txBody>
-      </p:sp>
-      <p:sp>
-        <p:nvSpPr>
-          <p:cNvPr id="9" name="日付プレースホルダー 8">
-            <a:extLst>
-              <a:ext uri="{FF2B5EF4-FFF2-40B4-BE49-F238E27FC236}">
-                <a16:creationId xmlns:a16="http://schemas.microsoft.com/office/drawing/2014/main" id="{AC78EFE3-FFBC-52AC-793F-A5AC5CEFBAE0}"/>
-              </a:ext>
-            </a:extLst>
-          </p:cNvPr>
+          <p:cNvPr id="3" name="Vertical Text Placeholder 2"/>
+          <p:cNvSpPr>
+            <a:spLocks noGrp="1"/>
+          </p:cNvSpPr>
+          <p:nvPr>
+            <p:ph type="body" orient="vert" idx="1"/>
+          </p:nvPr>
+        </p:nvSpPr>
+        <p:spPr/>
+        <p:txBody>
+          <a:bodyPr vert="eaVert"/>
+          <a:lstStyle/>
+          <a:p>
+            <a:pPr lvl="0"/>
+            <a:r>
+              <a:rPr lang="en-US"/>
+              <a:t>Click to edit Master text styles</a:t>
+            </a:r>
+          </a:p>
+          <a:p>
+            <a:pPr lvl="1"/>
+            <a:r>
+              <a:rPr lang="en-US"/>
+              <a:t>Second level</a:t>
+            </a:r>
+          </a:p>
+          <a:p>
+            <a:pPr lvl="2"/>
+            <a:r>
+              <a:rPr lang="en-US"/>
+              <a:t>Third level</a:t>
+            </a:r>
+          </a:p>
+          <a:p>
+            <a:pPr lvl="3"/>
+            <a:r>
+              <a:rPr lang="en-US"/>
+              <a:t>Fourth level</a:t>
+            </a:r>
+          </a:p>
+          <a:p>
+            <a:pPr lvl="4"/>
+            <a:r>
+              <a:rPr lang="en-US"/>
+              <a:t>Fifth level</a:t>
+            </a:r>
+          </a:p>
+        </p:txBody>
+      </p:sp>
+      <p:sp>
+        <p:nvSpPr>
+          <p:cNvPr id="4" name="Date Placeholder 3"/>
           <p:cNvSpPr>
             <a:spLocks noGrp="1"/>
           </p:cNvSpPr>
@@ -836,13 +587,7 @@
       </p:sp>
       <p:sp>
         <p:nvSpPr>
-          <p:cNvPr id="10" name="フッター プレースホルダー 9">
-            <a:extLst>
-              <a:ext uri="{FF2B5EF4-FFF2-40B4-BE49-F238E27FC236}">
-                <a16:creationId xmlns:a16="http://schemas.microsoft.com/office/drawing/2014/main" id="{2885C4CB-8898-EE25-076E-20BC39DFAA4B}"/>
-              </a:ext>
-            </a:extLst>
-          </p:cNvPr>
+          <p:cNvPr id="5" name="Footer Placeholder 4"/>
           <p:cNvSpPr>
             <a:spLocks noGrp="1"/>
           </p:cNvSpPr>
@@ -855,19 +600,13 @@
           <a:bodyPr/>
           <a:lstStyle/>
           <a:p>
-            <a:endParaRPr lang="en-US" dirty="0"/>
-          </a:p>
-        </p:txBody>
-      </p:sp>
-      <p:sp>
-        <p:nvSpPr>
-          <p:cNvPr id="11" name="スライド番号プレースホルダー 10">
-            <a:extLst>
-              <a:ext uri="{FF2B5EF4-FFF2-40B4-BE49-F238E27FC236}">
-                <a16:creationId xmlns:a16="http://schemas.microsoft.com/office/drawing/2014/main" id="{79D36539-24EF-59E1-CB5B-33D4B26D742C}"/>
-              </a:ext>
-            </a:extLst>
-          </p:cNvPr>
+            <a:endParaRPr lang="en-US"/>
+          </a:p>
+        </p:txBody>
+      </p:sp>
+      <p:sp>
+        <p:nvSpPr>
+          <p:cNvPr id="6" name="Slide Number Placeholder 5"/>
           <p:cNvSpPr>
             <a:spLocks noGrp="1"/>
           </p:cNvSpPr>
@@ -890,10 +629,10 @@
       </p:sp>
       <p:sp>
         <p:nvSpPr>
-          <p:cNvPr id="13" name="slot__card_1_combined_text">
+          <p:cNvPr id="7" name="タイトル 6">
             <a:extLst>
               <a:ext uri="{FF2B5EF4-FFF2-40B4-BE49-F238E27FC236}">
-                <a16:creationId xmlns:a16="http://schemas.microsoft.com/office/drawing/2014/main" id="{23D794FD-7998-B263-7A33-0D9A529D97EE}"/>
+                <a16:creationId xmlns:a16="http://schemas.microsoft.com/office/drawing/2014/main" id="{77F5274A-DA0B-755A-88F2-D3159180EEF9}"/>
               </a:ext>
             </a:extLst>
           </p:cNvPr>
@@ -901,470 +640,18 @@
             <a:spLocks noGrp="1"/>
           </p:cNvSpPr>
           <p:nvPr>
-            <p:ph sz="quarter" idx="13" type="obj"/>
-          </p:nvPr>
-        </p:nvSpPr>
-        <p:spPr>
-          <a:xfrm>
-            <a:off x="463296" y="2064258"/>
-            <a:ext cx="3279648" cy="4389120"/>
-          </a:xfrm>
-        </p:spPr>
-        <p:txBody>
-          <a:bodyPr/>
-          <a:lstStyle/>
-          <a:p>
-            <a:pPr lvl="0"/>
-            <a:r>
-              <a:rPr kumimoji="1" lang="ja-JP" altLang="en-US"/>
-              <a:t>マスター テキストの書式設定</a:t>
-            </a:r>
-          </a:p>
-          <a:p>
-            <a:pPr lvl="1"/>
-            <a:r>
-              <a:rPr kumimoji="1" lang="ja-JP" altLang="en-US"/>
-              <a:t>第 </a:t>
-            </a:r>
-            <a:r>
-              <a:rPr kumimoji="1" lang="en-US" altLang="ja-JP"/>
-              <a:t>2 </a:t>
-            </a:r>
-            <a:r>
-              <a:rPr kumimoji="1" lang="ja-JP" altLang="en-US"/>
-              <a:t>レベル</a:t>
-            </a:r>
-          </a:p>
-          <a:p>
-            <a:pPr lvl="2"/>
-            <a:r>
-              <a:rPr kumimoji="1" lang="ja-JP" altLang="en-US"/>
-              <a:t>第 </a:t>
-            </a:r>
-            <a:r>
-              <a:rPr kumimoji="1" lang="en-US" altLang="ja-JP"/>
-              <a:t>3 </a:t>
-            </a:r>
-            <a:r>
-              <a:rPr kumimoji="1" lang="ja-JP" altLang="en-US"/>
-              <a:t>レベル</a:t>
-            </a:r>
-          </a:p>
-          <a:p>
-            <a:pPr lvl="3"/>
-            <a:r>
-              <a:rPr kumimoji="1" lang="ja-JP" altLang="en-US"/>
-              <a:t>第 </a:t>
-            </a:r>
-            <a:r>
-              <a:rPr kumimoji="1" lang="en-US" altLang="ja-JP"/>
-              <a:t>4 </a:t>
-            </a:r>
-            <a:r>
-              <a:rPr kumimoji="1" lang="ja-JP" altLang="en-US"/>
-              <a:t>レベル</a:t>
-            </a:r>
-          </a:p>
-          <a:p>
-            <a:pPr lvl="4"/>
-            <a:r>
-              <a:rPr kumimoji="1" lang="ja-JP" altLang="en-US"/>
-              <a:t>第 </a:t>
-            </a:r>
-            <a:r>
-              <a:rPr kumimoji="1" lang="en-US" altLang="ja-JP"/>
-              <a:t>5 </a:t>
-            </a:r>
-            <a:r>
-              <a:rPr kumimoji="1" lang="ja-JP" altLang="en-US"/>
-              <a:t>レベル</a:t>
-            </a:r>
-          </a:p>
-        </p:txBody>
-      </p:sp>
-      <p:sp>
-        <p:nvSpPr>
-          <p:cNvPr id="15" name="slot__card_2_combined_text">
-            <a:extLst>
-              <a:ext uri="{FF2B5EF4-FFF2-40B4-BE49-F238E27FC236}">
-                <a16:creationId xmlns:a16="http://schemas.microsoft.com/office/drawing/2014/main" id="{CE5D3923-D828-BFFF-25F1-02538CEB89C0}"/>
-              </a:ext>
-            </a:extLst>
-          </p:cNvPr>
-          <p:cNvSpPr>
-            <a:spLocks noGrp="1"/>
-          </p:cNvSpPr>
-          <p:nvPr>
-            <p:ph sz="quarter" idx="14" type="obj"/>
-          </p:nvPr>
-        </p:nvSpPr>
-        <p:spPr>
-          <a:xfrm>
-            <a:off x="4462272" y="2064258"/>
-            <a:ext cx="3279648" cy="4389120"/>
-          </a:xfrm>
-        </p:spPr>
-        <p:txBody>
-          <a:bodyPr/>
-          <a:lstStyle/>
-          <a:p>
-            <a:pPr lvl="0"/>
-            <a:r>
-              <a:rPr kumimoji="1" lang="ja-JP" altLang="en-US"/>
-              <a:t>マスター テキストの書式設定</a:t>
-            </a:r>
-          </a:p>
-          <a:p>
-            <a:pPr lvl="1"/>
-            <a:r>
-              <a:rPr kumimoji="1" lang="ja-JP" altLang="en-US"/>
-              <a:t>第 </a:t>
-            </a:r>
-            <a:r>
-              <a:rPr kumimoji="1" lang="en-US" altLang="ja-JP"/>
-              <a:t>2 </a:t>
-            </a:r>
-            <a:r>
-              <a:rPr kumimoji="1" lang="ja-JP" altLang="en-US"/>
-              <a:t>レベル</a:t>
-            </a:r>
-          </a:p>
-          <a:p>
-            <a:pPr lvl="2"/>
-            <a:r>
-              <a:rPr kumimoji="1" lang="ja-JP" altLang="en-US"/>
-              <a:t>第 </a:t>
-            </a:r>
-            <a:r>
-              <a:rPr kumimoji="1" lang="en-US" altLang="ja-JP"/>
-              <a:t>3 </a:t>
-            </a:r>
-            <a:r>
-              <a:rPr kumimoji="1" lang="ja-JP" altLang="en-US"/>
-              <a:t>レベル</a:t>
-            </a:r>
-          </a:p>
-          <a:p>
-            <a:pPr lvl="3"/>
-            <a:r>
-              <a:rPr kumimoji="1" lang="ja-JP" altLang="en-US"/>
-              <a:t>第 </a:t>
-            </a:r>
-            <a:r>
-              <a:rPr kumimoji="1" lang="en-US" altLang="ja-JP"/>
-              <a:t>4 </a:t>
-            </a:r>
-            <a:r>
-              <a:rPr kumimoji="1" lang="ja-JP" altLang="en-US"/>
-              <a:t>レベル</a:t>
-            </a:r>
-          </a:p>
-          <a:p>
-            <a:pPr lvl="4"/>
-            <a:r>
-              <a:rPr kumimoji="1" lang="ja-JP" altLang="en-US"/>
-              <a:t>第 </a:t>
-            </a:r>
-            <a:r>
-              <a:rPr kumimoji="1" lang="en-US" altLang="ja-JP"/>
-              <a:t>5 </a:t>
-            </a:r>
-            <a:r>
-              <a:rPr kumimoji="1" lang="ja-JP" altLang="en-US"/>
-              <a:t>レベル</a:t>
-            </a:r>
-          </a:p>
-        </p:txBody>
-      </p:sp>
-      <p:sp>
-        <p:nvSpPr>
-          <p:cNvPr id="16" name="slot__card_3_combined_text">
-            <a:extLst>
-              <a:ext uri="{FF2B5EF4-FFF2-40B4-BE49-F238E27FC236}">
-                <a16:creationId xmlns:a16="http://schemas.microsoft.com/office/drawing/2014/main" id="{CE5D3923-D828-BFFF-25F1-02538CEB89C0}"/>
-              </a:ext>
-            </a:extLst>
-          </p:cNvPr>
-          <p:cNvSpPr>
-            <a:spLocks noGrp="1"/>
-          </p:cNvSpPr>
-          <p:nvPr>
-            <p:ph sz="quarter" idx="15" type="obj"/>
-          </p:nvPr>
-        </p:nvSpPr>
-        <p:spPr>
-          <a:xfrm>
-            <a:off x="8449056" y="2064258"/>
-            <a:ext cx="3279648" cy="4389120"/>
-          </a:xfrm>
-        </p:spPr>
-        <p:txBody>
-          <a:bodyPr/>
-          <a:lstStyle/>
-          <a:p>
-            <a:pPr lvl="0"/>
-            <a:r>
-              <a:rPr kumimoji="1" lang="ja-JP" altLang="en-US"/>
-              <a:t>マスター テキストの書式設定</a:t>
-            </a:r>
-          </a:p>
-          <a:p>
-            <a:pPr lvl="1"/>
-            <a:r>
-              <a:rPr kumimoji="1" lang="ja-JP" altLang="en-US"/>
-              <a:t>第 </a:t>
-            </a:r>
-            <a:r>
-              <a:rPr kumimoji="1" lang="en-US" altLang="ja-JP"/>
-              <a:t>2 </a:t>
-            </a:r>
-            <a:r>
-              <a:rPr kumimoji="1" lang="ja-JP" altLang="en-US"/>
-              <a:t>レベル</a:t>
-            </a:r>
-          </a:p>
-          <a:p>
-            <a:pPr lvl="2"/>
-            <a:r>
-              <a:rPr kumimoji="1" lang="ja-JP" altLang="en-US"/>
-              <a:t>第 </a:t>
-            </a:r>
-            <a:r>
-              <a:rPr kumimoji="1" lang="en-US" altLang="ja-JP"/>
-              <a:t>3 </a:t>
-            </a:r>
-            <a:r>
-              <a:rPr kumimoji="1" lang="ja-JP" altLang="en-US"/>
-              <a:t>レベル</a:t>
-            </a:r>
-          </a:p>
-          <a:p>
-            <a:pPr lvl="3"/>
-            <a:r>
-              <a:rPr kumimoji="1" lang="ja-JP" altLang="en-US"/>
-              <a:t>第 </a:t>
-            </a:r>
-            <a:r>
-              <a:rPr kumimoji="1" lang="en-US" altLang="ja-JP"/>
-              <a:t>4 </a:t>
-            </a:r>
-            <a:r>
-              <a:rPr kumimoji="1" lang="ja-JP" altLang="en-US"/>
-              <a:t>レベル</a:t>
-            </a:r>
-          </a:p>
-          <a:p>
-            <a:pPr lvl="4"/>
-            <a:r>
-              <a:rPr kumimoji="1" lang="ja-JP" altLang="en-US"/>
-              <a:t>第 </a:t>
-            </a:r>
-            <a:r>
-              <a:rPr kumimoji="1" lang="en-US" altLang="ja-JP"/>
-              <a:t>5 </a:t>
-            </a:r>
-            <a:r>
-              <a:rPr kumimoji="1" lang="ja-JP" altLang="en-US"/>
-              <a:t>レベル</a:t>
-            </a:r>
-          </a:p>
-        </p:txBody>
-      </p:sp>
-      <p:sp>
-        <p:nvSpPr>
-          <p:cNvPr id="17" name="slot__card_1_icon"/>
-          <p:cNvSpPr>
-            <a:spLocks noGrp="1"/>
-          </p:cNvSpPr>
-          <p:nvPr>
-            <p:ph type="pic" idx="16"/>
-          </p:nvPr>
-        </p:nvSpPr>
-        <p:spPr>
-          <a:xfrm>
-            <a:off x="1493520" y="1117854"/>
-            <a:ext cx="1219200" cy="754380"/>
-          </a:xfrm>
-          <a:noFill/>
-          <a:ln>
-            <a:noFill/>
-          </a:ln>
-        </p:spPr>
-        <p:txBody>
-          <a:bodyPr wrap="square" lIns="0" tIns="0" rIns="0" bIns="0" anchor="t"/>
-          <a:lstStyle>
-            <a:lvl1pPr marL="0" indent="0">
-              <a:buNone/>
-              <a:defRPr sz="3200"/>
-            </a:lvl1pPr>
-            <a:lvl2pPr marL="457200" indent="0">
-              <a:buNone/>
-              <a:defRPr sz="2800"/>
-            </a:lvl2pPr>
-            <a:lvl3pPr marL="914400" indent="0">
-              <a:buNone/>
-              <a:defRPr sz="2400"/>
-            </a:lvl3pPr>
-            <a:lvl4pPr marL="1371600" indent="0">
-              <a:buNone/>
-              <a:defRPr sz="2000"/>
-            </a:lvl4pPr>
-            <a:lvl5pPr marL="1828800" indent="0">
-              <a:buNone/>
-              <a:defRPr sz="2000"/>
-            </a:lvl5pPr>
-            <a:lvl6pPr marL="2286000" indent="0">
-              <a:buNone/>
-              <a:defRPr sz="2000"/>
-            </a:lvl6pPr>
-            <a:lvl7pPr marL="2743200" indent="0">
-              <a:buNone/>
-              <a:defRPr sz="2000"/>
-            </a:lvl7pPr>
-            <a:lvl8pPr marL="3200400" indent="0">
-              <a:buNone/>
-              <a:defRPr sz="2000"/>
-            </a:lvl8pPr>
-            <a:lvl9pPr marL="3657600" indent="0">
-              <a:buNone/>
-              <a:defRPr sz="2000"/>
-            </a:lvl9pPr>
-          </a:lstStyle>
-          <a:p>
-            <a:pPr algn="l"/>
-            <a:endParaRPr lang="en-US"/>
-          </a:p>
-        </p:txBody>
-      </p:sp>
-      <p:sp>
-        <p:nvSpPr>
-          <p:cNvPr id="18" name="slot__card_2_icon"/>
-          <p:cNvSpPr>
-            <a:spLocks noGrp="1"/>
-          </p:cNvSpPr>
-          <p:nvPr>
-            <p:ph type="pic" idx="17"/>
-          </p:nvPr>
-        </p:nvSpPr>
-        <p:spPr>
-          <a:xfrm>
-            <a:off x="5492496" y="1117854"/>
-            <a:ext cx="1219200" cy="754380"/>
-          </a:xfrm>
-          <a:noFill/>
-          <a:ln>
-            <a:noFill/>
-          </a:ln>
-        </p:spPr>
-        <p:txBody>
-          <a:bodyPr wrap="square" lIns="0" tIns="0" rIns="0" bIns="0" anchor="t"/>
-          <a:lstStyle>
-            <a:lvl1pPr marL="0" indent="0">
-              <a:buNone/>
-              <a:defRPr sz="3200"/>
-            </a:lvl1pPr>
-            <a:lvl2pPr marL="457200" indent="0">
-              <a:buNone/>
-              <a:defRPr sz="2800"/>
-            </a:lvl2pPr>
-            <a:lvl3pPr marL="914400" indent="0">
-              <a:buNone/>
-              <a:defRPr sz="2400"/>
-            </a:lvl3pPr>
-            <a:lvl4pPr marL="1371600" indent="0">
-              <a:buNone/>
-              <a:defRPr sz="2000"/>
-            </a:lvl4pPr>
-            <a:lvl5pPr marL="1828800" indent="0">
-              <a:buNone/>
-              <a:defRPr sz="2000"/>
-            </a:lvl5pPr>
-            <a:lvl6pPr marL="2286000" indent="0">
-              <a:buNone/>
-              <a:defRPr sz="2000"/>
-            </a:lvl6pPr>
-            <a:lvl7pPr marL="2743200" indent="0">
-              <a:buNone/>
-              <a:defRPr sz="2000"/>
-            </a:lvl7pPr>
-            <a:lvl8pPr marL="3200400" indent="0">
-              <a:buNone/>
-              <a:defRPr sz="2000"/>
-            </a:lvl8pPr>
-            <a:lvl9pPr marL="3657600" indent="0">
-              <a:buNone/>
-              <a:defRPr sz="2000"/>
-            </a:lvl9pPr>
-          </a:lstStyle>
-          <a:p>
-            <a:pPr algn="l"/>
-            <a:endParaRPr lang="en-US"/>
-          </a:p>
-        </p:txBody>
-      </p:sp>
-      <p:sp>
-        <p:nvSpPr>
-          <p:cNvPr id="19" name="slot__card_3_icon"/>
-          <p:cNvSpPr>
-            <a:spLocks noGrp="1"/>
-          </p:cNvSpPr>
-          <p:nvPr>
-            <p:ph type="pic" idx="18"/>
-          </p:nvPr>
-        </p:nvSpPr>
-        <p:spPr>
-          <a:xfrm>
-            <a:off x="9479280" y="1117854"/>
-            <a:ext cx="1219200" cy="754380"/>
-          </a:xfrm>
-          <a:noFill/>
-          <a:ln>
-            <a:noFill/>
-          </a:ln>
-        </p:spPr>
-        <p:txBody>
-          <a:bodyPr wrap="square" lIns="0" tIns="0" rIns="0" bIns="0" anchor="t"/>
-          <a:lstStyle>
-            <a:lvl1pPr marL="0" indent="0">
-              <a:buNone/>
-              <a:defRPr sz="3200"/>
-            </a:lvl1pPr>
-            <a:lvl2pPr marL="457200" indent="0">
-              <a:buNone/>
-              <a:defRPr sz="2800"/>
-            </a:lvl2pPr>
-            <a:lvl3pPr marL="914400" indent="0">
-              <a:buNone/>
-              <a:defRPr sz="2400"/>
-            </a:lvl3pPr>
-            <a:lvl4pPr marL="1371600" indent="0">
-              <a:buNone/>
-              <a:defRPr sz="2000"/>
-            </a:lvl4pPr>
-            <a:lvl5pPr marL="1828800" indent="0">
-              <a:buNone/>
-              <a:defRPr sz="2000"/>
-            </a:lvl5pPr>
-            <a:lvl6pPr marL="2286000" indent="0">
-              <a:buNone/>
-              <a:defRPr sz="2000"/>
-            </a:lvl6pPr>
-            <a:lvl7pPr marL="2743200" indent="0">
-              <a:buNone/>
-              <a:defRPr sz="2000"/>
-            </a:lvl7pPr>
-            <a:lvl8pPr marL="3200400" indent="0">
-              <a:buNone/>
-              <a:defRPr sz="2000"/>
-            </a:lvl8pPr>
-            <a:lvl9pPr marL="3657600" indent="0">
-              <a:buNone/>
-              <a:defRPr sz="2000"/>
-            </a:lvl9pPr>
-          </a:lstStyle>
-          <a:p>
-            <a:pPr algn="l"/>
-            <a:endParaRPr lang="en-US"/>
+            <p:ph type="title"/>
+          </p:nvPr>
+        </p:nvSpPr>
+        <p:spPr/>
+        <p:txBody>
+          <a:bodyPr/>
+          <a:lstStyle/>
+          <a:p>
+            <a:r>
+              <a:rPr kumimoji="1" lang="ja-JP" altLang="en-US"/>
+              <a:t>マスター タイトルの書式設定</a:t>
+            </a:r>
           </a:p>
         </p:txBody>
       </p:sp>
@@ -3770,8 +3057,8 @@
 </file>
 
 <file path=ppt/slideLayouts/slideLayout6.xml><?xml version="1.0" encoding="utf-8"?>
-<p:sldLayout xmlns:a="http://schemas.openxmlformats.org/drawingml/2006/main" xmlns:r="http://schemas.openxmlformats.org/officeDocument/2006/relationships" xmlns:p="http://schemas.openxmlformats.org/presentationml/2006/main" type="cust" preserve="1">
-  <p:cSld name="kpi_big_number">
+<p:sldLayout xmlns:a="http://schemas.openxmlformats.org/drawingml/2006/main" xmlns:r="http://schemas.openxmlformats.org/officeDocument/2006/relationships" xmlns:p="http://schemas.openxmlformats.org/presentationml/2006/main" type="titleOnly" preserve="1">
+  <p:cSld name="Title Only">
     <p:bg>
       <p:bgPr>
         <a:solidFill>
@@ -3796,93 +3083,6 @@
       </p:grpSpPr>
       <p:sp>
         <p:nvSpPr>
-          <p:cNvPr id="200" name="deco_metric_panel"/>
-          <p:cNvSpPr>
-            <a:spLocks noGrp="1"/>
-          </p:cNvSpPr>
-          <p:nvPr/>
-        </p:nvSpPr>
-        <p:spPr>
-          <a:xfrm>
-            <a:off x="707136" y="1062990"/>
-            <a:ext cx="8656320" cy="2537460"/>
-          </a:xfrm>
-          <a:prstGeom prst="rect">
-            <a:avLst/>
-          </a:prstGeom>
-          <a:solidFill>
-            <a:srgbClr val="1C3557"/>
-          </a:solidFill>
-          <a:ln>
-            <a:noFill/>
-          </a:ln>
-        </p:spPr>
-        <p:txBody>
-          <a:bodyPr/>
-          <a:lstStyle/>
-          <a:p/>
-        </p:txBody>
-      </p:sp>
-      <p:sp>
-        <p:nvSpPr>
-          <p:cNvPr id="201" name="deco_delta_badge"/>
-          <p:cNvSpPr>
-            <a:spLocks noGrp="1"/>
-          </p:cNvSpPr>
-          <p:nvPr/>
-        </p:nvSpPr>
-        <p:spPr>
-          <a:xfrm>
-            <a:off x="9534144" y="1062990"/>
-            <a:ext cx="2316480" cy="1028700"/>
-          </a:xfrm>
-          <a:prstGeom prst="rect">
-            <a:avLst/>
-          </a:prstGeom>
-          <a:solidFill>
-            <a:srgbClr val="E8763A"/>
-          </a:solidFill>
-          <a:ln>
-            <a:noFill/>
-          </a:ln>
-        </p:spPr>
-        <p:txBody>
-          <a:bodyPr/>
-          <a:lstStyle/>
-          <a:p/>
-        </p:txBody>
-      </p:sp>
-      <p:sp>
-        <p:nvSpPr>
-          <p:cNvPr id="202" name="deco_support_area"/>
-          <p:cNvSpPr>
-            <a:spLocks noGrp="1"/>
-          </p:cNvSpPr>
-          <p:nvPr/>
-        </p:nvSpPr>
-        <p:spPr>
-          <a:xfrm>
-            <a:off x="707136" y="3703320"/>
-            <a:ext cx="10777728" cy="2125980"/>
-          </a:xfrm>
-          <a:prstGeom prst="rect">
-            <a:avLst/>
-          </a:prstGeom>
-          <a:solidFill>
-            <a:srgbClr val="F2F4F7"/>
-          </a:solidFill>
-          <a:ln>
-            <a:noFill/>
-          </a:ln>
-        </p:spPr>
-        <p:txBody>
-          <a:bodyPr/>
-          <a:lstStyle/>
-          <a:p/>
-        </p:txBody>
-      </p:sp>
-      <p:sp>
-        <p:nvSpPr>
           <p:cNvPr id="2" name="Title 1"/>
           <p:cNvSpPr>
             <a:spLocks noGrp="1"/>
@@ -3965,303 +3165,6 @@
               <a:t>‹#›</a:t>
             </a:fld>
             <a:endParaRPr lang="en-US"/>
-          </a:p>
-        </p:txBody>
-      </p:sp>
-      <p:sp>
-        <p:nvSpPr>
-          <p:cNvPr id="6" name="slot__metric_value">
-            <a:extLst>
-              <a:ext uri="{FF2B5EF4-FFF2-40B4-BE49-F238E27FC236}">
-                <a16:creationId xmlns:a16="http://schemas.microsoft.com/office/drawing/2014/main" id="{9972CBED-8C1F-F962-DF1D-46CEC7DCCBC5}"/>
-              </a:ext>
-            </a:extLst>
-          </p:cNvPr>
-          <p:cNvSpPr>
-            <a:spLocks noGrp="1"/>
-          </p:cNvSpPr>
-          <p:nvPr>
-            <p:ph sz="quarter" idx="13" type="obj"/>
-          </p:nvPr>
-        </p:nvSpPr>
-        <p:spPr>
-          <a:xfrm>
-            <a:off x="975360" y="1371600"/>
-            <a:ext cx="8168640" cy="2057400"/>
-          </a:xfrm>
-        </p:spPr>
-        <p:txBody>
-          <a:bodyPr/>
-          <a:lstStyle>
-            <a:lvl1pPr>
-              <a:defRPr sz="5600" b="1">
-                <a:solidFill>
-                  <a:srgbClr val="FFFFFF"/>
-                </a:solidFill>
-              </a:defRPr>
-            </a:lvl1pPr>
-            <a:lvl2pPr>
-              <a:defRPr sz="1800">
-                <a:solidFill>
-                  <a:srgbClr val="E8F2FB"/>
-                </a:solidFill>
-              </a:defRPr>
-            </a:lvl2pPr>
-          </a:lstStyle>
-          <a:p>
-            <a:pPr lvl="0"/>
-            <a:r>
-              <a:rPr kumimoji="1" lang="ja-JP" altLang="en-US"/>
-              <a:t>マスター テキストの書式設定</a:t>
-            </a:r>
-          </a:p>
-          <a:p>
-            <a:pPr lvl="1"/>
-            <a:r>
-              <a:rPr kumimoji="1" lang="ja-JP" altLang="en-US"/>
-              <a:t>第 </a:t>
-            </a:r>
-            <a:r>
-              <a:rPr kumimoji="1" lang="en-US" altLang="ja-JP"/>
-              <a:t>2 </a:t>
-            </a:r>
-            <a:r>
-              <a:rPr kumimoji="1" lang="ja-JP" altLang="en-US"/>
-              <a:t>レベル</a:t>
-            </a:r>
-          </a:p>
-          <a:p>
-            <a:pPr lvl="2"/>
-            <a:r>
-              <a:rPr kumimoji="1" lang="ja-JP" altLang="en-US"/>
-              <a:t>第 </a:t>
-            </a:r>
-            <a:r>
-              <a:rPr kumimoji="1" lang="en-US" altLang="ja-JP"/>
-              <a:t>3 </a:t>
-            </a:r>
-            <a:r>
-              <a:rPr kumimoji="1" lang="ja-JP" altLang="en-US"/>
-              <a:t>レベル</a:t>
-            </a:r>
-          </a:p>
-          <a:p>
-            <a:pPr lvl="3"/>
-            <a:r>
-              <a:rPr kumimoji="1" lang="ja-JP" altLang="en-US"/>
-              <a:t>第 </a:t>
-            </a:r>
-            <a:r>
-              <a:rPr kumimoji="1" lang="en-US" altLang="ja-JP"/>
-              <a:t>4 </a:t>
-            </a:r>
-            <a:r>
-              <a:rPr kumimoji="1" lang="ja-JP" altLang="en-US"/>
-              <a:t>レベル</a:t>
-            </a:r>
-          </a:p>
-          <a:p>
-            <a:pPr lvl="4"/>
-            <a:r>
-              <a:rPr kumimoji="1" lang="ja-JP" altLang="en-US"/>
-              <a:t>第 </a:t>
-            </a:r>
-            <a:r>
-              <a:rPr kumimoji="1" lang="en-US" altLang="ja-JP"/>
-              <a:t>5 </a:t>
-            </a:r>
-            <a:r>
-              <a:rPr kumimoji="1" lang="ja-JP" altLang="en-US"/>
-              <a:t>レベル</a:t>
-            </a:r>
-          </a:p>
-        </p:txBody>
-      </p:sp>
-      <p:sp>
-        <p:nvSpPr>
-          <p:cNvPr id="7" name="slot__metric_delta">
-            <a:extLst>
-              <a:ext uri="{FF2B5EF4-FFF2-40B4-BE49-F238E27FC236}">
-                <a16:creationId xmlns:a16="http://schemas.microsoft.com/office/drawing/2014/main" id="{9972CBED-8C1F-F962-DF1D-46CEC7DCCBC5}"/>
-              </a:ext>
-            </a:extLst>
-          </p:cNvPr>
-          <p:cNvSpPr>
-            <a:spLocks noGrp="1"/>
-          </p:cNvSpPr>
-          <p:nvPr>
-            <p:ph sz="quarter" idx="14" type="obj"/>
-          </p:nvPr>
-        </p:nvSpPr>
-        <p:spPr>
-          <a:xfrm>
-            <a:off x="9656064" y="1289304"/>
-            <a:ext cx="2072640" cy="651510"/>
-          </a:xfrm>
-        </p:spPr>
-        <p:txBody>
-          <a:bodyPr/>
-          <a:lstStyle/>
-          <a:p>
-            <a:pPr lvl="0"/>
-            <a:r>
-              <a:rPr kumimoji="1" lang="ja-JP" altLang="en-US"/>
-              <a:t>マスター テキストの書式設定</a:t>
-            </a:r>
-          </a:p>
-          <a:p>
-            <a:pPr lvl="1"/>
-            <a:r>
-              <a:rPr kumimoji="1" lang="ja-JP" altLang="en-US"/>
-              <a:t>第 </a:t>
-            </a:r>
-            <a:r>
-              <a:rPr kumimoji="1" lang="en-US" altLang="ja-JP"/>
-              <a:t>2 </a:t>
-            </a:r>
-            <a:r>
-              <a:rPr kumimoji="1" lang="ja-JP" altLang="en-US"/>
-              <a:t>レベル</a:t>
-            </a:r>
-          </a:p>
-          <a:p>
-            <a:pPr lvl="2"/>
-            <a:r>
-              <a:rPr kumimoji="1" lang="ja-JP" altLang="en-US"/>
-              <a:t>第 </a:t>
-            </a:r>
-            <a:r>
-              <a:rPr kumimoji="1" lang="en-US" altLang="ja-JP"/>
-              <a:t>3 </a:t>
-            </a:r>
-            <a:r>
-              <a:rPr kumimoji="1" lang="ja-JP" altLang="en-US"/>
-              <a:t>レベル</a:t>
-            </a:r>
-          </a:p>
-          <a:p>
-            <a:pPr lvl="3"/>
-            <a:r>
-              <a:rPr kumimoji="1" lang="ja-JP" altLang="en-US"/>
-              <a:t>第 </a:t>
-            </a:r>
-            <a:r>
-              <a:rPr kumimoji="1" lang="en-US" altLang="ja-JP"/>
-              <a:t>4 </a:t>
-            </a:r>
-            <a:r>
-              <a:rPr kumimoji="1" lang="ja-JP" altLang="en-US"/>
-              <a:t>レベル</a:t>
-            </a:r>
-          </a:p>
-          <a:p>
-            <a:pPr lvl="4"/>
-            <a:r>
-              <a:rPr kumimoji="1" lang="ja-JP" altLang="en-US"/>
-              <a:t>第 </a:t>
-            </a:r>
-            <a:r>
-              <a:rPr kumimoji="1" lang="en-US" altLang="ja-JP"/>
-              <a:t>5 </a:t>
-            </a:r>
-            <a:r>
-              <a:rPr kumimoji="1" lang="ja-JP" altLang="en-US"/>
-              <a:t>レベル</a:t>
-            </a:r>
-          </a:p>
-        </p:txBody>
-      </p:sp>
-      <p:sp>
-        <p:nvSpPr>
-          <p:cNvPr id="8" name="slot__supporting_points">
-            <a:extLst>
-              <a:ext uri="{FF2B5EF4-FFF2-40B4-BE49-F238E27FC236}">
-                <a16:creationId xmlns:a16="http://schemas.microsoft.com/office/drawing/2014/main" id="{9972CBED-8C1F-F962-DF1D-46CEC7DCCBC5}"/>
-              </a:ext>
-            </a:extLst>
-          </p:cNvPr>
-          <p:cNvSpPr>
-            <a:spLocks noGrp="1"/>
-          </p:cNvSpPr>
-          <p:nvPr>
-            <p:ph sz="quarter" idx="15" type="obj"/>
-          </p:nvPr>
-        </p:nvSpPr>
-        <p:spPr>
-          <a:xfrm>
-            <a:off x="1036320" y="3874770"/>
-            <a:ext cx="10119360" cy="1783080"/>
-          </a:xfrm>
-        </p:spPr>
-        <p:txBody>
-          <a:bodyPr/>
-          <a:lstStyle/>
-          <a:p>
-            <a:pPr lvl="0"/>
-            <a:r>
-              <a:rPr kumimoji="1" lang="ja-JP" altLang="en-US"/>
-              <a:t>マスター テキストの書式設定</a:t>
-            </a:r>
-          </a:p>
-          <a:p>
-            <a:pPr lvl="1"/>
-            <a:r>
-              <a:rPr kumimoji="1" lang="ja-JP" altLang="en-US"/>
-              <a:t>第 </a:t>
-            </a:r>
-            <a:r>
-              <a:rPr kumimoji="1" lang="en-US" altLang="ja-JP"/>
-              <a:t>2 </a:t>
-            </a:r>
-            <a:r>
-              <a:rPr kumimoji="1" lang="ja-JP" altLang="en-US"/>
-              <a:t>レベル</a:t>
-            </a:r>
-          </a:p>
-          <a:p>
-            <a:pPr lvl="2"/>
-            <a:r>
-              <a:rPr kumimoji="1" lang="ja-JP" altLang="en-US"/>
-              <a:t>第 </a:t>
-            </a:r>
-            <a:r>
-              <a:rPr kumimoji="1" lang="en-US" altLang="ja-JP"/>
-              <a:t>3 </a:t>
-            </a:r>
-            <a:r>
-              <a:rPr kumimoji="1" lang="ja-JP" altLang="en-US"/>
-              <a:t>レベル</a:t>
-            </a:r>
-          </a:p>
-          <a:p>
-            <a:pPr lvl="3"/>
-            <a:r>
-              <a:rPr kumimoji="1" lang="ja-JP" altLang="en-US"/>
-              <a:t>第 </a:t>
-            </a:r>
-            <a:r>
-              <a:rPr kumimoji="1" lang="en-US" altLang="ja-JP"/>
-              <a:t>4 </a:t>
-            </a:r>
-            <a:r>
-              <a:rPr kumimoji="1" lang="ja-JP" altLang="en-US"/>
-              <a:t>レベル</a:t>
-            </a:r>
-          </a:p>
-          <a:p>
-            <a:pPr lvl="4"/>
-            <a:r>
-              <a:rPr kumimoji="1" lang="ja-JP" altLang="en-US"/>
-              <a:t>第 </a:t>
-            </a:r>
-            <a:r>
-              <a:rPr kumimoji="1" lang="en-US" altLang="ja-JP"/>
-              <a:t>5 </a:t>
-            </a:r>
-            <a:r>
-              <a:rPr kumimoji="1" lang="ja-JP" altLang="en-US"/>
-              <a:t>レベル</a:t>
-            </a:r>
           </a:p>
         </p:txBody>
       </p:sp>
@@ -4279,8 +3182,8 @@
 </file>
 
 <file path=ppt/slideLayouts/slideLayout7.xml><?xml version="1.0" encoding="utf-8"?>
-<p:sldLayout xmlns:a="http://schemas.openxmlformats.org/drawingml/2006/main" xmlns:r="http://schemas.openxmlformats.org/officeDocument/2006/relationships" xmlns:p="http://schemas.openxmlformats.org/presentationml/2006/main" type="cust" preserve="1">
-  <p:cSld name="timeline">
+<p:sldLayout xmlns:a="http://schemas.openxmlformats.org/drawingml/2006/main" xmlns:r="http://schemas.openxmlformats.org/officeDocument/2006/relationships" xmlns:p="http://schemas.openxmlformats.org/presentationml/2006/main" type="blank" preserve="1">
+  <p:cSld name="Blank">
     <p:bg>
       <p:bgPr>
         <a:solidFill>
@@ -4305,209 +3208,6 @@
       </p:grpSpPr>
       <p:sp>
         <p:nvSpPr>
-          <p:cNvPr id="200" name="deco_timeline_line"/>
-          <p:cNvSpPr>
-            <a:spLocks noGrp="1"/>
-          </p:cNvSpPr>
-          <p:nvPr/>
-        </p:nvSpPr>
-        <p:spPr>
-          <a:xfrm>
-            <a:off x="731520" y="1042416"/>
-            <a:ext cx="97536" cy="5225796"/>
-          </a:xfrm>
-          <a:prstGeom prst="rect">
-            <a:avLst/>
-          </a:prstGeom>
-          <a:solidFill>
-            <a:srgbClr val="2E6DA4"/>
-          </a:solidFill>
-          <a:ln>
-            <a:noFill/>
-          </a:ln>
-        </p:spPr>
-        <p:txBody>
-          <a:bodyPr/>
-          <a:lstStyle/>
-          <a:p/>
-        </p:txBody>
-      </p:sp>
-      <p:sp>
-        <p:nvSpPr>
-          <p:cNvPr id="201" name="deco_event_1_dot"/>
-          <p:cNvSpPr>
-            <a:spLocks noGrp="1"/>
-          </p:cNvSpPr>
-          <p:nvPr/>
-        </p:nvSpPr>
-        <p:spPr>
-          <a:xfrm>
-            <a:off x="633984" y="1419606"/>
-            <a:ext cx="292608" cy="205740"/>
-          </a:xfrm>
-          <a:prstGeom prst="ellipse">
-            <a:avLst/>
-          </a:prstGeom>
-          <a:solidFill>
-            <a:srgbClr val="1C3557"/>
-          </a:solidFill>
-          <a:ln>
-            <a:noFill/>
-          </a:ln>
-        </p:spPr>
-        <p:txBody>
-          <a:bodyPr/>
-          <a:lstStyle/>
-          <a:p/>
-        </p:txBody>
-      </p:sp>
-      <p:sp>
-        <p:nvSpPr>
-          <p:cNvPr id="202" name="deco_event_2_dot"/>
-          <p:cNvSpPr>
-            <a:spLocks noGrp="1"/>
-          </p:cNvSpPr>
-          <p:nvPr/>
-        </p:nvSpPr>
-        <p:spPr>
-          <a:xfrm>
-            <a:off x="633984" y="2269998"/>
-            <a:ext cx="292608" cy="205740"/>
-          </a:xfrm>
-          <a:prstGeom prst="ellipse">
-            <a:avLst/>
-          </a:prstGeom>
-          <a:solidFill>
-            <a:srgbClr val="1C3557"/>
-          </a:solidFill>
-          <a:ln>
-            <a:noFill/>
-          </a:ln>
-        </p:spPr>
-        <p:txBody>
-          <a:bodyPr/>
-          <a:lstStyle/>
-          <a:p/>
-        </p:txBody>
-      </p:sp>
-      <p:sp>
-        <p:nvSpPr>
-          <p:cNvPr id="203" name="deco_event_3_dot"/>
-          <p:cNvSpPr>
-            <a:spLocks noGrp="1"/>
-          </p:cNvSpPr>
-          <p:nvPr/>
-        </p:nvSpPr>
-        <p:spPr>
-          <a:xfrm>
-            <a:off x="633984" y="3120390"/>
-            <a:ext cx="292608" cy="205740"/>
-          </a:xfrm>
-          <a:prstGeom prst="ellipse">
-            <a:avLst/>
-          </a:prstGeom>
-          <a:solidFill>
-            <a:srgbClr val="1C3557"/>
-          </a:solidFill>
-          <a:ln>
-            <a:noFill/>
-          </a:ln>
-        </p:spPr>
-        <p:txBody>
-          <a:bodyPr/>
-          <a:lstStyle/>
-          <a:p/>
-        </p:txBody>
-      </p:sp>
-      <p:sp>
-        <p:nvSpPr>
-          <p:cNvPr id="204" name="deco_event_4_dot"/>
-          <p:cNvSpPr>
-            <a:spLocks noGrp="1"/>
-          </p:cNvSpPr>
-          <p:nvPr/>
-        </p:nvSpPr>
-        <p:spPr>
-          <a:xfrm>
-            <a:off x="633984" y="3970782"/>
-            <a:ext cx="292608" cy="205740"/>
-          </a:xfrm>
-          <a:prstGeom prst="ellipse">
-            <a:avLst/>
-          </a:prstGeom>
-          <a:solidFill>
-            <a:srgbClr val="1C3557"/>
-          </a:solidFill>
-          <a:ln>
-            <a:noFill/>
-          </a:ln>
-        </p:spPr>
-        <p:txBody>
-          <a:bodyPr/>
-          <a:lstStyle/>
-          <a:p/>
-        </p:txBody>
-      </p:sp>
-      <p:sp>
-        <p:nvSpPr>
-          <p:cNvPr id="205" name="deco_event_5_dot"/>
-          <p:cNvSpPr>
-            <a:spLocks noGrp="1"/>
-          </p:cNvSpPr>
-          <p:nvPr/>
-        </p:nvSpPr>
-        <p:spPr>
-          <a:xfrm>
-            <a:off x="633984" y="4821174"/>
-            <a:ext cx="292608" cy="205740"/>
-          </a:xfrm>
-          <a:prstGeom prst="ellipse">
-            <a:avLst/>
-          </a:prstGeom>
-          <a:solidFill>
-            <a:srgbClr val="1C3557"/>
-          </a:solidFill>
-          <a:ln>
-            <a:noFill/>
-          </a:ln>
-        </p:spPr>
-        <p:txBody>
-          <a:bodyPr/>
-          <a:lstStyle/>
-          <a:p/>
-        </p:txBody>
-      </p:sp>
-      <p:sp>
-        <p:nvSpPr>
-          <p:cNvPr id="206" name="deco_event_6_dot"/>
-          <p:cNvSpPr>
-            <a:spLocks noGrp="1"/>
-          </p:cNvSpPr>
-          <p:nvPr/>
-        </p:nvSpPr>
-        <p:spPr>
-          <a:xfrm>
-            <a:off x="633984" y="5671566"/>
-            <a:ext cx="292608" cy="205740"/>
-          </a:xfrm>
-          <a:prstGeom prst="ellipse">
-            <a:avLst/>
-          </a:prstGeom>
-          <a:solidFill>
-            <a:srgbClr val="1C3557"/>
-          </a:solidFill>
-          <a:ln>
-            <a:noFill/>
-          </a:ln>
-        </p:spPr>
-        <p:txBody>
-          <a:bodyPr/>
-          <a:lstStyle/>
-          <a:p/>
-        </p:txBody>
-      </p:sp>
-      <p:sp>
-        <p:nvSpPr>
           <p:cNvPr id="2" name="Date Placeholder 1"/>
           <p:cNvSpPr>
             <a:spLocks noGrp="1"/>
@@ -4568,603 +3268,6 @@
               <a:t>‹#›</a:t>
             </a:fld>
             <a:endParaRPr lang="en-US"/>
-          </a:p>
-        </p:txBody>
-      </p:sp>
-      <p:sp>
-        <p:nvSpPr>
-          <p:cNvPr id="5" name="タイトル 6">
-            <a:extLst>
-              <a:ext uri="{FF2B5EF4-FFF2-40B4-BE49-F238E27FC236}">
-                <a16:creationId xmlns:a16="http://schemas.microsoft.com/office/drawing/2014/main" id="{11DAA64B-18C1-17A1-691C-30AB57B5A327}"/>
-              </a:ext>
-            </a:extLst>
-          </p:cNvPr>
-          <p:cNvSpPr>
-            <a:spLocks noGrp="1"/>
-          </p:cNvSpPr>
-          <p:nvPr>
-            <p:ph type="title"/>
-          </p:nvPr>
-        </p:nvSpPr>
-        <p:spPr>
-          <a:xfrm>
-            <a:off x="231648" y="219456"/>
-            <a:ext cx="11728704" cy="644652"/>
-          </a:xfrm>
-        </p:spPr>
-        <p:txBody>
-          <a:bodyPr/>
-          <a:lstStyle/>
-          <a:p>
-            <a:r>
-              <a:rPr kumimoji="1" lang="ja-JP" altLang="en-US"/>
-              <a:t>マスター タイトルの書式設定</a:t>
-            </a:r>
-          </a:p>
-        </p:txBody>
-      </p:sp>
-      <p:sp>
-        <p:nvSpPr>
-          <p:cNvPr id="6" name="slot__event_1_combined_text">
-            <a:extLst>
-              <a:ext uri="{FF2B5EF4-FFF2-40B4-BE49-F238E27FC236}">
-                <a16:creationId xmlns:a16="http://schemas.microsoft.com/office/drawing/2014/main" id="{9972CBED-8C1F-F962-DF1D-46CEC7DCCBC5}"/>
-              </a:ext>
-            </a:extLst>
-          </p:cNvPr>
-          <p:cNvSpPr>
-            <a:spLocks noGrp="1"/>
-          </p:cNvSpPr>
-          <p:nvPr>
-            <p:ph sz="quarter" idx="13" type="obj"/>
-          </p:nvPr>
-        </p:nvSpPr>
-        <p:spPr>
-          <a:xfrm>
-            <a:off x="1219200" y="1179576"/>
-            <a:ext cx="10607040" cy="699516"/>
-          </a:xfrm>
-        </p:spPr>
-        <p:txBody>
-          <a:bodyPr/>
-          <a:lstStyle/>
-          <a:p>
-            <a:pPr lvl="0"/>
-            <a:r>
-              <a:rPr kumimoji="1" lang="ja-JP" altLang="en-US"/>
-              <a:t>マスター テキストの書式設定</a:t>
-            </a:r>
-          </a:p>
-          <a:p>
-            <a:pPr lvl="1"/>
-            <a:r>
-              <a:rPr kumimoji="1" lang="ja-JP" altLang="en-US"/>
-              <a:t>第 </a:t>
-            </a:r>
-            <a:r>
-              <a:rPr kumimoji="1" lang="en-US" altLang="ja-JP"/>
-              <a:t>2 </a:t>
-            </a:r>
-            <a:r>
-              <a:rPr kumimoji="1" lang="ja-JP" altLang="en-US"/>
-              <a:t>レベル</a:t>
-            </a:r>
-          </a:p>
-          <a:p>
-            <a:pPr lvl="2"/>
-            <a:r>
-              <a:rPr kumimoji="1" lang="ja-JP" altLang="en-US"/>
-              <a:t>第 </a:t>
-            </a:r>
-            <a:r>
-              <a:rPr kumimoji="1" lang="en-US" altLang="ja-JP"/>
-              <a:t>3 </a:t>
-            </a:r>
-            <a:r>
-              <a:rPr kumimoji="1" lang="ja-JP" altLang="en-US"/>
-              <a:t>レベル</a:t>
-            </a:r>
-          </a:p>
-          <a:p>
-            <a:pPr lvl="3"/>
-            <a:r>
-              <a:rPr kumimoji="1" lang="ja-JP" altLang="en-US"/>
-              <a:t>第 </a:t>
-            </a:r>
-            <a:r>
-              <a:rPr kumimoji="1" lang="en-US" altLang="ja-JP"/>
-              <a:t>4 </a:t>
-            </a:r>
-            <a:r>
-              <a:rPr kumimoji="1" lang="ja-JP" altLang="en-US"/>
-              <a:t>レベル</a:t>
-            </a:r>
-          </a:p>
-          <a:p>
-            <a:pPr lvl="4"/>
-            <a:r>
-              <a:rPr kumimoji="1" lang="ja-JP" altLang="en-US"/>
-              <a:t>第 </a:t>
-            </a:r>
-            <a:r>
-              <a:rPr kumimoji="1" lang="en-US" altLang="ja-JP"/>
-              <a:t>5 </a:t>
-            </a:r>
-            <a:r>
-              <a:rPr kumimoji="1" lang="ja-JP" altLang="en-US"/>
-              <a:t>レベル</a:t>
-            </a:r>
-          </a:p>
-        </p:txBody>
-      </p:sp>
-      <p:sp>
-        <p:nvSpPr>
-          <p:cNvPr id="7" name="slot__event_2_combined_text">
-            <a:extLst>
-              <a:ext uri="{FF2B5EF4-FFF2-40B4-BE49-F238E27FC236}">
-                <a16:creationId xmlns:a16="http://schemas.microsoft.com/office/drawing/2014/main" id="{9972CBED-8C1F-F962-DF1D-46CEC7DCCBC5}"/>
-              </a:ext>
-            </a:extLst>
-          </p:cNvPr>
-          <p:cNvSpPr>
-            <a:spLocks noGrp="1"/>
-          </p:cNvSpPr>
-          <p:nvPr>
-            <p:ph sz="quarter" idx="14" type="obj"/>
-          </p:nvPr>
-        </p:nvSpPr>
-        <p:spPr>
-          <a:xfrm>
-            <a:off x="1219200" y="2029968"/>
-            <a:ext cx="10607040" cy="699516"/>
-          </a:xfrm>
-        </p:spPr>
-        <p:txBody>
-          <a:bodyPr/>
-          <a:lstStyle/>
-          <a:p>
-            <a:pPr lvl="0"/>
-            <a:r>
-              <a:rPr kumimoji="1" lang="ja-JP" altLang="en-US"/>
-              <a:t>マスター テキストの書式設定</a:t>
-            </a:r>
-          </a:p>
-          <a:p>
-            <a:pPr lvl="1"/>
-            <a:r>
-              <a:rPr kumimoji="1" lang="ja-JP" altLang="en-US"/>
-              <a:t>第 </a:t>
-            </a:r>
-            <a:r>
-              <a:rPr kumimoji="1" lang="en-US" altLang="ja-JP"/>
-              <a:t>2 </a:t>
-            </a:r>
-            <a:r>
-              <a:rPr kumimoji="1" lang="ja-JP" altLang="en-US"/>
-              <a:t>レベル</a:t>
-            </a:r>
-          </a:p>
-          <a:p>
-            <a:pPr lvl="2"/>
-            <a:r>
-              <a:rPr kumimoji="1" lang="ja-JP" altLang="en-US"/>
-              <a:t>第 </a:t>
-            </a:r>
-            <a:r>
-              <a:rPr kumimoji="1" lang="en-US" altLang="ja-JP"/>
-              <a:t>3 </a:t>
-            </a:r>
-            <a:r>
-              <a:rPr kumimoji="1" lang="ja-JP" altLang="en-US"/>
-              <a:t>レベル</a:t>
-            </a:r>
-          </a:p>
-          <a:p>
-            <a:pPr lvl="3"/>
-            <a:r>
-              <a:rPr kumimoji="1" lang="ja-JP" altLang="en-US"/>
-              <a:t>第 </a:t>
-            </a:r>
-            <a:r>
-              <a:rPr kumimoji="1" lang="en-US" altLang="ja-JP"/>
-              <a:t>4 </a:t>
-            </a:r>
-            <a:r>
-              <a:rPr kumimoji="1" lang="ja-JP" altLang="en-US"/>
-              <a:t>レベル</a:t>
-            </a:r>
-          </a:p>
-          <a:p>
-            <a:pPr lvl="4"/>
-            <a:r>
-              <a:rPr kumimoji="1" lang="ja-JP" altLang="en-US"/>
-              <a:t>第 </a:t>
-            </a:r>
-            <a:r>
-              <a:rPr kumimoji="1" lang="en-US" altLang="ja-JP"/>
-              <a:t>5 </a:t>
-            </a:r>
-            <a:r>
-              <a:rPr kumimoji="1" lang="ja-JP" altLang="en-US"/>
-              <a:t>レベル</a:t>
-            </a:r>
-          </a:p>
-        </p:txBody>
-      </p:sp>
-      <p:sp>
-        <p:nvSpPr>
-          <p:cNvPr id="8" name="slot__event_3_combined_text">
-            <a:extLst>
-              <a:ext uri="{FF2B5EF4-FFF2-40B4-BE49-F238E27FC236}">
-                <a16:creationId xmlns:a16="http://schemas.microsoft.com/office/drawing/2014/main" id="{9972CBED-8C1F-F962-DF1D-46CEC7DCCBC5}"/>
-              </a:ext>
-            </a:extLst>
-          </p:cNvPr>
-          <p:cNvSpPr>
-            <a:spLocks noGrp="1"/>
-          </p:cNvSpPr>
-          <p:nvPr>
-            <p:ph sz="quarter" idx="15" type="obj"/>
-          </p:nvPr>
-        </p:nvSpPr>
-        <p:spPr>
-          <a:xfrm>
-            <a:off x="1219200" y="2880360"/>
-            <a:ext cx="10607040" cy="699516"/>
-          </a:xfrm>
-        </p:spPr>
-        <p:txBody>
-          <a:bodyPr/>
-          <a:lstStyle/>
-          <a:p>
-            <a:pPr lvl="0"/>
-            <a:r>
-              <a:rPr kumimoji="1" lang="ja-JP" altLang="en-US"/>
-              <a:t>マスター テキストの書式設定</a:t>
-            </a:r>
-          </a:p>
-          <a:p>
-            <a:pPr lvl="1"/>
-            <a:r>
-              <a:rPr kumimoji="1" lang="ja-JP" altLang="en-US"/>
-              <a:t>第 </a:t>
-            </a:r>
-            <a:r>
-              <a:rPr kumimoji="1" lang="en-US" altLang="ja-JP"/>
-              <a:t>2 </a:t>
-            </a:r>
-            <a:r>
-              <a:rPr kumimoji="1" lang="ja-JP" altLang="en-US"/>
-              <a:t>レベル</a:t>
-            </a:r>
-          </a:p>
-          <a:p>
-            <a:pPr lvl="2"/>
-            <a:r>
-              <a:rPr kumimoji="1" lang="ja-JP" altLang="en-US"/>
-              <a:t>第 </a:t>
-            </a:r>
-            <a:r>
-              <a:rPr kumimoji="1" lang="en-US" altLang="ja-JP"/>
-              <a:t>3 </a:t>
-            </a:r>
-            <a:r>
-              <a:rPr kumimoji="1" lang="ja-JP" altLang="en-US"/>
-              <a:t>レベル</a:t>
-            </a:r>
-          </a:p>
-          <a:p>
-            <a:pPr lvl="3"/>
-            <a:r>
-              <a:rPr kumimoji="1" lang="ja-JP" altLang="en-US"/>
-              <a:t>第 </a:t>
-            </a:r>
-            <a:r>
-              <a:rPr kumimoji="1" lang="en-US" altLang="ja-JP"/>
-              <a:t>4 </a:t>
-            </a:r>
-            <a:r>
-              <a:rPr kumimoji="1" lang="ja-JP" altLang="en-US"/>
-              <a:t>レベル</a:t>
-            </a:r>
-          </a:p>
-          <a:p>
-            <a:pPr lvl="4"/>
-            <a:r>
-              <a:rPr kumimoji="1" lang="ja-JP" altLang="en-US"/>
-              <a:t>第 </a:t>
-            </a:r>
-            <a:r>
-              <a:rPr kumimoji="1" lang="en-US" altLang="ja-JP"/>
-              <a:t>5 </a:t>
-            </a:r>
-            <a:r>
-              <a:rPr kumimoji="1" lang="ja-JP" altLang="en-US"/>
-              <a:t>レベル</a:t>
-            </a:r>
-          </a:p>
-        </p:txBody>
-      </p:sp>
-      <p:sp>
-        <p:nvSpPr>
-          <p:cNvPr id="9" name="slot__event_4_combined_text">
-            <a:extLst>
-              <a:ext uri="{FF2B5EF4-FFF2-40B4-BE49-F238E27FC236}">
-                <a16:creationId xmlns:a16="http://schemas.microsoft.com/office/drawing/2014/main" id="{9972CBED-8C1F-F962-DF1D-46CEC7DCCBC5}"/>
-              </a:ext>
-            </a:extLst>
-          </p:cNvPr>
-          <p:cNvSpPr>
-            <a:spLocks noGrp="1"/>
-          </p:cNvSpPr>
-          <p:nvPr>
-            <p:ph sz="quarter" idx="16" type="obj"/>
-          </p:nvPr>
-        </p:nvSpPr>
-        <p:spPr>
-          <a:xfrm>
-            <a:off x="1219200" y="3730752"/>
-            <a:ext cx="10607040" cy="699516"/>
-          </a:xfrm>
-        </p:spPr>
-        <p:txBody>
-          <a:bodyPr/>
-          <a:lstStyle/>
-          <a:p>
-            <a:pPr lvl="0"/>
-            <a:r>
-              <a:rPr kumimoji="1" lang="ja-JP" altLang="en-US"/>
-              <a:t>マスター テキストの書式設定</a:t>
-            </a:r>
-          </a:p>
-          <a:p>
-            <a:pPr lvl="1"/>
-            <a:r>
-              <a:rPr kumimoji="1" lang="ja-JP" altLang="en-US"/>
-              <a:t>第 </a:t>
-            </a:r>
-            <a:r>
-              <a:rPr kumimoji="1" lang="en-US" altLang="ja-JP"/>
-              <a:t>2 </a:t>
-            </a:r>
-            <a:r>
-              <a:rPr kumimoji="1" lang="ja-JP" altLang="en-US"/>
-              <a:t>レベル</a:t>
-            </a:r>
-          </a:p>
-          <a:p>
-            <a:pPr lvl="2"/>
-            <a:r>
-              <a:rPr kumimoji="1" lang="ja-JP" altLang="en-US"/>
-              <a:t>第 </a:t>
-            </a:r>
-            <a:r>
-              <a:rPr kumimoji="1" lang="en-US" altLang="ja-JP"/>
-              <a:t>3 </a:t>
-            </a:r>
-            <a:r>
-              <a:rPr kumimoji="1" lang="ja-JP" altLang="en-US"/>
-              <a:t>レベル</a:t>
-            </a:r>
-          </a:p>
-          <a:p>
-            <a:pPr lvl="3"/>
-            <a:r>
-              <a:rPr kumimoji="1" lang="ja-JP" altLang="en-US"/>
-              <a:t>第 </a:t>
-            </a:r>
-            <a:r>
-              <a:rPr kumimoji="1" lang="en-US" altLang="ja-JP"/>
-              <a:t>4 </a:t>
-            </a:r>
-            <a:r>
-              <a:rPr kumimoji="1" lang="ja-JP" altLang="en-US"/>
-              <a:t>レベル</a:t>
-            </a:r>
-          </a:p>
-          <a:p>
-            <a:pPr lvl="4"/>
-            <a:r>
-              <a:rPr kumimoji="1" lang="ja-JP" altLang="en-US"/>
-              <a:t>第 </a:t>
-            </a:r>
-            <a:r>
-              <a:rPr kumimoji="1" lang="en-US" altLang="ja-JP"/>
-              <a:t>5 </a:t>
-            </a:r>
-            <a:r>
-              <a:rPr kumimoji="1" lang="ja-JP" altLang="en-US"/>
-              <a:t>レベル</a:t>
-            </a:r>
-          </a:p>
-        </p:txBody>
-      </p:sp>
-      <p:sp>
-        <p:nvSpPr>
-          <p:cNvPr id="10" name="slot__event_5_combined_text">
-            <a:extLst>
-              <a:ext uri="{FF2B5EF4-FFF2-40B4-BE49-F238E27FC236}">
-                <a16:creationId xmlns:a16="http://schemas.microsoft.com/office/drawing/2014/main" id="{9972CBED-8C1F-F962-DF1D-46CEC7DCCBC5}"/>
-              </a:ext>
-            </a:extLst>
-          </p:cNvPr>
-          <p:cNvSpPr>
-            <a:spLocks noGrp="1"/>
-          </p:cNvSpPr>
-          <p:nvPr>
-            <p:ph sz="quarter" idx="17" type="obj"/>
-          </p:nvPr>
-        </p:nvSpPr>
-        <p:spPr>
-          <a:xfrm>
-            <a:off x="1219200" y="4581144"/>
-            <a:ext cx="10607040" cy="699516"/>
-          </a:xfrm>
-        </p:spPr>
-        <p:txBody>
-          <a:bodyPr/>
-          <a:lstStyle/>
-          <a:p>
-            <a:pPr lvl="0"/>
-            <a:r>
-              <a:rPr kumimoji="1" lang="ja-JP" altLang="en-US"/>
-              <a:t>マスター テキストの書式設定</a:t>
-            </a:r>
-          </a:p>
-          <a:p>
-            <a:pPr lvl="1"/>
-            <a:r>
-              <a:rPr kumimoji="1" lang="ja-JP" altLang="en-US"/>
-              <a:t>第 </a:t>
-            </a:r>
-            <a:r>
-              <a:rPr kumimoji="1" lang="en-US" altLang="ja-JP"/>
-              <a:t>2 </a:t>
-            </a:r>
-            <a:r>
-              <a:rPr kumimoji="1" lang="ja-JP" altLang="en-US"/>
-              <a:t>レベル</a:t>
-            </a:r>
-          </a:p>
-          <a:p>
-            <a:pPr lvl="2"/>
-            <a:r>
-              <a:rPr kumimoji="1" lang="ja-JP" altLang="en-US"/>
-              <a:t>第 </a:t>
-            </a:r>
-            <a:r>
-              <a:rPr kumimoji="1" lang="en-US" altLang="ja-JP"/>
-              <a:t>3 </a:t>
-            </a:r>
-            <a:r>
-              <a:rPr kumimoji="1" lang="ja-JP" altLang="en-US"/>
-              <a:t>レベル</a:t>
-            </a:r>
-          </a:p>
-          <a:p>
-            <a:pPr lvl="3"/>
-            <a:r>
-              <a:rPr kumimoji="1" lang="ja-JP" altLang="en-US"/>
-              <a:t>第 </a:t>
-            </a:r>
-            <a:r>
-              <a:rPr kumimoji="1" lang="en-US" altLang="ja-JP"/>
-              <a:t>4 </a:t>
-            </a:r>
-            <a:r>
-              <a:rPr kumimoji="1" lang="ja-JP" altLang="en-US"/>
-              <a:t>レベル</a:t>
-            </a:r>
-          </a:p>
-          <a:p>
-            <a:pPr lvl="4"/>
-            <a:r>
-              <a:rPr kumimoji="1" lang="ja-JP" altLang="en-US"/>
-              <a:t>第 </a:t>
-            </a:r>
-            <a:r>
-              <a:rPr kumimoji="1" lang="en-US" altLang="ja-JP"/>
-              <a:t>5 </a:t>
-            </a:r>
-            <a:r>
-              <a:rPr kumimoji="1" lang="ja-JP" altLang="en-US"/>
-              <a:t>レベル</a:t>
-            </a:r>
-          </a:p>
-        </p:txBody>
-      </p:sp>
-      <p:sp>
-        <p:nvSpPr>
-          <p:cNvPr id="11" name="slot__event_6_combined_text">
-            <a:extLst>
-              <a:ext uri="{FF2B5EF4-FFF2-40B4-BE49-F238E27FC236}">
-                <a16:creationId xmlns:a16="http://schemas.microsoft.com/office/drawing/2014/main" id="{9972CBED-8C1F-F962-DF1D-46CEC7DCCBC5}"/>
-              </a:ext>
-            </a:extLst>
-          </p:cNvPr>
-          <p:cNvSpPr>
-            <a:spLocks noGrp="1"/>
-          </p:cNvSpPr>
-          <p:nvPr>
-            <p:ph sz="quarter" idx="18" type="obj"/>
-          </p:nvPr>
-        </p:nvSpPr>
-        <p:spPr>
-          <a:xfrm>
-            <a:off x="1219200" y="5431536"/>
-            <a:ext cx="10607040" cy="699516"/>
-          </a:xfrm>
-        </p:spPr>
-        <p:txBody>
-          <a:bodyPr/>
-          <a:lstStyle/>
-          <a:p>
-            <a:pPr lvl="0"/>
-            <a:r>
-              <a:rPr kumimoji="1" lang="ja-JP" altLang="en-US"/>
-              <a:t>マスター テキストの書式設定</a:t>
-            </a:r>
-          </a:p>
-          <a:p>
-            <a:pPr lvl="1"/>
-            <a:r>
-              <a:rPr kumimoji="1" lang="ja-JP" altLang="en-US"/>
-              <a:t>第 </a:t>
-            </a:r>
-            <a:r>
-              <a:rPr kumimoji="1" lang="en-US" altLang="ja-JP"/>
-              <a:t>2 </a:t>
-            </a:r>
-            <a:r>
-              <a:rPr kumimoji="1" lang="ja-JP" altLang="en-US"/>
-              <a:t>レベル</a:t>
-            </a:r>
-          </a:p>
-          <a:p>
-            <a:pPr lvl="2"/>
-            <a:r>
-              <a:rPr kumimoji="1" lang="ja-JP" altLang="en-US"/>
-              <a:t>第 </a:t>
-            </a:r>
-            <a:r>
-              <a:rPr kumimoji="1" lang="en-US" altLang="ja-JP"/>
-              <a:t>3 </a:t>
-            </a:r>
-            <a:r>
-              <a:rPr kumimoji="1" lang="ja-JP" altLang="en-US"/>
-              <a:t>レベル</a:t>
-            </a:r>
-          </a:p>
-          <a:p>
-            <a:pPr lvl="3"/>
-            <a:r>
-              <a:rPr kumimoji="1" lang="ja-JP" altLang="en-US"/>
-              <a:t>第 </a:t>
-            </a:r>
-            <a:r>
-              <a:rPr kumimoji="1" lang="en-US" altLang="ja-JP"/>
-              <a:t>4 </a:t>
-            </a:r>
-            <a:r>
-              <a:rPr kumimoji="1" lang="ja-JP" altLang="en-US"/>
-              <a:t>レベル</a:t>
-            </a:r>
-          </a:p>
-          <a:p>
-            <a:pPr lvl="4"/>
-            <a:r>
-              <a:rPr kumimoji="1" lang="ja-JP" altLang="en-US"/>
-              <a:t>第 </a:t>
-            </a:r>
-            <a:r>
-              <a:rPr kumimoji="1" lang="en-US" altLang="ja-JP"/>
-              <a:t>5 </a:t>
-            </a:r>
-            <a:r>
-              <a:rPr kumimoji="1" lang="ja-JP" altLang="en-US"/>
-              <a:t>レベル</a:t>
-            </a:r>
           </a:p>
         </p:txBody>
       </p:sp>

--- a/templates/default.pptx
+++ b/templates/default.pptx
@@ -121,8 +121,8 @@
 </file>
 
 <file path=ppt/slideLayouts/slideLayout1.xml><?xml version="1.0" encoding="utf-8"?>
-<p:sldLayout xmlns:a="http://schemas.openxmlformats.org/drawingml/2006/main" xmlns:r="http://schemas.openxmlformats.org/officeDocument/2006/relationships" xmlns:p="http://schemas.openxmlformats.org/presentationml/2006/main" preserve="1" userDrawn="1" type="cust">
-  <p:cSld name="Title Slide">
+<p:sldLayout xmlns:a="http://schemas.openxmlformats.org/drawingml/2006/main" xmlns:r="http://schemas.openxmlformats.org/officeDocument/2006/relationships" xmlns:p="http://schemas.openxmlformats.org/presentationml/2006/main" preserve="1" userDrawn="1">
+  <p:cSld name="cover_title">
     <p:bg>
       <p:bgPr>
         <a:solidFill>
@@ -147,7 +147,7 @@
       </p:grpSpPr>
       <p:sp>
         <p:nvSpPr>
-          <p:cNvPr id="200" name="deco_top_bar"/>
+          <p:cNvPr id="204" name="deco_footer_line"/>
           <p:cNvSpPr>
             <a:spLocks noGrp="1"/>
           </p:cNvSpPr>
@@ -155,14 +155,14 @@
         </p:nvSpPr>
         <p:spPr>
           <a:xfrm>
-            <a:off x="0" y="0"/>
-            <a:ext cx="12192000" cy="1885950"/>
+            <a:off x="555874" y="5946621"/>
+            <a:ext cx="11082025" cy="41563"/>
           </a:xfrm>
           <a:prstGeom prst="rect">
             <a:avLst/>
           </a:prstGeom>
           <a:solidFill>
-            <a:srgbClr val="1C3557"/>
+            <a:srgbClr val="D9D9D6"/>
           </a:solidFill>
           <a:ln>
             <a:noFill/>
@@ -171,81 +171,25 @@
         <p:txBody>
           <a:bodyPr/>
           <a:lstStyle/>
-          <a:p/>
-        </p:txBody>
-      </p:sp>
-      <p:sp>
-        <p:nvSpPr>
-          <p:cNvPr id="201" name="deco_accent_line"/>
-          <p:cNvSpPr>
-            <a:spLocks noGrp="1"/>
-          </p:cNvSpPr>
-          <p:nvPr/>
-        </p:nvSpPr>
-        <p:spPr>
-          <a:xfrm>
-            <a:off x="0" y="1831086"/>
-            <a:ext cx="12192000" cy="109728"/>
-          </a:xfrm>
-          <a:prstGeom prst="rect">
-            <a:avLst/>
-          </a:prstGeom>
-          <a:solidFill>
-            <a:srgbClr val="E8763A"/>
-          </a:solidFill>
-          <a:ln>
-            <a:noFill/>
-          </a:ln>
-        </p:spPr>
-        <p:txBody>
-          <a:bodyPr/>
-          <a:lstStyle/>
-          <a:p/>
-        </p:txBody>
-      </p:sp>
-      <p:sp>
-        <p:nvSpPr>
-          <p:cNvPr id="202" name="deco_footer_bar"/>
-          <p:cNvSpPr>
-            <a:spLocks noGrp="1"/>
-          </p:cNvSpPr>
-          <p:nvPr/>
-        </p:nvSpPr>
-        <p:spPr>
-          <a:xfrm>
-            <a:off x="0" y="5966460"/>
-            <a:ext cx="12192000" cy="891540"/>
-          </a:xfrm>
-          <a:prstGeom prst="rect">
-            <a:avLst/>
-          </a:prstGeom>
-          <a:solidFill>
-            <a:srgbClr val="1C3557"/>
-          </a:solidFill>
-          <a:ln>
-            <a:noFill/>
-          </a:ln>
-        </p:spPr>
-        <p:txBody>
-          <a:bodyPr/>
-          <a:lstStyle/>
-          <a:p/>
-        </p:txBody>
-      </p:sp>
-      <p:sp>
-        <p:nvSpPr>
-          <p:cNvPr id="3" name="Subtitle 2"/>
-          <p:cNvSpPr>
-            <a:spLocks noGrp="1"/>
-          </p:cNvSpPr>
-          <p:nvPr>
-            <p:ph type="subTitle" idx="1"/>
-          </p:nvPr>
-        </p:nvSpPr>
-        <p:spPr>
-          <a:xfrm>
-            <a:off x="502920" y="3884023"/>
-            <a:ext cx="7772400" cy="1463040"/>
+          <a:p>
+            <a:endParaRPr/>
+          </a:p>
+        </p:txBody>
+      </p:sp>
+      <p:sp>
+        <p:nvSpPr>
+          <p:cNvPr id="3" name="AI_SUBTITLE"/>
+          <p:cNvSpPr>
+            <a:spLocks noGrp="1"/>
+          </p:cNvSpPr>
+          <p:nvPr>
+            <p:ph type="subTitle" idx="1" hasCustomPrompt="1"/>
+          </p:nvPr>
+        </p:nvSpPr>
+        <p:spPr>
+          <a:xfrm>
+            <a:off x="731520" y="3737610"/>
+            <a:ext cx="6644640" cy="617220"/>
           </a:xfrm>
           <a:noFill/>
           <a:ln>
@@ -255,94 +199,14 @@
         <p:txBody>
           <a:bodyPr wrap="square" lIns="0" tIns="0" rIns="0" bIns="0" anchor="t"/>
           <a:lstStyle>
-            <a:lvl1pPr marL="0" indent="0" algn="ctr">
-              <a:buNone/>
-              <a:defRPr sz="1800">
+            <a:lvl1pPr>
+              <a:buNone/>
+              <a:defRPr sz="2300">
                 <a:solidFill>
-                  <a:srgbClr val="444444"/>
+                  <a:srgbClr val="242424"/>
                 </a:solidFill>
               </a:defRPr>
             </a:lvl1pPr>
-            <a:lvl2pPr marL="457200" indent="0" algn="ctr">
-              <a:buNone/>
-              <a:defRPr>
-                <a:solidFill>
-                  <a:schemeClr val="tx1">
-                    <a:tint val="75000"/>
-                  </a:schemeClr>
-                </a:solidFill>
-              </a:defRPr>
-            </a:lvl2pPr>
-            <a:lvl3pPr marL="914400" indent="0" algn="ctr">
-              <a:buNone/>
-              <a:defRPr>
-                <a:solidFill>
-                  <a:schemeClr val="tx1">
-                    <a:tint val="75000"/>
-                  </a:schemeClr>
-                </a:solidFill>
-              </a:defRPr>
-            </a:lvl3pPr>
-            <a:lvl4pPr marL="1371600" indent="0" algn="ctr">
-              <a:buNone/>
-              <a:defRPr>
-                <a:solidFill>
-                  <a:schemeClr val="tx1">
-                    <a:tint val="75000"/>
-                  </a:schemeClr>
-                </a:solidFill>
-              </a:defRPr>
-            </a:lvl4pPr>
-            <a:lvl5pPr marL="1828800" indent="0" algn="ctr">
-              <a:buNone/>
-              <a:defRPr>
-                <a:solidFill>
-                  <a:schemeClr val="tx1">
-                    <a:tint val="75000"/>
-                  </a:schemeClr>
-                </a:solidFill>
-              </a:defRPr>
-            </a:lvl5pPr>
-            <a:lvl6pPr marL="2286000" indent="0" algn="ctr">
-              <a:buNone/>
-              <a:defRPr>
-                <a:solidFill>
-                  <a:schemeClr val="tx1">
-                    <a:tint val="75000"/>
-                  </a:schemeClr>
-                </a:solidFill>
-              </a:defRPr>
-            </a:lvl6pPr>
-            <a:lvl7pPr marL="2743200" indent="0" algn="ctr">
-              <a:buNone/>
-              <a:defRPr>
-                <a:solidFill>
-                  <a:schemeClr val="tx1">
-                    <a:tint val="75000"/>
-                  </a:schemeClr>
-                </a:solidFill>
-              </a:defRPr>
-            </a:lvl7pPr>
-            <a:lvl8pPr marL="3200400" indent="0" algn="ctr">
-              <a:buNone/>
-              <a:defRPr>
-                <a:solidFill>
-                  <a:schemeClr val="tx1">
-                    <a:tint val="75000"/>
-                  </a:schemeClr>
-                </a:solidFill>
-              </a:defRPr>
-            </a:lvl8pPr>
-            <a:lvl9pPr marL="3657600" indent="0" algn="ctr">
-              <a:buNone/>
-              <a:defRPr>
-                <a:solidFill>
-                  <a:schemeClr val="tx1">
-                    <a:tint val="75000"/>
-                  </a:schemeClr>
-                </a:solidFill>
-              </a:defRPr>
-            </a:lvl9pPr>
           </a:lstStyle>
           <a:p>
             <a:pPr algn="l"/>
@@ -355,7 +219,7 @@
       </p:sp>
       <p:sp>
         <p:nvSpPr>
-          <p:cNvPr id="7" name="タイトル 6">
+          <p:cNvPr id="7" name="AI_TITLE">
             <a:extLst>
               <a:ext uri="{FF2B5EF4-FFF2-40B4-BE49-F238E27FC236}">
                 <a16:creationId xmlns:a16="http://schemas.microsoft.com/office/drawing/2014/main" id="{C72B98BA-869D-3750-C4A0-0819554AC7D4}"/>
@@ -371,15 +235,19 @@
         </p:nvSpPr>
         <p:spPr>
           <a:xfrm>
-            <a:off x="502920" y="2376170"/>
-            <a:ext cx="11290663" cy="1143000"/>
+            <a:off x="731519" y="2125980"/>
+            <a:ext cx="10605347" cy="1405890"/>
           </a:xfrm>
         </p:spPr>
         <p:txBody>
           <a:bodyPr/>
           <a:lstStyle>
             <a:lvl1pPr>
-              <a:defRPr b="1"/>
+              <a:defRPr sz="5000" b="1">
+                <a:solidFill>
+                  <a:srgbClr val="191919"/>
+                </a:solidFill>
+              </a:defRPr>
             </a:lvl1pPr>
           </a:lstStyle>
           <a:p>
@@ -413,9 +281,9 @@
           <a:p>
             <a:fld id="{5BCAD085-E8A6-8845-BD4E-CB4CCA059FC4}" type="datetimeFigureOut">
               <a:rPr lang="en-US" smtClean="0"/>
-              <a:t>5/3/26</a:t>
+              <a:t>6/11/26</a:t>
             </a:fld>
-            <a:endParaRPr lang="en-US"/>
+            <a:endParaRPr lang="en-US" dirty="0"/>
           </a:p>
         </p:txBody>
       </p:sp>
@@ -470,6 +338,129 @@
               <a:t>‹#›</a:t>
             </a:fld>
             <a:endParaRPr lang="en-US"/>
+          </a:p>
+        </p:txBody>
+      </p:sp>
+      <p:sp>
+        <p:nvSpPr>
+          <p:cNvPr id="205" name="AI_DATE"/>
+          <p:cNvSpPr>
+            <a:spLocks noGrp="1"/>
+          </p:cNvSpPr>
+          <p:nvPr>
+            <p:ph type="body" idx="13" hasCustomPrompt="1"/>
+          </p:nvPr>
+        </p:nvSpPr>
+        <p:spPr>
+          <a:xfrm>
+            <a:off x="731519" y="4834890"/>
+            <a:ext cx="4023359" cy="308610"/>
+          </a:xfrm>
+          <a:noFill/>
+          <a:ln>
+            <a:noFill/>
+          </a:ln>
+        </p:spPr>
+        <p:txBody>
+          <a:bodyPr wrap="square" lIns="0" tIns="0" rIns="0" bIns="0" anchor="t"/>
+          <a:lstStyle>
+            <a:lvl1pPr>
+              <a:buNone/>
+              <a:defRPr sz="1300">
+                <a:solidFill>
+                  <a:srgbClr val="666666"/>
+                </a:solidFill>
+              </a:defRPr>
+            </a:lvl1pPr>
+          </a:lstStyle>
+          <a:p>
+            <a:pPr algn="l"/>
+            <a:r>
+              <a:rPr lang="en-US" dirty="0"/>
+              <a:t>Click to edit Master subtitle style</a:t>
+            </a:r>
+          </a:p>
+        </p:txBody>
+      </p:sp>
+      <p:sp>
+        <p:nvSpPr>
+          <p:cNvPr id="206" name="AI_ORGANIZATION"/>
+          <p:cNvSpPr>
+            <a:spLocks noGrp="1"/>
+          </p:cNvSpPr>
+          <p:nvPr>
+            <p:ph type="body" idx="14" hasCustomPrompt="1"/>
+          </p:nvPr>
+        </p:nvSpPr>
+        <p:spPr>
+          <a:xfrm>
+            <a:off x="731520" y="5383530"/>
+            <a:ext cx="4023360" cy="288036"/>
+          </a:xfrm>
+          <a:noFill/>
+          <a:ln>
+            <a:noFill/>
+          </a:ln>
+        </p:spPr>
+        <p:txBody>
+          <a:bodyPr wrap="square" lIns="0" tIns="0" rIns="0" bIns="0" anchor="t"/>
+          <a:lstStyle>
+            <a:lvl1pPr>
+              <a:buNone/>
+              <a:defRPr sz="1450">
+                <a:solidFill>
+                  <a:srgbClr val="666666"/>
+                </a:solidFill>
+              </a:defRPr>
+            </a:lvl1pPr>
+          </a:lstStyle>
+          <a:p>
+            <a:pPr algn="l"/>
+            <a:r>
+              <a:rPr lang="en-US" dirty="0"/>
+              <a:t>Click to edit Master subtitle style</a:t>
+            </a:r>
+          </a:p>
+        </p:txBody>
+      </p:sp>
+      <p:sp>
+        <p:nvSpPr>
+          <p:cNvPr id="207" name="AI_AUTHOR"/>
+          <p:cNvSpPr>
+            <a:spLocks noGrp="1"/>
+          </p:cNvSpPr>
+          <p:nvPr>
+            <p:ph type="body" idx="15" hasCustomPrompt="1"/>
+          </p:nvPr>
+        </p:nvSpPr>
+        <p:spPr>
+          <a:xfrm>
+            <a:off x="7802879" y="5383530"/>
+            <a:ext cx="3835019" cy="288036"/>
+          </a:xfrm>
+          <a:noFill/>
+          <a:ln>
+            <a:noFill/>
+          </a:ln>
+        </p:spPr>
+        <p:txBody>
+          <a:bodyPr wrap="square" lIns="0" tIns="0" rIns="0" bIns="0" anchor="t"/>
+          <a:lstStyle>
+            <a:lvl1pPr>
+              <a:buNone/>
+              <a:defRPr sz="1450">
+                <a:solidFill>
+                  <a:srgbClr val="666666"/>
+                </a:solidFill>
+              </a:defRPr>
+            </a:lvl1pPr>
+          </a:lstStyle>
+          <a:p>
+            <a:pPr algn="l"/>
+            <a:r>
+              <a:rPr lang="en-US" dirty="0"/>
+              <a:t>Click to edit Master subtitle style</a:t>
+            </a:r>
           </a:p>
         </p:txBody>
       </p:sp>
@@ -488,7 +479,7 @@
 
 <file path=ppt/slideLayouts/slideLayout10.xml><?xml version="1.0" encoding="utf-8"?>
 <p:sldLayout xmlns:a="http://schemas.openxmlformats.org/drawingml/2006/main" xmlns:r="http://schemas.openxmlformats.org/officeDocument/2006/relationships" xmlns:p="http://schemas.openxmlformats.org/presentationml/2006/main" preserve="1" userDrawn="1">
-  <p:cSld name="Title and Vertical Text">
+  <p:cSld name="closing_end">
     <p:bg>
       <p:bgPr>
         <a:solidFill>
@@ -513,58 +504,95 @@
       </p:grpSpPr>
       <p:sp>
         <p:nvSpPr>
-          <p:cNvPr id="3" name="Vertical Text Placeholder 2"/>
-          <p:cNvSpPr>
-            <a:spLocks noGrp="1"/>
-          </p:cNvSpPr>
-          <p:nvPr>
-            <p:ph type="body" orient="vert" idx="1"/>
-          </p:nvPr>
-        </p:nvSpPr>
-        <p:spPr/>
-        <p:txBody>
-          <a:bodyPr vert="eaVert"/>
-          <a:lstStyle/>
-          <a:p>
-            <a:pPr lvl="0"/>
-            <a:r>
-              <a:rPr lang="en-US"/>
-              <a:t>Click to edit Master text styles</a:t>
-            </a:r>
-          </a:p>
-          <a:p>
-            <a:pPr lvl="1"/>
-            <a:r>
-              <a:rPr lang="en-US"/>
-              <a:t>Second level</a:t>
-            </a:r>
-          </a:p>
-          <a:p>
-            <a:pPr lvl="2"/>
-            <a:r>
-              <a:rPr lang="en-US"/>
-              <a:t>Third level</a:t>
-            </a:r>
-          </a:p>
-          <a:p>
-            <a:pPr lvl="3"/>
-            <a:r>
-              <a:rPr lang="en-US"/>
-              <a:t>Fourth level</a:t>
-            </a:r>
-          </a:p>
-          <a:p>
-            <a:pPr lvl="4"/>
-            <a:r>
-              <a:rPr lang="en-US"/>
-              <a:t>Fifth level</a:t>
-            </a:r>
-          </a:p>
-        </p:txBody>
-      </p:sp>
-      <p:sp>
-        <p:nvSpPr>
-          <p:cNvPr id="4" name="Date Placeholder 3"/>
+          <p:cNvPr id="3" name="AI_SUBTITLE"/>
+          <p:cNvSpPr>
+            <a:spLocks noGrp="1"/>
+          </p:cNvSpPr>
+          <p:nvPr>
+            <p:ph type="subTitle" idx="1" hasCustomPrompt="1"/>
+          </p:nvPr>
+        </p:nvSpPr>
+        <p:spPr>
+          <a:xfrm>
+            <a:off x="731520" y="2846070"/>
+            <a:ext cx="9044492" cy="480060"/>
+          </a:xfrm>
+          <a:noFill/>
+          <a:ln>
+            <a:noFill/>
+          </a:ln>
+        </p:spPr>
+        <p:txBody>
+          <a:bodyPr wrap="square" lIns="0" tIns="0" rIns="0" bIns="0" anchor="t"/>
+          <a:lstStyle>
+            <a:lvl1pPr>
+              <a:buNone/>
+              <a:defRPr sz="1900">
+                <a:solidFill>
+                  <a:srgbClr val="242424"/>
+                </a:solidFill>
+              </a:defRPr>
+            </a:lvl1pPr>
+          </a:lstStyle>
+          <a:p>
+            <a:pPr algn="l"/>
+            <a:r>
+              <a:rPr lang="en-US" dirty="0"/>
+              <a:t>Click to edit Master subtitle style</a:t>
+            </a:r>
+          </a:p>
+        </p:txBody>
+      </p:sp>
+      <p:sp>
+        <p:nvSpPr>
+          <p:cNvPr id="7" name="AI_TITLE">
+            <a:extLst>
+              <a:ext uri="{FF2B5EF4-FFF2-40B4-BE49-F238E27FC236}">
+                <a16:creationId xmlns:a16="http://schemas.microsoft.com/office/drawing/2014/main" id="{C72B98BA-869D-3750-C4A0-0819554AC7D4}"/>
+              </a:ext>
+            </a:extLst>
+          </p:cNvPr>
+          <p:cNvSpPr>
+            <a:spLocks noGrp="1"/>
+          </p:cNvSpPr>
+          <p:nvPr>
+            <p:ph type="title"/>
+          </p:nvPr>
+        </p:nvSpPr>
+        <p:spPr>
+          <a:xfrm>
+            <a:off x="731520" y="1817370"/>
+            <a:ext cx="9044492" cy="822960"/>
+          </a:xfrm>
+        </p:spPr>
+        <p:txBody>
+          <a:bodyPr/>
+          <a:lstStyle>
+            <a:lvl1pPr>
+              <a:defRPr sz="4600" b="1">
+                <a:solidFill>
+                  <a:srgbClr val="191919"/>
+                </a:solidFill>
+              </a:defRPr>
+            </a:lvl1pPr>
+          </a:lstStyle>
+          <a:p>
+            <a:r>
+              <a:rPr kumimoji="1" lang="ja-JP" altLang="en-US"/>
+              <a:t>マスター タイトルの書式設定</a:t>
+            </a:r>
+          </a:p>
+        </p:txBody>
+      </p:sp>
+      <p:sp>
+        <p:nvSpPr>
+          <p:cNvPr id="8" name="日付プレースホルダー 7">
+            <a:extLst>
+              <a:ext uri="{FF2B5EF4-FFF2-40B4-BE49-F238E27FC236}">
+                <a16:creationId xmlns:a16="http://schemas.microsoft.com/office/drawing/2014/main" id="{075B6510-E118-0470-C854-7A1786F3A532}"/>
+              </a:ext>
+            </a:extLst>
+          </p:cNvPr>
           <p:cNvSpPr>
             <a:spLocks noGrp="1"/>
           </p:cNvSpPr>
@@ -579,7 +607,7 @@
           <a:p>
             <a:fld id="{5BCAD085-E8A6-8845-BD4E-CB4CCA059FC4}" type="datetimeFigureOut">
               <a:rPr lang="en-US" smtClean="0"/>
-              <a:t>5/3/26</a:t>
+              <a:t>6/11/26</a:t>
             </a:fld>
             <a:endParaRPr lang="en-US"/>
           </a:p>
@@ -587,7 +615,13 @@
       </p:sp>
       <p:sp>
         <p:nvSpPr>
-          <p:cNvPr id="5" name="Footer Placeholder 4"/>
+          <p:cNvPr id="9" name="フッター プレースホルダー 8">
+            <a:extLst>
+              <a:ext uri="{FF2B5EF4-FFF2-40B4-BE49-F238E27FC236}">
+                <a16:creationId xmlns:a16="http://schemas.microsoft.com/office/drawing/2014/main" id="{3AD7D4C5-CFA3-A26C-9B40-00CB703ED488}"/>
+              </a:ext>
+            </a:extLst>
+          </p:cNvPr>
           <p:cNvSpPr>
             <a:spLocks noGrp="1"/>
           </p:cNvSpPr>
@@ -600,13 +634,19 @@
           <a:bodyPr/>
           <a:lstStyle/>
           <a:p>
-            <a:endParaRPr lang="en-US"/>
-          </a:p>
-        </p:txBody>
-      </p:sp>
-      <p:sp>
-        <p:nvSpPr>
-          <p:cNvPr id="6" name="Slide Number Placeholder 5"/>
+            <a:endParaRPr lang="en-US" dirty="0"/>
+          </a:p>
+        </p:txBody>
+      </p:sp>
+      <p:sp>
+        <p:nvSpPr>
+          <p:cNvPr id="10" name="スライド番号プレースホルダー 9">
+            <a:extLst>
+              <a:ext uri="{FF2B5EF4-FFF2-40B4-BE49-F238E27FC236}">
+                <a16:creationId xmlns:a16="http://schemas.microsoft.com/office/drawing/2014/main" id="{2001425E-CEBA-0160-3EC6-DCDB0872041D}"/>
+              </a:ext>
+            </a:extLst>
+          </p:cNvPr>
           <p:cNvSpPr>
             <a:spLocks noGrp="1"/>
           </p:cNvSpPr>
@@ -629,29 +669,161 @@
       </p:sp>
       <p:sp>
         <p:nvSpPr>
-          <p:cNvPr id="7" name="タイトル 6">
+          <p:cNvPr id="205" name="AI_MESSAGE"/>
+          <p:cNvSpPr>
+            <a:spLocks noGrp="1"/>
+          </p:cNvSpPr>
+          <p:nvPr>
+            <p:ph type="body" idx="13" hasCustomPrompt="1"/>
+          </p:nvPr>
+        </p:nvSpPr>
+        <p:spPr>
+          <a:xfrm>
+            <a:off x="731520" y="3806190"/>
+            <a:ext cx="9044492" cy="822960"/>
+          </a:xfrm>
+          <a:noFill/>
+          <a:ln>
+            <a:noFill/>
+          </a:ln>
+        </p:spPr>
+        <p:txBody>
+          <a:bodyPr wrap="square" lIns="0" tIns="0" rIns="0" bIns="0" anchor="t"/>
+          <a:lstStyle>
+            <a:lvl1pPr>
+              <a:buNone/>
+              <a:defRPr sz="2000">
+                <a:solidFill>
+                  <a:srgbClr val="242424"/>
+                </a:solidFill>
+              </a:defRPr>
+            </a:lvl1pPr>
+          </a:lstStyle>
+          <a:p>
+            <a:pPr algn="l"/>
+            <a:r>
+              <a:rPr lang="en-US" dirty="0"/>
+              <a:t>Click to edit Master subtitle style</a:t>
+            </a:r>
+          </a:p>
+        </p:txBody>
+      </p:sp>
+      <p:sp>
+        <p:nvSpPr>
+          <p:cNvPr id="206" name="AI_CONTACT"/>
+          <p:cNvSpPr>
+            <a:spLocks noGrp="1"/>
+          </p:cNvSpPr>
+          <p:nvPr>
+            <p:ph type="body" idx="14" hasCustomPrompt="1"/>
+          </p:nvPr>
+        </p:nvSpPr>
+        <p:spPr>
+          <a:xfrm>
+            <a:off x="731520" y="5520690"/>
+            <a:ext cx="9044492" cy="308610"/>
+          </a:xfrm>
+          <a:noFill/>
+          <a:ln>
+            <a:noFill/>
+          </a:ln>
+        </p:spPr>
+        <p:txBody>
+          <a:bodyPr wrap="square" lIns="0" tIns="0" rIns="0" bIns="0" anchor="t"/>
+          <a:lstStyle>
+            <a:lvl1pPr>
+              <a:buNone/>
+              <a:defRPr sz="1400">
+                <a:solidFill>
+                  <a:srgbClr val="666666"/>
+                </a:solidFill>
+              </a:defRPr>
+            </a:lvl1pPr>
+          </a:lstStyle>
+          <a:p>
+            <a:pPr algn="l"/>
+            <a:r>
+              <a:rPr lang="en-US" dirty="0"/>
+              <a:t>Click to edit Master subtitle style</a:t>
+            </a:r>
+          </a:p>
+        </p:txBody>
+      </p:sp>
+      <p:sp>
+        <p:nvSpPr>
+          <p:cNvPr id="207" name="AI_CTA"/>
+          <p:cNvSpPr>
+            <a:spLocks noGrp="1"/>
+          </p:cNvSpPr>
+          <p:nvPr>
+            <p:ph type="body" idx="15" hasCustomPrompt="1"/>
+          </p:nvPr>
+        </p:nvSpPr>
+        <p:spPr>
+          <a:xfrm>
+            <a:off x="731520" y="4903470"/>
+            <a:ext cx="9044492" cy="308610"/>
+          </a:xfrm>
+          <a:noFill/>
+          <a:ln>
+            <a:noFill/>
+          </a:ln>
+        </p:spPr>
+        <p:txBody>
+          <a:bodyPr wrap="square" lIns="0" tIns="0" rIns="0" bIns="0" anchor="t"/>
+          <a:lstStyle>
+            <a:lvl1pPr>
+              <a:buNone/>
+              <a:defRPr sz="1400" b="1">
+                <a:solidFill>
+                  <a:srgbClr val="191919"/>
+                </a:solidFill>
+              </a:defRPr>
+            </a:lvl1pPr>
+          </a:lstStyle>
+          <a:p>
+            <a:pPr algn="l"/>
+            <a:r>
+              <a:rPr lang="en-US" dirty="0"/>
+              <a:t>Click to edit Master subtitle style</a:t>
+            </a:r>
+          </a:p>
+        </p:txBody>
+      </p:sp>
+      <p:sp>
+        <p:nvSpPr>
+          <p:cNvPr id="2" name="deco_footer_line">
             <a:extLst>
               <a:ext uri="{FF2B5EF4-FFF2-40B4-BE49-F238E27FC236}">
-                <a16:creationId xmlns:a16="http://schemas.microsoft.com/office/drawing/2014/main" id="{77F5274A-DA0B-755A-88F2-D3159180EEF9}"/>
+                <a16:creationId xmlns:a16="http://schemas.microsoft.com/office/drawing/2014/main" id="{A6FA330A-6720-2BED-B134-F0AEC6514449}"/>
               </a:ext>
             </a:extLst>
           </p:cNvPr>
           <p:cNvSpPr>
             <a:spLocks noGrp="1"/>
           </p:cNvSpPr>
-          <p:nvPr>
-            <p:ph type="title"/>
-          </p:nvPr>
-        </p:nvSpPr>
-        <p:spPr/>
+          <p:nvPr userDrawn="1"/>
+        </p:nvSpPr>
+        <p:spPr>
+          <a:xfrm>
+            <a:off x="555874" y="5946621"/>
+            <a:ext cx="11082025" cy="41563"/>
+          </a:xfrm>
+          <a:prstGeom prst="rect">
+            <a:avLst/>
+          </a:prstGeom>
+          <a:solidFill>
+            <a:srgbClr val="D9D9D6"/>
+          </a:solidFill>
+          <a:ln>
+            <a:noFill/>
+          </a:ln>
+        </p:spPr>
         <p:txBody>
           <a:bodyPr/>
           <a:lstStyle/>
           <a:p>
-            <a:r>
-              <a:rPr kumimoji="1" lang="ja-JP" altLang="en-US"/>
-              <a:t>マスター タイトルの書式設定</a:t>
-            </a:r>
+            <a:endParaRPr/>
           </a:p>
         </p:txBody>
       </p:sp>
@@ -669,7 +841,7 @@
 </file>
 
 <file path=ppt/slideLayouts/slideLayout11.xml><?xml version="1.0" encoding="utf-8"?>
-<p:sldLayout xmlns:a="http://schemas.openxmlformats.org/drawingml/2006/main" xmlns:r="http://schemas.openxmlformats.org/officeDocument/2006/relationships" xmlns:p="http://schemas.openxmlformats.org/presentationml/2006/main" preserve="1" userDrawn="1" type="cust">
+<p:sldLayout xmlns:a="http://schemas.openxmlformats.org/drawingml/2006/main" xmlns:r="http://schemas.openxmlformats.org/officeDocument/2006/relationships" xmlns:p="http://schemas.openxmlformats.org/presentationml/2006/main" preserve="1" userDrawn="1">
   <p:cSld name="three_cards_vertical">
     <p:bg>
       <p:bgPr>
@@ -695,7 +867,7 @@
       </p:grpSpPr>
       <p:sp>
         <p:nvSpPr>
-          <p:cNvPr id="200" name="deco_v_strip1_bg"/>
+          <p:cNvPr id="200" name="deco_h_card1_bg"/>
           <p:cNvSpPr>
             <a:spLocks noGrp="1"/>
           </p:cNvSpPr>
@@ -703,14 +875,16 @@
         </p:nvSpPr>
         <p:spPr>
           <a:xfrm>
-            <a:off x="243840" y="1014984"/>
-            <a:ext cx="11704320" cy="1536192"/>
-          </a:xfrm>
-          <a:prstGeom prst="rect">
-            <a:avLst/>
+            <a:off x="365760" y="1680210"/>
+            <a:ext cx="3474720" cy="3874770"/>
+          </a:xfrm>
+          <a:prstGeom prst="roundRect">
+            <a:avLst>
+              <a:gd name="adj" fmla="val 4500"/>
+            </a:avLst>
           </a:prstGeom>
           <a:solidFill>
-            <a:srgbClr val="E8F2FB"/>
+            <a:srgbClr val="F7F7F5"/>
           </a:solidFill>
           <a:ln>
             <a:noFill/>
@@ -719,12 +893,14 @@
         <p:txBody>
           <a:bodyPr/>
           <a:lstStyle/>
-          <a:p/>
-        </p:txBody>
-      </p:sp>
-      <p:sp>
-        <p:nvSpPr>
-          <p:cNvPr id="201" name="deco_v_strip1_bar"/>
+          <a:p>
+            <a:endParaRPr/>
+          </a:p>
+        </p:txBody>
+      </p:sp>
+      <p:sp>
+        <p:nvSpPr>
+          <p:cNvPr id="201" name="deco_h_card1_badge"/>
           <p:cNvSpPr>
             <a:spLocks noGrp="1"/>
           </p:cNvSpPr>
@@ -732,14 +908,14 @@
         </p:nvSpPr>
         <p:spPr>
           <a:xfrm>
-            <a:off x="243840" y="1014984"/>
-            <a:ext cx="121920" cy="1536192"/>
-          </a:xfrm>
-          <a:prstGeom prst="rect">
+            <a:off x="1767078" y="2057400"/>
+            <a:ext cx="672084" cy="672084"/>
+          </a:xfrm>
+          <a:prstGeom prst="ellipse">
             <a:avLst/>
           </a:prstGeom>
           <a:solidFill>
-            <a:srgbClr val="1C3557"/>
+            <a:srgbClr val="191919"/>
           </a:solidFill>
           <a:ln>
             <a:noFill/>
@@ -748,12 +924,14 @@
         <p:txBody>
           <a:bodyPr/>
           <a:lstStyle/>
-          <a:p/>
-        </p:txBody>
-      </p:sp>
-      <p:sp>
-        <p:nvSpPr>
-          <p:cNvPr id="202" name="deco_v_strip2_bg"/>
+          <a:p>
+            <a:endParaRPr/>
+          </a:p>
+        </p:txBody>
+      </p:sp>
+      <p:sp>
+        <p:nvSpPr>
+          <p:cNvPr id="202" name="deco_h_card2_bg"/>
           <p:cNvSpPr>
             <a:spLocks noGrp="1"/>
           </p:cNvSpPr>
@@ -761,14 +939,16 @@
         </p:nvSpPr>
         <p:spPr>
           <a:xfrm>
-            <a:off x="243840" y="2743200"/>
-            <a:ext cx="11704320" cy="1536192"/>
-          </a:xfrm>
-          <a:prstGeom prst="rect">
-            <a:avLst/>
+            <a:off x="4364736" y="1680210"/>
+            <a:ext cx="3474720" cy="3874770"/>
+          </a:xfrm>
+          <a:prstGeom prst="roundRect">
+            <a:avLst>
+              <a:gd name="adj" fmla="val 4500"/>
+            </a:avLst>
           </a:prstGeom>
           <a:solidFill>
-            <a:srgbClr val="E8F2FB"/>
+            <a:srgbClr val="F7F7F5"/>
           </a:solidFill>
           <a:ln>
             <a:noFill/>
@@ -777,12 +957,14 @@
         <p:txBody>
           <a:bodyPr/>
           <a:lstStyle/>
-          <a:p/>
-        </p:txBody>
-      </p:sp>
-      <p:sp>
-        <p:nvSpPr>
-          <p:cNvPr id="203" name="deco_v_strip2_bar"/>
+          <a:p>
+            <a:endParaRPr/>
+          </a:p>
+        </p:txBody>
+      </p:sp>
+      <p:sp>
+        <p:nvSpPr>
+          <p:cNvPr id="203" name="deco_h_card2_badge"/>
           <p:cNvSpPr>
             <a:spLocks noGrp="1"/>
           </p:cNvSpPr>
@@ -790,14 +972,14 @@
         </p:nvSpPr>
         <p:spPr>
           <a:xfrm>
-            <a:off x="243840" y="2743200"/>
-            <a:ext cx="121920" cy="1536192"/>
-          </a:xfrm>
-          <a:prstGeom prst="rect">
+            <a:off x="5766054" y="2057400"/>
+            <a:ext cx="672084" cy="672084"/>
+          </a:xfrm>
+          <a:prstGeom prst="ellipse">
             <a:avLst/>
           </a:prstGeom>
           <a:solidFill>
-            <a:srgbClr val="1C3557"/>
+            <a:srgbClr val="191919"/>
           </a:solidFill>
           <a:ln>
             <a:noFill/>
@@ -806,12 +988,14 @@
         <p:txBody>
           <a:bodyPr/>
           <a:lstStyle/>
-          <a:p/>
-        </p:txBody>
-      </p:sp>
-      <p:sp>
-        <p:nvSpPr>
-          <p:cNvPr id="204" name="deco_v_strip3_bg"/>
+          <a:p>
+            <a:endParaRPr/>
+          </a:p>
+        </p:txBody>
+      </p:sp>
+      <p:sp>
+        <p:nvSpPr>
+          <p:cNvPr id="204" name="deco_h_card3_bg"/>
           <p:cNvSpPr>
             <a:spLocks noGrp="1"/>
           </p:cNvSpPr>
@@ -819,14 +1003,16 @@
         </p:nvSpPr>
         <p:spPr>
           <a:xfrm>
-            <a:off x="243840" y="4471416"/>
-            <a:ext cx="11704320" cy="1536192"/>
-          </a:xfrm>
-          <a:prstGeom prst="rect">
-            <a:avLst/>
+            <a:off x="8351520" y="1680210"/>
+            <a:ext cx="3474720" cy="3874770"/>
+          </a:xfrm>
+          <a:prstGeom prst="roundRect">
+            <a:avLst>
+              <a:gd name="adj" fmla="val 4500"/>
+            </a:avLst>
           </a:prstGeom>
           <a:solidFill>
-            <a:srgbClr val="E8F2FB"/>
+            <a:srgbClr val="F7F7F5"/>
           </a:solidFill>
           <a:ln>
             <a:noFill/>
@@ -835,12 +1021,14 @@
         <p:txBody>
           <a:bodyPr/>
           <a:lstStyle/>
-          <a:p/>
-        </p:txBody>
-      </p:sp>
-      <p:sp>
-        <p:nvSpPr>
-          <p:cNvPr id="205" name="deco_v_strip3_bar"/>
+          <a:p>
+            <a:endParaRPr/>
+          </a:p>
+        </p:txBody>
+      </p:sp>
+      <p:sp>
+        <p:nvSpPr>
+          <p:cNvPr id="205" name="deco_h_card3_badge"/>
           <p:cNvSpPr>
             <a:spLocks noGrp="1"/>
           </p:cNvSpPr>
@@ -848,14 +1036,14 @@
         </p:nvSpPr>
         <p:spPr>
           <a:xfrm>
-            <a:off x="243840" y="4471416"/>
-            <a:ext cx="121920" cy="1536192"/>
-          </a:xfrm>
-          <a:prstGeom prst="rect">
+            <a:off x="9752838" y="2057400"/>
+            <a:ext cx="672084" cy="672084"/>
+          </a:xfrm>
+          <a:prstGeom prst="ellipse">
             <a:avLst/>
           </a:prstGeom>
           <a:solidFill>
-            <a:srgbClr val="1C3557"/>
+            <a:srgbClr val="191919"/>
           </a:solidFill>
           <a:ln>
             <a:noFill/>
@@ -864,12 +1052,14 @@
         <p:txBody>
           <a:bodyPr/>
           <a:lstStyle/>
-          <a:p/>
-        </p:txBody>
-      </p:sp>
-      <p:sp>
-        <p:nvSpPr>
-          <p:cNvPr id="8" name="タイトル 7">
+          <a:p>
+            <a:endParaRPr/>
+          </a:p>
+        </p:txBody>
+      </p:sp>
+      <p:sp>
+        <p:nvSpPr>
+          <p:cNvPr id="8" name="AI_TITLE">
             <a:extLst>
               <a:ext uri="{FF2B5EF4-FFF2-40B4-BE49-F238E27FC236}">
                 <a16:creationId xmlns:a16="http://schemas.microsoft.com/office/drawing/2014/main" id="{8A4D2959-DC66-A124-52B8-8E8467A7D32E}"/>
@@ -885,13 +1075,21 @@
         </p:nvSpPr>
         <p:spPr>
           <a:xfrm>
-            <a:off x="231648" y="219456"/>
-            <a:ext cx="11728704" cy="644652"/>
-          </a:xfrm>
-        </p:spPr>
-        <p:txBody>
-          <a:bodyPr/>
-          <a:lstStyle/>
+            <a:off x="365760" y="356616"/>
+            <a:ext cx="11460480" cy="617220"/>
+          </a:xfrm>
+        </p:spPr>
+        <p:txBody>
+          <a:bodyPr/>
+          <a:lstStyle>
+            <a:lvl1pPr>
+              <a:defRPr sz="3200" b="1">
+                <a:solidFill>
+                  <a:srgbClr val="191919"/>
+                </a:solidFill>
+              </a:defRPr>
+            </a:lvl1pPr>
+          </a:lstStyle>
           <a:p>
             <a:r>
               <a:rPr kumimoji="1" lang="ja-JP" altLang="en-US"/>
@@ -923,7 +1121,7 @@
           <a:p>
             <a:fld id="{5BCAD085-E8A6-8845-BD4E-CB4CCA059FC4}" type="datetimeFigureOut">
               <a:rPr lang="en-US" smtClean="0"/>
-              <a:t>5/3/26</a:t>
+              <a:t>6/11/26</a:t>
             </a:fld>
             <a:endParaRPr lang="en-US"/>
           </a:p>
@@ -985,7 +1183,7 @@
       </p:sp>
       <p:sp>
         <p:nvSpPr>
-          <p:cNvPr id="13" name="slot__card_1_combined_text">
+          <p:cNvPr id="13" name="AI_CARDS_1_DESCRIPTION">
             <a:extLst>
               <a:ext uri="{FF2B5EF4-FFF2-40B4-BE49-F238E27FC236}">
                 <a16:creationId xmlns:a16="http://schemas.microsoft.com/office/drawing/2014/main" id="{23D794FD-7998-B263-7A33-0D9A529D97EE}"/>
@@ -996,18 +1194,53 @@
             <a:spLocks noGrp="1"/>
           </p:cNvSpPr>
           <p:nvPr>
-            <p:ph sz="quarter" idx="13" type="obj"/>
-          </p:nvPr>
-        </p:nvSpPr>
-        <p:spPr>
-          <a:xfrm>
-            <a:off x="1524000" y="1234440"/>
-            <a:ext cx="10302240" cy="1097280"/>
-          </a:xfrm>
-        </p:spPr>
-        <p:txBody>
-          <a:bodyPr/>
-          <a:lstStyle/>
+            <p:ph sz="quarter" idx="13"/>
+          </p:nvPr>
+        </p:nvSpPr>
+        <p:spPr>
+          <a:xfrm>
+            <a:off x="694944" y="3758184"/>
+            <a:ext cx="2816352" cy="1405890"/>
+          </a:xfrm>
+        </p:spPr>
+        <p:txBody>
+          <a:bodyPr/>
+          <a:lstStyle>
+            <a:lvl1pPr>
+              <a:lnSpc>
+                <a:spcPct val="100000"/>
+              </a:lnSpc>
+              <a:defRPr sz="1400">
+                <a:solidFill>
+                  <a:srgbClr val="666666"/>
+                </a:solidFill>
+              </a:defRPr>
+            </a:lvl1pPr>
+            <a:lvl2pPr>
+              <a:lnSpc>
+                <a:spcPct val="100000"/>
+              </a:lnSpc>
+              <a:defRPr sz="1400"/>
+            </a:lvl2pPr>
+            <a:lvl3pPr>
+              <a:lnSpc>
+                <a:spcPct val="100000"/>
+              </a:lnSpc>
+              <a:defRPr sz="1400"/>
+            </a:lvl3pPr>
+            <a:lvl4pPr>
+              <a:lnSpc>
+                <a:spcPct val="100000"/>
+              </a:lnSpc>
+              <a:defRPr sz="1400"/>
+            </a:lvl4pPr>
+            <a:lvl5pPr>
+              <a:lnSpc>
+                <a:spcPct val="100000"/>
+              </a:lnSpc>
+              <a:defRPr sz="1400"/>
+            </a:lvl5pPr>
+          </a:lstStyle>
           <a:p>
             <a:pPr lvl="0"/>
             <a:r>
@@ -1022,7 +1255,7 @@
               <a:t>第 </a:t>
             </a:r>
             <a:r>
-              <a:rPr kumimoji="1" lang="en-US" altLang="ja-JP"/>
+              <a:rPr kumimoji="1" lang="en-US" altLang="ja-JP" dirty="0"/>
               <a:t>2 </a:t>
             </a:r>
             <a:r>
@@ -1037,7 +1270,7 @@
               <a:t>第 </a:t>
             </a:r>
             <a:r>
-              <a:rPr kumimoji="1" lang="en-US" altLang="ja-JP"/>
+              <a:rPr kumimoji="1" lang="en-US" altLang="ja-JP" dirty="0"/>
               <a:t>3 </a:t>
             </a:r>
             <a:r>
@@ -1052,7 +1285,7 @@
               <a:t>第 </a:t>
             </a:r>
             <a:r>
-              <a:rPr kumimoji="1" lang="en-US" altLang="ja-JP"/>
+              <a:rPr kumimoji="1" lang="en-US" altLang="ja-JP" dirty="0"/>
               <a:t>4 </a:t>
             </a:r>
             <a:r>
@@ -1067,7 +1300,7 @@
               <a:t>第 </a:t>
             </a:r>
             <a:r>
-              <a:rPr kumimoji="1" lang="en-US" altLang="ja-JP"/>
+              <a:rPr kumimoji="1" lang="en-US" altLang="ja-JP" dirty="0"/>
               <a:t>5 </a:t>
             </a:r>
             <a:r>
@@ -1079,7 +1312,7 @@
       </p:sp>
       <p:sp>
         <p:nvSpPr>
-          <p:cNvPr id="15" name="slot__card_2_combined_text">
+          <p:cNvPr id="15" name="AI_CARDS_2_DESCRIPTION">
             <a:extLst>
               <a:ext uri="{FF2B5EF4-FFF2-40B4-BE49-F238E27FC236}">
                 <a16:creationId xmlns:a16="http://schemas.microsoft.com/office/drawing/2014/main" id="{CE5D3923-D828-BFFF-25F1-02538CEB89C0}"/>
@@ -1090,18 +1323,53 @@
             <a:spLocks noGrp="1"/>
           </p:cNvSpPr>
           <p:nvPr>
-            <p:ph sz="quarter" idx="14" type="obj"/>
-          </p:nvPr>
-        </p:nvSpPr>
-        <p:spPr>
-          <a:xfrm>
-            <a:off x="1524000" y="2962656"/>
-            <a:ext cx="10302240" cy="1097280"/>
-          </a:xfrm>
-        </p:spPr>
-        <p:txBody>
-          <a:bodyPr/>
-          <a:lstStyle/>
+            <p:ph sz="quarter" idx="14"/>
+          </p:nvPr>
+        </p:nvSpPr>
+        <p:spPr>
+          <a:xfrm>
+            <a:off x="4693920" y="3758184"/>
+            <a:ext cx="2816352" cy="1405890"/>
+          </a:xfrm>
+        </p:spPr>
+        <p:txBody>
+          <a:bodyPr/>
+          <a:lstStyle>
+            <a:lvl1pPr>
+              <a:lnSpc>
+                <a:spcPct val="100000"/>
+              </a:lnSpc>
+              <a:defRPr sz="1400">
+                <a:solidFill>
+                  <a:srgbClr val="666666"/>
+                </a:solidFill>
+              </a:defRPr>
+            </a:lvl1pPr>
+            <a:lvl2pPr>
+              <a:lnSpc>
+                <a:spcPct val="100000"/>
+              </a:lnSpc>
+              <a:defRPr sz="1400"/>
+            </a:lvl2pPr>
+            <a:lvl3pPr>
+              <a:lnSpc>
+                <a:spcPct val="100000"/>
+              </a:lnSpc>
+              <a:defRPr sz="1400"/>
+            </a:lvl3pPr>
+            <a:lvl4pPr>
+              <a:lnSpc>
+                <a:spcPct val="100000"/>
+              </a:lnSpc>
+              <a:defRPr sz="1400"/>
+            </a:lvl4pPr>
+            <a:lvl5pPr>
+              <a:lnSpc>
+                <a:spcPct val="100000"/>
+              </a:lnSpc>
+              <a:defRPr sz="1400"/>
+            </a:lvl5pPr>
+          </a:lstStyle>
           <a:p>
             <a:pPr lvl="0"/>
             <a:r>
@@ -1116,7 +1384,7 @@
               <a:t>第 </a:t>
             </a:r>
             <a:r>
-              <a:rPr kumimoji="1" lang="en-US" altLang="ja-JP"/>
+              <a:rPr kumimoji="1" lang="en-US" altLang="ja-JP" dirty="0"/>
               <a:t>2 </a:t>
             </a:r>
             <a:r>
@@ -1131,7 +1399,7 @@
               <a:t>第 </a:t>
             </a:r>
             <a:r>
-              <a:rPr kumimoji="1" lang="en-US" altLang="ja-JP"/>
+              <a:rPr kumimoji="1" lang="en-US" altLang="ja-JP" dirty="0"/>
               <a:t>3 </a:t>
             </a:r>
             <a:r>
@@ -1146,7 +1414,7 @@
               <a:t>第 </a:t>
             </a:r>
             <a:r>
-              <a:rPr kumimoji="1" lang="en-US" altLang="ja-JP"/>
+              <a:rPr kumimoji="1" lang="en-US" altLang="ja-JP" dirty="0"/>
               <a:t>4 </a:t>
             </a:r>
             <a:r>
@@ -1161,7 +1429,7 @@
               <a:t>第 </a:t>
             </a:r>
             <a:r>
-              <a:rPr kumimoji="1" lang="en-US" altLang="ja-JP"/>
+              <a:rPr kumimoji="1" lang="en-US" altLang="ja-JP" dirty="0"/>
               <a:t>5 </a:t>
             </a:r>
             <a:r>
@@ -1173,7 +1441,7 @@
       </p:sp>
       <p:sp>
         <p:nvSpPr>
-          <p:cNvPr id="16" name="slot__card_3_combined_text">
+          <p:cNvPr id="16" name="AI_CARDS_3_DESCRIPTION">
             <a:extLst>
               <a:ext uri="{FF2B5EF4-FFF2-40B4-BE49-F238E27FC236}">
                 <a16:creationId xmlns:a16="http://schemas.microsoft.com/office/drawing/2014/main" id="{CE5D3923-D828-BFFF-25F1-02538CEB89C0}"/>
@@ -1184,18 +1452,53 @@
             <a:spLocks noGrp="1"/>
           </p:cNvSpPr>
           <p:nvPr>
-            <p:ph sz="quarter" idx="15" type="obj"/>
-          </p:nvPr>
-        </p:nvSpPr>
-        <p:spPr>
-          <a:xfrm>
-            <a:off x="1524000" y="4690872"/>
-            <a:ext cx="10302240" cy="1097280"/>
-          </a:xfrm>
-        </p:spPr>
-        <p:txBody>
-          <a:bodyPr/>
-          <a:lstStyle/>
+            <p:ph sz="quarter" idx="15"/>
+          </p:nvPr>
+        </p:nvSpPr>
+        <p:spPr>
+          <a:xfrm>
+            <a:off x="8680704" y="3758184"/>
+            <a:ext cx="2816352" cy="1405890"/>
+          </a:xfrm>
+        </p:spPr>
+        <p:txBody>
+          <a:bodyPr/>
+          <a:lstStyle>
+            <a:lvl1pPr>
+              <a:lnSpc>
+                <a:spcPct val="100000"/>
+              </a:lnSpc>
+              <a:defRPr sz="1400">
+                <a:solidFill>
+                  <a:srgbClr val="666666"/>
+                </a:solidFill>
+              </a:defRPr>
+            </a:lvl1pPr>
+            <a:lvl2pPr>
+              <a:lnSpc>
+                <a:spcPct val="100000"/>
+              </a:lnSpc>
+              <a:defRPr sz="1400"/>
+            </a:lvl2pPr>
+            <a:lvl3pPr>
+              <a:lnSpc>
+                <a:spcPct val="100000"/>
+              </a:lnSpc>
+              <a:defRPr sz="1400"/>
+            </a:lvl3pPr>
+            <a:lvl4pPr>
+              <a:lnSpc>
+                <a:spcPct val="100000"/>
+              </a:lnSpc>
+              <a:defRPr sz="1400"/>
+            </a:lvl4pPr>
+            <a:lvl5pPr>
+              <a:lnSpc>
+                <a:spcPct val="100000"/>
+              </a:lnSpc>
+              <a:defRPr sz="1400"/>
+            </a:lvl5pPr>
+          </a:lstStyle>
           <a:p>
             <a:pPr lvl="0"/>
             <a:r>
@@ -1210,7 +1513,7 @@
               <a:t>第 </a:t>
             </a:r>
             <a:r>
-              <a:rPr kumimoji="1" lang="en-US" altLang="ja-JP"/>
+              <a:rPr kumimoji="1" lang="en-US" altLang="ja-JP" dirty="0"/>
               <a:t>2 </a:t>
             </a:r>
             <a:r>
@@ -1225,7 +1528,7 @@
               <a:t>第 </a:t>
             </a:r>
             <a:r>
-              <a:rPr kumimoji="1" lang="en-US" altLang="ja-JP"/>
+              <a:rPr kumimoji="1" lang="en-US" altLang="ja-JP" dirty="0"/>
               <a:t>3 </a:t>
             </a:r>
             <a:r>
@@ -1240,7 +1543,7 @@
               <a:t>第 </a:t>
             </a:r>
             <a:r>
-              <a:rPr kumimoji="1" lang="en-US" altLang="ja-JP"/>
+              <a:rPr kumimoji="1" lang="en-US" altLang="ja-JP" dirty="0"/>
               <a:t>4 </a:t>
             </a:r>
             <a:r>
@@ -1255,7 +1558,7 @@
               <a:t>第 </a:t>
             </a:r>
             <a:r>
-              <a:rPr kumimoji="1" lang="en-US" altLang="ja-JP"/>
+              <a:rPr kumimoji="1" lang="en-US" altLang="ja-JP" dirty="0"/>
               <a:t>5 </a:t>
             </a:r>
             <a:r>
@@ -1267,7 +1570,111 @@
       </p:sp>
       <p:sp>
         <p:nvSpPr>
-          <p:cNvPr id="17" name="slot__card_1_icon"/>
+          <p:cNvPr id="17" name="AI_SUBTITLE">
+            <a:extLst>
+              <a:ext uri="{FF2B5EF4-FFF2-40B4-BE49-F238E27FC236}">
+                <a16:creationId xmlns:a16="http://schemas.microsoft.com/office/drawing/2014/main" id="{23D794FD-7998-B263-7A33-0D9A529D97EE}"/>
+              </a:ext>
+            </a:extLst>
+          </p:cNvPr>
+          <p:cNvSpPr>
+            <a:spLocks noGrp="1"/>
+          </p:cNvSpPr>
+          <p:nvPr>
+            <p:ph type="body" sz="quarter" idx="19"/>
+          </p:nvPr>
+        </p:nvSpPr>
+        <p:spPr>
+          <a:xfrm>
+            <a:off x="365760" y="1042416"/>
+            <a:ext cx="11460480" cy="342900"/>
+          </a:xfrm>
+        </p:spPr>
+        <p:txBody>
+          <a:bodyPr anchor="ctr"/>
+          <a:lstStyle>
+            <a:lvl1pPr>
+              <a:lnSpc>
+                <a:spcPct val="100000"/>
+              </a:lnSpc>
+              <a:buNone/>
+              <a:defRPr sz="1400">
+                <a:solidFill>
+                  <a:srgbClr val="666666"/>
+                </a:solidFill>
+              </a:defRPr>
+            </a:lvl1pPr>
+          </a:lstStyle>
+          <a:p>
+            <a:pPr lvl="0"/>
+            <a:r>
+              <a:rPr kumimoji="1" lang="ja-JP" altLang="en-US"/>
+              <a:t>マスター テキストの書式設定</a:t>
+            </a:r>
+          </a:p>
+        </p:txBody>
+      </p:sp>
+      <p:sp>
+        <p:nvSpPr>
+          <p:cNvPr id="18" name="AI_CARDS_1_TITLE">
+            <a:extLst>
+              <a:ext uri="{FF2B5EF4-FFF2-40B4-BE49-F238E27FC236}">
+                <a16:creationId xmlns:a16="http://schemas.microsoft.com/office/drawing/2014/main" id="{23D794FD-7998-B263-7A33-0D9A529D97EE}"/>
+              </a:ext>
+            </a:extLst>
+          </p:cNvPr>
+          <p:cNvSpPr>
+            <a:spLocks noGrp="1"/>
+          </p:cNvSpPr>
+          <p:nvPr>
+            <p:ph type="body" sz="quarter" idx="20"/>
+          </p:nvPr>
+        </p:nvSpPr>
+        <p:spPr>
+          <a:xfrm>
+            <a:off x="694944" y="3140964"/>
+            <a:ext cx="2816352" cy="445770"/>
+          </a:xfrm>
+        </p:spPr>
+        <p:txBody>
+          <a:bodyPr anchor="ctr"/>
+          <a:lstStyle>
+            <a:lvl1pPr algn="ctr">
+              <a:lnSpc>
+                <a:spcPct val="100000"/>
+              </a:lnSpc>
+              <a:buNone/>
+              <a:defRPr sz="1650" b="1">
+                <a:solidFill>
+                  <a:srgbClr val="191919"/>
+                </a:solidFill>
+              </a:defRPr>
+            </a:lvl1pPr>
+            <a:lvl2pPr algn="ctr">
+              <a:defRPr/>
+            </a:lvl2pPr>
+            <a:lvl3pPr algn="ctr">
+              <a:defRPr/>
+            </a:lvl3pPr>
+            <a:lvl4pPr algn="ctr">
+              <a:defRPr/>
+            </a:lvl4pPr>
+            <a:lvl5pPr algn="ctr">
+              <a:defRPr/>
+            </a:lvl5pPr>
+          </a:lstStyle>
+          <a:p>
+            <a:pPr lvl="0" algn="ctr"/>
+            <a:r>
+              <a:rPr kumimoji="1" lang="ja-JP" altLang="en-US"/>
+              <a:t>マスター テキストの書式設定</a:t>
+            </a:r>
+          </a:p>
+        </p:txBody>
+      </p:sp>
+      <p:sp>
+        <p:nvSpPr>
+          <p:cNvPr id="19" name="AI_CARDS_1_ICON"/>
           <p:cNvSpPr>
             <a:spLocks noGrp="1"/>
           </p:cNvSpPr>
@@ -1277,8 +1684,8 @@
         </p:nvSpPr>
         <p:spPr>
           <a:xfrm>
-            <a:off x="451104" y="1405890"/>
-            <a:ext cx="792480" cy="754380"/>
+            <a:off x="1945386" y="2235708"/>
+            <a:ext cx="315468" cy="315468"/>
           </a:xfrm>
           <a:noFill/>
           <a:ln>
@@ -1333,7 +1740,65 @@
       </p:sp>
       <p:sp>
         <p:nvSpPr>
-          <p:cNvPr id="18" name="slot__card_2_icon"/>
+          <p:cNvPr id="20" name="AI_CARDS_2_TITLE">
+            <a:extLst>
+              <a:ext uri="{FF2B5EF4-FFF2-40B4-BE49-F238E27FC236}">
+                <a16:creationId xmlns:a16="http://schemas.microsoft.com/office/drawing/2014/main" id="{CE5D3923-D828-BFFF-25F1-02538CEB89C0}"/>
+              </a:ext>
+            </a:extLst>
+          </p:cNvPr>
+          <p:cNvSpPr>
+            <a:spLocks noGrp="1"/>
+          </p:cNvSpPr>
+          <p:nvPr>
+            <p:ph type="body" sz="quarter" idx="21"/>
+          </p:nvPr>
+        </p:nvSpPr>
+        <p:spPr>
+          <a:xfrm>
+            <a:off x="4693920" y="3140964"/>
+            <a:ext cx="2816352" cy="445770"/>
+          </a:xfrm>
+        </p:spPr>
+        <p:txBody>
+          <a:bodyPr anchor="ctr"/>
+          <a:lstStyle>
+            <a:lvl1pPr algn="ctr">
+              <a:lnSpc>
+                <a:spcPct val="100000"/>
+              </a:lnSpc>
+              <a:buNone/>
+              <a:defRPr sz="1650" b="1">
+                <a:solidFill>
+                  <a:srgbClr val="191919"/>
+                </a:solidFill>
+              </a:defRPr>
+            </a:lvl1pPr>
+            <a:lvl2pPr algn="ctr">
+              <a:defRPr/>
+            </a:lvl2pPr>
+            <a:lvl3pPr algn="ctr">
+              <a:defRPr/>
+            </a:lvl3pPr>
+            <a:lvl4pPr algn="ctr">
+              <a:defRPr/>
+            </a:lvl4pPr>
+            <a:lvl5pPr algn="ctr">
+              <a:defRPr/>
+            </a:lvl5pPr>
+          </a:lstStyle>
+          <a:p>
+            <a:pPr lvl="0" algn="ctr"/>
+            <a:r>
+              <a:rPr kumimoji="1" lang="ja-JP" altLang="en-US"/>
+              <a:t>マスター テキストの書式設定</a:t>
+            </a:r>
+          </a:p>
+        </p:txBody>
+      </p:sp>
+      <p:sp>
+        <p:nvSpPr>
+          <p:cNvPr id="21" name="AI_CARDS_2_ICON"/>
           <p:cNvSpPr>
             <a:spLocks noGrp="1"/>
           </p:cNvSpPr>
@@ -1343,8 +1808,8 @@
         </p:nvSpPr>
         <p:spPr>
           <a:xfrm>
-            <a:off x="451104" y="3134106"/>
-            <a:ext cx="792480" cy="754380"/>
+            <a:off x="5944362" y="2235708"/>
+            <a:ext cx="315468" cy="315468"/>
           </a:xfrm>
           <a:noFill/>
           <a:ln>
@@ -1399,7 +1864,65 @@
       </p:sp>
       <p:sp>
         <p:nvSpPr>
-          <p:cNvPr id="19" name="slot__card_3_icon"/>
+          <p:cNvPr id="22" name="AI_CARDS_3_TITLE">
+            <a:extLst>
+              <a:ext uri="{FF2B5EF4-FFF2-40B4-BE49-F238E27FC236}">
+                <a16:creationId xmlns:a16="http://schemas.microsoft.com/office/drawing/2014/main" id="{CE5D3923-D828-BFFF-25F1-02538CEB89C0}"/>
+              </a:ext>
+            </a:extLst>
+          </p:cNvPr>
+          <p:cNvSpPr>
+            <a:spLocks noGrp="1"/>
+          </p:cNvSpPr>
+          <p:nvPr>
+            <p:ph type="body" sz="quarter" idx="22"/>
+          </p:nvPr>
+        </p:nvSpPr>
+        <p:spPr>
+          <a:xfrm>
+            <a:off x="8680704" y="3140964"/>
+            <a:ext cx="2816352" cy="445770"/>
+          </a:xfrm>
+        </p:spPr>
+        <p:txBody>
+          <a:bodyPr anchor="ctr"/>
+          <a:lstStyle>
+            <a:lvl1pPr algn="ctr">
+              <a:lnSpc>
+                <a:spcPct val="100000"/>
+              </a:lnSpc>
+              <a:buNone/>
+              <a:defRPr sz="1650" b="1">
+                <a:solidFill>
+                  <a:srgbClr val="191919"/>
+                </a:solidFill>
+              </a:defRPr>
+            </a:lvl1pPr>
+            <a:lvl2pPr algn="ctr">
+              <a:defRPr/>
+            </a:lvl2pPr>
+            <a:lvl3pPr algn="ctr">
+              <a:defRPr/>
+            </a:lvl3pPr>
+            <a:lvl4pPr algn="ctr">
+              <a:defRPr/>
+            </a:lvl4pPr>
+            <a:lvl5pPr algn="ctr">
+              <a:defRPr/>
+            </a:lvl5pPr>
+          </a:lstStyle>
+          <a:p>
+            <a:pPr lvl="0" algn="ctr"/>
+            <a:r>
+              <a:rPr kumimoji="1" lang="ja-JP" altLang="en-US"/>
+              <a:t>マスター テキストの書式設定</a:t>
+            </a:r>
+          </a:p>
+        </p:txBody>
+      </p:sp>
+      <p:sp>
+        <p:nvSpPr>
+          <p:cNvPr id="23" name="AI_CARDS_3_ICON"/>
           <p:cNvSpPr>
             <a:spLocks noGrp="1"/>
           </p:cNvSpPr>
@@ -1409,8 +1932,8 @@
         </p:nvSpPr>
         <p:spPr>
           <a:xfrm>
-            <a:off x="451104" y="4862322"/>
-            <a:ext cx="792480" cy="754380"/>
+            <a:off x="9931146" y="2235708"/>
+            <a:ext cx="315468" cy="315468"/>
           </a:xfrm>
           <a:noFill/>
           <a:ln>
@@ -1478,7 +2001,7 @@
 
 <file path=ppt/slideLayouts/slideLayout2.xml><?xml version="1.0" encoding="utf-8"?>
 <p:sldLayout xmlns:a="http://schemas.openxmlformats.org/drawingml/2006/main" xmlns:r="http://schemas.openxmlformats.org/officeDocument/2006/relationships" xmlns:p="http://schemas.openxmlformats.org/presentationml/2006/main" preserve="1" userDrawn="1">
-  <p:cSld name="Title and Content">
+  <p:cSld name="agenda">
     <p:bg>
       <p:bgPr>
         <a:solidFill>
@@ -1503,6 +2026,39 @@
       </p:grpSpPr>
       <p:sp>
         <p:nvSpPr>
+          <p:cNvPr id="200" name="deco_content_panel"/>
+          <p:cNvSpPr>
+            <a:spLocks noGrp="1"/>
+          </p:cNvSpPr>
+          <p:nvPr/>
+        </p:nvSpPr>
+        <p:spPr>
+          <a:xfrm>
+            <a:off x="280416" y="1580974"/>
+            <a:ext cx="11631168" cy="4361688"/>
+          </a:xfrm>
+          <a:prstGeom prst="roundRect">
+            <a:avLst>
+              <a:gd name="adj" fmla="val 2188"/>
+            </a:avLst>
+          </a:prstGeom>
+          <a:solidFill>
+            <a:srgbClr val="F7F7F5"/>
+          </a:solidFill>
+          <a:ln>
+            <a:noFill/>
+          </a:ln>
+        </p:spPr>
+        <p:txBody>
+          <a:bodyPr/>
+          <a:lstStyle/>
+          <a:p>
+            <a:endParaRPr/>
+          </a:p>
+        </p:txBody>
+      </p:sp>
+      <p:sp>
+        <p:nvSpPr>
           <p:cNvPr id="4" name="Date Placeholder 3"/>
           <p:cNvSpPr>
             <a:spLocks noGrp="1"/>
@@ -1518,7 +2074,7 @@
           <a:p>
             <a:fld id="{5BCAD085-E8A6-8845-BD4E-CB4CCA059FC4}" type="datetimeFigureOut">
               <a:rPr lang="en-US" smtClean="0"/>
-              <a:t>5/3/26</a:t>
+              <a:t>6/11/26</a:t>
             </a:fld>
             <a:endParaRPr lang="en-US"/>
           </a:p>
@@ -1568,7 +2124,7 @@
       </p:sp>
       <p:sp>
         <p:nvSpPr>
-          <p:cNvPr id="7" name="タイトル 6">
+          <p:cNvPr id="7" name="AI_TITLE">
             <a:extLst>
               <a:ext uri="{FF2B5EF4-FFF2-40B4-BE49-F238E27FC236}">
                 <a16:creationId xmlns:a16="http://schemas.microsoft.com/office/drawing/2014/main" id="{11DAA64B-18C1-17A1-691C-30AB57B5A327}"/>
@@ -1582,10 +2138,23 @@
             <p:ph type="title"/>
           </p:nvPr>
         </p:nvSpPr>
-        <p:spPr/>
-        <p:txBody>
-          <a:bodyPr/>
-          <a:lstStyle/>
+        <p:spPr>
+          <a:xfrm>
+            <a:off x="280416" y="356616"/>
+            <a:ext cx="11631168" cy="617220"/>
+          </a:xfrm>
+        </p:spPr>
+        <p:txBody>
+          <a:bodyPr/>
+          <a:lstStyle>
+            <a:lvl1pPr>
+              <a:defRPr sz="3200" b="1">
+                <a:solidFill>
+                  <a:srgbClr val="191919"/>
+                </a:solidFill>
+              </a:defRPr>
+            </a:lvl1pPr>
+          </a:lstStyle>
           <a:p>
             <a:r>
               <a:rPr kumimoji="1" lang="ja-JP" altLang="en-US"/>
@@ -1596,7 +2165,7 @@
       </p:sp>
       <p:sp>
         <p:nvSpPr>
-          <p:cNvPr id="9" name="コンテンツ プレースホルダー 8">
+          <p:cNvPr id="9" name="AI_ITEMS">
             <a:extLst>
               <a:ext uri="{FF2B5EF4-FFF2-40B4-BE49-F238E27FC236}">
                 <a16:creationId xmlns:a16="http://schemas.microsoft.com/office/drawing/2014/main" id="{9972CBED-8C1F-F962-DF1D-46CEC7DCCBC5}"/>
@@ -1612,8 +2181,8 @@
         </p:nvSpPr>
         <p:spPr>
           <a:xfrm>
-            <a:off x="226422" y="1114425"/>
-            <a:ext cx="11730445" cy="4998992"/>
+            <a:off x="517712" y="1741394"/>
+            <a:ext cx="11247568" cy="4077824"/>
           </a:xfrm>
         </p:spPr>
         <p:txBody>
@@ -1684,6 +2253,52 @@
             <a:r>
               <a:rPr kumimoji="1" lang="ja-JP" altLang="en-US"/>
               <a:t>レベル</a:t>
+            </a:r>
+          </a:p>
+        </p:txBody>
+      </p:sp>
+      <p:sp>
+        <p:nvSpPr>
+          <p:cNvPr id="10" name="AI_SUBTITLE">
+            <a:extLst>
+              <a:ext uri="{FF2B5EF4-FFF2-40B4-BE49-F238E27FC236}">
+                <a16:creationId xmlns:a16="http://schemas.microsoft.com/office/drawing/2014/main" id="{9972CBED-8C1F-F962-DF1D-46CEC7DCCBC5}"/>
+              </a:ext>
+            </a:extLst>
+          </p:cNvPr>
+          <p:cNvSpPr>
+            <a:spLocks noGrp="1"/>
+          </p:cNvSpPr>
+          <p:nvPr>
+            <p:ph type="body" sz="quarter" idx="14"/>
+          </p:nvPr>
+        </p:nvSpPr>
+        <p:spPr>
+          <a:xfrm>
+            <a:off x="280416" y="1042416"/>
+            <a:ext cx="11631168" cy="377190"/>
+          </a:xfrm>
+        </p:spPr>
+        <p:txBody>
+          <a:bodyPr anchor="ctr"/>
+          <a:lstStyle>
+            <a:lvl1pPr>
+              <a:lnSpc>
+                <a:spcPct val="100000"/>
+              </a:lnSpc>
+              <a:buNone/>
+              <a:defRPr sz="1450">
+                <a:solidFill>
+                  <a:srgbClr val="666666"/>
+                </a:solidFill>
+              </a:defRPr>
+            </a:lvl1pPr>
+          </a:lstStyle>
+          <a:p>
+            <a:pPr lvl="0"/>
+            <a:r>
+              <a:rPr kumimoji="1" lang="ja-JP" altLang="en-US"/>
+              <a:t>マスター テキストの書式設定</a:t>
             </a:r>
           </a:p>
         </p:txBody>
@@ -1702,8 +2317,8 @@
 </file>
 
 <file path=ppt/slideLayouts/slideLayout3.xml><?xml version="1.0" encoding="utf-8"?>
-<p:sldLayout xmlns:a="http://schemas.openxmlformats.org/drawingml/2006/main" xmlns:r="http://schemas.openxmlformats.org/officeDocument/2006/relationships" xmlns:p="http://schemas.openxmlformats.org/presentationml/2006/main" preserve="1" userDrawn="1" type="cust">
-  <p:cSld name="Section Header">
+<p:sldLayout xmlns:a="http://schemas.openxmlformats.org/drawingml/2006/main" xmlns:r="http://schemas.openxmlformats.org/officeDocument/2006/relationships" xmlns:p="http://schemas.openxmlformats.org/presentationml/2006/main" preserve="1" userDrawn="1">
+  <p:cSld name="section_divider">
     <p:bg>
       <p:bgPr>
         <a:solidFill>
@@ -1728,65 +2343,7 @@
       </p:grpSpPr>
       <p:sp>
         <p:nvSpPr>
-          <p:cNvPr id="200" name="deco_bg"/>
-          <p:cNvSpPr>
-            <a:spLocks noGrp="1"/>
-          </p:cNvSpPr>
-          <p:nvPr/>
-        </p:nvSpPr>
-        <p:spPr>
-          <a:xfrm>
-            <a:off x="0" y="0"/>
-            <a:ext cx="12192000" cy="6858000"/>
-          </a:xfrm>
-          <a:prstGeom prst="rect">
-            <a:avLst/>
-          </a:prstGeom>
-          <a:solidFill>
-            <a:srgbClr val="1C3557"/>
-          </a:solidFill>
-          <a:ln>
-            <a:noFill/>
-          </a:ln>
-        </p:spPr>
-        <p:txBody>
-          <a:bodyPr/>
-          <a:lstStyle/>
-          <a:p/>
-        </p:txBody>
-      </p:sp>
-      <p:sp>
-        <p:nvSpPr>
-          <p:cNvPr id="201" name="deco_accent_bar"/>
-          <p:cNvSpPr>
-            <a:spLocks noGrp="1"/>
-          </p:cNvSpPr>
-          <p:nvPr/>
-        </p:nvSpPr>
-        <p:spPr>
-          <a:xfrm>
-            <a:off x="499872" y="5349240"/>
-            <a:ext cx="2438400" cy="68580"/>
-          </a:xfrm>
-          <a:prstGeom prst="rect">
-            <a:avLst/>
-          </a:prstGeom>
-          <a:solidFill>
-            <a:srgbClr val="E8763A"/>
-          </a:solidFill>
-          <a:ln>
-            <a:noFill/>
-          </a:ln>
-        </p:spPr>
-        <p:txBody>
-          <a:bodyPr/>
-          <a:lstStyle/>
-          <a:p/>
-        </p:txBody>
-      </p:sp>
-      <p:sp>
-        <p:nvSpPr>
-          <p:cNvPr id="3" name="Text Placeholder 2"/>
+          <p:cNvPr id="3" name="AI_SUBTITLE"/>
           <p:cNvSpPr>
             <a:spLocks noGrp="1"/>
           </p:cNvSpPr>
@@ -1796,8 +2353,8 @@
         </p:nvSpPr>
         <p:spPr>
           <a:xfrm>
-            <a:off x="502921" y="2333898"/>
-            <a:ext cx="8229600" cy="1463040"/>
+            <a:off x="731519" y="4080510"/>
+            <a:ext cx="10906378" cy="548640"/>
           </a:xfrm>
           <a:noFill/>
           <a:ln>
@@ -1808,9 +2365,9 @@
           <a:bodyPr wrap="square" lIns="0" tIns="0" rIns="0" bIns="0" anchor="t"/>
           <a:lstStyle>
             <a:lvl1pPr>
-              <a:defRPr sz="2000">
+              <a:defRPr sz="1800">
                 <a:solidFill>
-                  <a:srgbClr val="E8F2FB"/>
+                  <a:srgbClr val="666666"/>
                 </a:solidFill>
               </a:defRPr>
             </a:lvl1pPr>
@@ -1826,7 +2383,7 @@
       </p:sp>
       <p:sp>
         <p:nvSpPr>
-          <p:cNvPr id="7" name="タイトル 6">
+          <p:cNvPr id="7" name="AI_TITLE">
             <a:extLst>
               <a:ext uri="{FF2B5EF4-FFF2-40B4-BE49-F238E27FC236}">
                 <a16:creationId xmlns:a16="http://schemas.microsoft.com/office/drawing/2014/main" id="{4E21F2C5-D692-C035-AB8E-E7F5E2278282}"/>
@@ -1842,17 +2399,17 @@
         </p:nvSpPr>
         <p:spPr>
           <a:xfrm>
-            <a:off x="502921" y="1411812"/>
-            <a:ext cx="11175274" cy="645196"/>
+            <a:off x="731520" y="3051810"/>
+            <a:ext cx="10906378" cy="857250"/>
           </a:xfrm>
         </p:spPr>
         <p:txBody>
           <a:bodyPr/>
           <a:lstStyle>
             <a:lvl1pPr>
-              <a:defRPr sz="3600" b="1">
+              <a:defRPr sz="4300" b="1">
                 <a:solidFill>
-                  <a:srgbClr val="FFFFFF"/>
+                  <a:srgbClr val="191919"/>
                 </a:solidFill>
               </a:defRPr>
             </a:lvl1pPr>
@@ -1888,7 +2445,7 @@
           <a:p>
             <a:fld id="{5BCAD085-E8A6-8845-BD4E-CB4CCA059FC4}" type="datetimeFigureOut">
               <a:rPr lang="en-US" smtClean="0"/>
-              <a:t>5/3/26</a:t>
+              <a:t>6/11/26</a:t>
             </a:fld>
             <a:endParaRPr lang="en-US"/>
           </a:p>
@@ -1945,6 +2502,84 @@
               <a:t>‹#›</a:t>
             </a:fld>
             <a:endParaRPr lang="en-US"/>
+          </a:p>
+        </p:txBody>
+      </p:sp>
+      <p:sp>
+        <p:nvSpPr>
+          <p:cNvPr id="204" name="AI_SECTION_NO"/>
+          <p:cNvSpPr>
+            <a:spLocks noGrp="1"/>
+          </p:cNvSpPr>
+          <p:nvPr>
+            <p:ph type="body" idx="13" hasCustomPrompt="1"/>
+          </p:nvPr>
+        </p:nvSpPr>
+        <p:spPr>
+          <a:xfrm>
+            <a:off x="670559" y="994410"/>
+            <a:ext cx="10967339" cy="1303020"/>
+          </a:xfrm>
+          <a:noFill/>
+          <a:ln>
+            <a:noFill/>
+          </a:ln>
+        </p:spPr>
+        <p:txBody>
+          <a:bodyPr wrap="square" lIns="0" tIns="0" rIns="0" bIns="0" anchor="t"/>
+          <a:lstStyle>
+            <a:lvl1pPr>
+              <a:buNone/>
+              <a:defRPr sz="8600" b="1">
+                <a:solidFill>
+                  <a:srgbClr val="191919"/>
+                </a:solidFill>
+              </a:defRPr>
+            </a:lvl1pPr>
+          </a:lstStyle>
+          <a:p>
+            <a:pPr lvl="0" algn="l"/>
+            <a:r>
+              <a:rPr lang="en-US" dirty="0"/>
+              <a:t>Click to edit Master text styles</a:t>
+            </a:r>
+          </a:p>
+        </p:txBody>
+      </p:sp>
+      <p:sp>
+        <p:nvSpPr>
+          <p:cNvPr id="2" name="deco_footer_line">
+            <a:extLst>
+              <a:ext uri="{FF2B5EF4-FFF2-40B4-BE49-F238E27FC236}">
+                <a16:creationId xmlns:a16="http://schemas.microsoft.com/office/drawing/2014/main" id="{12659D8F-F824-772F-2B0A-68B5BEA2E0D9}"/>
+              </a:ext>
+            </a:extLst>
+          </p:cNvPr>
+          <p:cNvSpPr>
+            <a:spLocks noGrp="1"/>
+          </p:cNvSpPr>
+          <p:nvPr userDrawn="1"/>
+        </p:nvSpPr>
+        <p:spPr>
+          <a:xfrm>
+            <a:off x="555874" y="5946621"/>
+            <a:ext cx="11082025" cy="41563"/>
+          </a:xfrm>
+          <a:prstGeom prst="rect">
+            <a:avLst/>
+          </a:prstGeom>
+          <a:solidFill>
+            <a:srgbClr val="D9D9D6"/>
+          </a:solidFill>
+          <a:ln>
+            <a:noFill/>
+          </a:ln>
+        </p:spPr>
+        <p:txBody>
+          <a:bodyPr/>
+          <a:lstStyle/>
+          <a:p>
+            <a:endParaRPr/>
           </a:p>
         </p:txBody>
       </p:sp>
@@ -1963,7 +2598,7 @@
 
 <file path=ppt/slideLayouts/slideLayout4.xml><?xml version="1.0" encoding="utf-8"?>
 <p:sldLayout xmlns:a="http://schemas.openxmlformats.org/drawingml/2006/main" xmlns:r="http://schemas.openxmlformats.org/officeDocument/2006/relationships" xmlns:p="http://schemas.openxmlformats.org/presentationml/2006/main" preserve="1" userDrawn="1">
-  <p:cSld name="Two Content">
+  <p:cSld name="list_basic">
     <p:bg>
       <p:bgPr>
         <a:solidFill>
@@ -1988,41 +2623,46 @@
       </p:grpSpPr>
       <p:sp>
         <p:nvSpPr>
-          <p:cNvPr id="8" name="タイトル 7">
+          <p:cNvPr id="12" name="deco_content_panel">
             <a:extLst>
               <a:ext uri="{FF2B5EF4-FFF2-40B4-BE49-F238E27FC236}">
-                <a16:creationId xmlns:a16="http://schemas.microsoft.com/office/drawing/2014/main" id="{8A4D2959-DC66-A124-52B8-8E8467A7D32E}"/>
+                <a16:creationId xmlns:a16="http://schemas.microsoft.com/office/drawing/2014/main" id="{EF289679-D445-4579-0F80-FDC6BCD3BF54}"/>
               </a:ext>
             </a:extLst>
           </p:cNvPr>
           <p:cNvSpPr>
             <a:spLocks noGrp="1"/>
           </p:cNvSpPr>
-          <p:nvPr>
-            <p:ph type="title"/>
-          </p:nvPr>
-        </p:nvSpPr>
-        <p:spPr/>
+          <p:nvPr userDrawn="1"/>
+        </p:nvSpPr>
+        <p:spPr>
+          <a:xfrm>
+            <a:off x="280416" y="1580974"/>
+            <a:ext cx="11631168" cy="4361688"/>
+          </a:xfrm>
+          <a:prstGeom prst="roundRect">
+            <a:avLst>
+              <a:gd name="adj" fmla="val 2188"/>
+            </a:avLst>
+          </a:prstGeom>
+          <a:solidFill>
+            <a:srgbClr val="F7F7F5"/>
+          </a:solidFill>
+          <a:ln>
+            <a:noFill/>
+          </a:ln>
+        </p:spPr>
         <p:txBody>
           <a:bodyPr/>
           <a:lstStyle/>
           <a:p>
-            <a:r>
-              <a:rPr kumimoji="1" lang="ja-JP" altLang="en-US"/>
-              <a:t>マスター タイトルの書式設定</a:t>
-            </a:r>
-          </a:p>
-        </p:txBody>
-      </p:sp>
-      <p:sp>
-        <p:nvSpPr>
-          <p:cNvPr id="9" name="日付プレースホルダー 8">
-            <a:extLst>
-              <a:ext uri="{FF2B5EF4-FFF2-40B4-BE49-F238E27FC236}">
-                <a16:creationId xmlns:a16="http://schemas.microsoft.com/office/drawing/2014/main" id="{AC78EFE3-FFBC-52AC-793F-A5AC5CEFBAE0}"/>
-              </a:ext>
-            </a:extLst>
-          </p:cNvPr>
+            <a:endParaRPr/>
+          </a:p>
+        </p:txBody>
+      </p:sp>
+      <p:sp>
+        <p:nvSpPr>
+          <p:cNvPr id="4" name="Date Placeholder 3"/>
           <p:cNvSpPr>
             <a:spLocks noGrp="1"/>
           </p:cNvSpPr>
@@ -2037,7 +2677,7 @@
           <a:p>
             <a:fld id="{5BCAD085-E8A6-8845-BD4E-CB4CCA059FC4}" type="datetimeFigureOut">
               <a:rPr lang="en-US" smtClean="0"/>
-              <a:t>5/3/26</a:t>
+              <a:t>6/11/26</a:t>
             </a:fld>
             <a:endParaRPr lang="en-US"/>
           </a:p>
@@ -2045,13 +2685,7 @@
       </p:sp>
       <p:sp>
         <p:nvSpPr>
-          <p:cNvPr id="10" name="フッター プレースホルダー 9">
-            <a:extLst>
-              <a:ext uri="{FF2B5EF4-FFF2-40B4-BE49-F238E27FC236}">
-                <a16:creationId xmlns:a16="http://schemas.microsoft.com/office/drawing/2014/main" id="{2885C4CB-8898-EE25-076E-20BC39DFAA4B}"/>
-              </a:ext>
-            </a:extLst>
-          </p:cNvPr>
+          <p:cNvPr id="5" name="Footer Placeholder 4"/>
           <p:cNvSpPr>
             <a:spLocks noGrp="1"/>
           </p:cNvSpPr>
@@ -2064,19 +2698,13 @@
           <a:bodyPr/>
           <a:lstStyle/>
           <a:p>
-            <a:endParaRPr lang="en-US" dirty="0"/>
-          </a:p>
-        </p:txBody>
-      </p:sp>
-      <p:sp>
-        <p:nvSpPr>
-          <p:cNvPr id="11" name="スライド番号プレースホルダー 10">
-            <a:extLst>
-              <a:ext uri="{FF2B5EF4-FFF2-40B4-BE49-F238E27FC236}">
-                <a16:creationId xmlns:a16="http://schemas.microsoft.com/office/drawing/2014/main" id="{79D36539-24EF-59E1-CB5B-33D4B26D742C}"/>
-              </a:ext>
-            </a:extLst>
-          </p:cNvPr>
+            <a:endParaRPr lang="en-US"/>
+          </a:p>
+        </p:txBody>
+      </p:sp>
+      <p:sp>
+        <p:nvSpPr>
+          <p:cNvPr id="6" name="Slide Number Placeholder 5"/>
           <p:cNvSpPr>
             <a:spLocks noGrp="1"/>
           </p:cNvSpPr>
@@ -2099,10 +2727,10 @@
       </p:sp>
       <p:sp>
         <p:nvSpPr>
-          <p:cNvPr id="13" name="コンテンツ プレースホルダー 12">
+          <p:cNvPr id="7" name="AI_TITLE">
             <a:extLst>
               <a:ext uri="{FF2B5EF4-FFF2-40B4-BE49-F238E27FC236}">
-                <a16:creationId xmlns:a16="http://schemas.microsoft.com/office/drawing/2014/main" id="{23D794FD-7998-B263-7A33-0D9A529D97EE}"/>
+                <a16:creationId xmlns:a16="http://schemas.microsoft.com/office/drawing/2014/main" id="{11DAA64B-18C1-17A1-691C-30AB57B5A327}"/>
               </a:ext>
             </a:extLst>
           </p:cNvPr>
@@ -2110,93 +2738,40 @@
             <a:spLocks noGrp="1"/>
           </p:cNvSpPr>
           <p:nvPr>
-            <p:ph sz="quarter" idx="13"/>
-          </p:nvPr>
-        </p:nvSpPr>
-        <p:spPr>
-          <a:xfrm>
-            <a:off x="226423" y="1114652"/>
-            <a:ext cx="5738812" cy="5016182"/>
-          </a:xfrm>
-        </p:spPr>
-        <p:txBody>
-          <a:bodyPr/>
-          <a:lstStyle/>
-          <a:p>
-            <a:pPr lvl="0"/>
-            <a:r>
-              <a:rPr kumimoji="1" lang="ja-JP" altLang="en-US"/>
-              <a:t>マスター テキストの書式設定</a:t>
-            </a:r>
-          </a:p>
-          <a:p>
-            <a:pPr lvl="1"/>
-            <a:r>
-              <a:rPr kumimoji="1" lang="ja-JP" altLang="en-US"/>
-              <a:t>第 </a:t>
-            </a:r>
-            <a:r>
-              <a:rPr kumimoji="1" lang="en-US" altLang="ja-JP"/>
-              <a:t>2 </a:t>
-            </a:r>
-            <a:r>
-              <a:rPr kumimoji="1" lang="ja-JP" altLang="en-US"/>
-              <a:t>レベル</a:t>
-            </a:r>
-          </a:p>
-          <a:p>
-            <a:pPr lvl="2"/>
-            <a:r>
-              <a:rPr kumimoji="1" lang="ja-JP" altLang="en-US"/>
-              <a:t>第 </a:t>
-            </a:r>
-            <a:r>
-              <a:rPr kumimoji="1" lang="en-US" altLang="ja-JP"/>
-              <a:t>3 </a:t>
-            </a:r>
-            <a:r>
-              <a:rPr kumimoji="1" lang="ja-JP" altLang="en-US"/>
-              <a:t>レベル</a:t>
-            </a:r>
-          </a:p>
-          <a:p>
-            <a:pPr lvl="3"/>
-            <a:r>
-              <a:rPr kumimoji="1" lang="ja-JP" altLang="en-US"/>
-              <a:t>第 </a:t>
-            </a:r>
-            <a:r>
-              <a:rPr kumimoji="1" lang="en-US" altLang="ja-JP"/>
-              <a:t>4 </a:t>
-            </a:r>
-            <a:r>
-              <a:rPr kumimoji="1" lang="ja-JP" altLang="en-US"/>
-              <a:t>レベル</a:t>
-            </a:r>
-          </a:p>
-          <a:p>
-            <a:pPr lvl="4"/>
-            <a:r>
-              <a:rPr kumimoji="1" lang="ja-JP" altLang="en-US"/>
-              <a:t>第 </a:t>
-            </a:r>
-            <a:r>
-              <a:rPr kumimoji="1" lang="en-US" altLang="ja-JP"/>
-              <a:t>5 </a:t>
-            </a:r>
-            <a:r>
-              <a:rPr kumimoji="1" lang="ja-JP" altLang="en-US"/>
-              <a:t>レベル</a:t>
-            </a:r>
-          </a:p>
-        </p:txBody>
-      </p:sp>
-      <p:sp>
-        <p:nvSpPr>
-          <p:cNvPr id="15" name="コンテンツ プレースホルダー 14">
+            <p:ph type="title"/>
+          </p:nvPr>
+        </p:nvSpPr>
+        <p:spPr>
+          <a:xfrm>
+            <a:off x="280416" y="356616"/>
+            <a:ext cx="11631168" cy="617220"/>
+          </a:xfrm>
+        </p:spPr>
+        <p:txBody>
+          <a:bodyPr/>
+          <a:lstStyle>
+            <a:lvl1pPr>
+              <a:defRPr sz="3200" b="1">
+                <a:solidFill>
+                  <a:srgbClr val="191919"/>
+                </a:solidFill>
+              </a:defRPr>
+            </a:lvl1pPr>
+          </a:lstStyle>
+          <a:p>
+            <a:r>
+              <a:rPr kumimoji="1" lang="ja-JP" altLang="en-US"/>
+              <a:t>マスター タイトルの書式設定</a:t>
+            </a:r>
+          </a:p>
+        </p:txBody>
+      </p:sp>
+      <p:sp>
+        <p:nvSpPr>
+          <p:cNvPr id="9" name="AI_ITEMS">
             <a:extLst>
               <a:ext uri="{FF2B5EF4-FFF2-40B4-BE49-F238E27FC236}">
-                <a16:creationId xmlns:a16="http://schemas.microsoft.com/office/drawing/2014/main" id="{CE5D3923-D828-BFFF-25F1-02538CEB89C0}"/>
+                <a16:creationId xmlns:a16="http://schemas.microsoft.com/office/drawing/2014/main" id="{9972CBED-8C1F-F962-DF1D-46CEC7DCCBC5}"/>
               </a:ext>
             </a:extLst>
           </p:cNvPr>
@@ -2204,13 +2779,13 @@
             <a:spLocks noGrp="1"/>
           </p:cNvSpPr>
           <p:nvPr>
-            <p:ph sz="quarter" idx="14"/>
-          </p:nvPr>
-        </p:nvSpPr>
-        <p:spPr>
-          <a:xfrm>
-            <a:off x="6218056" y="1114652"/>
-            <a:ext cx="5738812" cy="5016182"/>
+            <p:ph sz="quarter" idx="13"/>
+          </p:nvPr>
+        </p:nvSpPr>
+        <p:spPr>
+          <a:xfrm>
+            <a:off x="517711" y="1748116"/>
+            <a:ext cx="11287909" cy="4037479"/>
           </a:xfrm>
         </p:spPr>
         <p:txBody>
@@ -2230,7 +2805,7 @@
               <a:t>第 </a:t>
             </a:r>
             <a:r>
-              <a:rPr kumimoji="1" lang="en-US" altLang="ja-JP"/>
+              <a:rPr kumimoji="1" lang="en-US" altLang="ja-JP" dirty="0"/>
               <a:t>2 </a:t>
             </a:r>
             <a:r>
@@ -2245,7 +2820,7 @@
               <a:t>第 </a:t>
             </a:r>
             <a:r>
-              <a:rPr kumimoji="1" lang="en-US" altLang="ja-JP"/>
+              <a:rPr kumimoji="1" lang="en-US" altLang="ja-JP" dirty="0"/>
               <a:t>3 </a:t>
             </a:r>
             <a:r>
@@ -2260,7 +2835,7 @@
               <a:t>第 </a:t>
             </a:r>
             <a:r>
-              <a:rPr kumimoji="1" lang="en-US" altLang="ja-JP"/>
+              <a:rPr kumimoji="1" lang="en-US" altLang="ja-JP" dirty="0"/>
               <a:t>4 </a:t>
             </a:r>
             <a:r>
@@ -2275,12 +2850,58 @@
               <a:t>第 </a:t>
             </a:r>
             <a:r>
-              <a:rPr kumimoji="1" lang="en-US" altLang="ja-JP"/>
+              <a:rPr kumimoji="1" lang="en-US" altLang="ja-JP" dirty="0"/>
               <a:t>5 </a:t>
             </a:r>
             <a:r>
               <a:rPr kumimoji="1" lang="ja-JP" altLang="en-US"/>
               <a:t>レベル</a:t>
+            </a:r>
+          </a:p>
+        </p:txBody>
+      </p:sp>
+      <p:sp>
+        <p:nvSpPr>
+          <p:cNvPr id="10" name="AI_SUBTITLE">
+            <a:extLst>
+              <a:ext uri="{FF2B5EF4-FFF2-40B4-BE49-F238E27FC236}">
+                <a16:creationId xmlns:a16="http://schemas.microsoft.com/office/drawing/2014/main" id="{9972CBED-8C1F-F962-DF1D-46CEC7DCCBC5}"/>
+              </a:ext>
+            </a:extLst>
+          </p:cNvPr>
+          <p:cNvSpPr>
+            <a:spLocks noGrp="1"/>
+          </p:cNvSpPr>
+          <p:nvPr>
+            <p:ph type="body" sz="quarter" idx="14"/>
+          </p:nvPr>
+        </p:nvSpPr>
+        <p:spPr>
+          <a:xfrm>
+            <a:off x="280416" y="1042416"/>
+            <a:ext cx="11631168" cy="377190"/>
+          </a:xfrm>
+        </p:spPr>
+        <p:txBody>
+          <a:bodyPr anchor="ctr"/>
+          <a:lstStyle>
+            <a:lvl1pPr>
+              <a:lnSpc>
+                <a:spcPct val="100000"/>
+              </a:lnSpc>
+              <a:buNone/>
+              <a:defRPr sz="1450">
+                <a:solidFill>
+                  <a:srgbClr val="666666"/>
+                </a:solidFill>
+              </a:defRPr>
+            </a:lvl1pPr>
+          </a:lstStyle>
+          <a:p>
+            <a:pPr lvl="0"/>
+            <a:r>
+              <a:rPr kumimoji="1" lang="ja-JP" altLang="en-US"/>
+              <a:t>マスター テキストの書式設定</a:t>
             </a:r>
           </a:p>
         </p:txBody>
@@ -2299,7 +2920,7 @@
 </file>
 
 <file path=ppt/slideLayouts/slideLayout5.xml><?xml version="1.0" encoding="utf-8"?>
-<p:sldLayout xmlns:a="http://schemas.openxmlformats.org/drawingml/2006/main" xmlns:r="http://schemas.openxmlformats.org/officeDocument/2006/relationships" xmlns:p="http://schemas.openxmlformats.org/presentationml/2006/main" preserve="1" userDrawn="1" type="cust">
+<p:sldLayout xmlns:a="http://schemas.openxmlformats.org/drawingml/2006/main" xmlns:r="http://schemas.openxmlformats.org/officeDocument/2006/relationships" xmlns:p="http://schemas.openxmlformats.org/presentationml/2006/main" preserve="1" userDrawn="1">
   <p:cSld name="comparison_2col">
     <p:bg>
       <p:bgPr>
@@ -2325,7 +2946,7 @@
       </p:grpSpPr>
       <p:sp>
         <p:nvSpPr>
-          <p:cNvPr id="200" name="deco_left_panel"/>
+          <p:cNvPr id="202" name="deco_left_panel"/>
           <p:cNvSpPr>
             <a:spLocks noGrp="1"/>
           </p:cNvSpPr>
@@ -2333,14 +2954,142 @@
         </p:nvSpPr>
         <p:spPr>
           <a:xfrm>
-            <a:off x="268224" y="857250"/>
-            <a:ext cx="5657088" cy="5266944"/>
+            <a:off x="268224" y="1580706"/>
+            <a:ext cx="5657088" cy="4491990"/>
+          </a:xfrm>
+          <a:prstGeom prst="roundRect">
+            <a:avLst>
+              <a:gd name="adj" fmla="val 2255"/>
+            </a:avLst>
+          </a:prstGeom>
+          <a:solidFill>
+            <a:srgbClr val="F7F7F5"/>
+          </a:solidFill>
+          <a:ln>
+            <a:noFill/>
+          </a:ln>
+        </p:spPr>
+        <p:txBody>
+          <a:bodyPr/>
+          <a:lstStyle/>
+          <a:p>
+            <a:endParaRPr/>
+          </a:p>
+        </p:txBody>
+      </p:sp>
+      <p:sp>
+        <p:nvSpPr>
+          <p:cNvPr id="203" name="deco_right_panel"/>
+          <p:cNvSpPr>
+            <a:spLocks noGrp="1"/>
+          </p:cNvSpPr>
+          <p:nvPr/>
+        </p:nvSpPr>
+        <p:spPr>
+          <a:xfrm>
+            <a:off x="6266688" y="1580706"/>
+            <a:ext cx="5657088" cy="4491990"/>
+          </a:xfrm>
+          <a:prstGeom prst="roundRect">
+            <a:avLst>
+              <a:gd name="adj" fmla="val 1806"/>
+            </a:avLst>
+          </a:prstGeom>
+          <a:solidFill>
+            <a:srgbClr val="F7F7F5"/>
+          </a:solidFill>
+          <a:ln>
+            <a:noFill/>
+          </a:ln>
+        </p:spPr>
+        <p:txBody>
+          <a:bodyPr/>
+          <a:lstStyle/>
+          <a:p>
+            <a:endParaRPr dirty="0"/>
+          </a:p>
+        </p:txBody>
+      </p:sp>
+      <p:sp>
+        <p:nvSpPr>
+          <p:cNvPr id="205" name="deco_left_badge"/>
+          <p:cNvSpPr>
+            <a:spLocks noGrp="1"/>
+          </p:cNvSpPr>
+          <p:nvPr/>
+        </p:nvSpPr>
+        <p:spPr>
+          <a:xfrm>
+            <a:off x="963535" y="1853686"/>
+            <a:ext cx="534924" cy="534924"/>
+          </a:xfrm>
+          <a:prstGeom prst="ellipse">
+            <a:avLst/>
+          </a:prstGeom>
+          <a:solidFill>
+            <a:srgbClr val="191919"/>
+          </a:solidFill>
+          <a:ln>
+            <a:noFill/>
+          </a:ln>
+        </p:spPr>
+        <p:txBody>
+          <a:bodyPr/>
+          <a:lstStyle/>
+          <a:p>
+            <a:endParaRPr/>
+          </a:p>
+        </p:txBody>
+      </p:sp>
+      <p:sp>
+        <p:nvSpPr>
+          <p:cNvPr id="206" name="deco_right_badge"/>
+          <p:cNvSpPr>
+            <a:spLocks noGrp="1"/>
+          </p:cNvSpPr>
+          <p:nvPr/>
+        </p:nvSpPr>
+        <p:spPr>
+          <a:xfrm>
+            <a:off x="7181455" y="1853686"/>
+            <a:ext cx="534924" cy="534924"/>
+          </a:xfrm>
+          <a:prstGeom prst="ellipse">
+            <a:avLst/>
+          </a:prstGeom>
+          <a:solidFill>
+            <a:srgbClr val="191919"/>
+          </a:solidFill>
+          <a:ln>
+            <a:noFill/>
+          </a:ln>
+        </p:spPr>
+        <p:txBody>
+          <a:bodyPr/>
+          <a:lstStyle/>
+          <a:p>
+            <a:endParaRPr/>
+          </a:p>
+        </p:txBody>
+      </p:sp>
+      <p:sp>
+        <p:nvSpPr>
+          <p:cNvPr id="207" name="deco_divider"/>
+          <p:cNvSpPr>
+            <a:spLocks noGrp="1"/>
+          </p:cNvSpPr>
+          <p:nvPr/>
+        </p:nvSpPr>
+        <p:spPr>
+          <a:xfrm>
+            <a:off x="6085064" y="1731315"/>
+            <a:ext cx="24384" cy="4149090"/>
           </a:xfrm>
           <a:prstGeom prst="rect">
             <a:avLst/>
           </a:prstGeom>
           <a:solidFill>
-            <a:srgbClr val="E8F2FB"/>
+            <a:srgbClr val="D9D9D6"/>
           </a:solidFill>
           <a:ln>
             <a:noFill/>
@@ -2349,128 +3098,14 @@
         <p:txBody>
           <a:bodyPr/>
           <a:lstStyle/>
-          <a:p/>
-        </p:txBody>
-      </p:sp>
-      <p:sp>
-        <p:nvSpPr>
-          <p:cNvPr id="201" name="deco_right_panel"/>
-          <p:cNvSpPr>
-            <a:spLocks noGrp="1"/>
-          </p:cNvSpPr>
-          <p:nvPr/>
-        </p:nvSpPr>
-        <p:spPr>
-          <a:xfrm>
-            <a:off x="6266688" y="857250"/>
-            <a:ext cx="5657088" cy="5266944"/>
-          </a:xfrm>
-          <a:prstGeom prst="rect">
-            <a:avLst/>
-          </a:prstGeom>
-          <a:solidFill>
-            <a:srgbClr val="E8F2FB"/>
-          </a:solidFill>
-          <a:ln>
-            <a:noFill/>
-          </a:ln>
-        </p:spPr>
-        <p:txBody>
-          <a:bodyPr/>
-          <a:lstStyle/>
-          <a:p/>
-        </p:txBody>
-      </p:sp>
-      <p:sp>
-        <p:nvSpPr>
-          <p:cNvPr id="202" name="deco_left_accent"/>
-          <p:cNvSpPr>
-            <a:spLocks noGrp="1"/>
-          </p:cNvSpPr>
-          <p:nvPr/>
-        </p:nvSpPr>
-        <p:spPr>
-          <a:xfrm>
-            <a:off x="268224" y="857250"/>
-            <a:ext cx="5657088" cy="109728"/>
-          </a:xfrm>
-          <a:prstGeom prst="rect">
-            <a:avLst/>
-          </a:prstGeom>
-          <a:solidFill>
-            <a:srgbClr val="1C3557"/>
-          </a:solidFill>
-          <a:ln>
-            <a:noFill/>
-          </a:ln>
-        </p:spPr>
-        <p:txBody>
-          <a:bodyPr/>
-          <a:lstStyle/>
-          <a:p/>
-        </p:txBody>
-      </p:sp>
-      <p:sp>
-        <p:nvSpPr>
-          <p:cNvPr id="203" name="deco_right_accent"/>
-          <p:cNvSpPr>
-            <a:spLocks noGrp="1"/>
-          </p:cNvSpPr>
-          <p:nvPr/>
-        </p:nvSpPr>
-        <p:spPr>
-          <a:xfrm>
-            <a:off x="6266688" y="857250"/>
-            <a:ext cx="5657088" cy="109728"/>
-          </a:xfrm>
-          <a:prstGeom prst="rect">
-            <a:avLst/>
-          </a:prstGeom>
-          <a:solidFill>
-            <a:srgbClr val="1C3557"/>
-          </a:solidFill>
-          <a:ln>
-            <a:noFill/>
-          </a:ln>
-        </p:spPr>
-        <p:txBody>
-          <a:bodyPr/>
-          <a:lstStyle/>
-          <a:p/>
-        </p:txBody>
-      </p:sp>
-      <p:sp>
-        <p:nvSpPr>
-          <p:cNvPr id="204" name="deco_divider"/>
-          <p:cNvSpPr>
-            <a:spLocks noGrp="1"/>
-          </p:cNvSpPr>
-          <p:nvPr/>
-        </p:nvSpPr>
-        <p:spPr>
-          <a:xfrm>
-            <a:off x="5974080" y="857250"/>
-            <a:ext cx="243840" cy="5266944"/>
-          </a:xfrm>
-          <a:prstGeom prst="rect">
-            <a:avLst/>
-          </a:prstGeom>
-          <a:solidFill>
-            <a:srgbClr val="BFD4EF"/>
-          </a:solidFill>
-          <a:ln>
-            <a:noFill/>
-          </a:ln>
-        </p:spPr>
-        <p:txBody>
-          <a:bodyPr/>
-          <a:lstStyle/>
-          <a:p/>
-        </p:txBody>
-      </p:sp>
-      <p:sp>
-        <p:nvSpPr>
-          <p:cNvPr id="3" name="slot__left_title"/>
+          <a:p>
+            <a:endParaRPr/>
+          </a:p>
+        </p:txBody>
+      </p:sp>
+      <p:sp>
+        <p:nvSpPr>
+          <p:cNvPr id="3" name="AI_LEFT_TITLE"/>
           <p:cNvSpPr>
             <a:spLocks noGrp="1"/>
           </p:cNvSpPr>
@@ -2480,8 +3115,8 @@
         </p:nvSpPr>
         <p:spPr>
           <a:xfrm>
-            <a:off x="463296" y="1131570"/>
-            <a:ext cx="4693920" cy="445770"/>
+            <a:off x="1597519" y="1932553"/>
+            <a:ext cx="3657600" cy="377190"/>
           </a:xfrm>
           <a:noFill/>
           <a:ln>
@@ -2491,46 +3126,17 @@
         <p:txBody>
           <a:bodyPr wrap="square" lIns="73152" tIns="36576" rIns="73152" bIns="0" anchor="ctr"/>
           <a:lstStyle>
-            <a:lvl1pPr marL="0" indent="0" algn="ctr">
-              <a:buNone/>
-              <a:defRPr sz="1400" b="1">
+            <a:lvl1pPr>
+              <a:lnSpc>
+                <a:spcPct val="100000"/>
+              </a:lnSpc>
+              <a:buNone/>
+              <a:defRPr sz="1600" b="1">
                 <a:solidFill>
-                  <a:srgbClr val="111111"/>
+                  <a:srgbClr val="191919"/>
                 </a:solidFill>
               </a:defRPr>
             </a:lvl1pPr>
-            <a:lvl2pPr marL="457200" indent="0">
-              <a:buNone/>
-              <a:defRPr sz="2000" b="1"/>
-            </a:lvl2pPr>
-            <a:lvl3pPr marL="914400" indent="0">
-              <a:buNone/>
-              <a:defRPr sz="1800" b="1"/>
-            </a:lvl3pPr>
-            <a:lvl4pPr marL="1371600" indent="0">
-              <a:buNone/>
-              <a:defRPr sz="1600" b="1"/>
-            </a:lvl4pPr>
-            <a:lvl5pPr marL="1828800" indent="0">
-              <a:buNone/>
-              <a:defRPr sz="1600" b="1"/>
-            </a:lvl5pPr>
-            <a:lvl6pPr marL="2286000" indent="0">
-              <a:buNone/>
-              <a:defRPr sz="1600" b="1"/>
-            </a:lvl6pPr>
-            <a:lvl7pPr marL="2743200" indent="0">
-              <a:buNone/>
-              <a:defRPr sz="1600" b="1"/>
-            </a:lvl7pPr>
-            <a:lvl8pPr marL="3200400" indent="0">
-              <a:buNone/>
-              <a:defRPr sz="1600" b="1"/>
-            </a:lvl8pPr>
-            <a:lvl9pPr marL="3657600" indent="0">
-              <a:buNone/>
-              <a:defRPr sz="1600" b="1"/>
-            </a:lvl9pPr>
           </a:lstStyle>
           <a:p>
             <a:pPr lvl="0" algn="l"/>
@@ -2540,7 +3146,7 @@
       </p:sp>
       <p:sp>
         <p:nvSpPr>
-          <p:cNvPr id="5" name="slot__right_title"/>
+          <p:cNvPr id="5" name="AI_RIGHT_TITLE"/>
           <p:cNvSpPr>
             <a:spLocks noGrp="1"/>
           </p:cNvSpPr>
@@ -2550,8 +3156,8 @@
         </p:nvSpPr>
         <p:spPr>
           <a:xfrm>
-            <a:off x="6425184" y="1131570"/>
-            <a:ext cx="4693920" cy="445770"/>
+            <a:off x="7815439" y="1932553"/>
+            <a:ext cx="3657600" cy="377190"/>
           </a:xfrm>
           <a:noFill/>
           <a:ln>
@@ -2561,46 +3167,17 @@
         <p:txBody>
           <a:bodyPr wrap="square" lIns="73152" tIns="36576" rIns="73152" bIns="0" anchor="ctr"/>
           <a:lstStyle>
-            <a:lvl1pPr marL="0" indent="0" algn="ctr">
-              <a:buNone/>
-              <a:defRPr sz="1400" b="1">
+            <a:lvl1pPr>
+              <a:lnSpc>
+                <a:spcPct val="100000"/>
+              </a:lnSpc>
+              <a:buNone/>
+              <a:defRPr sz="1600" b="1">
                 <a:solidFill>
-                  <a:srgbClr val="111111"/>
+                  <a:srgbClr val="191919"/>
                 </a:solidFill>
               </a:defRPr>
             </a:lvl1pPr>
-            <a:lvl2pPr marL="457200" indent="0">
-              <a:buNone/>
-              <a:defRPr sz="2000" b="1"/>
-            </a:lvl2pPr>
-            <a:lvl3pPr marL="914400" indent="0">
-              <a:buNone/>
-              <a:defRPr sz="1800" b="1"/>
-            </a:lvl3pPr>
-            <a:lvl4pPr marL="1371600" indent="0">
-              <a:buNone/>
-              <a:defRPr sz="1600" b="1"/>
-            </a:lvl4pPr>
-            <a:lvl5pPr marL="1828800" indent="0">
-              <a:buNone/>
-              <a:defRPr sz="1600" b="1"/>
-            </a:lvl5pPr>
-            <a:lvl6pPr marL="2286000" indent="0">
-              <a:buNone/>
-              <a:defRPr sz="1600" b="1"/>
-            </a:lvl6pPr>
-            <a:lvl7pPr marL="2743200" indent="0">
-              <a:buNone/>
-              <a:defRPr sz="1600" b="1"/>
-            </a:lvl7pPr>
-            <a:lvl8pPr marL="3200400" indent="0">
-              <a:buNone/>
-              <a:defRPr sz="1600" b="1"/>
-            </a:lvl8pPr>
-            <a:lvl9pPr marL="3657600" indent="0">
-              <a:buNone/>
-              <a:defRPr sz="1600" b="1"/>
-            </a:lvl9pPr>
           </a:lstStyle>
           <a:p>
             <a:pPr lvl="0" algn="l"/>
@@ -2610,7 +3187,7 @@
       </p:sp>
       <p:sp>
         <p:nvSpPr>
-          <p:cNvPr id="10" name="タイトル 9">
+          <p:cNvPr id="10" name="AI_TITLE">
             <a:extLst>
               <a:ext uri="{FF2B5EF4-FFF2-40B4-BE49-F238E27FC236}">
                 <a16:creationId xmlns:a16="http://schemas.microsoft.com/office/drawing/2014/main" id="{742611C5-3334-7E2B-59D2-B8B829483775}"/>
@@ -2624,12 +3201,21 @@
             <p:ph type="title"/>
           </p:nvPr>
         </p:nvSpPr>
-        <p:spPr/>
+        <p:spPr>
+          <a:xfrm>
+            <a:off x="268224" y="356616"/>
+            <a:ext cx="11655552" cy="617220"/>
+          </a:xfrm>
+        </p:spPr>
         <p:txBody>
           <a:bodyPr/>
           <a:lstStyle>
-            <a:lvl1pPr algn="l">
-              <a:defRPr/>
+            <a:lvl1pPr>
+              <a:defRPr sz="3200" b="1">
+                <a:solidFill>
+                  <a:srgbClr val="191919"/>
+                </a:solidFill>
+              </a:defRPr>
             </a:lvl1pPr>
           </a:lstStyle>
           <a:p>
@@ -2663,7 +3249,7 @@
           <a:p>
             <a:fld id="{5BCAD085-E8A6-8845-BD4E-CB4CCA059FC4}" type="datetimeFigureOut">
               <a:rPr lang="en-US" smtClean="0"/>
-              <a:t>5/3/26</a:t>
+              <a:t>6/11/26</a:t>
             </a:fld>
             <a:endParaRPr lang="en-US"/>
           </a:p>
@@ -2725,7 +3311,7 @@
       </p:sp>
       <p:sp>
         <p:nvSpPr>
-          <p:cNvPr id="15" name="slot__left_description">
+          <p:cNvPr id="15" name="AI_LEFT_DESCRIPTION">
             <a:extLst>
               <a:ext uri="{FF2B5EF4-FFF2-40B4-BE49-F238E27FC236}">
                 <a16:creationId xmlns:a16="http://schemas.microsoft.com/office/drawing/2014/main" id="{05A5F16C-5213-8739-D5CC-71F95A8DD83A}"/>
@@ -2741,13 +3327,37 @@
         </p:nvSpPr>
         <p:spPr>
           <a:xfrm>
-            <a:off x="463296" y="1680210"/>
-            <a:ext cx="5364480" cy="4389120"/>
-          </a:xfrm>
-        </p:spPr>
-        <p:txBody>
-          <a:bodyPr/>
-          <a:lstStyle/>
+            <a:off x="670560" y="2599427"/>
+            <a:ext cx="4754880" cy="627859"/>
+          </a:xfrm>
+        </p:spPr>
+        <p:txBody>
+          <a:bodyPr anchor="ctr"/>
+          <a:lstStyle>
+            <a:lvl1pPr algn="ctr">
+              <a:lnSpc>
+                <a:spcPct val="100000"/>
+              </a:lnSpc>
+              <a:buNone/>
+              <a:defRPr sz="1600">
+                <a:solidFill>
+                  <a:srgbClr val="666666"/>
+                </a:solidFill>
+              </a:defRPr>
+            </a:lvl1pPr>
+            <a:lvl2pPr algn="ctr">
+              <a:defRPr sz="1600"/>
+            </a:lvl2pPr>
+            <a:lvl3pPr algn="ctr">
+              <a:defRPr sz="1600"/>
+            </a:lvl3pPr>
+            <a:lvl4pPr algn="ctr">
+              <a:defRPr sz="1600"/>
+            </a:lvl4pPr>
+            <a:lvl5pPr algn="ctr">
+              <a:defRPr sz="1600"/>
+            </a:lvl5pPr>
+          </a:lstStyle>
           <a:p>
             <a:pPr lvl="0"/>
             <a:r>
@@ -2755,71 +3365,11 @@
               <a:t>マスター テキストの書式設定</a:t>
             </a:r>
           </a:p>
-          <a:p>
-            <a:pPr lvl="1"/>
-            <a:r>
-              <a:rPr kumimoji="1" lang="ja-JP" altLang="en-US"/>
-              <a:t>第 </a:t>
-            </a:r>
-            <a:r>
-              <a:rPr kumimoji="1" lang="en-US" altLang="ja-JP"/>
-              <a:t>2 </a:t>
-            </a:r>
-            <a:r>
-              <a:rPr kumimoji="1" lang="ja-JP" altLang="en-US"/>
-              <a:t>レベル</a:t>
-            </a:r>
-          </a:p>
-          <a:p>
-            <a:pPr lvl="2"/>
-            <a:r>
-              <a:rPr kumimoji="1" lang="ja-JP" altLang="en-US"/>
-              <a:t>第 </a:t>
-            </a:r>
-            <a:r>
-              <a:rPr kumimoji="1" lang="en-US" altLang="ja-JP"/>
-              <a:t>3 </a:t>
-            </a:r>
-            <a:r>
-              <a:rPr kumimoji="1" lang="ja-JP" altLang="en-US"/>
-              <a:t>レベル</a:t>
-            </a:r>
-          </a:p>
-          <a:p>
-            <a:pPr lvl="3"/>
-            <a:r>
-              <a:rPr kumimoji="1" lang="ja-JP" altLang="en-US"/>
-              <a:t>第 </a:t>
-            </a:r>
-            <a:r>
-              <a:rPr kumimoji="1" lang="en-US" altLang="ja-JP"/>
-              <a:t>4 </a:t>
-            </a:r>
-            <a:r>
-              <a:rPr kumimoji="1" lang="ja-JP" altLang="en-US"/>
-              <a:t>レベル</a:t>
-            </a:r>
-          </a:p>
-          <a:p>
-            <a:pPr lvl="4"/>
-            <a:r>
-              <a:rPr kumimoji="1" lang="ja-JP" altLang="en-US"/>
-              <a:t>第 </a:t>
-            </a:r>
-            <a:r>
-              <a:rPr kumimoji="1" lang="en-US" altLang="ja-JP"/>
-              <a:t>5 </a:t>
-            </a:r>
-            <a:r>
-              <a:rPr kumimoji="1" lang="ja-JP" altLang="en-US"/>
-              <a:t>レベル</a:t>
-            </a:r>
-          </a:p>
-        </p:txBody>
-      </p:sp>
-      <p:sp>
-        <p:nvSpPr>
-          <p:cNvPr id="17" name="slot__right_description">
+        </p:txBody>
+      </p:sp>
+      <p:sp>
+        <p:nvSpPr>
+          <p:cNvPr id="17" name="AI_RIGHT_DESCRIPTION">
             <a:extLst>
               <a:ext uri="{FF2B5EF4-FFF2-40B4-BE49-F238E27FC236}">
                 <a16:creationId xmlns:a16="http://schemas.microsoft.com/office/drawing/2014/main" id="{7736F04F-6D87-D6E7-D993-8E4670208CB6}"/>
@@ -2835,13 +3385,37 @@
         </p:nvSpPr>
         <p:spPr>
           <a:xfrm>
-            <a:off x="6425184" y="1680210"/>
-            <a:ext cx="5364480" cy="4389120"/>
-          </a:xfrm>
-        </p:spPr>
-        <p:txBody>
-          <a:bodyPr/>
-          <a:lstStyle/>
+            <a:off x="6888480" y="2599427"/>
+            <a:ext cx="4754880" cy="608934"/>
+          </a:xfrm>
+        </p:spPr>
+        <p:txBody>
+          <a:bodyPr anchor="ctr"/>
+          <a:lstStyle>
+            <a:lvl1pPr algn="ctr">
+              <a:lnSpc>
+                <a:spcPct val="100000"/>
+              </a:lnSpc>
+              <a:buNone/>
+              <a:defRPr sz="1600">
+                <a:solidFill>
+                  <a:srgbClr val="666666"/>
+                </a:solidFill>
+              </a:defRPr>
+            </a:lvl1pPr>
+            <a:lvl2pPr algn="ctr">
+              <a:defRPr sz="1600"/>
+            </a:lvl2pPr>
+            <a:lvl3pPr algn="ctr">
+              <a:defRPr sz="1600"/>
+            </a:lvl3pPr>
+            <a:lvl4pPr algn="ctr">
+              <a:defRPr sz="1600"/>
+            </a:lvl4pPr>
+            <a:lvl5pPr algn="ctr">
+              <a:defRPr sz="1600"/>
+            </a:lvl5pPr>
+          </a:lstStyle>
           <a:p>
             <a:pPr lvl="0"/>
             <a:r>
@@ -2849,6 +3423,118 @@
               <a:t>マスター テキストの書式設定</a:t>
             </a:r>
           </a:p>
+        </p:txBody>
+      </p:sp>
+      <p:sp>
+        <p:nvSpPr>
+          <p:cNvPr id="18" name="AI_SUBTITLE">
+            <a:extLst>
+              <a:ext uri="{FF2B5EF4-FFF2-40B4-BE49-F238E27FC236}">
+                <a16:creationId xmlns:a16="http://schemas.microsoft.com/office/drawing/2014/main" id="{05A5F16C-5213-8739-D5CC-71F95A8DD83A}"/>
+              </a:ext>
+            </a:extLst>
+          </p:cNvPr>
+          <p:cNvSpPr>
+            <a:spLocks noGrp="1"/>
+          </p:cNvSpPr>
+          <p:nvPr>
+            <p:ph type="body" sz="quarter" idx="19"/>
+          </p:nvPr>
+        </p:nvSpPr>
+        <p:spPr>
+          <a:xfrm>
+            <a:off x="268224" y="1042416"/>
+            <a:ext cx="11655552" cy="342900"/>
+          </a:xfrm>
+        </p:spPr>
+        <p:txBody>
+          <a:bodyPr anchor="ctr"/>
+          <a:lstStyle>
+            <a:lvl1pPr>
+              <a:lnSpc>
+                <a:spcPct val="100000"/>
+              </a:lnSpc>
+              <a:buNone/>
+              <a:defRPr sz="1400">
+                <a:solidFill>
+                  <a:srgbClr val="666666"/>
+                </a:solidFill>
+              </a:defRPr>
+            </a:lvl1pPr>
+            <a:lvl2pPr>
+              <a:defRPr sz="1400"/>
+            </a:lvl2pPr>
+            <a:lvl3pPr>
+              <a:defRPr sz="1400"/>
+            </a:lvl3pPr>
+            <a:lvl4pPr>
+              <a:defRPr sz="1400"/>
+            </a:lvl4pPr>
+            <a:lvl5pPr>
+              <a:defRPr sz="1400"/>
+            </a:lvl5pPr>
+          </a:lstStyle>
+          <a:p>
+            <a:pPr lvl="0"/>
+            <a:r>
+              <a:rPr kumimoji="1" lang="ja-JP" altLang="en-US"/>
+              <a:t>マスター テキストの書式設定</a:t>
+            </a:r>
+          </a:p>
+        </p:txBody>
+      </p:sp>
+      <p:sp>
+        <p:nvSpPr>
+          <p:cNvPr id="19" name="AI_LEFT_BULLETS">
+            <a:extLst>
+              <a:ext uri="{FF2B5EF4-FFF2-40B4-BE49-F238E27FC236}">
+                <a16:creationId xmlns:a16="http://schemas.microsoft.com/office/drawing/2014/main" id="{05A5F16C-5213-8739-D5CC-71F95A8DD83A}"/>
+              </a:ext>
+            </a:extLst>
+          </p:cNvPr>
+          <p:cNvSpPr>
+            <a:spLocks noGrp="1"/>
+          </p:cNvSpPr>
+          <p:nvPr>
+            <p:ph sz="quarter" idx="17"/>
+          </p:nvPr>
+        </p:nvSpPr>
+        <p:spPr>
+          <a:xfrm>
+            <a:off x="670560" y="3379912"/>
+            <a:ext cx="4754880" cy="1954530"/>
+          </a:xfrm>
+        </p:spPr>
+        <p:txBody>
+          <a:bodyPr/>
+          <a:lstStyle>
+            <a:lvl1pPr>
+              <a:defRPr sz="1400">
+                <a:solidFill>
+                  <a:srgbClr val="666666"/>
+                </a:solidFill>
+              </a:defRPr>
+            </a:lvl1pPr>
+            <a:lvl2pPr>
+              <a:defRPr sz="1400"/>
+            </a:lvl2pPr>
+            <a:lvl3pPr>
+              <a:defRPr sz="1400"/>
+            </a:lvl3pPr>
+            <a:lvl4pPr>
+              <a:defRPr sz="1400"/>
+            </a:lvl4pPr>
+            <a:lvl5pPr>
+              <a:defRPr sz="1400"/>
+            </a:lvl5pPr>
+          </a:lstStyle>
+          <a:p>
+            <a:pPr lvl="0"/>
+            <a:r>
+              <a:rPr kumimoji="1" lang="ja-JP" altLang="en-US"/>
+              <a:t>マスター テキストの書式設定</a:t>
+            </a:r>
+          </a:p>
           <a:p>
             <a:pPr lvl="1"/>
             <a:r>
@@ -2856,7 +3542,7 @@
               <a:t>第 </a:t>
             </a:r>
             <a:r>
-              <a:rPr kumimoji="1" lang="en-US" altLang="ja-JP"/>
+              <a:rPr kumimoji="1" lang="en-US" altLang="ja-JP" dirty="0"/>
               <a:t>2 </a:t>
             </a:r>
             <a:r>
@@ -2871,7 +3557,7 @@
               <a:t>第 </a:t>
             </a:r>
             <a:r>
-              <a:rPr kumimoji="1" lang="en-US" altLang="ja-JP"/>
+              <a:rPr kumimoji="1" lang="en-US" altLang="ja-JP" dirty="0"/>
               <a:t>3 </a:t>
             </a:r>
             <a:r>
@@ -2886,7 +3572,7 @@
               <a:t>第 </a:t>
             </a:r>
             <a:r>
-              <a:rPr kumimoji="1" lang="en-US" altLang="ja-JP"/>
+              <a:rPr kumimoji="1" lang="en-US" altLang="ja-JP" dirty="0"/>
               <a:t>4 </a:t>
             </a:r>
             <a:r>
@@ -2901,7 +3587,7 @@
               <a:t>第 </a:t>
             </a:r>
             <a:r>
-              <a:rPr kumimoji="1" lang="en-US" altLang="ja-JP"/>
+              <a:rPr kumimoji="1" lang="en-US" altLang="ja-JP" dirty="0"/>
               <a:t>5 </a:t>
             </a:r>
             <a:r>
@@ -2913,7 +3599,121 @@
       </p:sp>
       <p:sp>
         <p:nvSpPr>
-          <p:cNvPr id="18" name="slot__left_icon"/>
+          <p:cNvPr id="20" name="AI_RIGHT_BULLETS">
+            <a:extLst>
+              <a:ext uri="{FF2B5EF4-FFF2-40B4-BE49-F238E27FC236}">
+                <a16:creationId xmlns:a16="http://schemas.microsoft.com/office/drawing/2014/main" id="{7736F04F-6D87-D6E7-D993-8E4670208CB6}"/>
+              </a:ext>
+            </a:extLst>
+          </p:cNvPr>
+          <p:cNvSpPr>
+            <a:spLocks noGrp="1"/>
+          </p:cNvSpPr>
+          <p:nvPr>
+            <p:ph sz="quarter" idx="18"/>
+          </p:nvPr>
+        </p:nvSpPr>
+        <p:spPr>
+          <a:xfrm>
+            <a:off x="6888480" y="3379912"/>
+            <a:ext cx="4754880" cy="1954530"/>
+          </a:xfrm>
+        </p:spPr>
+        <p:txBody>
+          <a:bodyPr/>
+          <a:lstStyle>
+            <a:lvl1pPr>
+              <a:defRPr sz="1400">
+                <a:solidFill>
+                  <a:srgbClr val="666666"/>
+                </a:solidFill>
+              </a:defRPr>
+            </a:lvl1pPr>
+            <a:lvl2pPr>
+              <a:defRPr sz="1400"/>
+            </a:lvl2pPr>
+            <a:lvl3pPr>
+              <a:defRPr sz="1400"/>
+            </a:lvl3pPr>
+            <a:lvl4pPr>
+              <a:defRPr sz="1400"/>
+            </a:lvl4pPr>
+            <a:lvl5pPr>
+              <a:defRPr sz="1400"/>
+            </a:lvl5pPr>
+          </a:lstStyle>
+          <a:p>
+            <a:pPr lvl="0"/>
+            <a:r>
+              <a:rPr kumimoji="1" lang="ja-JP" altLang="en-US"/>
+              <a:t>マスター テキストの書式設定</a:t>
+            </a:r>
+          </a:p>
+          <a:p>
+            <a:pPr lvl="1"/>
+            <a:r>
+              <a:rPr kumimoji="1" lang="ja-JP" altLang="en-US"/>
+              <a:t>第 </a:t>
+            </a:r>
+            <a:r>
+              <a:rPr kumimoji="1" lang="en-US" altLang="ja-JP" dirty="0"/>
+              <a:t>2 </a:t>
+            </a:r>
+            <a:r>
+              <a:rPr kumimoji="1" lang="ja-JP" altLang="en-US"/>
+              <a:t>レベル</a:t>
+            </a:r>
+          </a:p>
+          <a:p>
+            <a:pPr lvl="2"/>
+            <a:r>
+              <a:rPr kumimoji="1" lang="ja-JP" altLang="en-US"/>
+              <a:t>第 </a:t>
+            </a:r>
+            <a:r>
+              <a:rPr kumimoji="1" lang="en-US" altLang="ja-JP" dirty="0"/>
+              <a:t>3 </a:t>
+            </a:r>
+            <a:r>
+              <a:rPr kumimoji="1" lang="ja-JP" altLang="en-US"/>
+              <a:t>レベル</a:t>
+            </a:r>
+          </a:p>
+          <a:p>
+            <a:pPr lvl="3"/>
+            <a:r>
+              <a:rPr kumimoji="1" lang="ja-JP" altLang="en-US"/>
+              <a:t>第 </a:t>
+            </a:r>
+            <a:r>
+              <a:rPr kumimoji="1" lang="en-US" altLang="ja-JP" dirty="0"/>
+              <a:t>4 </a:t>
+            </a:r>
+            <a:r>
+              <a:rPr kumimoji="1" lang="ja-JP" altLang="en-US"/>
+              <a:t>レベル</a:t>
+            </a:r>
+          </a:p>
+          <a:p>
+            <a:pPr lvl="4"/>
+            <a:r>
+              <a:rPr kumimoji="1" lang="ja-JP" altLang="en-US"/>
+              <a:t>第 </a:t>
+            </a:r>
+            <a:r>
+              <a:rPr kumimoji="1" lang="en-US" altLang="ja-JP" dirty="0"/>
+              <a:t>5 </a:t>
+            </a:r>
+            <a:r>
+              <a:rPr kumimoji="1" lang="ja-JP" altLang="en-US"/>
+              <a:t>レベル</a:t>
+            </a:r>
+          </a:p>
+        </p:txBody>
+      </p:sp>
+      <p:sp>
+        <p:nvSpPr>
+          <p:cNvPr id="21" name="AI_LEFT_ICON"/>
           <p:cNvSpPr>
             <a:spLocks noGrp="1"/>
           </p:cNvSpPr>
@@ -2923,8 +3723,8 @@
         </p:nvSpPr>
         <p:spPr>
           <a:xfrm>
-            <a:off x="5181600" y="1083564"/>
-            <a:ext cx="609600" cy="548640"/>
+            <a:off x="1107553" y="1997704"/>
+            <a:ext cx="246888" cy="246888"/>
           </a:xfrm>
           <a:noFill/>
           <a:ln>
@@ -2979,7 +3779,7 @@
       </p:sp>
       <p:sp>
         <p:nvSpPr>
-          <p:cNvPr id="19" name="slot__right_icon"/>
+          <p:cNvPr id="22" name="AI_RIGHT_ICON"/>
           <p:cNvSpPr>
             <a:spLocks noGrp="1"/>
           </p:cNvSpPr>
@@ -2989,8 +3789,8 @@
         </p:nvSpPr>
         <p:spPr>
           <a:xfrm>
-            <a:off x="11192256" y="1083564"/>
-            <a:ext cx="609600" cy="548640"/>
+            <a:off x="7325473" y="1997704"/>
+            <a:ext cx="246888" cy="246888"/>
           </a:xfrm>
           <a:noFill/>
           <a:ln>
@@ -3057,8 +3857,8 @@
 </file>
 
 <file path=ppt/slideLayouts/slideLayout6.xml><?xml version="1.0" encoding="utf-8"?>
-<p:sldLayout xmlns:a="http://schemas.openxmlformats.org/drawingml/2006/main" xmlns:r="http://schemas.openxmlformats.org/officeDocument/2006/relationships" xmlns:p="http://schemas.openxmlformats.org/presentationml/2006/main" type="titleOnly" preserve="1">
-  <p:cSld name="Title Only">
+<p:sldLayout xmlns:a="http://schemas.openxmlformats.org/drawingml/2006/main" xmlns:r="http://schemas.openxmlformats.org/officeDocument/2006/relationships" xmlns:p="http://schemas.openxmlformats.org/presentationml/2006/main" preserve="1" userDrawn="1">
+  <p:cSld name="table_basic">
     <p:bg>
       <p:bgPr>
         <a:solidFill>
@@ -3083,29 +3883,40 @@
       </p:grpSpPr>
       <p:sp>
         <p:nvSpPr>
-          <p:cNvPr id="2" name="Title 1"/>
-          <p:cNvSpPr>
-            <a:spLocks noGrp="1"/>
-          </p:cNvSpPr>
-          <p:nvPr>
-            <p:ph type="title"/>
-          </p:nvPr>
-        </p:nvSpPr>
-        <p:spPr/>
+          <p:cNvPr id="200" name="deco_content_panel"/>
+          <p:cNvSpPr>
+            <a:spLocks noGrp="1"/>
+          </p:cNvSpPr>
+          <p:nvPr/>
+        </p:nvSpPr>
+        <p:spPr>
+          <a:xfrm>
+            <a:off x="280416" y="1580972"/>
+            <a:ext cx="11631168" cy="3675888"/>
+          </a:xfrm>
+          <a:prstGeom prst="roundRect">
+            <a:avLst>
+              <a:gd name="adj" fmla="val 1756"/>
+            </a:avLst>
+          </a:prstGeom>
+          <a:solidFill>
+            <a:srgbClr val="F7F7F5"/>
+          </a:solidFill>
+          <a:ln>
+            <a:noFill/>
+          </a:ln>
+        </p:spPr>
         <p:txBody>
           <a:bodyPr/>
           <a:lstStyle/>
           <a:p>
-            <a:r>
-              <a:rPr lang="en-US"/>
-              <a:t>Click to edit Master title style</a:t>
-            </a:r>
-          </a:p>
-        </p:txBody>
-      </p:sp>
-      <p:sp>
-        <p:nvSpPr>
-          <p:cNvPr id="3" name="Date Placeholder 2"/>
+            <a:endParaRPr/>
+          </a:p>
+        </p:txBody>
+      </p:sp>
+      <p:sp>
+        <p:nvSpPr>
+          <p:cNvPr id="4" name="Date Placeholder 3"/>
           <p:cNvSpPr>
             <a:spLocks noGrp="1"/>
           </p:cNvSpPr>
@@ -3120,7 +3931,7 @@
           <a:p>
             <a:fld id="{5BCAD085-E8A6-8845-BD4E-CB4CCA059FC4}" type="datetimeFigureOut">
               <a:rPr lang="en-US" smtClean="0"/>
-              <a:t>5/3/26</a:t>
+              <a:t>6/11/26</a:t>
             </a:fld>
             <a:endParaRPr lang="en-US"/>
           </a:p>
@@ -3128,7 +3939,7 @@
       </p:sp>
       <p:sp>
         <p:nvSpPr>
-          <p:cNvPr id="4" name="Footer Placeholder 3"/>
+          <p:cNvPr id="5" name="Footer Placeholder 4"/>
           <p:cNvSpPr>
             <a:spLocks noGrp="1"/>
           </p:cNvSpPr>
@@ -3147,7 +3958,7 @@
       </p:sp>
       <p:sp>
         <p:nvSpPr>
-          <p:cNvPr id="5" name="Slide Number Placeholder 4"/>
+          <p:cNvPr id="6" name="Slide Number Placeholder 5"/>
           <p:cNvSpPr>
             <a:spLocks noGrp="1"/>
           </p:cNvSpPr>
@@ -3165,6 +3976,230 @@
               <a:t>‹#›</a:t>
             </a:fld>
             <a:endParaRPr lang="en-US"/>
+          </a:p>
+        </p:txBody>
+      </p:sp>
+      <p:sp>
+        <p:nvSpPr>
+          <p:cNvPr id="7" name="AI_TITLE">
+            <a:extLst>
+              <a:ext uri="{FF2B5EF4-FFF2-40B4-BE49-F238E27FC236}">
+                <a16:creationId xmlns:a16="http://schemas.microsoft.com/office/drawing/2014/main" id="{11DAA64B-18C1-17A1-691C-30AB57B5A327}"/>
+              </a:ext>
+            </a:extLst>
+          </p:cNvPr>
+          <p:cNvSpPr>
+            <a:spLocks noGrp="1"/>
+          </p:cNvSpPr>
+          <p:nvPr>
+            <p:ph type="title"/>
+          </p:nvPr>
+        </p:nvSpPr>
+        <p:spPr>
+          <a:xfrm>
+            <a:off x="280416" y="356616"/>
+            <a:ext cx="11631168" cy="617220"/>
+          </a:xfrm>
+        </p:spPr>
+        <p:txBody>
+          <a:bodyPr/>
+          <a:lstStyle>
+            <a:lvl1pPr>
+              <a:defRPr sz="3200" b="1">
+                <a:solidFill>
+                  <a:srgbClr val="191919"/>
+                </a:solidFill>
+              </a:defRPr>
+            </a:lvl1pPr>
+          </a:lstStyle>
+          <a:p>
+            <a:r>
+              <a:rPr kumimoji="1" lang="ja-JP" altLang="en-US"/>
+              <a:t>マスター タイトルの書式設定</a:t>
+            </a:r>
+          </a:p>
+        </p:txBody>
+      </p:sp>
+      <p:sp>
+        <p:nvSpPr>
+          <p:cNvPr id="9" name="AI_TABLE">
+            <a:extLst>
+              <a:ext uri="{FF2B5EF4-FFF2-40B4-BE49-F238E27FC236}">
+                <a16:creationId xmlns:a16="http://schemas.microsoft.com/office/drawing/2014/main" id="{9972CBED-8C1F-F962-DF1D-46CEC7DCCBC5}"/>
+              </a:ext>
+            </a:extLst>
+          </p:cNvPr>
+          <p:cNvSpPr>
+            <a:spLocks noGrp="1"/>
+          </p:cNvSpPr>
+          <p:nvPr>
+            <p:ph type="tbl" sz="quarter" idx="13"/>
+          </p:nvPr>
+        </p:nvSpPr>
+        <p:spPr>
+          <a:xfrm>
+            <a:off x="426720" y="1704419"/>
+            <a:ext cx="11338560" cy="3429000"/>
+          </a:xfrm>
+        </p:spPr>
+        <p:txBody>
+          <a:bodyPr/>
+          <a:lstStyle/>
+          <a:p>
+            <a:pPr lvl="0"/>
+            <a:r>
+              <a:rPr kumimoji="1" lang="ja-JP" altLang="en-US"/>
+              <a:t>マスター テキストの書式設定</a:t>
+            </a:r>
+          </a:p>
+          <a:p>
+            <a:pPr lvl="1"/>
+            <a:r>
+              <a:rPr kumimoji="1" lang="ja-JP" altLang="en-US"/>
+              <a:t>第 </a:t>
+            </a:r>
+            <a:r>
+              <a:rPr kumimoji="1" lang="en-US" altLang="ja-JP" dirty="0"/>
+              <a:t>2 </a:t>
+            </a:r>
+            <a:r>
+              <a:rPr kumimoji="1" lang="ja-JP" altLang="en-US"/>
+              <a:t>レベル</a:t>
+            </a:r>
+          </a:p>
+          <a:p>
+            <a:pPr lvl="2"/>
+            <a:r>
+              <a:rPr kumimoji="1" lang="ja-JP" altLang="en-US"/>
+              <a:t>第 </a:t>
+            </a:r>
+            <a:r>
+              <a:rPr kumimoji="1" lang="en-US" altLang="ja-JP" dirty="0"/>
+              <a:t>3 </a:t>
+            </a:r>
+            <a:r>
+              <a:rPr kumimoji="1" lang="ja-JP" altLang="en-US"/>
+              <a:t>レベル</a:t>
+            </a:r>
+          </a:p>
+          <a:p>
+            <a:pPr lvl="3"/>
+            <a:r>
+              <a:rPr kumimoji="1" lang="ja-JP" altLang="en-US"/>
+              <a:t>第 </a:t>
+            </a:r>
+            <a:r>
+              <a:rPr kumimoji="1" lang="en-US" altLang="ja-JP" dirty="0"/>
+              <a:t>4 </a:t>
+            </a:r>
+            <a:r>
+              <a:rPr kumimoji="1" lang="ja-JP" altLang="en-US"/>
+              <a:t>レベル</a:t>
+            </a:r>
+          </a:p>
+          <a:p>
+            <a:pPr lvl="4"/>
+            <a:r>
+              <a:rPr kumimoji="1" lang="ja-JP" altLang="en-US"/>
+              <a:t>第 </a:t>
+            </a:r>
+            <a:r>
+              <a:rPr kumimoji="1" lang="en-US" altLang="ja-JP" dirty="0"/>
+              <a:t>5 </a:t>
+            </a:r>
+            <a:r>
+              <a:rPr kumimoji="1" lang="ja-JP" altLang="en-US"/>
+              <a:t>レベル</a:t>
+            </a:r>
+          </a:p>
+        </p:txBody>
+      </p:sp>
+      <p:sp>
+        <p:nvSpPr>
+          <p:cNvPr id="10" name="AI_SUBTITLE">
+            <a:extLst>
+              <a:ext uri="{FF2B5EF4-FFF2-40B4-BE49-F238E27FC236}">
+                <a16:creationId xmlns:a16="http://schemas.microsoft.com/office/drawing/2014/main" id="{9972CBED-8C1F-F962-DF1D-46CEC7DCCBC5}"/>
+              </a:ext>
+            </a:extLst>
+          </p:cNvPr>
+          <p:cNvSpPr>
+            <a:spLocks noGrp="1"/>
+          </p:cNvSpPr>
+          <p:nvPr>
+            <p:ph type="body" sz="quarter" idx="14"/>
+          </p:nvPr>
+        </p:nvSpPr>
+        <p:spPr>
+          <a:xfrm>
+            <a:off x="280416" y="1042416"/>
+            <a:ext cx="11631168" cy="377190"/>
+          </a:xfrm>
+        </p:spPr>
+        <p:txBody>
+          <a:bodyPr anchor="ctr"/>
+          <a:lstStyle>
+            <a:lvl1pPr>
+              <a:lnSpc>
+                <a:spcPct val="100000"/>
+              </a:lnSpc>
+              <a:buNone/>
+              <a:defRPr sz="1450">
+                <a:solidFill>
+                  <a:srgbClr val="666666"/>
+                </a:solidFill>
+              </a:defRPr>
+            </a:lvl1pPr>
+          </a:lstStyle>
+          <a:p>
+            <a:pPr lvl="0"/>
+            <a:r>
+              <a:rPr kumimoji="1" lang="ja-JP" altLang="en-US"/>
+              <a:t>マスター テキストの書式設定</a:t>
+            </a:r>
+          </a:p>
+        </p:txBody>
+      </p:sp>
+      <p:sp>
+        <p:nvSpPr>
+          <p:cNvPr id="11" name="AI_CAPTION">
+            <a:extLst>
+              <a:ext uri="{FF2B5EF4-FFF2-40B4-BE49-F238E27FC236}">
+                <a16:creationId xmlns:a16="http://schemas.microsoft.com/office/drawing/2014/main" id="{9972CBED-8C1F-F962-DF1D-46CEC7DCCBC5}"/>
+              </a:ext>
+            </a:extLst>
+          </p:cNvPr>
+          <p:cNvSpPr>
+            <a:spLocks noGrp="1"/>
+          </p:cNvSpPr>
+          <p:nvPr>
+            <p:ph type="body" sz="quarter" idx="15"/>
+          </p:nvPr>
+        </p:nvSpPr>
+        <p:spPr>
+          <a:xfrm>
+            <a:off x="426720" y="5423201"/>
+            <a:ext cx="11338560" cy="377190"/>
+          </a:xfrm>
+        </p:spPr>
+        <p:txBody>
+          <a:bodyPr/>
+          <a:lstStyle>
+            <a:lvl1pPr>
+              <a:buNone/>
+              <a:defRPr sz="1250">
+                <a:solidFill>
+                  <a:srgbClr val="666666"/>
+                </a:solidFill>
+              </a:defRPr>
+            </a:lvl1pPr>
+          </a:lstStyle>
+          <a:p>
+            <a:pPr lvl="0"/>
+            <a:r>
+              <a:rPr kumimoji="1" lang="ja-JP" altLang="en-US"/>
+              <a:t>マスター テキストの書式設定</a:t>
+            </a:r>
           </a:p>
         </p:txBody>
       </p:sp>
@@ -3182,8 +4217,8 @@
 </file>
 
 <file path=ppt/slideLayouts/slideLayout7.xml><?xml version="1.0" encoding="utf-8"?>
-<p:sldLayout xmlns:a="http://schemas.openxmlformats.org/drawingml/2006/main" xmlns:r="http://schemas.openxmlformats.org/officeDocument/2006/relationships" xmlns:p="http://schemas.openxmlformats.org/presentationml/2006/main" type="blank" preserve="1">
-  <p:cSld name="Blank">
+<p:sldLayout xmlns:a="http://schemas.openxmlformats.org/drawingml/2006/main" xmlns:r="http://schemas.openxmlformats.org/officeDocument/2006/relationships" xmlns:p="http://schemas.openxmlformats.org/presentationml/2006/main" preserve="1" userDrawn="1">
+  <p:cSld name="chart_basic">
     <p:bg>
       <p:bgPr>
         <a:solidFill>
@@ -3208,7 +4243,40 @@
       </p:grpSpPr>
       <p:sp>
         <p:nvSpPr>
-          <p:cNvPr id="2" name="Date Placeholder 1"/>
+          <p:cNvPr id="200" name="deco_content_panel"/>
+          <p:cNvSpPr>
+            <a:spLocks noGrp="1"/>
+          </p:cNvSpPr>
+          <p:nvPr/>
+        </p:nvSpPr>
+        <p:spPr>
+          <a:xfrm>
+            <a:off x="280416" y="1587698"/>
+            <a:ext cx="11631168" cy="3675888"/>
+          </a:xfrm>
+          <a:prstGeom prst="roundRect">
+            <a:avLst>
+              <a:gd name="adj" fmla="val 4500"/>
+            </a:avLst>
+          </a:prstGeom>
+          <a:solidFill>
+            <a:srgbClr val="F7F7F5"/>
+          </a:solidFill>
+          <a:ln>
+            <a:noFill/>
+          </a:ln>
+        </p:spPr>
+        <p:txBody>
+          <a:bodyPr/>
+          <a:lstStyle/>
+          <a:p>
+            <a:endParaRPr/>
+          </a:p>
+        </p:txBody>
+      </p:sp>
+      <p:sp>
+        <p:nvSpPr>
+          <p:cNvPr id="4" name="Date Placeholder 3"/>
           <p:cNvSpPr>
             <a:spLocks noGrp="1"/>
           </p:cNvSpPr>
@@ -3223,7 +4291,7 @@
           <a:p>
             <a:fld id="{5BCAD085-E8A6-8845-BD4E-CB4CCA059FC4}" type="datetimeFigureOut">
               <a:rPr lang="en-US" smtClean="0"/>
-              <a:t>5/3/26</a:t>
+              <a:t>6/11/26</a:t>
             </a:fld>
             <a:endParaRPr lang="en-US"/>
           </a:p>
@@ -3231,7 +4299,7 @@
       </p:sp>
       <p:sp>
         <p:nvSpPr>
-          <p:cNvPr id="3" name="Footer Placeholder 2"/>
+          <p:cNvPr id="5" name="Footer Placeholder 4"/>
           <p:cNvSpPr>
             <a:spLocks noGrp="1"/>
           </p:cNvSpPr>
@@ -3250,7 +4318,7 @@
       </p:sp>
       <p:sp>
         <p:nvSpPr>
-          <p:cNvPr id="4" name="Slide Number Placeholder 3"/>
+          <p:cNvPr id="6" name="Slide Number Placeholder 5"/>
           <p:cNvSpPr>
             <a:spLocks noGrp="1"/>
           </p:cNvSpPr>
@@ -3268,6 +4336,230 @@
               <a:t>‹#›</a:t>
             </a:fld>
             <a:endParaRPr lang="en-US"/>
+          </a:p>
+        </p:txBody>
+      </p:sp>
+      <p:sp>
+        <p:nvSpPr>
+          <p:cNvPr id="7" name="AI_TITLE">
+            <a:extLst>
+              <a:ext uri="{FF2B5EF4-FFF2-40B4-BE49-F238E27FC236}">
+                <a16:creationId xmlns:a16="http://schemas.microsoft.com/office/drawing/2014/main" id="{11DAA64B-18C1-17A1-691C-30AB57B5A327}"/>
+              </a:ext>
+            </a:extLst>
+          </p:cNvPr>
+          <p:cNvSpPr>
+            <a:spLocks noGrp="1"/>
+          </p:cNvSpPr>
+          <p:nvPr>
+            <p:ph type="title"/>
+          </p:nvPr>
+        </p:nvSpPr>
+        <p:spPr>
+          <a:xfrm>
+            <a:off x="280416" y="356616"/>
+            <a:ext cx="11631168" cy="617220"/>
+          </a:xfrm>
+        </p:spPr>
+        <p:txBody>
+          <a:bodyPr/>
+          <a:lstStyle>
+            <a:lvl1pPr>
+              <a:defRPr sz="3200" b="1">
+                <a:solidFill>
+                  <a:srgbClr val="191919"/>
+                </a:solidFill>
+              </a:defRPr>
+            </a:lvl1pPr>
+          </a:lstStyle>
+          <a:p>
+            <a:r>
+              <a:rPr kumimoji="1" lang="ja-JP" altLang="en-US"/>
+              <a:t>マスター タイトルの書式設定</a:t>
+            </a:r>
+          </a:p>
+        </p:txBody>
+      </p:sp>
+      <p:sp>
+        <p:nvSpPr>
+          <p:cNvPr id="9" name="AI_CHART">
+            <a:extLst>
+              <a:ext uri="{FF2B5EF4-FFF2-40B4-BE49-F238E27FC236}">
+                <a16:creationId xmlns:a16="http://schemas.microsoft.com/office/drawing/2014/main" id="{9972CBED-8C1F-F962-DF1D-46CEC7DCCBC5}"/>
+              </a:ext>
+            </a:extLst>
+          </p:cNvPr>
+          <p:cNvSpPr>
+            <a:spLocks noGrp="1"/>
+          </p:cNvSpPr>
+          <p:nvPr>
+            <p:ph type="chart" sz="quarter" idx="13"/>
+          </p:nvPr>
+        </p:nvSpPr>
+        <p:spPr>
+          <a:xfrm>
+            <a:off x="467063" y="1738038"/>
+            <a:ext cx="11338560" cy="3429000"/>
+          </a:xfrm>
+        </p:spPr>
+        <p:txBody>
+          <a:bodyPr/>
+          <a:lstStyle/>
+          <a:p>
+            <a:pPr lvl="0"/>
+            <a:r>
+              <a:rPr kumimoji="1" lang="ja-JP" altLang="en-US"/>
+              <a:t>マスター テキストの書式設定</a:t>
+            </a:r>
+          </a:p>
+          <a:p>
+            <a:pPr lvl="1"/>
+            <a:r>
+              <a:rPr kumimoji="1" lang="ja-JP" altLang="en-US"/>
+              <a:t>第 </a:t>
+            </a:r>
+            <a:r>
+              <a:rPr kumimoji="1" lang="en-US" altLang="ja-JP"/>
+              <a:t>2 </a:t>
+            </a:r>
+            <a:r>
+              <a:rPr kumimoji="1" lang="ja-JP" altLang="en-US"/>
+              <a:t>レベル</a:t>
+            </a:r>
+          </a:p>
+          <a:p>
+            <a:pPr lvl="2"/>
+            <a:r>
+              <a:rPr kumimoji="1" lang="ja-JP" altLang="en-US"/>
+              <a:t>第 </a:t>
+            </a:r>
+            <a:r>
+              <a:rPr kumimoji="1" lang="en-US" altLang="ja-JP"/>
+              <a:t>3 </a:t>
+            </a:r>
+            <a:r>
+              <a:rPr kumimoji="1" lang="ja-JP" altLang="en-US"/>
+              <a:t>レベル</a:t>
+            </a:r>
+          </a:p>
+          <a:p>
+            <a:pPr lvl="3"/>
+            <a:r>
+              <a:rPr kumimoji="1" lang="ja-JP" altLang="en-US"/>
+              <a:t>第 </a:t>
+            </a:r>
+            <a:r>
+              <a:rPr kumimoji="1" lang="en-US" altLang="ja-JP"/>
+              <a:t>4 </a:t>
+            </a:r>
+            <a:r>
+              <a:rPr kumimoji="1" lang="ja-JP" altLang="en-US"/>
+              <a:t>レベル</a:t>
+            </a:r>
+          </a:p>
+          <a:p>
+            <a:pPr lvl="4"/>
+            <a:r>
+              <a:rPr kumimoji="1" lang="ja-JP" altLang="en-US"/>
+              <a:t>第 </a:t>
+            </a:r>
+            <a:r>
+              <a:rPr kumimoji="1" lang="en-US" altLang="ja-JP"/>
+              <a:t>5 </a:t>
+            </a:r>
+            <a:r>
+              <a:rPr kumimoji="1" lang="ja-JP" altLang="en-US"/>
+              <a:t>レベル</a:t>
+            </a:r>
+          </a:p>
+        </p:txBody>
+      </p:sp>
+      <p:sp>
+        <p:nvSpPr>
+          <p:cNvPr id="10" name="AI_SUBTITLE">
+            <a:extLst>
+              <a:ext uri="{FF2B5EF4-FFF2-40B4-BE49-F238E27FC236}">
+                <a16:creationId xmlns:a16="http://schemas.microsoft.com/office/drawing/2014/main" id="{9972CBED-8C1F-F962-DF1D-46CEC7DCCBC5}"/>
+              </a:ext>
+            </a:extLst>
+          </p:cNvPr>
+          <p:cNvSpPr>
+            <a:spLocks noGrp="1"/>
+          </p:cNvSpPr>
+          <p:nvPr>
+            <p:ph type="body" sz="quarter" idx="14"/>
+          </p:nvPr>
+        </p:nvSpPr>
+        <p:spPr>
+          <a:xfrm>
+            <a:off x="280416" y="1042416"/>
+            <a:ext cx="11631168" cy="377190"/>
+          </a:xfrm>
+        </p:spPr>
+        <p:txBody>
+          <a:bodyPr anchor="ctr"/>
+          <a:lstStyle>
+            <a:lvl1pPr>
+              <a:lnSpc>
+                <a:spcPct val="100000"/>
+              </a:lnSpc>
+              <a:buNone/>
+              <a:defRPr sz="1450">
+                <a:solidFill>
+                  <a:srgbClr val="666666"/>
+                </a:solidFill>
+              </a:defRPr>
+            </a:lvl1pPr>
+          </a:lstStyle>
+          <a:p>
+            <a:pPr lvl="0"/>
+            <a:r>
+              <a:rPr kumimoji="1" lang="ja-JP" altLang="en-US"/>
+              <a:t>マスター テキストの書式設定</a:t>
+            </a:r>
+          </a:p>
+        </p:txBody>
+      </p:sp>
+      <p:sp>
+        <p:nvSpPr>
+          <p:cNvPr id="11" name="AI_CAPTION">
+            <a:extLst>
+              <a:ext uri="{FF2B5EF4-FFF2-40B4-BE49-F238E27FC236}">
+                <a16:creationId xmlns:a16="http://schemas.microsoft.com/office/drawing/2014/main" id="{9972CBED-8C1F-F962-DF1D-46CEC7DCCBC5}"/>
+              </a:ext>
+            </a:extLst>
+          </p:cNvPr>
+          <p:cNvSpPr>
+            <a:spLocks noGrp="1"/>
+          </p:cNvSpPr>
+          <p:nvPr>
+            <p:ph type="body" sz="quarter" idx="15"/>
+          </p:nvPr>
+        </p:nvSpPr>
+        <p:spPr>
+          <a:xfrm>
+            <a:off x="426720" y="5456819"/>
+            <a:ext cx="11338560" cy="377190"/>
+          </a:xfrm>
+        </p:spPr>
+        <p:txBody>
+          <a:bodyPr/>
+          <a:lstStyle>
+            <a:lvl1pPr>
+              <a:buNone/>
+              <a:defRPr sz="1250">
+                <a:solidFill>
+                  <a:srgbClr val="666666"/>
+                </a:solidFill>
+              </a:defRPr>
+            </a:lvl1pPr>
+          </a:lstStyle>
+          <a:p>
+            <a:pPr lvl="0"/>
+            <a:r>
+              <a:rPr kumimoji="1" lang="ja-JP" altLang="en-US"/>
+              <a:t>マスター テキストの書式設定</a:t>
+            </a:r>
           </a:p>
         </p:txBody>
       </p:sp>
@@ -3285,7 +4577,7 @@
 </file>
 
 <file path=ppt/slideLayouts/slideLayout8.xml><?xml version="1.0" encoding="utf-8"?>
-<p:sldLayout xmlns:a="http://schemas.openxmlformats.org/drawingml/2006/main" xmlns:r="http://schemas.openxmlformats.org/officeDocument/2006/relationships" xmlns:p="http://schemas.openxmlformats.org/presentationml/2006/main" preserve="1" userDrawn="1" type="cust">
+<p:sldLayout xmlns:a="http://schemas.openxmlformats.org/drawingml/2006/main" xmlns:r="http://schemas.openxmlformats.org/officeDocument/2006/relationships" xmlns:p="http://schemas.openxmlformats.org/presentationml/2006/main" preserve="1" userDrawn="1">
   <p:cSld name="appendix_backup">
     <p:bg>
       <p:bgPr>
@@ -3311,7 +4603,7 @@
       </p:grpSpPr>
       <p:sp>
         <p:nvSpPr>
-          <p:cNvPr id="200" name="deco_top_accent"/>
+          <p:cNvPr id="202" name="deco_body_panel"/>
           <p:cNvSpPr>
             <a:spLocks noGrp="1"/>
           </p:cNvSpPr>
@@ -3319,14 +4611,80 @@
         </p:nvSpPr>
         <p:spPr>
           <a:xfrm>
-            <a:off x="341376" y="1268730"/>
-            <a:ext cx="11509248" cy="54864"/>
+            <a:off x="268224" y="1580706"/>
+            <a:ext cx="5547360" cy="4457700"/>
+          </a:xfrm>
+          <a:prstGeom prst="roundRect">
+            <a:avLst>
+              <a:gd name="adj" fmla="val 4500"/>
+            </a:avLst>
+          </a:prstGeom>
+          <a:solidFill>
+            <a:srgbClr val="F7F7F5"/>
+          </a:solidFill>
+          <a:ln>
+            <a:noFill/>
+          </a:ln>
+        </p:spPr>
+        <p:txBody>
+          <a:bodyPr/>
+          <a:lstStyle/>
+          <a:p>
+            <a:endParaRPr/>
+          </a:p>
+        </p:txBody>
+      </p:sp>
+      <p:sp>
+        <p:nvSpPr>
+          <p:cNvPr id="203" name="deco_refs_panel"/>
+          <p:cNvSpPr>
+            <a:spLocks noGrp="1"/>
+          </p:cNvSpPr>
+          <p:nvPr/>
+        </p:nvSpPr>
+        <p:spPr>
+          <a:xfrm>
+            <a:off x="6096000" y="1580706"/>
+            <a:ext cx="5827776" cy="4457700"/>
+          </a:xfrm>
+          <a:prstGeom prst="roundRect">
+            <a:avLst>
+              <a:gd name="adj" fmla="val 4500"/>
+            </a:avLst>
+          </a:prstGeom>
+          <a:solidFill>
+            <a:srgbClr val="F7F7F5"/>
+          </a:solidFill>
+          <a:ln>
+            <a:noFill/>
+          </a:ln>
+        </p:spPr>
+        <p:txBody>
+          <a:bodyPr/>
+          <a:lstStyle/>
+          <a:p>
+            <a:endParaRPr/>
+          </a:p>
+        </p:txBody>
+      </p:sp>
+      <p:sp>
+        <p:nvSpPr>
+          <p:cNvPr id="205" name="deco_col_divider"/>
+          <p:cNvSpPr>
+            <a:spLocks noGrp="1"/>
+          </p:cNvSpPr>
+          <p:nvPr/>
+        </p:nvSpPr>
+        <p:spPr>
+          <a:xfrm>
+            <a:off x="5949696" y="1895369"/>
+            <a:ext cx="24384" cy="3840480"/>
           </a:xfrm>
           <a:prstGeom prst="rect">
             <a:avLst/>
           </a:prstGeom>
           <a:solidFill>
-            <a:srgbClr val="1C3557"/>
+            <a:srgbClr val="D9D9D6"/>
           </a:solidFill>
           <a:ln>
             <a:noFill/>
@@ -3335,41 +4693,14 @@
         <p:txBody>
           <a:bodyPr/>
           <a:lstStyle/>
-          <a:p/>
-        </p:txBody>
-      </p:sp>
-      <p:sp>
-        <p:nvSpPr>
-          <p:cNvPr id="201" name="deco_col_divider"/>
-          <p:cNvSpPr>
-            <a:spLocks noGrp="1"/>
-          </p:cNvSpPr>
-          <p:nvPr/>
-        </p:nvSpPr>
-        <p:spPr>
-          <a:xfrm>
-            <a:off x="5925312" y="1337310"/>
-            <a:ext cx="170688" cy="4354830"/>
-          </a:xfrm>
-          <a:prstGeom prst="rect">
-            <a:avLst/>
-          </a:prstGeom>
-          <a:solidFill>
-            <a:srgbClr val="BFD4EF"/>
-          </a:solidFill>
-          <a:ln>
-            <a:noFill/>
-          </a:ln>
-        </p:spPr>
-        <p:txBody>
-          <a:bodyPr/>
-          <a:lstStyle/>
-          <a:p/>
-        </p:txBody>
-      </p:sp>
-      <p:sp>
-        <p:nvSpPr>
-          <p:cNvPr id="8" name="タイトル 7">
+          <a:p>
+            <a:endParaRPr/>
+          </a:p>
+        </p:txBody>
+      </p:sp>
+      <p:sp>
+        <p:nvSpPr>
+          <p:cNvPr id="8" name="AI_TITLE">
             <a:extLst>
               <a:ext uri="{FF2B5EF4-FFF2-40B4-BE49-F238E27FC236}">
                 <a16:creationId xmlns:a16="http://schemas.microsoft.com/office/drawing/2014/main" id="{8A4D2959-DC66-A124-52B8-8E8467A7D32E}"/>
@@ -3383,10 +4714,23 @@
             <p:ph type="title"/>
           </p:nvPr>
         </p:nvSpPr>
-        <p:spPr/>
-        <p:txBody>
-          <a:bodyPr/>
-          <a:lstStyle/>
+        <p:spPr>
+          <a:xfrm>
+            <a:off x="268224" y="356616"/>
+            <a:ext cx="11655552" cy="617220"/>
+          </a:xfrm>
+        </p:spPr>
+        <p:txBody>
+          <a:bodyPr/>
+          <a:lstStyle>
+            <a:lvl1pPr>
+              <a:defRPr sz="3200" b="1">
+                <a:solidFill>
+                  <a:srgbClr val="191919"/>
+                </a:solidFill>
+              </a:defRPr>
+            </a:lvl1pPr>
+          </a:lstStyle>
           <a:p>
             <a:r>
               <a:rPr kumimoji="1" lang="ja-JP" altLang="en-US"/>
@@ -3418,7 +4762,7 @@
           <a:p>
             <a:fld id="{5BCAD085-E8A6-8845-BD4E-CB4CCA059FC4}" type="datetimeFigureOut">
               <a:rPr lang="en-US" smtClean="0"/>
-              <a:t>5/3/26</a:t>
+              <a:t>6/11/26</a:t>
             </a:fld>
             <a:endParaRPr lang="en-US"/>
           </a:p>
@@ -3480,7 +4824,7 @@
       </p:sp>
       <p:sp>
         <p:nvSpPr>
-          <p:cNvPr id="13" name="slot__body">
+          <p:cNvPr id="13" name="AI_BODY">
             <a:extLst>
               <a:ext uri="{FF2B5EF4-FFF2-40B4-BE49-F238E27FC236}">
                 <a16:creationId xmlns:a16="http://schemas.microsoft.com/office/drawing/2014/main" id="{23D794FD-7998-B263-7A33-0D9A529D97EE}"/>
@@ -3491,18 +4835,53 @@
             <a:spLocks noGrp="1"/>
           </p:cNvSpPr>
           <p:nvPr>
-            <p:ph sz="quarter" idx="13" type="obj"/>
-          </p:nvPr>
-        </p:nvSpPr>
-        <p:spPr>
-          <a:xfrm>
-            <a:off x="426720" y="1405890"/>
-            <a:ext cx="5242560" cy="4286250"/>
-          </a:xfrm>
-        </p:spPr>
-        <p:txBody>
-          <a:bodyPr/>
-          <a:lstStyle/>
+            <p:ph sz="quarter" idx="13"/>
+          </p:nvPr>
+        </p:nvSpPr>
+        <p:spPr>
+          <a:xfrm>
+            <a:off x="426720" y="1758209"/>
+            <a:ext cx="5242560" cy="2057400"/>
+          </a:xfrm>
+        </p:spPr>
+        <p:txBody>
+          <a:bodyPr/>
+          <a:lstStyle>
+            <a:lvl1pPr>
+              <a:lnSpc>
+                <a:spcPct val="100000"/>
+              </a:lnSpc>
+              <a:defRPr sz="1400">
+                <a:solidFill>
+                  <a:srgbClr val="242424"/>
+                </a:solidFill>
+              </a:defRPr>
+            </a:lvl1pPr>
+            <a:lvl2pPr>
+              <a:lnSpc>
+                <a:spcPct val="100000"/>
+              </a:lnSpc>
+              <a:defRPr sz="1400"/>
+            </a:lvl2pPr>
+            <a:lvl3pPr>
+              <a:lnSpc>
+                <a:spcPct val="100000"/>
+              </a:lnSpc>
+              <a:defRPr sz="1400"/>
+            </a:lvl3pPr>
+            <a:lvl4pPr>
+              <a:lnSpc>
+                <a:spcPct val="100000"/>
+              </a:lnSpc>
+              <a:defRPr sz="1400"/>
+            </a:lvl4pPr>
+            <a:lvl5pPr>
+              <a:lnSpc>
+                <a:spcPct val="100000"/>
+              </a:lnSpc>
+              <a:defRPr sz="1400"/>
+            </a:lvl5pPr>
+          </a:lstStyle>
           <a:p>
             <a:pPr lvl="0"/>
             <a:r>
@@ -3517,7 +4896,7 @@
               <a:t>第 </a:t>
             </a:r>
             <a:r>
-              <a:rPr kumimoji="1" lang="en-US" altLang="ja-JP"/>
+              <a:rPr kumimoji="1" lang="en-US" altLang="ja-JP" dirty="0"/>
               <a:t>2 </a:t>
             </a:r>
             <a:r>
@@ -3532,7 +4911,7 @@
               <a:t>第 </a:t>
             </a:r>
             <a:r>
-              <a:rPr kumimoji="1" lang="en-US" altLang="ja-JP"/>
+              <a:rPr kumimoji="1" lang="en-US" altLang="ja-JP" dirty="0"/>
               <a:t>3 </a:t>
             </a:r>
             <a:r>
@@ -3547,7 +4926,7 @@
               <a:t>第 </a:t>
             </a:r>
             <a:r>
-              <a:rPr kumimoji="1" lang="en-US" altLang="ja-JP"/>
+              <a:rPr kumimoji="1" lang="en-US" altLang="ja-JP" dirty="0"/>
               <a:t>4 </a:t>
             </a:r>
             <a:r>
@@ -3562,7 +4941,7 @@
               <a:t>第 </a:t>
             </a:r>
             <a:r>
-              <a:rPr kumimoji="1" lang="en-US" altLang="ja-JP"/>
+              <a:rPr kumimoji="1" lang="en-US" altLang="ja-JP" dirty="0"/>
               <a:t>5 </a:t>
             </a:r>
             <a:r>
@@ -3574,7 +4953,7 @@
       </p:sp>
       <p:sp>
         <p:nvSpPr>
-          <p:cNvPr id="15" name="slot__references">
+          <p:cNvPr id="15" name="AI_REFERENCES">
             <a:extLst>
               <a:ext uri="{FF2B5EF4-FFF2-40B4-BE49-F238E27FC236}">
                 <a16:creationId xmlns:a16="http://schemas.microsoft.com/office/drawing/2014/main" id="{CE5D3923-D828-BFFF-25F1-02538CEB89C0}"/>
@@ -3585,18 +4964,38 @@
             <a:spLocks noGrp="1"/>
           </p:cNvSpPr>
           <p:nvPr>
-            <p:ph sz="quarter" idx="14" type="obj"/>
-          </p:nvPr>
-        </p:nvSpPr>
-        <p:spPr>
-          <a:xfrm>
-            <a:off x="6278880" y="1405890"/>
-            <a:ext cx="5486400" cy="4286250"/>
-          </a:xfrm>
-        </p:spPr>
-        <p:txBody>
-          <a:bodyPr/>
-          <a:lstStyle/>
+            <p:ph sz="quarter" idx="14"/>
+          </p:nvPr>
+        </p:nvSpPr>
+        <p:spPr>
+          <a:xfrm>
+            <a:off x="6278880" y="1758209"/>
+            <a:ext cx="5486400" cy="4114800"/>
+          </a:xfrm>
+        </p:spPr>
+        <p:txBody>
+          <a:bodyPr/>
+          <a:lstStyle>
+            <a:lvl1pPr>
+              <a:defRPr sz="1400">
+                <a:solidFill>
+                  <a:srgbClr val="242424"/>
+                </a:solidFill>
+              </a:defRPr>
+            </a:lvl1pPr>
+            <a:lvl2pPr>
+              <a:defRPr sz="1400"/>
+            </a:lvl2pPr>
+            <a:lvl3pPr>
+              <a:defRPr sz="1400"/>
+            </a:lvl3pPr>
+            <a:lvl4pPr>
+              <a:defRPr sz="1400"/>
+            </a:lvl4pPr>
+            <a:lvl5pPr>
+              <a:defRPr sz="1400"/>
+            </a:lvl5pPr>
+          </a:lstStyle>
           <a:p>
             <a:pPr lvl="0"/>
             <a:r>
@@ -3611,7 +5010,7 @@
               <a:t>第 </a:t>
             </a:r>
             <a:r>
-              <a:rPr kumimoji="1" lang="en-US" altLang="ja-JP"/>
+              <a:rPr kumimoji="1" lang="en-US" altLang="ja-JP" dirty="0"/>
               <a:t>2 </a:t>
             </a:r>
             <a:r>
@@ -3626,7 +5025,7 @@
               <a:t>第 </a:t>
             </a:r>
             <a:r>
-              <a:rPr kumimoji="1" lang="en-US" altLang="ja-JP"/>
+              <a:rPr kumimoji="1" lang="en-US" altLang="ja-JP" dirty="0"/>
               <a:t>3 </a:t>
             </a:r>
             <a:r>
@@ -3641,7 +5040,7 @@
               <a:t>第 </a:t>
             </a:r>
             <a:r>
-              <a:rPr kumimoji="1" lang="en-US" altLang="ja-JP"/>
+              <a:rPr kumimoji="1" lang="en-US" altLang="ja-JP" dirty="0"/>
               <a:t>4 </a:t>
             </a:r>
             <a:r>
@@ -3656,7 +5055,178 @@
               <a:t>第 </a:t>
             </a:r>
             <a:r>
-              <a:rPr kumimoji="1" lang="en-US" altLang="ja-JP"/>
+              <a:rPr kumimoji="1" lang="en-US" altLang="ja-JP" dirty="0"/>
+              <a:t>5 </a:t>
+            </a:r>
+            <a:r>
+              <a:rPr kumimoji="1" lang="ja-JP" altLang="en-US"/>
+              <a:t>レベル</a:t>
+            </a:r>
+          </a:p>
+        </p:txBody>
+      </p:sp>
+      <p:sp>
+        <p:nvSpPr>
+          <p:cNvPr id="16" name="AI_SUBTITLE">
+            <a:extLst>
+              <a:ext uri="{FF2B5EF4-FFF2-40B4-BE49-F238E27FC236}">
+                <a16:creationId xmlns:a16="http://schemas.microsoft.com/office/drawing/2014/main" id="{23D794FD-7998-B263-7A33-0D9A529D97EE}"/>
+              </a:ext>
+            </a:extLst>
+          </p:cNvPr>
+          <p:cNvSpPr>
+            <a:spLocks noGrp="1"/>
+          </p:cNvSpPr>
+          <p:nvPr>
+            <p:ph type="body" sz="quarter" idx="15"/>
+          </p:nvPr>
+        </p:nvSpPr>
+        <p:spPr>
+          <a:xfrm>
+            <a:off x="268224" y="1042416"/>
+            <a:ext cx="11655552" cy="342900"/>
+          </a:xfrm>
+        </p:spPr>
+        <p:txBody>
+          <a:bodyPr anchor="ctr"/>
+          <a:lstStyle>
+            <a:lvl1pPr>
+              <a:lnSpc>
+                <a:spcPct val="100000"/>
+              </a:lnSpc>
+              <a:buNone/>
+              <a:defRPr sz="1400">
+                <a:solidFill>
+                  <a:srgbClr val="666666"/>
+                </a:solidFill>
+              </a:defRPr>
+            </a:lvl1pPr>
+          </a:lstStyle>
+          <a:p>
+            <a:pPr lvl="0"/>
+            <a:r>
+              <a:rPr kumimoji="1" lang="ja-JP" altLang="en-US"/>
+              <a:t>マスター テキストの書式設定</a:t>
+            </a:r>
+          </a:p>
+        </p:txBody>
+      </p:sp>
+      <p:sp>
+        <p:nvSpPr>
+          <p:cNvPr id="17" name="AI_ITEMS">
+            <a:extLst>
+              <a:ext uri="{FF2B5EF4-FFF2-40B4-BE49-F238E27FC236}">
+                <a16:creationId xmlns:a16="http://schemas.microsoft.com/office/drawing/2014/main" id="{23D794FD-7998-B263-7A33-0D9A529D97EE}"/>
+              </a:ext>
+            </a:extLst>
+          </p:cNvPr>
+          <p:cNvSpPr>
+            <a:spLocks noGrp="1"/>
+          </p:cNvSpPr>
+          <p:nvPr>
+            <p:ph sz="quarter" idx="16"/>
+          </p:nvPr>
+        </p:nvSpPr>
+        <p:spPr>
+          <a:xfrm>
+            <a:off x="426720" y="4049586"/>
+            <a:ext cx="5242560" cy="1783080"/>
+          </a:xfrm>
+        </p:spPr>
+        <p:txBody>
+          <a:bodyPr/>
+          <a:lstStyle>
+            <a:lvl1pPr>
+              <a:lnSpc>
+                <a:spcPct val="100000"/>
+              </a:lnSpc>
+              <a:defRPr sz="1400"/>
+            </a:lvl1pPr>
+            <a:lvl2pPr>
+              <a:lnSpc>
+                <a:spcPct val="100000"/>
+              </a:lnSpc>
+              <a:defRPr sz="1400"/>
+            </a:lvl2pPr>
+            <a:lvl3pPr>
+              <a:lnSpc>
+                <a:spcPct val="100000"/>
+              </a:lnSpc>
+              <a:defRPr sz="1400"/>
+            </a:lvl3pPr>
+            <a:lvl4pPr>
+              <a:lnSpc>
+                <a:spcPct val="100000"/>
+              </a:lnSpc>
+              <a:defRPr sz="1400"/>
+            </a:lvl4pPr>
+            <a:lvl5pPr>
+              <a:lnSpc>
+                <a:spcPct val="100000"/>
+              </a:lnSpc>
+              <a:defRPr sz="1400"/>
+            </a:lvl5pPr>
+          </a:lstStyle>
+          <a:p>
+            <a:pPr lvl="0"/>
+            <a:r>
+              <a:rPr kumimoji="1" lang="ja-JP" altLang="en-US"/>
+              <a:t>マスター テキストの書式設定</a:t>
+            </a:r>
+          </a:p>
+          <a:p>
+            <a:pPr lvl="1"/>
+            <a:r>
+              <a:rPr kumimoji="1" lang="ja-JP" altLang="en-US"/>
+              <a:t>第 </a:t>
+            </a:r>
+            <a:r>
+              <a:rPr kumimoji="1" lang="en-US" altLang="ja-JP" dirty="0"/>
+              <a:t>2 </a:t>
+            </a:r>
+            <a:r>
+              <a:rPr kumimoji="1" lang="ja-JP" altLang="en-US"/>
+              <a:t>レベル</a:t>
+            </a:r>
+          </a:p>
+          <a:p>
+            <a:pPr lvl="2"/>
+            <a:r>
+              <a:rPr kumimoji="1" lang="ja-JP" altLang="en-US"/>
+              <a:t>第 </a:t>
+            </a:r>
+            <a:r>
+              <a:rPr kumimoji="1" lang="en-US" altLang="ja-JP" dirty="0"/>
+              <a:t>3 </a:t>
+            </a:r>
+            <a:r>
+              <a:rPr kumimoji="1" lang="ja-JP" altLang="en-US"/>
+              <a:t>レベル</a:t>
+            </a:r>
+          </a:p>
+          <a:p>
+            <a:pPr lvl="3"/>
+            <a:r>
+              <a:rPr kumimoji="1" lang="ja-JP" altLang="en-US"/>
+              <a:t>第 </a:t>
+            </a:r>
+            <a:r>
+              <a:rPr kumimoji="1" lang="en-US" altLang="ja-JP" dirty="0"/>
+              <a:t>4 </a:t>
+            </a:r>
+            <a:r>
+              <a:rPr kumimoji="1" lang="ja-JP" altLang="en-US"/>
+              <a:t>レベル</a:t>
+            </a:r>
+          </a:p>
+          <a:p>
+            <a:pPr lvl="4"/>
+            <a:r>
+              <a:rPr kumimoji="1" lang="ja-JP" altLang="en-US"/>
+              <a:t>第 </a:t>
+            </a:r>
+            <a:r>
+              <a:rPr kumimoji="1" lang="en-US" altLang="ja-JP" dirty="0"/>
               <a:t>5 </a:t>
             </a:r>
             <a:r>
@@ -3681,7 +5251,7 @@
 
 <file path=ppt/slideLayouts/slideLayout9.xml><?xml version="1.0" encoding="utf-8"?>
 <p:sldLayout xmlns:a="http://schemas.openxmlformats.org/drawingml/2006/main" xmlns:r="http://schemas.openxmlformats.org/officeDocument/2006/relationships" xmlns:p="http://schemas.openxmlformats.org/presentationml/2006/main" preserve="1" userDrawn="1">
-  <p:cSld name="Picture with Caption">
+  <p:cSld name="image_caption">
     <p:bg>
       <p:bgPr>
         <a:solidFill>
@@ -3706,7 +5276,73 @@
       </p:grpSpPr>
       <p:sp>
         <p:nvSpPr>
-          <p:cNvPr id="3" name="Picture Placeholder 2"/>
+          <p:cNvPr id="202" name="deco_media_panel"/>
+          <p:cNvSpPr>
+            <a:spLocks noGrp="1"/>
+          </p:cNvSpPr>
+          <p:nvPr/>
+        </p:nvSpPr>
+        <p:spPr>
+          <a:xfrm>
+            <a:off x="670560" y="2103799"/>
+            <a:ext cx="4389120" cy="3223260"/>
+          </a:xfrm>
+          <a:prstGeom prst="roundRect">
+            <a:avLst>
+              <a:gd name="adj" fmla="val 4500"/>
+            </a:avLst>
+          </a:prstGeom>
+          <a:solidFill>
+            <a:srgbClr val="F7F7F5"/>
+          </a:solidFill>
+          <a:ln>
+            <a:noFill/>
+          </a:ln>
+        </p:spPr>
+        <p:txBody>
+          <a:bodyPr/>
+          <a:lstStyle/>
+          <a:p>
+            <a:endParaRPr/>
+          </a:p>
+        </p:txBody>
+      </p:sp>
+      <p:sp>
+        <p:nvSpPr>
+          <p:cNvPr id="203" name="deco_caption_panel"/>
+          <p:cNvSpPr>
+            <a:spLocks noGrp="1"/>
+          </p:cNvSpPr>
+          <p:nvPr/>
+        </p:nvSpPr>
+        <p:spPr>
+          <a:xfrm>
+            <a:off x="5303520" y="1733998"/>
+            <a:ext cx="5974080" cy="3223260"/>
+          </a:xfrm>
+          <a:prstGeom prst="roundRect">
+            <a:avLst>
+              <a:gd name="adj" fmla="val 4500"/>
+            </a:avLst>
+          </a:prstGeom>
+          <a:solidFill>
+            <a:srgbClr val="FFFFFF"/>
+          </a:solidFill>
+          <a:ln>
+            <a:noFill/>
+          </a:ln>
+        </p:spPr>
+        <p:txBody>
+          <a:bodyPr/>
+          <a:lstStyle/>
+          <a:p>
+            <a:endParaRPr/>
+          </a:p>
+        </p:txBody>
+      </p:sp>
+      <p:sp>
+        <p:nvSpPr>
+          <p:cNvPr id="3" name="AI_ICON"/>
           <p:cNvSpPr>
             <a:spLocks noGrp="1"/>
           </p:cNvSpPr>
@@ -3716,8 +5352,8 @@
         </p:nvSpPr>
         <p:spPr>
           <a:xfrm>
-            <a:off x="217712" y="1097280"/>
-            <a:ext cx="7855134" cy="5024846"/>
+            <a:off x="2110740" y="2961049"/>
+            <a:ext cx="1508760" cy="1508760"/>
           </a:xfrm>
           <a:noFill/>
           <a:ln>
@@ -3772,7 +5408,7 @@
       </p:sp>
       <p:sp>
         <p:nvSpPr>
-          <p:cNvPr id="4" name="Text Placeholder 3"/>
+          <p:cNvPr id="4" name="AI_CAPTION"/>
           <p:cNvSpPr>
             <a:spLocks noGrp="1"/>
           </p:cNvSpPr>
@@ -3782,8 +5418,8 @@
         </p:nvSpPr>
         <p:spPr>
           <a:xfrm>
-            <a:off x="8319952" y="1097280"/>
-            <a:ext cx="3636916" cy="5024846"/>
+            <a:off x="5547360" y="2214058"/>
+            <a:ext cx="5486400" cy="2091690"/>
           </a:xfrm>
           <a:noFill/>
           <a:ln>
@@ -3793,46 +5429,13 @@
         <p:txBody>
           <a:bodyPr wrap="square" lIns="0" tIns="36576" rIns="0" bIns="0" anchor="t"/>
           <a:lstStyle>
-            <a:lvl1pPr marL="0" indent="0">
-              <a:buNone/>
-              <a:defRPr sz="1400">
+            <a:lvl1pPr>
+              <a:defRPr sz="1250">
                 <a:solidFill>
-                  <a:srgbClr val="444444"/>
+                  <a:srgbClr val="242424"/>
                 </a:solidFill>
               </a:defRPr>
             </a:lvl1pPr>
-            <a:lvl2pPr marL="457200" indent="0">
-              <a:buNone/>
-              <a:defRPr sz="1200"/>
-            </a:lvl2pPr>
-            <a:lvl3pPr marL="914400" indent="0">
-              <a:buNone/>
-              <a:defRPr sz="1000"/>
-            </a:lvl3pPr>
-            <a:lvl4pPr marL="1371600" indent="0">
-              <a:buNone/>
-              <a:defRPr sz="900"/>
-            </a:lvl4pPr>
-            <a:lvl5pPr marL="1828800" indent="0">
-              <a:buNone/>
-              <a:defRPr sz="900"/>
-            </a:lvl5pPr>
-            <a:lvl6pPr marL="2286000" indent="0">
-              <a:buNone/>
-              <a:defRPr sz="900"/>
-            </a:lvl6pPr>
-            <a:lvl7pPr marL="2743200" indent="0">
-              <a:buNone/>
-              <a:defRPr sz="900"/>
-            </a:lvl7pPr>
-            <a:lvl8pPr marL="3200400" indent="0">
-              <a:buNone/>
-              <a:defRPr sz="900"/>
-            </a:lvl8pPr>
-            <a:lvl9pPr marL="3657600" indent="0">
-              <a:buNone/>
-              <a:defRPr sz="900"/>
-            </a:lvl9pPr>
           </a:lstStyle>
           <a:p>
             <a:pPr lvl="0" algn="l"/>
@@ -3860,7 +5463,7 @@
           <a:p>
             <a:fld id="{5BCAD085-E8A6-8845-BD4E-CB4CCA059FC4}" type="datetimeFigureOut">
               <a:rPr lang="en-US" smtClean="0"/>
-              <a:t>5/3/26</a:t>
+              <a:t>6/11/26</a:t>
             </a:fld>
             <a:endParaRPr lang="en-US"/>
           </a:p>
@@ -3910,7 +5513,7 @@
       </p:sp>
       <p:sp>
         <p:nvSpPr>
-          <p:cNvPr id="8" name="タイトル 7">
+          <p:cNvPr id="8" name="AI_TITLE">
             <a:extLst>
               <a:ext uri="{FF2B5EF4-FFF2-40B4-BE49-F238E27FC236}">
                 <a16:creationId xmlns:a16="http://schemas.microsoft.com/office/drawing/2014/main" id="{3E4DDDEC-1DB2-EF3B-AA3A-651334DC9538}"/>
@@ -3924,14 +5527,111 @@
             <p:ph type="title"/>
           </p:nvPr>
         </p:nvSpPr>
-        <p:spPr/>
-        <p:txBody>
-          <a:bodyPr/>
-          <a:lstStyle/>
+        <p:spPr>
+          <a:xfrm>
+            <a:off x="670560" y="356616"/>
+            <a:ext cx="10728960" cy="617220"/>
+          </a:xfrm>
+        </p:spPr>
+        <p:txBody>
+          <a:bodyPr/>
+          <a:lstStyle>
+            <a:lvl1pPr>
+              <a:defRPr sz="3200" b="1">
+                <a:solidFill>
+                  <a:srgbClr val="191919"/>
+                </a:solidFill>
+              </a:defRPr>
+            </a:lvl1pPr>
+          </a:lstStyle>
           <a:p>
             <a:r>
               <a:rPr kumimoji="1" lang="ja-JP" altLang="en-US"/>
               <a:t>マスター タイトルの書式設定</a:t>
+            </a:r>
+          </a:p>
+        </p:txBody>
+      </p:sp>
+      <p:sp>
+        <p:nvSpPr>
+          <p:cNvPr id="9" name="AI_SUBTITLE"/>
+          <p:cNvSpPr>
+            <a:spLocks noGrp="1"/>
+          </p:cNvSpPr>
+          <p:nvPr>
+            <p:ph type="body" sz="half" idx="13" hasCustomPrompt="1"/>
+          </p:nvPr>
+        </p:nvSpPr>
+        <p:spPr>
+          <a:xfrm>
+            <a:off x="670560" y="1042416"/>
+            <a:ext cx="10728960" cy="342900"/>
+          </a:xfrm>
+          <a:noFill/>
+          <a:ln>
+            <a:noFill/>
+          </a:ln>
+        </p:spPr>
+        <p:txBody>
+          <a:bodyPr wrap="square" lIns="0" tIns="36576" rIns="0" bIns="0" anchor="ctr"/>
+          <a:lstStyle>
+            <a:lvl1pPr>
+              <a:lnSpc>
+                <a:spcPct val="100000"/>
+              </a:lnSpc>
+              <a:buNone/>
+              <a:defRPr sz="1400">
+                <a:solidFill>
+                  <a:srgbClr val="666666"/>
+                </a:solidFill>
+              </a:defRPr>
+            </a:lvl1pPr>
+          </a:lstStyle>
+          <a:p>
+            <a:pPr lvl="0" algn="l"/>
+            <a:r>
+              <a:rPr lang="en-US" dirty="0"/>
+              <a:t>Click to edit Master text styles</a:t>
+            </a:r>
+          </a:p>
+        </p:txBody>
+      </p:sp>
+      <p:sp>
+        <p:nvSpPr>
+          <p:cNvPr id="10" name="AI_ATTRIBUTION"/>
+          <p:cNvSpPr>
+            <a:spLocks noGrp="1"/>
+          </p:cNvSpPr>
+          <p:nvPr>
+            <p:ph type="body" sz="half" idx="14"/>
+          </p:nvPr>
+        </p:nvSpPr>
+        <p:spPr>
+          <a:xfrm>
+            <a:off x="5547360" y="4785808"/>
+            <a:ext cx="5486400" cy="377190"/>
+          </a:xfrm>
+          <a:noFill/>
+          <a:ln>
+            <a:noFill/>
+          </a:ln>
+        </p:spPr>
+        <p:txBody>
+          <a:bodyPr wrap="square" lIns="0" tIns="36576" rIns="0" bIns="0" anchor="t"/>
+          <a:lstStyle>
+            <a:lvl1pPr>
+              <a:defRPr sz="1150">
+                <a:solidFill>
+                  <a:srgbClr val="666666"/>
+                </a:solidFill>
+              </a:defRPr>
+            </a:lvl1pPr>
+          </a:lstStyle>
+          <a:p>
+            <a:pPr lvl="0" algn="l"/>
+            <a:r>
+              <a:rPr lang="en-US"/>
+              <a:t>Click to edit Master text styles</a:t>
             </a:r>
           </a:p>
         </p:txBody>
@@ -4008,7 +5708,7 @@
       </p:sp>
       <p:sp>
         <p:nvSpPr>
-          <p:cNvPr id="3" name="Text Placeholder 2"/>
+          <p:cNvPr id="3" name="AI_MASTER_PLACEHOLDER_3"/>
           <p:cNvSpPr>
             <a:spLocks noGrp="1"/>
           </p:cNvSpPr>
@@ -4102,7 +5802,7 @@
           <a:p>
             <a:fld id="{5BCAD085-E8A6-8845-BD4E-CB4CCA059FC4}" type="datetimeFigureOut">
               <a:rPr lang="en-US" smtClean="0"/>
-              <a:t>5/3/26</a:t>
+              <a:t>6/11/26</a:t>
             </a:fld>
             <a:endParaRPr lang="en-US"/>
           </a:p>
@@ -4226,6 +5926,9 @@
     </p:titleStyle>
     <p:bodyStyle>
       <a:lvl1pPr marL="342900" indent="-342900" algn="l" defTabSz="457200" rtl="0" eaLnBrk="1" latinLnBrk="0" hangingPunct="1">
+        <a:lnSpc>
+          <a:spcPct val="150000"/>
+        </a:lnSpc>
         <a:spcBef>
           <a:spcPct val="20000"/>
         </a:spcBef>
@@ -4241,6 +5944,9 @@
         </a:defRPr>
       </a:lvl1pPr>
       <a:lvl2pPr marL="742950" indent="-285750" algn="l" defTabSz="457200" rtl="0" eaLnBrk="1" latinLnBrk="0" hangingPunct="1">
+        <a:lnSpc>
+          <a:spcPct val="150000"/>
+        </a:lnSpc>
         <a:spcBef>
           <a:spcPct val="20000"/>
         </a:spcBef>
@@ -4256,6 +5962,9 @@
         </a:defRPr>
       </a:lvl2pPr>
       <a:lvl3pPr marL="1143000" indent="-228600" algn="l" defTabSz="457200" rtl="0" eaLnBrk="1" latinLnBrk="0" hangingPunct="1">
+        <a:lnSpc>
+          <a:spcPct val="150000"/>
+        </a:lnSpc>
         <a:spcBef>
           <a:spcPct val="20000"/>
         </a:spcBef>
@@ -4271,6 +5980,9 @@
         </a:defRPr>
       </a:lvl3pPr>
       <a:lvl4pPr marL="1600200" indent="-228600" algn="l" defTabSz="457200" rtl="0" eaLnBrk="1" latinLnBrk="0" hangingPunct="1">
+        <a:lnSpc>
+          <a:spcPct val="150000"/>
+        </a:lnSpc>
         <a:spcBef>
           <a:spcPct val="20000"/>
         </a:spcBef>
@@ -4286,6 +5998,9 @@
         </a:defRPr>
       </a:lvl4pPr>
       <a:lvl5pPr marL="2057400" indent="-228600" algn="l" defTabSz="457200" rtl="0" eaLnBrk="1" latinLnBrk="0" hangingPunct="1">
+        <a:lnSpc>
+          <a:spcPct val="150000"/>
+        </a:lnSpc>
         <a:spcBef>
           <a:spcPct val="20000"/>
         </a:spcBef>
@@ -4501,16 +6216,16 @@
         <a:srgbClr val="800080"/>
       </a:folHlink>
     </a:clrScheme>
-    <a:fontScheme name="BIZ UDPGothic">
+    <a:fontScheme name="Meiryo UI (All)">
       <a:majorFont>
-        <a:latin typeface="BIZ UDPGothic"/>
-        <a:ea typeface="BIZ UDPGothic"/>
-        <a:cs typeface="BIZ UDPGothic"/>
+        <a:latin typeface="Meiryo UI"/>
+        <a:ea typeface="Meiryo UI"/>
+        <a:cs typeface="Meiryo UI"/>
       </a:majorFont>
       <a:minorFont>
-        <a:latin typeface="BIZ UDPGothic"/>
-        <a:ea typeface="BIZ UDPGothic"/>
-        <a:cs typeface="BIZ UDPGothic"/>
+        <a:latin typeface="Meiryo UI"/>
+        <a:ea typeface="Meiryo UI"/>
+        <a:cs typeface="Meiryo UI"/>
       </a:minorFont>
     </a:fontScheme>
     <a:fmtScheme name="Office">
